--- a/slides/11501/Introduction to Computer/CH10.pptx
+++ b/slides/11501/Introduction to Computer/CH10.pptx
@@ -215,13 +215,18 @@
   </p:defaultTextStyle>
   <p:extLst>
     <p:ext uri="{EFAFB233-063F-42B5-8137-9DF3F51BA10A}">
-      <p15:sldGuideLst xmlns:p15="http://schemas.microsoft.com/office/powerpoint/2012/main" xmlns="">
+      <p15:sldGuideLst xmlns:p15="http://schemas.microsoft.com/office/powerpoint/2012/main">
         <p15:guide id="1" orient="horz" pos="2160">
           <p15:clr>
             <a:srgbClr val="A4A3A4"/>
           </p15:clr>
         </p15:guide>
         <p15:guide id="2" pos="2880">
+          <p15:clr>
+            <a:srgbClr val="A4A3A4"/>
+          </p15:clr>
+        </p15:guide>
+        <p15:guide id="3" orient="horz" pos="1620">
           <p15:clr>
             <a:srgbClr val="A4A3A4"/>
           </p15:clr>
@@ -1037,14 +1042,14 @@
         <a:p>
           <a:pPr rtl="0"/>
           <a:r>
-            <a:rPr lang="zh-TW" sz="2400" b="1" dirty="0" smtClean="0">
+            <a:rPr lang="zh-TW" sz="2400" b="1" dirty="0">
               <a:latin typeface="微軟正黑體" panose="020B0604030504040204" pitchFamily="34" charset="-120"/>
               <a:ea typeface="微軟正黑體" panose="020B0604030504040204" pitchFamily="34" charset="-120"/>
             </a:rPr>
             <a:t>前序法</a:t>
           </a:r>
           <a:r>
-            <a:rPr lang="en-US" sz="2400" b="1" dirty="0" smtClean="0">
+            <a:rPr lang="en-US" sz="2400" b="1" dirty="0">
               <a:latin typeface="微軟正黑體" panose="020B0604030504040204" pitchFamily="34" charset="-120"/>
               <a:ea typeface="微軟正黑體" panose="020B0604030504040204" pitchFamily="34" charset="-120"/>
             </a:rPr>
@@ -1094,7 +1099,7 @@
         <a:p>
           <a:pPr rtl="0"/>
           <a:r>
-            <a:rPr lang="en-US" sz="2400" b="1" smtClean="0">
+            <a:rPr lang="en-US" sz="2400" b="1">
               <a:latin typeface="微軟正黑體" panose="020B0604030504040204" pitchFamily="34" charset="-120"/>
               <a:ea typeface="微軟正黑體" panose="020B0604030504040204" pitchFamily="34" charset="-120"/>
             </a:rPr>
@@ -1144,28 +1149,28 @@
         <a:p>
           <a:pPr rtl="0"/>
           <a:r>
-            <a:rPr lang="zh-TW" sz="2400" b="1" dirty="0" smtClean="0">
+            <a:rPr lang="zh-TW" sz="2400" b="1" dirty="0">
               <a:latin typeface="微軟正黑體" panose="020B0604030504040204" pitchFamily="34" charset="-120"/>
               <a:ea typeface="微軟正黑體" panose="020B0604030504040204" pitchFamily="34" charset="-120"/>
             </a:rPr>
             <a:t>中序法</a:t>
           </a:r>
           <a:r>
-            <a:rPr lang="en-US" sz="2400" b="1" dirty="0" smtClean="0">
+            <a:rPr lang="en-US" sz="2400" b="1" dirty="0">
               <a:latin typeface="微軟正黑體" panose="020B0604030504040204" pitchFamily="34" charset="-120"/>
               <a:ea typeface="微軟正黑體" panose="020B0604030504040204" pitchFamily="34" charset="-120"/>
             </a:rPr>
             <a:t>(</a:t>
           </a:r>
           <a:r>
-            <a:rPr lang="en-US" sz="2400" b="1" dirty="0" err="1" smtClean="0">
+            <a:rPr lang="en-US" sz="2400" b="1" dirty="0" err="1">
               <a:latin typeface="微軟正黑體" panose="020B0604030504040204" pitchFamily="34" charset="-120"/>
               <a:ea typeface="微軟正黑體" panose="020B0604030504040204" pitchFamily="34" charset="-120"/>
             </a:rPr>
             <a:t>inorder</a:t>
           </a:r>
           <a:r>
-            <a:rPr lang="en-US" sz="2400" b="1" dirty="0" smtClean="0">
+            <a:rPr lang="en-US" sz="2400" b="1" dirty="0">
               <a:latin typeface="微軟正黑體" panose="020B0604030504040204" pitchFamily="34" charset="-120"/>
               <a:ea typeface="微軟正黑體" panose="020B0604030504040204" pitchFamily="34" charset="-120"/>
             </a:rPr>
@@ -1215,7 +1220,7 @@
         <a:p>
           <a:pPr rtl="0"/>
           <a:r>
-            <a:rPr lang="en-US" sz="2400" b="1" smtClean="0">
+            <a:rPr lang="en-US" sz="2400" b="1">
               <a:latin typeface="微軟正黑體" panose="020B0604030504040204" pitchFamily="34" charset="-120"/>
               <a:ea typeface="微軟正黑體" panose="020B0604030504040204" pitchFamily="34" charset="-120"/>
             </a:rPr>
@@ -1265,28 +1270,28 @@
         <a:p>
           <a:pPr rtl="0"/>
           <a:r>
-            <a:rPr lang="zh-TW" sz="2400" b="1" dirty="0" smtClean="0">
+            <a:rPr lang="zh-TW" sz="2400" b="1" dirty="0">
               <a:latin typeface="微軟正黑體" panose="020B0604030504040204" pitchFamily="34" charset="-120"/>
               <a:ea typeface="微軟正黑體" panose="020B0604030504040204" pitchFamily="34" charset="-120"/>
             </a:rPr>
             <a:t>後序法</a:t>
           </a:r>
           <a:r>
-            <a:rPr lang="en-US" sz="2400" b="1" dirty="0" smtClean="0">
+            <a:rPr lang="en-US" sz="2400" b="1" dirty="0">
               <a:latin typeface="微軟正黑體" panose="020B0604030504040204" pitchFamily="34" charset="-120"/>
               <a:ea typeface="微軟正黑體" panose="020B0604030504040204" pitchFamily="34" charset="-120"/>
             </a:rPr>
             <a:t>(</a:t>
           </a:r>
           <a:r>
-            <a:rPr lang="en-US" sz="2400" b="1" dirty="0" err="1" smtClean="0">
+            <a:rPr lang="en-US" sz="2400" b="1" dirty="0" err="1">
               <a:latin typeface="微軟正黑體" panose="020B0604030504040204" pitchFamily="34" charset="-120"/>
               <a:ea typeface="微軟正黑體" panose="020B0604030504040204" pitchFamily="34" charset="-120"/>
             </a:rPr>
             <a:t>postorder</a:t>
           </a:r>
           <a:r>
-            <a:rPr lang="en-US" sz="2400" b="1" dirty="0" smtClean="0">
+            <a:rPr lang="en-US" sz="2400" b="1" dirty="0">
               <a:latin typeface="微軟正黑體" panose="020B0604030504040204" pitchFamily="34" charset="-120"/>
               <a:ea typeface="微軟正黑體" panose="020B0604030504040204" pitchFamily="34" charset="-120"/>
             </a:rPr>
@@ -1336,7 +1341,7 @@
         <a:p>
           <a:pPr rtl="0"/>
           <a:r>
-            <a:rPr lang="en-US" sz="2400" b="1" smtClean="0">
+            <a:rPr lang="en-US" sz="2400" b="1">
               <a:latin typeface="微軟正黑體" panose="020B0604030504040204" pitchFamily="34" charset="-120"/>
               <a:ea typeface="微軟正黑體" panose="020B0604030504040204" pitchFamily="34" charset="-120"/>
             </a:rPr>
@@ -1388,24 +1393,10 @@
         </dgm:presLayoutVars>
       </dgm:prSet>
       <dgm:spPr/>
-      <dgm:t>
-        <a:bodyPr/>
-        <a:lstStyle/>
-        <a:p>
-          <a:endParaRPr lang="zh-TW" altLang="en-US"/>
-        </a:p>
-      </dgm:t>
     </dgm:pt>
     <dgm:pt modelId="{A569548B-F86E-4354-AC1B-B68C7C0DE387}" type="pres">
       <dgm:prSet presAssocID="{3F7A4BBC-7895-45C6-8BE0-F91E75F90821}" presName="vertOne" presStyleCnt="0"/>
       <dgm:spPr/>
-      <dgm:t>
-        <a:bodyPr/>
-        <a:lstStyle/>
-        <a:p>
-          <a:endParaRPr lang="zh-TW" altLang="en-US"/>
-        </a:p>
-      </dgm:t>
     </dgm:pt>
     <dgm:pt modelId="{547FAAD8-FAFC-4613-A4BE-5A5666369965}" type="pres">
       <dgm:prSet presAssocID="{3F7A4BBC-7895-45C6-8BE0-F91E75F90821}" presName="txOne" presStyleLbl="node0" presStyleIdx="0" presStyleCnt="3">
@@ -1414,46 +1405,18 @@
         </dgm:presLayoutVars>
       </dgm:prSet>
       <dgm:spPr/>
-      <dgm:t>
-        <a:bodyPr/>
-        <a:lstStyle/>
-        <a:p>
-          <a:endParaRPr lang="zh-TW" altLang="en-US"/>
-        </a:p>
-      </dgm:t>
     </dgm:pt>
     <dgm:pt modelId="{8EC9E0EE-719F-4ACF-9F66-35246DBC8F55}" type="pres">
       <dgm:prSet presAssocID="{3F7A4BBC-7895-45C6-8BE0-F91E75F90821}" presName="parTransOne" presStyleCnt="0"/>
       <dgm:spPr/>
-      <dgm:t>
-        <a:bodyPr/>
-        <a:lstStyle/>
-        <a:p>
-          <a:endParaRPr lang="zh-TW" altLang="en-US"/>
-        </a:p>
-      </dgm:t>
     </dgm:pt>
     <dgm:pt modelId="{681A65D1-6DE4-4AEE-950B-753785E8F450}" type="pres">
       <dgm:prSet presAssocID="{3F7A4BBC-7895-45C6-8BE0-F91E75F90821}" presName="horzOne" presStyleCnt="0"/>
       <dgm:spPr/>
-      <dgm:t>
-        <a:bodyPr/>
-        <a:lstStyle/>
-        <a:p>
-          <a:endParaRPr lang="zh-TW" altLang="en-US"/>
-        </a:p>
-      </dgm:t>
     </dgm:pt>
     <dgm:pt modelId="{397F8750-46A7-4204-9F74-082D3A130299}" type="pres">
       <dgm:prSet presAssocID="{A2216521-3689-4352-A927-8CB5E69A9C35}" presName="vertTwo" presStyleCnt="0"/>
       <dgm:spPr/>
-      <dgm:t>
-        <a:bodyPr/>
-        <a:lstStyle/>
-        <a:p>
-          <a:endParaRPr lang="zh-TW" altLang="en-US"/>
-        </a:p>
-      </dgm:t>
     </dgm:pt>
     <dgm:pt modelId="{38883DA3-32C4-4ED7-A906-1789FC2BE51B}" type="pres">
       <dgm:prSet presAssocID="{A2216521-3689-4352-A927-8CB5E69A9C35}" presName="txTwo" presStyleLbl="node2" presStyleIdx="0" presStyleCnt="3">
@@ -1462,46 +1425,18 @@
         </dgm:presLayoutVars>
       </dgm:prSet>
       <dgm:spPr/>
-      <dgm:t>
-        <a:bodyPr/>
-        <a:lstStyle/>
-        <a:p>
-          <a:endParaRPr lang="zh-TW" altLang="en-US"/>
-        </a:p>
-      </dgm:t>
     </dgm:pt>
     <dgm:pt modelId="{4C7B99E4-A5AF-45D8-B1E7-A6DFF81F2B7A}" type="pres">
       <dgm:prSet presAssocID="{A2216521-3689-4352-A927-8CB5E69A9C35}" presName="horzTwo" presStyleCnt="0"/>
       <dgm:spPr/>
-      <dgm:t>
-        <a:bodyPr/>
-        <a:lstStyle/>
-        <a:p>
-          <a:endParaRPr lang="zh-TW" altLang="en-US"/>
-        </a:p>
-      </dgm:t>
     </dgm:pt>
     <dgm:pt modelId="{4DD60CBB-9A88-4D89-B354-2AE06113C2C3}" type="pres">
       <dgm:prSet presAssocID="{DB20D205-DEEE-46F5-8314-D995A1E9C142}" presName="sibSpaceOne" presStyleCnt="0"/>
       <dgm:spPr/>
-      <dgm:t>
-        <a:bodyPr/>
-        <a:lstStyle/>
-        <a:p>
-          <a:endParaRPr lang="zh-TW" altLang="en-US"/>
-        </a:p>
-      </dgm:t>
     </dgm:pt>
     <dgm:pt modelId="{8659CCB3-C41D-4D43-9967-7784F908FC0A}" type="pres">
       <dgm:prSet presAssocID="{32F3D542-2FC2-4AFE-8E50-E2685174590A}" presName="vertOne" presStyleCnt="0"/>
       <dgm:spPr/>
-      <dgm:t>
-        <a:bodyPr/>
-        <a:lstStyle/>
-        <a:p>
-          <a:endParaRPr lang="zh-TW" altLang="en-US"/>
-        </a:p>
-      </dgm:t>
     </dgm:pt>
     <dgm:pt modelId="{6A7D3B0E-5E79-4492-A03F-79EC8587720D}" type="pres">
       <dgm:prSet presAssocID="{32F3D542-2FC2-4AFE-8E50-E2685174590A}" presName="txOne" presStyleLbl="node0" presStyleIdx="1" presStyleCnt="3">
@@ -1510,46 +1445,18 @@
         </dgm:presLayoutVars>
       </dgm:prSet>
       <dgm:spPr/>
-      <dgm:t>
-        <a:bodyPr/>
-        <a:lstStyle/>
-        <a:p>
-          <a:endParaRPr lang="zh-TW" altLang="en-US"/>
-        </a:p>
-      </dgm:t>
     </dgm:pt>
     <dgm:pt modelId="{F46AFF2F-CE9D-4F95-A9ED-D18356D0DCD3}" type="pres">
       <dgm:prSet presAssocID="{32F3D542-2FC2-4AFE-8E50-E2685174590A}" presName="parTransOne" presStyleCnt="0"/>
       <dgm:spPr/>
-      <dgm:t>
-        <a:bodyPr/>
-        <a:lstStyle/>
-        <a:p>
-          <a:endParaRPr lang="zh-TW" altLang="en-US"/>
-        </a:p>
-      </dgm:t>
     </dgm:pt>
     <dgm:pt modelId="{51E9D411-408E-49AE-87A1-AF2897BC3883}" type="pres">
       <dgm:prSet presAssocID="{32F3D542-2FC2-4AFE-8E50-E2685174590A}" presName="horzOne" presStyleCnt="0"/>
       <dgm:spPr/>
-      <dgm:t>
-        <a:bodyPr/>
-        <a:lstStyle/>
-        <a:p>
-          <a:endParaRPr lang="zh-TW" altLang="en-US"/>
-        </a:p>
-      </dgm:t>
     </dgm:pt>
     <dgm:pt modelId="{2C2042A9-1215-4480-9AAF-F5B086AC292E}" type="pres">
       <dgm:prSet presAssocID="{A50E1366-7447-4C4D-AC4C-70A17AF7891C}" presName="vertTwo" presStyleCnt="0"/>
       <dgm:spPr/>
-      <dgm:t>
-        <a:bodyPr/>
-        <a:lstStyle/>
-        <a:p>
-          <a:endParaRPr lang="zh-TW" altLang="en-US"/>
-        </a:p>
-      </dgm:t>
     </dgm:pt>
     <dgm:pt modelId="{716CBBD1-D2C2-4FAC-AB61-F9A1CEE28AF4}" type="pres">
       <dgm:prSet presAssocID="{A50E1366-7447-4C4D-AC4C-70A17AF7891C}" presName="txTwo" presStyleLbl="node2" presStyleIdx="1" presStyleCnt="3">
@@ -1558,46 +1465,18 @@
         </dgm:presLayoutVars>
       </dgm:prSet>
       <dgm:spPr/>
-      <dgm:t>
-        <a:bodyPr/>
-        <a:lstStyle/>
-        <a:p>
-          <a:endParaRPr lang="zh-TW" altLang="en-US"/>
-        </a:p>
-      </dgm:t>
     </dgm:pt>
     <dgm:pt modelId="{ACA5CE8E-F17F-4194-8800-9FEA5AE253AB}" type="pres">
       <dgm:prSet presAssocID="{A50E1366-7447-4C4D-AC4C-70A17AF7891C}" presName="horzTwo" presStyleCnt="0"/>
       <dgm:spPr/>
-      <dgm:t>
-        <a:bodyPr/>
-        <a:lstStyle/>
-        <a:p>
-          <a:endParaRPr lang="zh-TW" altLang="en-US"/>
-        </a:p>
-      </dgm:t>
     </dgm:pt>
     <dgm:pt modelId="{AF601FD7-0A14-4A8D-887B-9E5DE404794A}" type="pres">
       <dgm:prSet presAssocID="{3BFF6FC1-3ECF-4421-9B77-37C4BB0AFFAD}" presName="sibSpaceOne" presStyleCnt="0"/>
       <dgm:spPr/>
-      <dgm:t>
-        <a:bodyPr/>
-        <a:lstStyle/>
-        <a:p>
-          <a:endParaRPr lang="zh-TW" altLang="en-US"/>
-        </a:p>
-      </dgm:t>
     </dgm:pt>
     <dgm:pt modelId="{D971AB50-E694-4666-9584-198961D72E16}" type="pres">
       <dgm:prSet presAssocID="{D184C4B4-F689-4EE6-BD92-541F3F2D531D}" presName="vertOne" presStyleCnt="0"/>
       <dgm:spPr/>
-      <dgm:t>
-        <a:bodyPr/>
-        <a:lstStyle/>
-        <a:p>
-          <a:endParaRPr lang="zh-TW" altLang="en-US"/>
-        </a:p>
-      </dgm:t>
     </dgm:pt>
     <dgm:pt modelId="{66CA22BB-8E57-4A66-A84D-D361F627A364}" type="pres">
       <dgm:prSet presAssocID="{D184C4B4-F689-4EE6-BD92-541F3F2D531D}" presName="txOne" presStyleLbl="node0" presStyleIdx="2" presStyleCnt="3">
@@ -1606,46 +1485,18 @@
         </dgm:presLayoutVars>
       </dgm:prSet>
       <dgm:spPr/>
-      <dgm:t>
-        <a:bodyPr/>
-        <a:lstStyle/>
-        <a:p>
-          <a:endParaRPr lang="zh-TW" altLang="en-US"/>
-        </a:p>
-      </dgm:t>
     </dgm:pt>
     <dgm:pt modelId="{3E1AD318-49A1-4F35-872B-26E2B3D475F9}" type="pres">
       <dgm:prSet presAssocID="{D184C4B4-F689-4EE6-BD92-541F3F2D531D}" presName="parTransOne" presStyleCnt="0"/>
       <dgm:spPr/>
-      <dgm:t>
-        <a:bodyPr/>
-        <a:lstStyle/>
-        <a:p>
-          <a:endParaRPr lang="zh-TW" altLang="en-US"/>
-        </a:p>
-      </dgm:t>
     </dgm:pt>
     <dgm:pt modelId="{5608D1D1-3A21-422D-BDE6-6200BB9810CF}" type="pres">
       <dgm:prSet presAssocID="{D184C4B4-F689-4EE6-BD92-541F3F2D531D}" presName="horzOne" presStyleCnt="0"/>
       <dgm:spPr/>
-      <dgm:t>
-        <a:bodyPr/>
-        <a:lstStyle/>
-        <a:p>
-          <a:endParaRPr lang="zh-TW" altLang="en-US"/>
-        </a:p>
-      </dgm:t>
     </dgm:pt>
     <dgm:pt modelId="{EFFCC1AB-1A6D-4CE5-8DA2-6814C2134895}" type="pres">
       <dgm:prSet presAssocID="{35DB3B97-B7A6-4C5A-8BB3-7C143515DA97}" presName="vertTwo" presStyleCnt="0"/>
       <dgm:spPr/>
-      <dgm:t>
-        <a:bodyPr/>
-        <a:lstStyle/>
-        <a:p>
-          <a:endParaRPr lang="zh-TW" altLang="en-US"/>
-        </a:p>
-      </dgm:t>
     </dgm:pt>
     <dgm:pt modelId="{93A01245-F1A6-4B94-AE03-EA67FAF82D0E}" type="pres">
       <dgm:prSet presAssocID="{35DB3B97-B7A6-4C5A-8BB3-7C143515DA97}" presName="txTwo" presStyleLbl="node2" presStyleIdx="2" presStyleCnt="3">
@@ -1654,40 +1505,26 @@
         </dgm:presLayoutVars>
       </dgm:prSet>
       <dgm:spPr/>
-      <dgm:t>
-        <a:bodyPr/>
-        <a:lstStyle/>
-        <a:p>
-          <a:endParaRPr lang="zh-TW" altLang="en-US"/>
-        </a:p>
-      </dgm:t>
     </dgm:pt>
     <dgm:pt modelId="{C5F83A16-CD41-4991-B3C4-E0D4731BE5FB}" type="pres">
       <dgm:prSet presAssocID="{35DB3B97-B7A6-4C5A-8BB3-7C143515DA97}" presName="horzTwo" presStyleCnt="0"/>
       <dgm:spPr/>
-      <dgm:t>
-        <a:bodyPr/>
-        <a:lstStyle/>
-        <a:p>
-          <a:endParaRPr lang="zh-TW" altLang="en-US"/>
-        </a:p>
-      </dgm:t>
     </dgm:pt>
   </dgm:ptLst>
   <dgm:cxnLst>
-    <dgm:cxn modelId="{C10ECDE1-62BF-4142-85F9-2941C735C397}" srcId="{6B470555-30D9-433A-949C-96E7CD7A0A28}" destId="{3F7A4BBC-7895-45C6-8BE0-F91E75F90821}" srcOrd="0" destOrd="0" parTransId="{AC89FDF7-342C-4146-BF9A-963F74ADBFA4}" sibTransId="{DB20D205-DEEE-46F5-8314-D995A1E9C142}"/>
+    <dgm:cxn modelId="{BF5B432E-249E-4D99-8C2A-7E8A13A0EFDB}" srcId="{32F3D542-2FC2-4AFE-8E50-E2685174590A}" destId="{A50E1366-7447-4C4D-AC4C-70A17AF7891C}" srcOrd="0" destOrd="0" parTransId="{18F435A2-5592-498A-8F00-16267B1FD969}" sibTransId="{C8141815-9A09-48D8-9954-1CFB76A8CE59}"/>
+    <dgm:cxn modelId="{7F61AC36-F510-4D89-9C33-3F5D3F7ECB57}" type="presOf" srcId="{A50E1366-7447-4C4D-AC4C-70A17AF7891C}" destId="{716CBBD1-D2C2-4FAC-AB61-F9A1CEE28AF4}" srcOrd="0" destOrd="0" presId="urn:microsoft.com/office/officeart/2005/8/layout/hierarchy4"/>
+    <dgm:cxn modelId="{C2CC8C3E-45E1-4C3D-802E-50700076AE6A}" srcId="{3F7A4BBC-7895-45C6-8BE0-F91E75F90821}" destId="{A2216521-3689-4352-A927-8CB5E69A9C35}" srcOrd="0" destOrd="0" parTransId="{46A6762E-1DBE-4503-93EA-00EEE3E3EA32}" sibTransId="{1E0CC12B-764E-4C13-843E-0F92376F7B7E}"/>
     <dgm:cxn modelId="{D35C875B-631A-446F-9E42-30AE6FF382D7}" type="presOf" srcId="{A2216521-3689-4352-A927-8CB5E69A9C35}" destId="{38883DA3-32C4-4ED7-A906-1789FC2BE51B}" srcOrd="0" destOrd="0" presId="urn:microsoft.com/office/officeart/2005/8/layout/hierarchy4"/>
     <dgm:cxn modelId="{B2CD2B62-F155-4BE8-AD56-F09C389877EA}" srcId="{D184C4B4-F689-4EE6-BD92-541F3F2D531D}" destId="{35DB3B97-B7A6-4C5A-8BB3-7C143515DA97}" srcOrd="0" destOrd="0" parTransId="{E6260062-2020-4C61-A8FD-9F020E527F47}" sibTransId="{15F48AA2-8ABD-463F-9ED2-DB4AFC6C4040}"/>
     <dgm:cxn modelId="{08ED9447-A95F-4F97-ADFD-FCED31F1AA23}" type="presOf" srcId="{6B470555-30D9-433A-949C-96E7CD7A0A28}" destId="{E54EE2D3-0DA0-42E3-98DB-48F00B11A82F}" srcOrd="0" destOrd="0" presId="urn:microsoft.com/office/officeart/2005/8/layout/hierarchy4"/>
+    <dgm:cxn modelId="{58BFFDA8-2844-4521-A07B-DBDCEE3586DF}" srcId="{6B470555-30D9-433A-949C-96E7CD7A0A28}" destId="{32F3D542-2FC2-4AFE-8E50-E2685174590A}" srcOrd="1" destOrd="0" parTransId="{7E68AE8C-58F6-4B3C-952D-62DC38B5F116}" sibTransId="{3BFF6FC1-3ECF-4421-9B77-37C4BB0AFFAD}"/>
     <dgm:cxn modelId="{F703ADB6-667A-4494-9E22-1A5451F81158}" type="presOf" srcId="{32F3D542-2FC2-4AFE-8E50-E2685174590A}" destId="{6A7D3B0E-5E79-4492-A03F-79EC8587720D}" srcOrd="0" destOrd="0" presId="urn:microsoft.com/office/officeart/2005/8/layout/hierarchy4"/>
-    <dgm:cxn modelId="{58BFFDA8-2844-4521-A07B-DBDCEE3586DF}" srcId="{6B470555-30D9-433A-949C-96E7CD7A0A28}" destId="{32F3D542-2FC2-4AFE-8E50-E2685174590A}" srcOrd="1" destOrd="0" parTransId="{7E68AE8C-58F6-4B3C-952D-62DC38B5F116}" sibTransId="{3BFF6FC1-3ECF-4421-9B77-37C4BB0AFFAD}"/>
+    <dgm:cxn modelId="{DED133D9-9FB1-4AF9-AC8F-195113C3E5D6}" type="presOf" srcId="{3F7A4BBC-7895-45C6-8BE0-F91E75F90821}" destId="{547FAAD8-FAFC-4613-A4BE-5A5666369965}" srcOrd="0" destOrd="0" presId="urn:microsoft.com/office/officeart/2005/8/layout/hierarchy4"/>
+    <dgm:cxn modelId="{C10ECDE1-62BF-4142-85F9-2941C735C397}" srcId="{6B470555-30D9-433A-949C-96E7CD7A0A28}" destId="{3F7A4BBC-7895-45C6-8BE0-F91E75F90821}" srcOrd="0" destOrd="0" parTransId="{AC89FDF7-342C-4146-BF9A-963F74ADBFA4}" sibTransId="{DB20D205-DEEE-46F5-8314-D995A1E9C142}"/>
+    <dgm:cxn modelId="{4B80EAEB-10FF-47B1-BCB6-90F55341FA69}" type="presOf" srcId="{35DB3B97-B7A6-4C5A-8BB3-7C143515DA97}" destId="{93A01245-F1A6-4B94-AE03-EA67FAF82D0E}" srcOrd="0" destOrd="0" presId="urn:microsoft.com/office/officeart/2005/8/layout/hierarchy4"/>
     <dgm:cxn modelId="{4D6787EF-DF47-40D8-868C-420BB5CBE5A8}" type="presOf" srcId="{D184C4B4-F689-4EE6-BD92-541F3F2D531D}" destId="{66CA22BB-8E57-4A66-A84D-D361F627A364}" srcOrd="0" destOrd="0" presId="urn:microsoft.com/office/officeart/2005/8/layout/hierarchy4"/>
-    <dgm:cxn modelId="{4B80EAEB-10FF-47B1-BCB6-90F55341FA69}" type="presOf" srcId="{35DB3B97-B7A6-4C5A-8BB3-7C143515DA97}" destId="{93A01245-F1A6-4B94-AE03-EA67FAF82D0E}" srcOrd="0" destOrd="0" presId="urn:microsoft.com/office/officeart/2005/8/layout/hierarchy4"/>
     <dgm:cxn modelId="{34CF22F0-B254-4428-81BA-547DEB24A778}" srcId="{6B470555-30D9-433A-949C-96E7CD7A0A28}" destId="{D184C4B4-F689-4EE6-BD92-541F3F2D531D}" srcOrd="2" destOrd="0" parTransId="{F100EE03-B02C-41B2-B82D-21561146D947}" sibTransId="{EBFAEB51-5CF1-4CB9-A36B-F94DB1C28A6C}"/>
-    <dgm:cxn modelId="{7F61AC36-F510-4D89-9C33-3F5D3F7ECB57}" type="presOf" srcId="{A50E1366-7447-4C4D-AC4C-70A17AF7891C}" destId="{716CBBD1-D2C2-4FAC-AB61-F9A1CEE28AF4}" srcOrd="0" destOrd="0" presId="urn:microsoft.com/office/officeart/2005/8/layout/hierarchy4"/>
-    <dgm:cxn modelId="{C2CC8C3E-45E1-4C3D-802E-50700076AE6A}" srcId="{3F7A4BBC-7895-45C6-8BE0-F91E75F90821}" destId="{A2216521-3689-4352-A927-8CB5E69A9C35}" srcOrd="0" destOrd="0" parTransId="{46A6762E-1DBE-4503-93EA-00EEE3E3EA32}" sibTransId="{1E0CC12B-764E-4C13-843E-0F92376F7B7E}"/>
-    <dgm:cxn modelId="{DED133D9-9FB1-4AF9-AC8F-195113C3E5D6}" type="presOf" srcId="{3F7A4BBC-7895-45C6-8BE0-F91E75F90821}" destId="{547FAAD8-FAFC-4613-A4BE-5A5666369965}" srcOrd="0" destOrd="0" presId="urn:microsoft.com/office/officeart/2005/8/layout/hierarchy4"/>
-    <dgm:cxn modelId="{BF5B432E-249E-4D99-8C2A-7E8A13A0EFDB}" srcId="{32F3D542-2FC2-4AFE-8E50-E2685174590A}" destId="{A50E1366-7447-4C4D-AC4C-70A17AF7891C}" srcOrd="0" destOrd="0" parTransId="{18F435A2-5592-498A-8F00-16267B1FD969}" sibTransId="{C8141815-9A09-48D8-9954-1CFB76A8CE59}"/>
     <dgm:cxn modelId="{08A8D510-C776-4BA3-8E82-504EECCCE8EB}" type="presParOf" srcId="{E54EE2D3-0DA0-42E3-98DB-48F00B11A82F}" destId="{A569548B-F86E-4354-AC1B-B68C7C0DE387}" srcOrd="0" destOrd="0" presId="urn:microsoft.com/office/officeart/2005/8/layout/hierarchy4"/>
     <dgm:cxn modelId="{F37B849F-817B-4805-B6BC-700576623420}" type="presParOf" srcId="{A569548B-F86E-4354-AC1B-B68C7C0DE387}" destId="{547FAAD8-FAFC-4613-A4BE-5A5666369965}" srcOrd="0" destOrd="0" presId="urn:microsoft.com/office/officeart/2005/8/layout/hierarchy4"/>
     <dgm:cxn modelId="{2C57F58F-E9FE-408E-A12D-2F24821E39D5}" type="presParOf" srcId="{A569548B-F86E-4354-AC1B-B68C7C0DE387}" destId="{8EC9E0EE-719F-4ACF-9F66-35246DBC8F55}" srcOrd="1" destOrd="0" presId="urn:microsoft.com/office/officeart/2005/8/layout/hierarchy4"/>
@@ -1796,7 +1633,7 @@
         </a:bodyPr>
         <a:lstStyle/>
         <a:p>
-          <a:pPr lvl="0" algn="ctr" defTabSz="1066800" rtl="0">
+          <a:pPr marL="0" lvl="0" indent="0" algn="ctr" defTabSz="1066800" rtl="0">
             <a:lnSpc>
               <a:spcPct val="90000"/>
             </a:lnSpc>
@@ -1806,16 +1643,17 @@
             <a:spcAft>
               <a:spcPct val="35000"/>
             </a:spcAft>
+            <a:buNone/>
           </a:pPr>
           <a:r>
-            <a:rPr lang="zh-TW" sz="2400" b="1" kern="1200" dirty="0" smtClean="0">
+            <a:rPr lang="zh-TW" sz="2400" b="1" kern="1200" dirty="0">
               <a:latin typeface="微軟正黑體" panose="020B0604030504040204" pitchFamily="34" charset="-120"/>
               <a:ea typeface="微軟正黑體" panose="020B0604030504040204" pitchFamily="34" charset="-120"/>
             </a:rPr>
             <a:t>前序法</a:t>
           </a:r>
           <a:r>
-            <a:rPr lang="en-US" sz="2400" b="1" kern="1200" dirty="0" smtClean="0">
+            <a:rPr lang="en-US" sz="2400" b="1" kern="1200" dirty="0">
               <a:latin typeface="微軟正黑體" panose="020B0604030504040204" pitchFamily="34" charset="-120"/>
               <a:ea typeface="微軟正黑體" panose="020B0604030504040204" pitchFamily="34" charset="-120"/>
             </a:rPr>
@@ -1898,7 +1736,7 @@
         </a:bodyPr>
         <a:lstStyle/>
         <a:p>
-          <a:pPr lvl="0" algn="ctr" defTabSz="1066800" rtl="0">
+          <a:pPr marL="0" lvl="0" indent="0" algn="ctr" defTabSz="1066800" rtl="0">
             <a:lnSpc>
               <a:spcPct val="90000"/>
             </a:lnSpc>
@@ -1908,9 +1746,10 @@
             <a:spcAft>
               <a:spcPct val="35000"/>
             </a:spcAft>
+            <a:buNone/>
           </a:pPr>
           <a:r>
-            <a:rPr lang="en-US" sz="2400" b="1" kern="1200" smtClean="0">
+            <a:rPr lang="en-US" sz="2400" b="1" kern="1200">
               <a:latin typeface="微軟正黑體" panose="020B0604030504040204" pitchFamily="34" charset="-120"/>
               <a:ea typeface="微軟正黑體" panose="020B0604030504040204" pitchFamily="34" charset="-120"/>
             </a:rPr>
@@ -1993,7 +1832,7 @@
         </a:bodyPr>
         <a:lstStyle/>
         <a:p>
-          <a:pPr lvl="0" algn="ctr" defTabSz="1066800" rtl="0">
+          <a:pPr marL="0" lvl="0" indent="0" algn="ctr" defTabSz="1066800" rtl="0">
             <a:lnSpc>
               <a:spcPct val="90000"/>
             </a:lnSpc>
@@ -2003,30 +1842,31 @@
             <a:spcAft>
               <a:spcPct val="35000"/>
             </a:spcAft>
+            <a:buNone/>
           </a:pPr>
           <a:r>
-            <a:rPr lang="zh-TW" sz="2400" b="1" kern="1200" dirty="0" smtClean="0">
+            <a:rPr lang="zh-TW" sz="2400" b="1" kern="1200" dirty="0">
               <a:latin typeface="微軟正黑體" panose="020B0604030504040204" pitchFamily="34" charset="-120"/>
               <a:ea typeface="微軟正黑體" panose="020B0604030504040204" pitchFamily="34" charset="-120"/>
             </a:rPr>
             <a:t>中序法</a:t>
           </a:r>
           <a:r>
-            <a:rPr lang="en-US" sz="2400" b="1" kern="1200" dirty="0" smtClean="0">
+            <a:rPr lang="en-US" sz="2400" b="1" kern="1200" dirty="0">
               <a:latin typeface="微軟正黑體" panose="020B0604030504040204" pitchFamily="34" charset="-120"/>
               <a:ea typeface="微軟正黑體" panose="020B0604030504040204" pitchFamily="34" charset="-120"/>
             </a:rPr>
             <a:t>(</a:t>
           </a:r>
           <a:r>
-            <a:rPr lang="en-US" sz="2400" b="1" kern="1200" dirty="0" err="1" smtClean="0">
+            <a:rPr lang="en-US" sz="2400" b="1" kern="1200" dirty="0" err="1">
               <a:latin typeface="微軟正黑體" panose="020B0604030504040204" pitchFamily="34" charset="-120"/>
               <a:ea typeface="微軟正黑體" panose="020B0604030504040204" pitchFamily="34" charset="-120"/>
             </a:rPr>
             <a:t>inorder</a:t>
           </a:r>
           <a:r>
-            <a:rPr lang="en-US" sz="2400" b="1" kern="1200" dirty="0" smtClean="0">
+            <a:rPr lang="en-US" sz="2400" b="1" kern="1200" dirty="0">
               <a:latin typeface="微軟正黑體" panose="020B0604030504040204" pitchFamily="34" charset="-120"/>
               <a:ea typeface="微軟正黑體" panose="020B0604030504040204" pitchFamily="34" charset="-120"/>
             </a:rPr>
@@ -2109,7 +1949,7 @@
         </a:bodyPr>
         <a:lstStyle/>
         <a:p>
-          <a:pPr lvl="0" algn="ctr" defTabSz="1066800" rtl="0">
+          <a:pPr marL="0" lvl="0" indent="0" algn="ctr" defTabSz="1066800" rtl="0">
             <a:lnSpc>
               <a:spcPct val="90000"/>
             </a:lnSpc>
@@ -2119,9 +1959,10 @@
             <a:spcAft>
               <a:spcPct val="35000"/>
             </a:spcAft>
+            <a:buNone/>
           </a:pPr>
           <a:r>
-            <a:rPr lang="en-US" sz="2400" b="1" kern="1200" smtClean="0">
+            <a:rPr lang="en-US" sz="2400" b="1" kern="1200">
               <a:latin typeface="微軟正黑體" panose="020B0604030504040204" pitchFamily="34" charset="-120"/>
               <a:ea typeface="微軟正黑體" panose="020B0604030504040204" pitchFamily="34" charset="-120"/>
             </a:rPr>
@@ -2204,7 +2045,7 @@
         </a:bodyPr>
         <a:lstStyle/>
         <a:p>
-          <a:pPr lvl="0" algn="ctr" defTabSz="1066800" rtl="0">
+          <a:pPr marL="0" lvl="0" indent="0" algn="ctr" defTabSz="1066800" rtl="0">
             <a:lnSpc>
               <a:spcPct val="90000"/>
             </a:lnSpc>
@@ -2214,30 +2055,31 @@
             <a:spcAft>
               <a:spcPct val="35000"/>
             </a:spcAft>
+            <a:buNone/>
           </a:pPr>
           <a:r>
-            <a:rPr lang="zh-TW" sz="2400" b="1" kern="1200" dirty="0" smtClean="0">
+            <a:rPr lang="zh-TW" sz="2400" b="1" kern="1200" dirty="0">
               <a:latin typeface="微軟正黑體" panose="020B0604030504040204" pitchFamily="34" charset="-120"/>
               <a:ea typeface="微軟正黑體" panose="020B0604030504040204" pitchFamily="34" charset="-120"/>
             </a:rPr>
             <a:t>後序法</a:t>
           </a:r>
           <a:r>
-            <a:rPr lang="en-US" sz="2400" b="1" kern="1200" dirty="0" smtClean="0">
+            <a:rPr lang="en-US" sz="2400" b="1" kern="1200" dirty="0">
               <a:latin typeface="微軟正黑體" panose="020B0604030504040204" pitchFamily="34" charset="-120"/>
               <a:ea typeface="微軟正黑體" panose="020B0604030504040204" pitchFamily="34" charset="-120"/>
             </a:rPr>
             <a:t>(</a:t>
           </a:r>
           <a:r>
-            <a:rPr lang="en-US" sz="2400" b="1" kern="1200" dirty="0" err="1" smtClean="0">
+            <a:rPr lang="en-US" sz="2400" b="1" kern="1200" dirty="0" err="1">
               <a:latin typeface="微軟正黑體" panose="020B0604030504040204" pitchFamily="34" charset="-120"/>
               <a:ea typeface="微軟正黑體" panose="020B0604030504040204" pitchFamily="34" charset="-120"/>
             </a:rPr>
             <a:t>postorder</a:t>
           </a:r>
           <a:r>
-            <a:rPr lang="en-US" sz="2400" b="1" kern="1200" dirty="0" smtClean="0">
+            <a:rPr lang="en-US" sz="2400" b="1" kern="1200" dirty="0">
               <a:latin typeface="微軟正黑體" panose="020B0604030504040204" pitchFamily="34" charset="-120"/>
               <a:ea typeface="微軟正黑體" panose="020B0604030504040204" pitchFamily="34" charset="-120"/>
             </a:rPr>
@@ -2320,7 +2162,7 @@
         </a:bodyPr>
         <a:lstStyle/>
         <a:p>
-          <a:pPr lvl="0" algn="ctr" defTabSz="1066800" rtl="0">
+          <a:pPr marL="0" lvl="0" indent="0" algn="ctr" defTabSz="1066800" rtl="0">
             <a:lnSpc>
               <a:spcPct val="90000"/>
             </a:lnSpc>
@@ -2330,9 +2172,10 @@
             <a:spcAft>
               <a:spcPct val="35000"/>
             </a:spcAft>
+            <a:buNone/>
           </a:pPr>
           <a:r>
-            <a:rPr lang="en-US" sz="2400" b="1" kern="1200" smtClean="0">
+            <a:rPr lang="en-US" sz="2400" b="1" kern="1200">
               <a:latin typeface="微軟正黑體" panose="020B0604030504040204" pitchFamily="34" charset="-120"/>
               <a:ea typeface="微軟正黑體" panose="020B0604030504040204" pitchFamily="34" charset="-120"/>
             </a:rPr>
@@ -4288,7 +4131,7 @@
             <a:fld id="{55EB12AB-0481-4543-9448-EE76391C4D02}" type="datetimeFigureOut">
               <a:rPr lang="zh-TW" altLang="en-US" smtClean="0"/>
               <a:pPr/>
-              <a:t>2025/6/16</a:t>
+              <a:t>2026/6/10</a:t>
             </a:fld>
             <a:endParaRPr lang="zh-TW" altLang="en-US"/>
           </a:p>
@@ -4352,38 +4195,37 @@
           <a:p>
             <a:pPr lvl="0"/>
             <a:r>
-              <a:rPr lang="zh-TW" altLang="en-US" smtClean="0"/>
+              <a:rPr lang="zh-TW" altLang="en-US"/>
               <a:t>按一下以編輯母片文字樣式</a:t>
             </a:r>
           </a:p>
           <a:p>
             <a:pPr lvl="1"/>
             <a:r>
-              <a:rPr lang="zh-TW" altLang="en-US" smtClean="0"/>
+              <a:rPr lang="zh-TW" altLang="en-US"/>
               <a:t>第二層</a:t>
             </a:r>
           </a:p>
           <a:p>
             <a:pPr lvl="2"/>
             <a:r>
-              <a:rPr lang="zh-TW" altLang="en-US" smtClean="0"/>
+              <a:rPr lang="zh-TW" altLang="en-US"/>
               <a:t>第三層</a:t>
             </a:r>
           </a:p>
           <a:p>
             <a:pPr lvl="3"/>
             <a:r>
-              <a:rPr lang="zh-TW" altLang="en-US" smtClean="0"/>
+              <a:rPr lang="zh-TW" altLang="en-US"/>
               <a:t>第四層</a:t>
             </a:r>
           </a:p>
           <a:p>
             <a:pPr lvl="4"/>
             <a:r>
-              <a:rPr lang="zh-TW" altLang="en-US" smtClean="0"/>
+              <a:rPr lang="zh-TW" altLang="en-US"/>
               <a:t>第五層</a:t>
             </a:r>
-            <a:endParaRPr lang="zh-TW" altLang="en-US"/>
           </a:p>
         </p:txBody>
       </p:sp>
@@ -4713,10 +4555,9 @@
           </a:lstStyle>
           <a:p>
             <a:r>
-              <a:rPr lang="zh-TW" altLang="en-US" dirty="0" smtClean="0"/>
+              <a:rPr lang="zh-TW" altLang="en-US" dirty="0"/>
               <a:t>計算機簡介</a:t>
             </a:r>
-            <a:endParaRPr lang="zh-TW" altLang="en-US" dirty="0"/>
           </a:p>
         </p:txBody>
       </p:sp>
@@ -4832,10 +4673,9 @@
           </a:lstStyle>
           <a:p>
             <a:r>
-              <a:rPr lang="zh-TW" altLang="en-US" dirty="0" smtClean="0"/>
+              <a:rPr lang="zh-TW" altLang="en-US" dirty="0"/>
               <a:t>按一下以編輯母片副標題樣式</a:t>
             </a:r>
-            <a:endParaRPr lang="zh-TW" altLang="en-US" dirty="0"/>
           </a:p>
         </p:txBody>
       </p:sp>
@@ -7630,7 +7470,7 @@
           <a:lstStyle/>
           <a:p>
             <a:r>
-              <a:rPr lang="en-US" altLang="zh-TW" sz="3600" b="1" dirty="0" smtClean="0">
+              <a:rPr lang="en-US" altLang="zh-TW" sz="3600" b="1" dirty="0">
                 <a:solidFill>
                   <a:schemeClr val="bg1"/>
                 </a:solidFill>
@@ -7638,7 +7478,7 @@
               <a:t>CHAPTER</a:t>
             </a:r>
             <a:r>
-              <a:rPr lang="zh-TW" altLang="en-US" sz="3600" b="1" dirty="0" smtClean="0">
+              <a:rPr lang="zh-TW" altLang="en-US" sz="3600" b="1" dirty="0">
                 <a:solidFill>
                   <a:schemeClr val="bg1"/>
                 </a:solidFill>
@@ -7646,7 +7486,7 @@
               <a:t> </a:t>
             </a:r>
             <a:r>
-              <a:rPr lang="en-US" altLang="zh-TW" sz="5400" b="1" dirty="0" smtClean="0">
+              <a:rPr lang="en-US" altLang="zh-TW" sz="5400" b="1" dirty="0">
                 <a:solidFill>
                   <a:schemeClr val="accent5">
                     <a:lumMod val="50000"/>
@@ -7675,13 +7515,6 @@
   <p:clrMapOvr>
     <a:masterClrMapping/>
   </p:clrMapOvr>
-  <p:timing>
-    <p:tnLst>
-      <p:par>
-        <p:cTn id="1" dur="indefinite" restart="never" nodeType="tmRoot"/>
-      </p:par>
-    </p:tnLst>
-  </p:timing>
 </p:sldLayout>
 </file>
 
@@ -7718,10 +7551,9 @@
           <a:lstStyle/>
           <a:p>
             <a:r>
-              <a:rPr lang="zh-TW" altLang="en-US" smtClean="0"/>
+              <a:rPr lang="zh-TW" altLang="en-US"/>
               <a:t>按一下以編輯母片標題樣式</a:t>
             </a:r>
-            <a:endParaRPr lang="zh-TW" altLang="en-US"/>
           </a:p>
         </p:txBody>
       </p:sp>
@@ -7810,10 +7642,9 @@
           </a:lstStyle>
           <a:p>
             <a:r>
-              <a:rPr lang="zh-TW" altLang="en-US" smtClean="0"/>
+              <a:rPr lang="zh-TW" altLang="en-US"/>
               <a:t>按一下以編輯母片標題樣式</a:t>
             </a:r>
-            <a:endParaRPr lang="zh-TW" altLang="en-US"/>
           </a:p>
         </p:txBody>
       </p:sp>
@@ -7867,38 +7698,37 @@
           <a:p>
             <a:pPr lvl="0"/>
             <a:r>
-              <a:rPr lang="zh-TW" altLang="en-US" smtClean="0"/>
+              <a:rPr lang="zh-TW" altLang="en-US"/>
               <a:t>按一下以編輯母片文字樣式</a:t>
             </a:r>
           </a:p>
           <a:p>
             <a:pPr lvl="1"/>
             <a:r>
-              <a:rPr lang="zh-TW" altLang="en-US" smtClean="0"/>
+              <a:rPr lang="zh-TW" altLang="en-US"/>
               <a:t>第二層</a:t>
             </a:r>
           </a:p>
           <a:p>
             <a:pPr lvl="2"/>
             <a:r>
-              <a:rPr lang="zh-TW" altLang="en-US" smtClean="0"/>
+              <a:rPr lang="zh-TW" altLang="en-US"/>
               <a:t>第三層</a:t>
             </a:r>
           </a:p>
           <a:p>
             <a:pPr lvl="3"/>
             <a:r>
-              <a:rPr lang="zh-TW" altLang="en-US" smtClean="0"/>
+              <a:rPr lang="zh-TW" altLang="en-US"/>
               <a:t>第四層</a:t>
             </a:r>
           </a:p>
           <a:p>
             <a:pPr lvl="4"/>
             <a:r>
-              <a:rPr lang="zh-TW" altLang="en-US" smtClean="0"/>
+              <a:rPr lang="zh-TW" altLang="en-US"/>
               <a:t>第五層</a:t>
             </a:r>
-            <a:endParaRPr lang="zh-TW" altLang="en-US"/>
           </a:p>
         </p:txBody>
       </p:sp>
@@ -7961,7 +7791,7 @@
           <a:p>
             <a:pPr lvl="0"/>
             <a:r>
-              <a:rPr lang="zh-TW" altLang="en-US" smtClean="0"/>
+              <a:rPr lang="zh-TW" altLang="en-US"/>
               <a:t>按一下以編輯母片文字樣式</a:t>
             </a:r>
           </a:p>
@@ -8108,10 +7938,9 @@
           </a:lstStyle>
           <a:p>
             <a:r>
-              <a:rPr lang="zh-TW" altLang="en-US" smtClean="0"/>
+              <a:rPr lang="zh-TW" altLang="en-US"/>
               <a:t>按一下以編輯母片標題樣式</a:t>
             </a:r>
-            <a:endParaRPr lang="zh-TW" altLang="en-US"/>
           </a:p>
         </p:txBody>
       </p:sp>
@@ -8235,7 +8064,7 @@
           <a:p>
             <a:pPr lvl="0"/>
             <a:r>
-              <a:rPr lang="zh-TW" altLang="en-US" smtClean="0"/>
+              <a:rPr lang="zh-TW" altLang="en-US"/>
               <a:t>按一下以編輯母片文字樣式</a:t>
             </a:r>
           </a:p>
@@ -8373,10 +8202,9 @@
           <a:lstStyle/>
           <a:p>
             <a:r>
-              <a:rPr lang="zh-TW" altLang="en-US" smtClean="0"/>
+              <a:rPr lang="zh-TW" altLang="en-US"/>
               <a:t>按一下以編輯母片標題樣式</a:t>
             </a:r>
-            <a:endParaRPr lang="zh-TW" altLang="en-US"/>
           </a:p>
         </p:txBody>
       </p:sp>
@@ -8397,38 +8225,37 @@
           <a:p>
             <a:pPr lvl="0"/>
             <a:r>
-              <a:rPr lang="zh-TW" altLang="en-US" smtClean="0"/>
+              <a:rPr lang="zh-TW" altLang="en-US"/>
               <a:t>按一下以編輯母片文字樣式</a:t>
             </a:r>
           </a:p>
           <a:p>
             <a:pPr lvl="1"/>
             <a:r>
-              <a:rPr lang="zh-TW" altLang="en-US" smtClean="0"/>
+              <a:rPr lang="zh-TW" altLang="en-US"/>
               <a:t>第二層</a:t>
             </a:r>
           </a:p>
           <a:p>
             <a:pPr lvl="2"/>
             <a:r>
-              <a:rPr lang="zh-TW" altLang="en-US" smtClean="0"/>
+              <a:rPr lang="zh-TW" altLang="en-US"/>
               <a:t>第三層</a:t>
             </a:r>
           </a:p>
           <a:p>
             <a:pPr lvl="3"/>
             <a:r>
-              <a:rPr lang="zh-TW" altLang="en-US" smtClean="0"/>
+              <a:rPr lang="zh-TW" altLang="en-US"/>
               <a:t>第四層</a:t>
             </a:r>
           </a:p>
           <a:p>
             <a:pPr lvl="4"/>
             <a:r>
-              <a:rPr lang="zh-TW" altLang="en-US" smtClean="0"/>
+              <a:rPr lang="zh-TW" altLang="en-US"/>
               <a:t>第五層</a:t>
             </a:r>
-            <a:endParaRPr lang="zh-TW" altLang="en-US"/>
           </a:p>
         </p:txBody>
       </p:sp>
@@ -8569,10 +8396,9 @@
           <a:lstStyle/>
           <a:p>
             <a:r>
-              <a:rPr lang="zh-TW" altLang="en-US" smtClean="0"/>
+              <a:rPr lang="zh-TW" altLang="en-US"/>
               <a:t>按一下以編輯母片標題樣式</a:t>
             </a:r>
-            <a:endParaRPr lang="zh-TW" altLang="en-US"/>
           </a:p>
         </p:txBody>
       </p:sp>
@@ -8598,38 +8424,37 @@
           <a:p>
             <a:pPr lvl="0"/>
             <a:r>
-              <a:rPr lang="zh-TW" altLang="en-US" smtClean="0"/>
+              <a:rPr lang="zh-TW" altLang="en-US"/>
               <a:t>按一下以編輯母片文字樣式</a:t>
             </a:r>
           </a:p>
           <a:p>
             <a:pPr lvl="1"/>
             <a:r>
-              <a:rPr lang="zh-TW" altLang="en-US" smtClean="0"/>
+              <a:rPr lang="zh-TW" altLang="en-US"/>
               <a:t>第二層</a:t>
             </a:r>
           </a:p>
           <a:p>
             <a:pPr lvl="2"/>
             <a:r>
-              <a:rPr lang="zh-TW" altLang="en-US" smtClean="0"/>
+              <a:rPr lang="zh-TW" altLang="en-US"/>
               <a:t>第三層</a:t>
             </a:r>
           </a:p>
           <a:p>
             <a:pPr lvl="3"/>
             <a:r>
-              <a:rPr lang="zh-TW" altLang="en-US" smtClean="0"/>
+              <a:rPr lang="zh-TW" altLang="en-US"/>
               <a:t>第四層</a:t>
             </a:r>
           </a:p>
           <a:p>
             <a:pPr lvl="4"/>
             <a:r>
-              <a:rPr lang="zh-TW" altLang="en-US" smtClean="0"/>
+              <a:rPr lang="zh-TW" altLang="en-US"/>
               <a:t>第五層</a:t>
             </a:r>
-            <a:endParaRPr lang="zh-TW" altLang="en-US"/>
           </a:p>
         </p:txBody>
       </p:sp>
@@ -8696,10 +8521,9 @@
           </a:lstStyle>
           <a:p>
             <a:r>
-              <a:rPr lang="zh-TW" altLang="en-US" dirty="0" smtClean="0"/>
+              <a:rPr lang="zh-TW" altLang="en-US" dirty="0"/>
               <a:t>按一下以編輯母片標題樣式</a:t>
             </a:r>
-            <a:endParaRPr lang="zh-TW" altLang="en-US" dirty="0"/>
           </a:p>
         </p:txBody>
       </p:sp>
@@ -8802,38 +8626,37 @@
           <a:p>
             <a:pPr lvl="0"/>
             <a:r>
-              <a:rPr lang="zh-TW" altLang="en-US" dirty="0" smtClean="0"/>
+              <a:rPr lang="zh-TW" altLang="en-US" dirty="0"/>
               <a:t>按一下以編輯母片文字樣式</a:t>
             </a:r>
           </a:p>
           <a:p>
             <a:pPr lvl="1"/>
             <a:r>
-              <a:rPr lang="zh-TW" altLang="en-US" dirty="0" smtClean="0"/>
+              <a:rPr lang="zh-TW" altLang="en-US" dirty="0"/>
               <a:t>第二層</a:t>
             </a:r>
           </a:p>
           <a:p>
             <a:pPr lvl="2"/>
             <a:r>
-              <a:rPr lang="zh-TW" altLang="en-US" dirty="0" smtClean="0"/>
+              <a:rPr lang="zh-TW" altLang="en-US" dirty="0"/>
               <a:t>第三層</a:t>
             </a:r>
           </a:p>
           <a:p>
             <a:pPr lvl="3"/>
             <a:r>
-              <a:rPr lang="zh-TW" altLang="en-US" dirty="0" smtClean="0"/>
+              <a:rPr lang="zh-TW" altLang="en-US" dirty="0"/>
               <a:t>第四層</a:t>
             </a:r>
           </a:p>
           <a:p>
             <a:pPr lvl="4"/>
             <a:r>
-              <a:rPr lang="zh-TW" altLang="en-US" dirty="0" smtClean="0"/>
+              <a:rPr lang="zh-TW" altLang="en-US" dirty="0"/>
               <a:t>第五層</a:t>
             </a:r>
-            <a:endParaRPr lang="zh-TW" altLang="en-US" dirty="0"/>
           </a:p>
         </p:txBody>
       </p:sp>
@@ -8912,7 +8735,7 @@
           <a:lstStyle/>
           <a:p>
             <a:r>
-              <a:rPr lang="en-US" altLang="zh-TW" sz="1800" b="0" i="0" u="none" strike="noStrike" kern="1200" baseline="0" dirty="0" smtClean="0">
+              <a:rPr lang="en-US" altLang="zh-TW" sz="1800" b="0" i="0" u="none" strike="noStrike" kern="1200" baseline="0" dirty="0">
                 <a:solidFill>
                   <a:schemeClr val="accent5">
                     <a:lumMod val="40000"/>
@@ -9058,47 +8881,47 @@
               <a:lstStyle/>
               <a:p>
                 <a:pPr algn="ctr"/>
-                <a:endParaRPr lang="en-US" altLang="zh-TW" dirty="0" smtClean="0"/>
+                <a:endParaRPr lang="en-US" altLang="zh-TW" dirty="0"/>
               </a:p>
               <a:p>
                 <a:pPr algn="ctr"/>
-                <a:endParaRPr lang="en-US" altLang="zh-TW" dirty="0" smtClean="0"/>
+                <a:endParaRPr lang="en-US" altLang="zh-TW" dirty="0"/>
               </a:p>
               <a:p>
                 <a:pPr algn="ctr"/>
-                <a:endParaRPr lang="en-US" altLang="zh-TW" dirty="0" smtClean="0"/>
+                <a:endParaRPr lang="en-US" altLang="zh-TW" dirty="0"/>
               </a:p>
               <a:p>
                 <a:pPr algn="ctr"/>
-                <a:endParaRPr lang="en-US" altLang="zh-TW" dirty="0" smtClean="0"/>
+                <a:endParaRPr lang="en-US" altLang="zh-TW" dirty="0"/>
               </a:p>
               <a:p>
                 <a:pPr algn="ctr"/>
-                <a:endParaRPr lang="en-US" altLang="zh-TW" dirty="0" smtClean="0"/>
+                <a:endParaRPr lang="en-US" altLang="zh-TW" dirty="0"/>
               </a:p>
               <a:p>
                 <a:pPr algn="ctr"/>
-                <a:endParaRPr lang="en-US" altLang="zh-TW" dirty="0" smtClean="0"/>
+                <a:endParaRPr lang="en-US" altLang="zh-TW" dirty="0"/>
               </a:p>
               <a:p>
                 <a:pPr algn="ctr"/>
-                <a:endParaRPr lang="en-US" altLang="zh-TW" dirty="0" smtClean="0"/>
+                <a:endParaRPr lang="en-US" altLang="zh-TW" dirty="0"/>
               </a:p>
               <a:p>
                 <a:pPr algn="ctr"/>
-                <a:endParaRPr lang="en-US" altLang="zh-TW" dirty="0" smtClean="0"/>
+                <a:endParaRPr lang="en-US" altLang="zh-TW" dirty="0"/>
               </a:p>
               <a:p>
                 <a:pPr algn="ctr"/>
-                <a:endParaRPr lang="en-US" altLang="zh-TW" dirty="0" smtClean="0"/>
+                <a:endParaRPr lang="en-US" altLang="zh-TW" dirty="0"/>
               </a:p>
               <a:p>
                 <a:pPr algn="ctr"/>
-                <a:endParaRPr lang="en-US" altLang="zh-TW" dirty="0" smtClean="0"/>
+                <a:endParaRPr lang="en-US" altLang="zh-TW" dirty="0"/>
               </a:p>
               <a:p>
                 <a:pPr algn="ctr"/>
-                <a:endParaRPr lang="en-US" altLang="zh-TW" dirty="0" smtClean="0"/>
+                <a:endParaRPr lang="en-US" altLang="zh-TW" dirty="0"/>
               </a:p>
               <a:p>
                 <a:pPr algn="ctr"/>
@@ -9128,7 +8951,7 @@
               <a:lstStyle/>
               <a:p>
                 <a:r>
-                  <a:rPr lang="en-US" altLang="zh-TW" sz="1800" b="0" i="0" u="none" strike="noStrike" kern="1200" baseline="0" dirty="0" smtClean="0">
+                  <a:rPr lang="en-US" altLang="zh-TW" sz="1800" b="0" i="0" u="none" strike="noStrike" kern="1200" baseline="0" dirty="0">
                     <a:solidFill>
                       <a:schemeClr val="accent5">
                         <a:lumMod val="40000"/>
@@ -9295,19 +9118,19 @@
               <a:lstStyle/>
               <a:p>
                 <a:pPr algn="ctr"/>
-                <a:endParaRPr lang="en-US" altLang="zh-TW" dirty="0" smtClean="0"/>
+                <a:endParaRPr lang="en-US" altLang="zh-TW" dirty="0"/>
               </a:p>
               <a:p>
                 <a:pPr algn="ctr"/>
-                <a:endParaRPr lang="en-US" altLang="zh-TW" dirty="0" smtClean="0"/>
+                <a:endParaRPr lang="en-US" altLang="zh-TW" dirty="0"/>
               </a:p>
               <a:p>
                 <a:pPr algn="ctr"/>
-                <a:endParaRPr lang="en-US" altLang="zh-TW" dirty="0" smtClean="0"/>
+                <a:endParaRPr lang="en-US" altLang="zh-TW" dirty="0"/>
               </a:p>
               <a:p>
                 <a:pPr algn="ctr"/>
-                <a:endParaRPr lang="en-US" altLang="zh-TW" dirty="0" smtClean="0"/>
+                <a:endParaRPr lang="en-US" altLang="zh-TW" dirty="0"/>
               </a:p>
               <a:p>
                 <a:pPr algn="ctr"/>
@@ -9393,7 +9216,7 @@
             <a:p>
               <a:pPr algn="ctr"/>
               <a:r>
-                <a:rPr lang="en-US" altLang="zh-TW" sz="1200" dirty="0" smtClean="0">
+                <a:rPr lang="en-US" altLang="zh-TW" sz="1200" dirty="0">
                   <a:solidFill>
                     <a:schemeClr val="accent5">
                       <a:lumMod val="20000"/>
@@ -9407,7 +9230,7 @@
             <a:p>
               <a:pPr algn="ctr"/>
               <a:r>
-                <a:rPr lang="en-US" altLang="zh-TW" sz="2200" dirty="0" smtClean="0">
+                <a:rPr lang="en-US" altLang="zh-TW" sz="2200" dirty="0">
                   <a:solidFill>
                     <a:schemeClr val="accent5">
                       <a:lumMod val="20000"/>
@@ -9439,13 +9262,6 @@
   <p:clrMapOvr>
     <a:masterClrMapping/>
   </p:clrMapOvr>
-  <p:timing>
-    <p:tnLst>
-      <p:par>
-        <p:cTn id="1" dur="indefinite" restart="never" nodeType="tmRoot"/>
-      </p:par>
-    </p:tnLst>
-  </p:timing>
 </p:sldLayout>
 </file>
 
@@ -9524,38 +9340,37 @@
           <a:p>
             <a:pPr lvl="0"/>
             <a:r>
-              <a:rPr lang="zh-TW" altLang="en-US" dirty="0" smtClean="0"/>
+              <a:rPr lang="zh-TW" altLang="en-US" dirty="0"/>
               <a:t>按一下以編輯母片文字樣式</a:t>
             </a:r>
           </a:p>
           <a:p>
             <a:pPr lvl="1"/>
             <a:r>
-              <a:rPr lang="zh-TW" altLang="en-US" dirty="0" smtClean="0"/>
+              <a:rPr lang="zh-TW" altLang="en-US" dirty="0"/>
               <a:t>第二層</a:t>
             </a:r>
           </a:p>
           <a:p>
             <a:pPr lvl="2"/>
             <a:r>
-              <a:rPr lang="zh-TW" altLang="en-US" dirty="0" smtClean="0"/>
+              <a:rPr lang="zh-TW" altLang="en-US" dirty="0"/>
               <a:t>第三層</a:t>
             </a:r>
           </a:p>
           <a:p>
             <a:pPr lvl="3"/>
             <a:r>
-              <a:rPr lang="zh-TW" altLang="en-US" dirty="0" smtClean="0"/>
+              <a:rPr lang="zh-TW" altLang="en-US" dirty="0"/>
               <a:t>第四層</a:t>
             </a:r>
           </a:p>
           <a:p>
             <a:pPr lvl="4"/>
             <a:r>
-              <a:rPr lang="zh-TW" altLang="en-US" dirty="0" smtClean="0"/>
+              <a:rPr lang="zh-TW" altLang="en-US" dirty="0"/>
               <a:t>第五層</a:t>
             </a:r>
-            <a:endParaRPr lang="zh-TW" altLang="en-US" dirty="0"/>
           </a:p>
         </p:txBody>
       </p:sp>
@@ -9683,7 +9498,7 @@
           <a:lstStyle/>
           <a:p>
             <a:r>
-              <a:rPr lang="en-US" altLang="zh-TW" sz="1800" b="0" i="0" u="none" strike="noStrike" kern="1200" baseline="0" dirty="0" smtClean="0">
+              <a:rPr lang="en-US" altLang="zh-TW" sz="1800" b="0" i="0" u="none" strike="noStrike" kern="1200" baseline="0" dirty="0">
                 <a:solidFill>
                   <a:schemeClr val="accent5">
                     <a:lumMod val="40000"/>
@@ -9780,7 +9595,7 @@
           <a:p>
             <a:pPr algn="ctr"/>
             <a:r>
-              <a:rPr lang="en-US" altLang="zh-TW" sz="1400" dirty="0" smtClean="0">
+              <a:rPr lang="en-US" altLang="zh-TW" sz="1400" dirty="0">
                 <a:solidFill>
                   <a:schemeClr val="accent5">
                     <a:lumMod val="20000"/>
@@ -9794,7 +9609,7 @@
           <a:p>
             <a:pPr algn="ctr"/>
             <a:r>
-              <a:rPr lang="en-US" altLang="zh-TW" sz="2400" dirty="0" smtClean="0">
+              <a:rPr lang="en-US" altLang="zh-TW" sz="2400" dirty="0">
                 <a:solidFill>
                   <a:schemeClr val="accent5">
                     <a:lumMod val="20000"/>
@@ -9986,47 +9801,47 @@
               <a:lstStyle/>
               <a:p>
                 <a:pPr algn="ctr"/>
-                <a:endParaRPr lang="en-US" altLang="zh-TW" dirty="0" smtClean="0"/>
+                <a:endParaRPr lang="en-US" altLang="zh-TW" dirty="0"/>
               </a:p>
               <a:p>
                 <a:pPr algn="ctr"/>
-                <a:endParaRPr lang="en-US" altLang="zh-TW" dirty="0" smtClean="0"/>
+                <a:endParaRPr lang="en-US" altLang="zh-TW" dirty="0"/>
               </a:p>
               <a:p>
                 <a:pPr algn="ctr"/>
-                <a:endParaRPr lang="en-US" altLang="zh-TW" dirty="0" smtClean="0"/>
+                <a:endParaRPr lang="en-US" altLang="zh-TW" dirty="0"/>
               </a:p>
               <a:p>
                 <a:pPr algn="ctr"/>
-                <a:endParaRPr lang="en-US" altLang="zh-TW" dirty="0" smtClean="0"/>
+                <a:endParaRPr lang="en-US" altLang="zh-TW" dirty="0"/>
               </a:p>
               <a:p>
                 <a:pPr algn="ctr"/>
-                <a:endParaRPr lang="en-US" altLang="zh-TW" dirty="0" smtClean="0"/>
+                <a:endParaRPr lang="en-US" altLang="zh-TW" dirty="0"/>
               </a:p>
               <a:p>
                 <a:pPr algn="ctr"/>
-                <a:endParaRPr lang="en-US" altLang="zh-TW" dirty="0" smtClean="0"/>
+                <a:endParaRPr lang="en-US" altLang="zh-TW" dirty="0"/>
               </a:p>
               <a:p>
                 <a:pPr algn="ctr"/>
-                <a:endParaRPr lang="en-US" altLang="zh-TW" dirty="0" smtClean="0"/>
+                <a:endParaRPr lang="en-US" altLang="zh-TW" dirty="0"/>
               </a:p>
               <a:p>
                 <a:pPr algn="ctr"/>
-                <a:endParaRPr lang="en-US" altLang="zh-TW" dirty="0" smtClean="0"/>
+                <a:endParaRPr lang="en-US" altLang="zh-TW" dirty="0"/>
               </a:p>
               <a:p>
                 <a:pPr algn="ctr"/>
-                <a:endParaRPr lang="en-US" altLang="zh-TW" dirty="0" smtClean="0"/>
+                <a:endParaRPr lang="en-US" altLang="zh-TW" dirty="0"/>
               </a:p>
               <a:p>
                 <a:pPr algn="ctr"/>
-                <a:endParaRPr lang="en-US" altLang="zh-TW" dirty="0" smtClean="0"/>
+                <a:endParaRPr lang="en-US" altLang="zh-TW" dirty="0"/>
               </a:p>
               <a:p>
                 <a:pPr algn="ctr"/>
-                <a:endParaRPr lang="en-US" altLang="zh-TW" dirty="0" smtClean="0"/>
+                <a:endParaRPr lang="en-US" altLang="zh-TW" dirty="0"/>
               </a:p>
               <a:p>
                 <a:pPr algn="ctr"/>
@@ -10056,7 +9871,7 @@
               <a:lstStyle/>
               <a:p>
                 <a:r>
-                  <a:rPr lang="en-US" altLang="zh-TW" sz="1800" b="0" i="0" u="none" strike="noStrike" kern="1200" baseline="0" dirty="0" smtClean="0">
+                  <a:rPr lang="en-US" altLang="zh-TW" sz="1800" b="0" i="0" u="none" strike="noStrike" kern="1200" baseline="0" dirty="0">
                     <a:solidFill>
                       <a:schemeClr val="accent5">
                         <a:lumMod val="40000"/>
@@ -10223,19 +10038,19 @@
               <a:lstStyle/>
               <a:p>
                 <a:pPr algn="ctr"/>
-                <a:endParaRPr lang="en-US" altLang="zh-TW" dirty="0" smtClean="0"/>
+                <a:endParaRPr lang="en-US" altLang="zh-TW" dirty="0"/>
               </a:p>
               <a:p>
                 <a:pPr algn="ctr"/>
-                <a:endParaRPr lang="en-US" altLang="zh-TW" dirty="0" smtClean="0"/>
+                <a:endParaRPr lang="en-US" altLang="zh-TW" dirty="0"/>
               </a:p>
               <a:p>
                 <a:pPr algn="ctr"/>
-                <a:endParaRPr lang="en-US" altLang="zh-TW" dirty="0" smtClean="0"/>
+                <a:endParaRPr lang="en-US" altLang="zh-TW" dirty="0"/>
               </a:p>
               <a:p>
                 <a:pPr algn="ctr"/>
-                <a:endParaRPr lang="en-US" altLang="zh-TW" dirty="0" smtClean="0"/>
+                <a:endParaRPr lang="en-US" altLang="zh-TW" dirty="0"/>
               </a:p>
               <a:p>
                 <a:pPr algn="ctr"/>
@@ -10321,7 +10136,7 @@
             <a:p>
               <a:pPr algn="ctr"/>
               <a:r>
-                <a:rPr lang="en-US" altLang="zh-TW" sz="1200" dirty="0" smtClean="0">
+                <a:rPr lang="en-US" altLang="zh-TW" sz="1200" dirty="0">
                   <a:solidFill>
                     <a:schemeClr val="accent5">
                       <a:lumMod val="20000"/>
@@ -10335,7 +10150,7 @@
             <a:p>
               <a:pPr algn="ctr"/>
               <a:r>
-                <a:rPr lang="en-US" altLang="zh-TW" sz="2200" dirty="0" smtClean="0">
+                <a:rPr lang="en-US" altLang="zh-TW" sz="2200" dirty="0">
                   <a:solidFill>
                     <a:schemeClr val="accent5">
                       <a:lumMod val="20000"/>
@@ -10511,7 +10326,7 @@
           <a:lstStyle/>
           <a:p>
             <a:r>
-              <a:rPr lang="en-US" altLang="zh-TW" sz="1800" b="0" i="0" u="none" strike="noStrike" kern="1200" baseline="0" dirty="0" smtClean="0">
+              <a:rPr lang="en-US" altLang="zh-TW" sz="1800" b="0" i="0" u="none" strike="noStrike" kern="1200" baseline="0" dirty="0">
                 <a:solidFill>
                   <a:schemeClr val="accent5">
                     <a:lumMod val="40000"/>
@@ -10608,7 +10423,7 @@
           <a:p>
             <a:pPr algn="ctr"/>
             <a:r>
-              <a:rPr lang="en-US" altLang="zh-TW" sz="1400" dirty="0" smtClean="0">
+              <a:rPr lang="en-US" altLang="zh-TW" sz="1400" dirty="0">
                 <a:solidFill>
                   <a:schemeClr val="accent5">
                     <a:lumMod val="20000"/>
@@ -10622,7 +10437,7 @@
           <a:p>
             <a:pPr algn="ctr"/>
             <a:r>
-              <a:rPr lang="en-US" altLang="zh-TW" sz="2400" dirty="0" smtClean="0">
+              <a:rPr lang="en-US" altLang="zh-TW" sz="2400" dirty="0">
                 <a:solidFill>
                   <a:schemeClr val="accent5">
                     <a:lumMod val="20000"/>
@@ -10802,38 +10617,37 @@
           <a:p>
             <a:pPr lvl="0"/>
             <a:r>
-              <a:rPr lang="zh-TW" altLang="en-US" dirty="0" smtClean="0"/>
+              <a:rPr lang="zh-TW" altLang="en-US" dirty="0"/>
               <a:t>按一下以編輯母片文字樣式</a:t>
             </a:r>
           </a:p>
           <a:p>
             <a:pPr lvl="1"/>
             <a:r>
-              <a:rPr lang="zh-TW" altLang="en-US" dirty="0" smtClean="0"/>
+              <a:rPr lang="zh-TW" altLang="en-US" dirty="0"/>
               <a:t>第二層</a:t>
             </a:r>
           </a:p>
           <a:p>
             <a:pPr lvl="2"/>
             <a:r>
-              <a:rPr lang="zh-TW" altLang="en-US" dirty="0" smtClean="0"/>
+              <a:rPr lang="zh-TW" altLang="en-US" dirty="0"/>
               <a:t>第三層</a:t>
             </a:r>
           </a:p>
           <a:p>
             <a:pPr lvl="3"/>
             <a:r>
-              <a:rPr lang="zh-TW" altLang="en-US" dirty="0" smtClean="0"/>
+              <a:rPr lang="zh-TW" altLang="en-US" dirty="0"/>
               <a:t>第四層</a:t>
             </a:r>
           </a:p>
           <a:p>
             <a:pPr lvl="4"/>
             <a:r>
-              <a:rPr lang="zh-TW" altLang="en-US" dirty="0" smtClean="0"/>
+              <a:rPr lang="zh-TW" altLang="en-US" dirty="0"/>
               <a:t>第五層</a:t>
             </a:r>
-            <a:endParaRPr lang="zh-TW" altLang="en-US" dirty="0"/>
           </a:p>
         </p:txBody>
       </p:sp>
@@ -10910,47 +10724,47 @@
               <a:lstStyle/>
               <a:p>
                 <a:pPr algn="ctr"/>
-                <a:endParaRPr lang="en-US" altLang="zh-TW" dirty="0" smtClean="0"/>
+                <a:endParaRPr lang="en-US" altLang="zh-TW" dirty="0"/>
               </a:p>
               <a:p>
                 <a:pPr algn="ctr"/>
-                <a:endParaRPr lang="en-US" altLang="zh-TW" dirty="0" smtClean="0"/>
+                <a:endParaRPr lang="en-US" altLang="zh-TW" dirty="0"/>
               </a:p>
               <a:p>
                 <a:pPr algn="ctr"/>
-                <a:endParaRPr lang="en-US" altLang="zh-TW" dirty="0" smtClean="0"/>
+                <a:endParaRPr lang="en-US" altLang="zh-TW" dirty="0"/>
               </a:p>
               <a:p>
                 <a:pPr algn="ctr"/>
-                <a:endParaRPr lang="en-US" altLang="zh-TW" dirty="0" smtClean="0"/>
+                <a:endParaRPr lang="en-US" altLang="zh-TW" dirty="0"/>
               </a:p>
               <a:p>
                 <a:pPr algn="ctr"/>
-                <a:endParaRPr lang="en-US" altLang="zh-TW" dirty="0" smtClean="0"/>
+                <a:endParaRPr lang="en-US" altLang="zh-TW" dirty="0"/>
               </a:p>
               <a:p>
                 <a:pPr algn="ctr"/>
-                <a:endParaRPr lang="en-US" altLang="zh-TW" dirty="0" smtClean="0"/>
+                <a:endParaRPr lang="en-US" altLang="zh-TW" dirty="0"/>
               </a:p>
               <a:p>
                 <a:pPr algn="ctr"/>
-                <a:endParaRPr lang="en-US" altLang="zh-TW" dirty="0" smtClean="0"/>
+                <a:endParaRPr lang="en-US" altLang="zh-TW" dirty="0"/>
               </a:p>
               <a:p>
                 <a:pPr algn="ctr"/>
-                <a:endParaRPr lang="en-US" altLang="zh-TW" dirty="0" smtClean="0"/>
+                <a:endParaRPr lang="en-US" altLang="zh-TW" dirty="0"/>
               </a:p>
               <a:p>
                 <a:pPr algn="ctr"/>
-                <a:endParaRPr lang="en-US" altLang="zh-TW" dirty="0" smtClean="0"/>
+                <a:endParaRPr lang="en-US" altLang="zh-TW" dirty="0"/>
               </a:p>
               <a:p>
                 <a:pPr algn="ctr"/>
-                <a:endParaRPr lang="en-US" altLang="zh-TW" dirty="0" smtClean="0"/>
+                <a:endParaRPr lang="en-US" altLang="zh-TW" dirty="0"/>
               </a:p>
               <a:p>
                 <a:pPr algn="ctr"/>
-                <a:endParaRPr lang="en-US" altLang="zh-TW" dirty="0" smtClean="0"/>
+                <a:endParaRPr lang="en-US" altLang="zh-TW" dirty="0"/>
               </a:p>
               <a:p>
                 <a:pPr algn="ctr"/>
@@ -10980,7 +10794,7 @@
               <a:lstStyle/>
               <a:p>
                 <a:r>
-                  <a:rPr lang="en-US" altLang="zh-TW" sz="1800" b="0" i="0" u="none" strike="noStrike" kern="1200" baseline="0" dirty="0" smtClean="0">
+                  <a:rPr lang="en-US" altLang="zh-TW" sz="1800" b="0" i="0" u="none" strike="noStrike" kern="1200" baseline="0" dirty="0">
                     <a:solidFill>
                       <a:schemeClr val="accent5">
                         <a:lumMod val="40000"/>
@@ -11147,19 +10961,19 @@
               <a:lstStyle/>
               <a:p>
                 <a:pPr algn="ctr"/>
-                <a:endParaRPr lang="en-US" altLang="zh-TW" dirty="0" smtClean="0"/>
+                <a:endParaRPr lang="en-US" altLang="zh-TW" dirty="0"/>
               </a:p>
               <a:p>
                 <a:pPr algn="ctr"/>
-                <a:endParaRPr lang="en-US" altLang="zh-TW" dirty="0" smtClean="0"/>
+                <a:endParaRPr lang="en-US" altLang="zh-TW" dirty="0"/>
               </a:p>
               <a:p>
                 <a:pPr algn="ctr"/>
-                <a:endParaRPr lang="en-US" altLang="zh-TW" dirty="0" smtClean="0"/>
+                <a:endParaRPr lang="en-US" altLang="zh-TW" dirty="0"/>
               </a:p>
               <a:p>
                 <a:pPr algn="ctr"/>
-                <a:endParaRPr lang="en-US" altLang="zh-TW" dirty="0" smtClean="0"/>
+                <a:endParaRPr lang="en-US" altLang="zh-TW" dirty="0"/>
               </a:p>
               <a:p>
                 <a:pPr algn="ctr"/>
@@ -11245,7 +11059,7 @@
             <a:p>
               <a:pPr algn="ctr"/>
               <a:r>
-                <a:rPr lang="en-US" altLang="zh-TW" sz="1200" dirty="0" smtClean="0">
+                <a:rPr lang="en-US" altLang="zh-TW" sz="1200" dirty="0">
                   <a:solidFill>
                     <a:schemeClr val="accent5">
                       <a:lumMod val="20000"/>
@@ -11259,7 +11073,7 @@
             <a:p>
               <a:pPr algn="ctr"/>
               <a:r>
-                <a:rPr lang="en-US" altLang="zh-TW" sz="2200" dirty="0" smtClean="0">
+                <a:rPr lang="en-US" altLang="zh-TW" sz="2200" dirty="0">
                   <a:solidFill>
                     <a:schemeClr val="accent5">
                       <a:lumMod val="20000"/>
@@ -11778,7 +11592,7 @@
           <a:lstStyle/>
           <a:p>
             <a:r>
-              <a:rPr lang="en-US" altLang="zh-TW" b="1" dirty="0" smtClean="0">
+              <a:rPr lang="en-US" altLang="zh-TW" b="1" dirty="0">
                 <a:solidFill>
                   <a:srgbClr val="C00000"/>
                 </a:solidFill>
@@ -11788,7 +11602,7 @@
               <a:t>IT</a:t>
             </a:r>
             <a:r>
-              <a:rPr lang="zh-TW" altLang="en-US" b="1" dirty="0" smtClean="0">
+              <a:rPr lang="zh-TW" altLang="en-US" b="1" dirty="0">
                 <a:solidFill>
                   <a:srgbClr val="C00000"/>
                 </a:solidFill>
@@ -11797,7 +11611,7 @@
               </a:rPr>
               <a:t>　專    家    </a:t>
             </a:r>
-            <a:endParaRPr lang="en-US" altLang="zh-TW" b="1" dirty="0" smtClean="0">
+            <a:endParaRPr lang="en-US" altLang="zh-TW" b="1" dirty="0">
               <a:solidFill>
                 <a:srgbClr val="C00000"/>
               </a:solidFill>
@@ -11959,7 +11773,7 @@
               <a:lstStyle/>
               <a:p>
                 <a:r>
-                  <a:rPr lang="en-US" altLang="zh-TW" sz="1800" b="0" i="0" u="none" strike="noStrike" kern="1200" baseline="0" dirty="0" smtClean="0">
+                  <a:rPr lang="en-US" altLang="zh-TW" sz="1800" b="0" i="0" u="none" strike="noStrike" kern="1200" baseline="0" dirty="0">
                     <a:solidFill>
                       <a:schemeClr val="accent5">
                         <a:lumMod val="40000"/>
@@ -12155,7 +11969,7 @@
             <a:p>
               <a:pPr algn="ctr"/>
               <a:r>
-                <a:rPr lang="en-US" altLang="zh-TW" sz="1200" dirty="0" smtClean="0">
+                <a:rPr lang="en-US" altLang="zh-TW" sz="1200" dirty="0">
                   <a:solidFill>
                     <a:schemeClr val="accent5">
                       <a:lumMod val="20000"/>
@@ -12169,7 +11983,7 @@
             <a:p>
               <a:pPr algn="ctr"/>
               <a:r>
-                <a:rPr lang="en-US" altLang="zh-TW" sz="2000" dirty="0" smtClean="0">
+                <a:rPr lang="en-US" altLang="zh-TW" sz="2000" dirty="0">
                   <a:solidFill>
                     <a:schemeClr val="accent5">
                       <a:lumMod val="20000"/>
@@ -12401,7 +12215,7 @@
           <a:lstStyle/>
           <a:p>
             <a:r>
-              <a:rPr lang="en-US" altLang="zh-TW" sz="1800" b="0" i="0" u="none" strike="noStrike" kern="1200" baseline="0" dirty="0" smtClean="0">
+              <a:rPr lang="en-US" altLang="zh-TW" sz="1800" b="0" i="0" u="none" strike="noStrike" kern="1200" baseline="0" dirty="0">
                 <a:solidFill>
                   <a:schemeClr val="accent5">
                     <a:lumMod val="40000"/>
@@ -12498,7 +12312,7 @@
           <a:p>
             <a:pPr algn="ctr"/>
             <a:r>
-              <a:rPr lang="en-US" altLang="zh-TW" sz="1400" dirty="0" smtClean="0">
+              <a:rPr lang="en-US" altLang="zh-TW" sz="1400" dirty="0">
                 <a:solidFill>
                   <a:schemeClr val="accent5">
                     <a:lumMod val="20000"/>
@@ -12512,7 +12326,7 @@
           <a:p>
             <a:pPr algn="ctr"/>
             <a:r>
-              <a:rPr lang="en-US" altLang="zh-TW" sz="2400" dirty="0" smtClean="0">
+              <a:rPr lang="en-US" altLang="zh-TW" sz="2400" dirty="0">
                 <a:solidFill>
                   <a:schemeClr val="accent5">
                     <a:lumMod val="20000"/>
@@ -12770,38 +12584,37 @@
           <a:p>
             <a:pPr lvl="0"/>
             <a:r>
-              <a:rPr lang="zh-TW" altLang="en-US" dirty="0" smtClean="0"/>
+              <a:rPr lang="zh-TW" altLang="en-US" dirty="0"/>
               <a:t>按一下以編輯母片文字樣式</a:t>
             </a:r>
           </a:p>
           <a:p>
             <a:pPr lvl="1"/>
             <a:r>
-              <a:rPr lang="zh-TW" altLang="en-US" dirty="0" smtClean="0"/>
+              <a:rPr lang="zh-TW" altLang="en-US" dirty="0"/>
               <a:t>第二層</a:t>
             </a:r>
           </a:p>
           <a:p>
             <a:pPr lvl="2"/>
             <a:r>
-              <a:rPr lang="zh-TW" altLang="en-US" dirty="0" smtClean="0"/>
+              <a:rPr lang="zh-TW" altLang="en-US" dirty="0"/>
               <a:t>第三層</a:t>
             </a:r>
           </a:p>
           <a:p>
             <a:pPr lvl="3"/>
             <a:r>
-              <a:rPr lang="zh-TW" altLang="en-US" dirty="0" smtClean="0"/>
+              <a:rPr lang="zh-TW" altLang="en-US" dirty="0"/>
               <a:t>第四層</a:t>
             </a:r>
           </a:p>
           <a:p>
             <a:pPr lvl="4"/>
             <a:r>
-              <a:rPr lang="zh-TW" altLang="en-US" dirty="0" smtClean="0"/>
+              <a:rPr lang="zh-TW" altLang="en-US" dirty="0"/>
               <a:t>第五層</a:t>
             </a:r>
-            <a:endParaRPr lang="zh-TW" altLang="en-US" dirty="0"/>
           </a:p>
         </p:txBody>
       </p:sp>
@@ -12957,7 +12770,7 @@
               <a:lstStyle/>
               <a:p>
                 <a:r>
-                  <a:rPr lang="en-US" altLang="zh-TW" sz="1800" b="0" i="0" u="none" strike="noStrike" kern="1200" baseline="0" dirty="0" smtClean="0">
+                  <a:rPr lang="en-US" altLang="zh-TW" sz="1800" b="0" i="0" u="none" strike="noStrike" kern="1200" baseline="0" dirty="0">
                     <a:solidFill>
                       <a:schemeClr val="accent5">
                         <a:lumMod val="40000"/>
@@ -13153,7 +12966,7 @@
             <a:p>
               <a:pPr algn="ctr"/>
               <a:r>
-                <a:rPr lang="en-US" altLang="zh-TW" sz="1200" dirty="0" smtClean="0">
+                <a:rPr lang="en-US" altLang="zh-TW" sz="1200" dirty="0">
                   <a:solidFill>
                     <a:schemeClr val="accent5">
                       <a:lumMod val="20000"/>
@@ -13167,7 +12980,7 @@
             <a:p>
               <a:pPr algn="ctr"/>
               <a:r>
-                <a:rPr lang="en-US" altLang="zh-TW" sz="2000" dirty="0" smtClean="0">
+                <a:rPr lang="en-US" altLang="zh-TW" sz="2000" dirty="0">
                   <a:solidFill>
                     <a:schemeClr val="accent5">
                       <a:lumMod val="20000"/>
@@ -13337,7 +13150,7 @@
             <a:lstStyle/>
             <a:p>
               <a:r>
-                <a:rPr lang="zh-TW" altLang="en-US" sz="2400" b="1" dirty="0" smtClean="0">
+                <a:rPr lang="zh-TW" altLang="en-US" sz="2400" b="1" dirty="0">
                   <a:solidFill>
                     <a:srgbClr val="C00000"/>
                   </a:solidFill>
@@ -13346,7 +13159,7 @@
                 </a:rPr>
                 <a:t>資    訊    專    欄</a:t>
               </a:r>
-              <a:endParaRPr lang="en-US" altLang="zh-TW" sz="2400" b="1" dirty="0" smtClean="0">
+              <a:endParaRPr lang="en-US" altLang="zh-TW" sz="2400" b="1" dirty="0">
                 <a:solidFill>
                   <a:srgbClr val="C00000"/>
                 </a:solidFill>
@@ -13412,10 +13225,9 @@
           </a:lstStyle>
           <a:p>
             <a:r>
-              <a:rPr lang="zh-TW" altLang="en-US" smtClean="0"/>
+              <a:rPr lang="zh-TW" altLang="en-US"/>
               <a:t>按一下以編輯母片標題樣式</a:t>
             </a:r>
-            <a:endParaRPr lang="zh-TW" altLang="en-US"/>
           </a:p>
         </p:txBody>
       </p:sp>
@@ -13532,7 +13344,7 @@
           <a:p>
             <a:pPr lvl="0"/>
             <a:r>
-              <a:rPr lang="zh-TW" altLang="en-US" smtClean="0"/>
+              <a:rPr lang="zh-TW" altLang="en-US"/>
               <a:t>按一下以編輯母片文字樣式</a:t>
             </a:r>
           </a:p>
@@ -13584,10 +13396,9 @@
           <a:lstStyle/>
           <a:p>
             <a:r>
-              <a:rPr lang="zh-TW" altLang="en-US" smtClean="0"/>
+              <a:rPr lang="zh-TW" altLang="en-US"/>
               <a:t>按一下以編輯母片標題樣式</a:t>
             </a:r>
-            <a:endParaRPr lang="zh-TW" altLang="en-US"/>
           </a:p>
         </p:txBody>
       </p:sp>
@@ -13641,38 +13452,37 @@
           <a:p>
             <a:pPr lvl="0"/>
             <a:r>
-              <a:rPr lang="zh-TW" altLang="en-US" smtClean="0"/>
+              <a:rPr lang="zh-TW" altLang="en-US"/>
               <a:t>按一下以編輯母片文字樣式</a:t>
             </a:r>
           </a:p>
           <a:p>
             <a:pPr lvl="1"/>
             <a:r>
-              <a:rPr lang="zh-TW" altLang="en-US" smtClean="0"/>
+              <a:rPr lang="zh-TW" altLang="en-US"/>
               <a:t>第二層</a:t>
             </a:r>
           </a:p>
           <a:p>
             <a:pPr lvl="2"/>
             <a:r>
-              <a:rPr lang="zh-TW" altLang="en-US" smtClean="0"/>
+              <a:rPr lang="zh-TW" altLang="en-US"/>
               <a:t>第三層</a:t>
             </a:r>
           </a:p>
           <a:p>
             <a:pPr lvl="3"/>
             <a:r>
-              <a:rPr lang="zh-TW" altLang="en-US" smtClean="0"/>
+              <a:rPr lang="zh-TW" altLang="en-US"/>
               <a:t>第四層</a:t>
             </a:r>
           </a:p>
           <a:p>
             <a:pPr lvl="4"/>
             <a:r>
-              <a:rPr lang="zh-TW" altLang="en-US" smtClean="0"/>
+              <a:rPr lang="zh-TW" altLang="en-US"/>
               <a:t>第五層</a:t>
             </a:r>
-            <a:endParaRPr lang="zh-TW" altLang="en-US"/>
           </a:p>
         </p:txBody>
       </p:sp>
@@ -13726,38 +13536,37 @@
           <a:p>
             <a:pPr lvl="0"/>
             <a:r>
-              <a:rPr lang="zh-TW" altLang="en-US" smtClean="0"/>
+              <a:rPr lang="zh-TW" altLang="en-US"/>
               <a:t>按一下以編輯母片文字樣式</a:t>
             </a:r>
           </a:p>
           <a:p>
             <a:pPr lvl="1"/>
             <a:r>
-              <a:rPr lang="zh-TW" altLang="en-US" smtClean="0"/>
+              <a:rPr lang="zh-TW" altLang="en-US"/>
               <a:t>第二層</a:t>
             </a:r>
           </a:p>
           <a:p>
             <a:pPr lvl="2"/>
             <a:r>
-              <a:rPr lang="zh-TW" altLang="en-US" smtClean="0"/>
+              <a:rPr lang="zh-TW" altLang="en-US"/>
               <a:t>第三層</a:t>
             </a:r>
           </a:p>
           <a:p>
             <a:pPr lvl="3"/>
             <a:r>
-              <a:rPr lang="zh-TW" altLang="en-US" smtClean="0"/>
+              <a:rPr lang="zh-TW" altLang="en-US"/>
               <a:t>第四層</a:t>
             </a:r>
           </a:p>
           <a:p>
             <a:pPr lvl="4"/>
             <a:r>
-              <a:rPr lang="zh-TW" altLang="en-US" smtClean="0"/>
+              <a:rPr lang="zh-TW" altLang="en-US"/>
               <a:t>第五層</a:t>
             </a:r>
-            <a:endParaRPr lang="zh-TW" altLang="en-US"/>
           </a:p>
         </p:txBody>
       </p:sp>
@@ -13811,10 +13620,9 @@
           </a:lstStyle>
           <a:p>
             <a:r>
-              <a:rPr lang="zh-TW" altLang="en-US" smtClean="0"/>
+              <a:rPr lang="zh-TW" altLang="en-US"/>
               <a:t>按一下以編輯母片標題樣式</a:t>
             </a:r>
-            <a:endParaRPr lang="zh-TW" altLang="en-US"/>
           </a:p>
         </p:txBody>
       </p:sp>
@@ -13877,7 +13685,7 @@
           <a:p>
             <a:pPr lvl="0"/>
             <a:r>
-              <a:rPr lang="zh-TW" altLang="en-US" smtClean="0"/>
+              <a:rPr lang="zh-TW" altLang="en-US"/>
               <a:t>按一下以編輯母片文字樣式</a:t>
             </a:r>
           </a:p>
@@ -13933,38 +13741,37 @@
           <a:p>
             <a:pPr lvl="0"/>
             <a:r>
-              <a:rPr lang="zh-TW" altLang="en-US" smtClean="0"/>
+              <a:rPr lang="zh-TW" altLang="en-US"/>
               <a:t>按一下以編輯母片文字樣式</a:t>
             </a:r>
           </a:p>
           <a:p>
             <a:pPr lvl="1"/>
             <a:r>
-              <a:rPr lang="zh-TW" altLang="en-US" smtClean="0"/>
+              <a:rPr lang="zh-TW" altLang="en-US"/>
               <a:t>第二層</a:t>
             </a:r>
           </a:p>
           <a:p>
             <a:pPr lvl="2"/>
             <a:r>
-              <a:rPr lang="zh-TW" altLang="en-US" smtClean="0"/>
+              <a:rPr lang="zh-TW" altLang="en-US"/>
               <a:t>第三層</a:t>
             </a:r>
           </a:p>
           <a:p>
             <a:pPr lvl="3"/>
             <a:r>
-              <a:rPr lang="zh-TW" altLang="en-US" smtClean="0"/>
+              <a:rPr lang="zh-TW" altLang="en-US"/>
               <a:t>第四層</a:t>
             </a:r>
           </a:p>
           <a:p>
             <a:pPr lvl="4"/>
             <a:r>
-              <a:rPr lang="zh-TW" altLang="en-US" smtClean="0"/>
+              <a:rPr lang="zh-TW" altLang="en-US"/>
               <a:t>第五層</a:t>
             </a:r>
-            <a:endParaRPr lang="zh-TW" altLang="en-US"/>
           </a:p>
         </p:txBody>
       </p:sp>
@@ -14027,7 +13834,7 @@
           <a:p>
             <a:pPr lvl="0"/>
             <a:r>
-              <a:rPr lang="zh-TW" altLang="en-US" smtClean="0"/>
+              <a:rPr lang="zh-TW" altLang="en-US"/>
               <a:t>按一下以編輯母片文字樣式</a:t>
             </a:r>
           </a:p>
@@ -14083,38 +13890,37 @@
           <a:p>
             <a:pPr lvl="0"/>
             <a:r>
-              <a:rPr lang="zh-TW" altLang="en-US" smtClean="0"/>
+              <a:rPr lang="zh-TW" altLang="en-US"/>
               <a:t>按一下以編輯母片文字樣式</a:t>
             </a:r>
           </a:p>
           <a:p>
             <a:pPr lvl="1"/>
             <a:r>
-              <a:rPr lang="zh-TW" altLang="en-US" smtClean="0"/>
+              <a:rPr lang="zh-TW" altLang="en-US"/>
               <a:t>第二層</a:t>
             </a:r>
           </a:p>
           <a:p>
             <a:pPr lvl="2"/>
             <a:r>
-              <a:rPr lang="zh-TW" altLang="en-US" smtClean="0"/>
+              <a:rPr lang="zh-TW" altLang="en-US"/>
               <a:t>第三層</a:t>
             </a:r>
           </a:p>
           <a:p>
             <a:pPr lvl="3"/>
             <a:r>
-              <a:rPr lang="zh-TW" altLang="en-US" smtClean="0"/>
+              <a:rPr lang="zh-TW" altLang="en-US"/>
               <a:t>第四層</a:t>
             </a:r>
           </a:p>
           <a:p>
             <a:pPr lvl="4"/>
             <a:r>
-              <a:rPr lang="zh-TW" altLang="en-US" smtClean="0"/>
+              <a:rPr lang="zh-TW" altLang="en-US"/>
               <a:t>第五層</a:t>
             </a:r>
-            <a:endParaRPr lang="zh-TW" altLang="en-US"/>
           </a:p>
         </p:txBody>
       </p:sp>
@@ -14179,10 +13985,9 @@
           <a:lstStyle/>
           <a:p>
             <a:r>
-              <a:rPr lang="zh-TW" altLang="en-US" smtClean="0"/>
+              <a:rPr lang="zh-TW" altLang="en-US"/>
               <a:t>按一下以編輯母片標題樣式</a:t>
             </a:r>
-            <a:endParaRPr lang="zh-TW" altLang="en-US"/>
           </a:p>
         </p:txBody>
       </p:sp>
@@ -14213,38 +14018,37 @@
           <a:p>
             <a:pPr lvl="0"/>
             <a:r>
-              <a:rPr lang="zh-TW" altLang="en-US" smtClean="0"/>
+              <a:rPr lang="zh-TW" altLang="en-US"/>
               <a:t>按一下以編輯母片文字樣式</a:t>
             </a:r>
           </a:p>
           <a:p>
             <a:pPr lvl="1"/>
             <a:r>
-              <a:rPr lang="zh-TW" altLang="en-US" smtClean="0"/>
+              <a:rPr lang="zh-TW" altLang="en-US"/>
               <a:t>第二層</a:t>
             </a:r>
           </a:p>
           <a:p>
             <a:pPr lvl="2"/>
             <a:r>
-              <a:rPr lang="zh-TW" altLang="en-US" smtClean="0"/>
+              <a:rPr lang="zh-TW" altLang="en-US"/>
               <a:t>第三層</a:t>
             </a:r>
           </a:p>
           <a:p>
             <a:pPr lvl="3"/>
             <a:r>
-              <a:rPr lang="zh-TW" altLang="en-US" smtClean="0"/>
+              <a:rPr lang="zh-TW" altLang="en-US"/>
               <a:t>第四層</a:t>
             </a:r>
           </a:p>
           <a:p>
             <a:pPr lvl="4"/>
             <a:r>
-              <a:rPr lang="zh-TW" altLang="en-US" smtClean="0"/>
+              <a:rPr lang="zh-TW" altLang="en-US"/>
               <a:t>第五層</a:t>
             </a:r>
-            <a:endParaRPr lang="zh-TW" altLang="en-US"/>
           </a:p>
         </p:txBody>
       </p:sp>
@@ -15027,10 +14831,9 @@
           <a:lstStyle/>
           <a:p>
             <a:r>
-              <a:rPr lang="zh-TW" altLang="en-US" dirty="0" smtClean="0"/>
+              <a:rPr lang="zh-TW" altLang="en-US" dirty="0"/>
               <a:t>資料結構</a:t>
             </a:r>
-            <a:endParaRPr lang="zh-TW" altLang="en-US" dirty="0"/>
           </a:p>
         </p:txBody>
       </p:sp>
@@ -15061,7 +14864,7 @@
               </a:lnSpc>
             </a:pPr>
             <a:r>
-              <a:rPr lang="en-US" altLang="zh-TW" sz="2400" b="1" dirty="0" smtClean="0">
+              <a:rPr lang="en-US" altLang="zh-TW" sz="2400" b="1" dirty="0">
                 <a:solidFill>
                   <a:schemeClr val="tx1">
                     <a:lumMod val="75000"/>
@@ -15075,7 +14878,7 @@
               <a:t>10-1 </a:t>
             </a:r>
             <a:r>
-              <a:rPr lang="zh-TW" altLang="en-US" sz="2400" b="1" dirty="0" smtClean="0">
+              <a:rPr lang="zh-TW" altLang="en-US" sz="2400" b="1" dirty="0">
                 <a:solidFill>
                   <a:schemeClr val="tx1">
                     <a:lumMod val="75000"/>
@@ -15088,7 +14891,7 @@
               </a:rPr>
               <a:t>陣列</a:t>
             </a:r>
-            <a:endParaRPr lang="en-US" altLang="zh-TW" sz="2400" b="1" dirty="0" smtClean="0">
+            <a:endParaRPr lang="en-US" altLang="zh-TW" sz="2400" b="1" dirty="0">
               <a:solidFill>
                 <a:schemeClr val="tx1">
                   <a:lumMod val="75000"/>
@@ -15106,7 +14909,7 @@
               </a:lnSpc>
             </a:pPr>
             <a:r>
-              <a:rPr lang="en-US" altLang="zh-TW" sz="2400" b="1" dirty="0" smtClean="0">
+              <a:rPr lang="en-US" altLang="zh-TW" sz="2400" b="1" dirty="0">
                 <a:solidFill>
                   <a:schemeClr val="tx1">
                     <a:lumMod val="75000"/>
@@ -15131,23 +14934,9 @@
                 <a:ea typeface="微軟正黑體" pitchFamily="34" charset="-120"/>
                 <a:hlinkClick r:id="rId4" action="ppaction://hlinksldjump"/>
               </a:rPr>
-              <a:t>鏈結</a:t>
-            </a:r>
-            <a:r>
-              <a:rPr lang="zh-TW" altLang="en-US" sz="2400" b="1" dirty="0" smtClean="0">
-                <a:solidFill>
-                  <a:schemeClr val="tx1">
-                    <a:lumMod val="75000"/>
-                    <a:lumOff val="25000"/>
-                  </a:schemeClr>
-                </a:solidFill>
-                <a:latin typeface="微軟正黑體" pitchFamily="34" charset="-120"/>
-                <a:ea typeface="微軟正黑體" pitchFamily="34" charset="-120"/>
-                <a:hlinkClick r:id="rId4" action="ppaction://hlinksldjump"/>
-              </a:rPr>
-              <a:t>串列</a:t>
-            </a:r>
-            <a:endParaRPr lang="en-US" altLang="zh-TW" sz="2400" b="1" dirty="0" smtClean="0">
+              <a:t>鏈結串列</a:t>
+            </a:r>
+            <a:endParaRPr lang="en-US" altLang="zh-TW" sz="2400" b="1" dirty="0">
               <a:solidFill>
                 <a:schemeClr val="tx1">
                   <a:lumMod val="75000"/>
@@ -15165,7 +14954,7 @@
               </a:lnSpc>
             </a:pPr>
             <a:r>
-              <a:rPr lang="en-US" altLang="zh-TW" sz="2400" b="1" dirty="0" smtClean="0">
+              <a:rPr lang="en-US" altLang="zh-TW" sz="2400" b="1" dirty="0">
                 <a:solidFill>
                   <a:schemeClr val="tx1">
                     <a:lumMod val="75000"/>
@@ -15190,23 +14979,9 @@
                 <a:ea typeface="微軟正黑體" pitchFamily="34" charset="-120"/>
                 <a:hlinkClick r:id="rId5" action="ppaction://hlinksldjump"/>
               </a:rPr>
-              <a:t>堆疊和</a:t>
-            </a:r>
-            <a:r>
-              <a:rPr lang="zh-TW" altLang="en-US" sz="2400" b="1" dirty="0" smtClean="0">
-                <a:solidFill>
-                  <a:schemeClr val="tx1">
-                    <a:lumMod val="75000"/>
-                    <a:lumOff val="25000"/>
-                  </a:schemeClr>
-                </a:solidFill>
-                <a:latin typeface="微軟正黑體" pitchFamily="34" charset="-120"/>
-                <a:ea typeface="微軟正黑體" pitchFamily="34" charset="-120"/>
-                <a:hlinkClick r:id="rId5" action="ppaction://hlinksldjump"/>
-              </a:rPr>
-              <a:t>佇列</a:t>
-            </a:r>
-            <a:endParaRPr lang="en-US" altLang="zh-TW" sz="2400" b="1" dirty="0" smtClean="0">
+              <a:t>堆疊和佇列</a:t>
+            </a:r>
+            <a:endParaRPr lang="en-US" altLang="zh-TW" sz="2400" b="1" dirty="0">
               <a:solidFill>
                 <a:schemeClr val="tx1">
                   <a:lumMod val="75000"/>
@@ -15224,7 +14999,7 @@
               </a:lnSpc>
             </a:pPr>
             <a:r>
-              <a:rPr lang="en-US" altLang="zh-TW" sz="2400" b="1" dirty="0" smtClean="0">
+              <a:rPr lang="en-US" altLang="zh-TW" sz="2400" b="1" dirty="0">
                 <a:solidFill>
                   <a:schemeClr val="tx1">
                     <a:lumMod val="75000"/>
@@ -15249,21 +15024,7 @@
                 <a:ea typeface="微軟正黑體" pitchFamily="34" charset="-120"/>
                 <a:hlinkClick r:id="rId6" action="ppaction://hlinksldjump"/>
               </a:rPr>
-              <a:t>樹狀</a:t>
-            </a:r>
-            <a:r>
-              <a:rPr lang="zh-TW" altLang="en-US" sz="2400" b="1" dirty="0" smtClean="0">
-                <a:solidFill>
-                  <a:schemeClr val="tx1">
-                    <a:lumMod val="75000"/>
-                    <a:lumOff val="25000"/>
-                  </a:schemeClr>
-                </a:solidFill>
-                <a:latin typeface="微軟正黑體" pitchFamily="34" charset="-120"/>
-                <a:ea typeface="微軟正黑體" pitchFamily="34" charset="-120"/>
-                <a:hlinkClick r:id="rId6" action="ppaction://hlinksldjump"/>
-              </a:rPr>
-              <a:t>結構</a:t>
+              <a:t>樹狀結構</a:t>
             </a:r>
             <a:endParaRPr lang="en-US" altLang="zh-TW" sz="2400" b="1" dirty="0">
               <a:solidFill>
@@ -15319,7 +15080,6 @@
               </a:prstClr>
             </a:outerShdw>
           </a:effectLst>
-          <a:extLst/>
         </p:spPr>
       </p:pic>
       <p:pic>
@@ -15363,7 +15123,6 @@
               </a:prstClr>
             </a:outerShdw>
           </a:effectLst>
-          <a:extLst/>
         </p:spPr>
       </p:pic>
       <p:pic>
@@ -15407,7 +15166,6 @@
               </a:prstClr>
             </a:outerShdw>
           </a:effectLst>
-          <a:extLst/>
         </p:spPr>
       </p:pic>
     </p:spTree>
@@ -15420,13 +15178,6 @@
   <p:clrMapOvr>
     <a:masterClrMapping/>
   </p:clrMapOvr>
-  <p:timing>
-    <p:tnLst>
-      <p:par>
-        <p:cTn id="1" dur="indefinite" restart="never" nodeType="tmRoot"/>
-      </p:par>
-    </p:tnLst>
-  </p:timing>
 </p:sld>
 </file>
 
@@ -15463,7 +15214,7 @@
           <a:lstStyle/>
           <a:p>
             <a:r>
-              <a:rPr lang="en-US" altLang="zh-TW" dirty="0" smtClean="0"/>
+              <a:rPr lang="en-US" altLang="zh-TW" dirty="0"/>
               <a:t>10-1 </a:t>
             </a:r>
             <a:r>
@@ -15491,11 +15242,11 @@
           <a:lstStyle/>
           <a:p>
             <a:r>
-              <a:rPr lang="zh-TW" altLang="en-US" dirty="0" smtClean="0"/>
+              <a:rPr lang="zh-TW" altLang="en-US" dirty="0"/>
               <a:t>所有同學的數學成績可以記錄在</a:t>
             </a:r>
             <a:r>
-              <a:rPr lang="en-US" altLang="zh-TW" dirty="0" smtClean="0">
+              <a:rPr lang="en-US" altLang="zh-TW" dirty="0">
                 <a:solidFill>
                   <a:srgbClr val="0070C0"/>
                 </a:solidFill>
@@ -15503,11 +15254,11 @@
               <a:t>scores</a:t>
             </a:r>
             <a:r>
-              <a:rPr lang="zh-TW" altLang="en-US" dirty="0" smtClean="0"/>
+              <a:rPr lang="zh-TW" altLang="en-US" dirty="0"/>
               <a:t>二維陣列的第一列，英文成績可以記錄在</a:t>
             </a:r>
             <a:r>
-              <a:rPr lang="en-US" altLang="zh-TW" dirty="0" smtClean="0">
+              <a:rPr lang="en-US" altLang="zh-TW" dirty="0">
                 <a:solidFill>
                   <a:srgbClr val="0070C0"/>
                 </a:solidFill>
@@ -15515,10 +15266,10 @@
               <a:t>scores</a:t>
             </a:r>
             <a:r>
-              <a:rPr lang="zh-TW" altLang="en-US" dirty="0" smtClean="0"/>
+              <a:rPr lang="zh-TW" altLang="en-US" dirty="0"/>
               <a:t>二維陣列的第二列。</a:t>
             </a:r>
-            <a:endParaRPr lang="en-US" altLang="zh-TW" dirty="0" smtClean="0"/>
+            <a:endParaRPr lang="en-US" altLang="zh-TW" dirty="0"/>
           </a:p>
         </p:txBody>
       </p:sp>
@@ -15532,13 +15283,6 @@
   <p:clrMapOvr>
     <a:masterClrMapping/>
   </p:clrMapOvr>
-  <p:timing>
-    <p:tnLst>
-      <p:par>
-        <p:cTn id="1" dur="indefinite" restart="never" nodeType="tmRoot"/>
-      </p:par>
-    </p:tnLst>
-  </p:timing>
 </p:sld>
 </file>
 
@@ -15575,22 +15319,21 @@
           <a:lstStyle/>
           <a:p>
             <a:r>
-              <a:rPr lang="en-US" altLang="zh-TW" dirty="0" smtClean="0"/>
+              <a:rPr lang="en-US" altLang="zh-TW" dirty="0"/>
               <a:t>10-4 </a:t>
             </a:r>
             <a:r>
-              <a:rPr lang="zh-TW" altLang="en-US" dirty="0" smtClean="0"/>
+              <a:rPr lang="zh-TW" altLang="en-US" dirty="0"/>
               <a:t>樹狀結構</a:t>
             </a:r>
             <a:r>
-              <a:rPr lang="en-US" altLang="zh-TW" dirty="0" smtClean="0"/>
+              <a:rPr lang="en-US" altLang="zh-TW" dirty="0"/>
               <a:t>—</a:t>
             </a:r>
             <a:r>
-              <a:rPr lang="zh-TW" altLang="en-US" dirty="0" smtClean="0"/>
+              <a:rPr lang="zh-TW" altLang="en-US" dirty="0"/>
               <a:t>前序法</a:t>
             </a:r>
-            <a:endParaRPr lang="zh-TW" altLang="en-US" dirty="0"/>
           </a:p>
         </p:txBody>
       </p:sp>
@@ -15617,19 +15360,19 @@
           <a:lstStyle/>
           <a:p>
             <a:r>
-              <a:rPr lang="zh-TW" altLang="en-US" dirty="0" smtClean="0"/>
+              <a:rPr lang="zh-TW" altLang="en-US" dirty="0"/>
               <a:t>前序法在探訪節點的時候，同時將該節點表示的字元列出來：</a:t>
             </a:r>
-            <a:endParaRPr lang="en-US" altLang="zh-TW" dirty="0" smtClean="0"/>
+            <a:endParaRPr lang="en-US" altLang="zh-TW" dirty="0"/>
           </a:p>
           <a:p>
             <a:pPr lvl="1"/>
             <a:r>
-              <a:rPr lang="zh-TW" altLang="en-US" dirty="0" smtClean="0"/>
+              <a:rPr lang="zh-TW" altLang="en-US" dirty="0"/>
               <a:t>前序法的程序</a:t>
             </a:r>
             <a:r>
-              <a:rPr lang="en-US" altLang="zh-TW" dirty="0" smtClean="0">
+              <a:rPr lang="en-US" altLang="zh-TW" dirty="0">
                 <a:solidFill>
                   <a:srgbClr val="0070C0"/>
                 </a:solidFill>
@@ -15637,11 +15380,11 @@
               <a:t>preorder</a:t>
             </a:r>
             <a:r>
-              <a:rPr lang="zh-TW" altLang="en-US" dirty="0" smtClean="0"/>
+              <a:rPr lang="zh-TW" altLang="en-US" dirty="0"/>
               <a:t>，先將參數</a:t>
             </a:r>
             <a:r>
-              <a:rPr lang="en-US" altLang="zh-TW" dirty="0" smtClean="0">
+              <a:rPr lang="en-US" altLang="zh-TW" dirty="0">
                 <a:solidFill>
                   <a:srgbClr val="0070C0"/>
                 </a:solidFill>
@@ -15649,18 +15392,18 @@
               <a:t>p</a:t>
             </a:r>
             <a:r>
-              <a:rPr lang="zh-TW" altLang="en-US" dirty="0" smtClean="0"/>
+              <a:rPr lang="zh-TW" altLang="en-US" dirty="0"/>
               <a:t>對應的節點，也就是父節點的資料先列印出來，接著再遞迴呼叫此程序處理左子節點。</a:t>
             </a:r>
-            <a:endParaRPr lang="en-US" altLang="zh-TW" dirty="0" smtClean="0"/>
+            <a:endParaRPr lang="en-US" altLang="zh-TW" dirty="0"/>
           </a:p>
           <a:p>
             <a:pPr lvl="1"/>
             <a:r>
-              <a:rPr lang="zh-TW" altLang="en-US" dirty="0" smtClean="0"/>
+              <a:rPr lang="zh-TW" altLang="en-US" dirty="0"/>
               <a:t>等到進入遞迴呼叫時，此左子節點會再度被視作是根節點，然後左子樹會依照一樣的方式被處理。</a:t>
             </a:r>
-            <a:endParaRPr lang="en-US" altLang="zh-TW" dirty="0" smtClean="0"/>
+            <a:endParaRPr lang="en-US" altLang="zh-TW" dirty="0"/>
           </a:p>
         </p:txBody>
       </p:sp>
@@ -15674,13 +15417,6 @@
   <p:clrMapOvr>
     <a:masterClrMapping/>
   </p:clrMapOvr>
-  <p:timing>
-    <p:tnLst>
-      <p:par>
-        <p:cTn id="1" dur="indefinite" restart="never" nodeType="tmRoot"/>
-      </p:par>
-    </p:tnLst>
-  </p:timing>
 </p:sld>
 </file>
 
@@ -15717,19 +15453,19 @@
           <a:lstStyle/>
           <a:p>
             <a:r>
-              <a:rPr lang="en-US" altLang="zh-TW" smtClean="0"/>
+              <a:rPr lang="en-US" altLang="zh-TW"/>
               <a:t>10-4 </a:t>
             </a:r>
             <a:r>
-              <a:rPr lang="zh-TW" altLang="en-US" smtClean="0"/>
+              <a:rPr lang="zh-TW" altLang="en-US"/>
               <a:t>樹狀結構</a:t>
             </a:r>
             <a:r>
-              <a:rPr lang="en-US" altLang="zh-TW" smtClean="0"/>
+              <a:rPr lang="en-US" altLang="zh-TW"/>
               <a:t>—</a:t>
             </a:r>
             <a:r>
-              <a:rPr lang="zh-TW" altLang="en-US" smtClean="0"/>
+              <a:rPr lang="zh-TW" altLang="en-US"/>
               <a:t>前序法</a:t>
             </a:r>
             <a:endParaRPr lang="zh-TW" altLang="en-US" dirty="0"/>
@@ -15752,20 +15488,20 @@
           <a:lstStyle/>
           <a:p>
             <a:r>
-              <a:rPr lang="zh-TW" altLang="en-US" dirty="0" smtClean="0"/>
+              <a:rPr lang="zh-TW" altLang="en-US" dirty="0"/>
               <a:t>前序法在探訪節點的時候，同時將該節點表示的字元列出來：</a:t>
             </a:r>
-            <a:endParaRPr lang="en-US" altLang="zh-TW" dirty="0" smtClean="0"/>
+            <a:endParaRPr lang="en-US" altLang="zh-TW" dirty="0"/>
           </a:p>
           <a:p>
             <a:pPr lvl="1"/>
             <a:r>
-              <a:rPr lang="zh-TW" altLang="en-US" dirty="0" smtClean="0"/>
+              <a:rPr lang="zh-TW" altLang="en-US" dirty="0"/>
               <a:t>等到左子節點對應的整棵樹都列印出來之後，該遞迴呼叫結束處理，也就是回到最原始的狀態。</a:t>
             </a:r>
           </a:p>
           <a:p>
-            <a:endParaRPr lang="en-US" altLang="zh-TW" dirty="0" smtClean="0"/>
+            <a:endParaRPr lang="en-US" altLang="zh-TW" dirty="0"/>
           </a:p>
           <a:p>
             <a:endParaRPr lang="zh-TW" altLang="en-US" dirty="0"/>
@@ -15782,13 +15518,6 @@
   <p:clrMapOvr>
     <a:masterClrMapping/>
   </p:clrMapOvr>
-  <p:timing>
-    <p:tnLst>
-      <p:par>
-        <p:cTn id="1" dur="indefinite" restart="never" nodeType="tmRoot"/>
-      </p:par>
-    </p:tnLst>
-  </p:timing>
 </p:sld>
 </file>
 
@@ -15827,16 +15556,12 @@
           <a:lstStyle/>
           <a:p>
             <a:r>
-              <a:rPr lang="en-US" altLang="zh-TW" dirty="0" smtClean="0"/>
+              <a:rPr lang="en-US" altLang="zh-TW" dirty="0"/>
               <a:t>10-4 </a:t>
             </a:r>
             <a:r>
               <a:rPr lang="zh-TW" altLang="en-US" dirty="0"/>
-              <a:t>樹狀</a:t>
-            </a:r>
-            <a:r>
-              <a:rPr lang="zh-TW" altLang="en-US" dirty="0" smtClean="0"/>
-              <a:t>結構</a:t>
+              <a:t>樹狀結構</a:t>
             </a:r>
             <a:r>
               <a:rPr lang="en-US" altLang="zh-TW" dirty="0"/>
@@ -15844,22 +15569,18 @@
             </a:r>
             <a:r>
               <a:rPr lang="zh-TW" altLang="en-US" dirty="0"/>
-              <a:t>前序</a:t>
-            </a:r>
-            <a:r>
-              <a:rPr lang="zh-TW" altLang="en-US" dirty="0" smtClean="0"/>
-              <a:t>法</a:t>
-            </a:r>
-            <a:r>
-              <a:rPr lang="en-US" altLang="zh-TW" dirty="0" smtClean="0"/>
+              <a:t>前序法</a:t>
+            </a:r>
+            <a:r>
+              <a:rPr lang="en-US" altLang="zh-TW" dirty="0"/>
               <a:t>(</a:t>
             </a:r>
             <a:r>
-              <a:rPr lang="zh-TW" altLang="en-US" dirty="0" smtClean="0"/>
+              <a:rPr lang="zh-TW" altLang="en-US" dirty="0"/>
               <a:t>續</a:t>
             </a:r>
             <a:r>
-              <a:rPr lang="en-US" altLang="zh-TW" dirty="0" smtClean="0"/>
+              <a:rPr lang="en-US" altLang="zh-TW" dirty="0"/>
               <a:t>)</a:t>
             </a:r>
             <a:endParaRPr lang="zh-TW" altLang="en-US" dirty="0"/>
@@ -15883,36 +15604,16 @@
           <a:p>
             <a:pPr lvl="1"/>
             <a:r>
-              <a:rPr lang="zh-TW" altLang="en-US" dirty="0" smtClean="0"/>
-              <a:t>此時</a:t>
-            </a:r>
-            <a:r>
-              <a:rPr lang="zh-TW" altLang="en-US" dirty="0"/>
-              <a:t>程式會接著繼續進行下一個遞迴呼叫，</a:t>
-            </a:r>
-            <a:r>
-              <a:rPr lang="zh-TW" altLang="en-US" dirty="0" smtClean="0"/>
-              <a:t>也就是</a:t>
-            </a:r>
-            <a:r>
-              <a:rPr lang="en-US" altLang="zh-TW" dirty="0" smtClean="0"/>
-              <a:t>preorder(p-</a:t>
+              <a:rPr lang="zh-TW" altLang="en-US" dirty="0"/>
+              <a:t>此時程式會接著繼續進行下一個遞迴呼叫，也就是</a:t>
             </a:r>
             <a:r>
               <a:rPr lang="en-US" altLang="zh-TW" dirty="0"/>
-              <a:t>&gt;right</a:t>
-            </a:r>
-            <a:r>
-              <a:rPr lang="en-US" altLang="zh-TW" dirty="0" smtClean="0"/>
-              <a:t>)</a:t>
-            </a:r>
-            <a:r>
-              <a:rPr lang="zh-TW" altLang="en-US" dirty="0" smtClean="0"/>
-              <a:t>，</a:t>
-            </a:r>
-            <a:r>
-              <a:rPr lang="zh-TW" altLang="en-US" dirty="0"/>
-              <a:t>以處理右子節點</a:t>
+              <a:t>preorder(p-&gt;right)</a:t>
+            </a:r>
+            <a:r>
+              <a:rPr lang="zh-TW" altLang="en-US" dirty="0"/>
+              <a:t>，以處理右子節點</a:t>
             </a:r>
             <a:r>
               <a:rPr lang="en-US" altLang="zh-TW" dirty="0"/>
@@ -15927,10 +15628,9 @@
               <a:t>)</a:t>
             </a:r>
             <a:r>
-              <a:rPr lang="zh-TW" altLang="en-US" dirty="0" smtClean="0"/>
+              <a:rPr lang="zh-TW" altLang="en-US" dirty="0"/>
               <a:t>。</a:t>
             </a:r>
-            <a:endParaRPr lang="zh-TW" altLang="en-US" dirty="0"/>
           </a:p>
         </p:txBody>
       </p:sp>
@@ -16004,13 +15704,6 @@
   <p:clrMapOvr>
     <a:masterClrMapping/>
   </p:clrMapOvr>
-  <p:timing>
-    <p:tnLst>
-      <p:par>
-        <p:cTn id="1" dur="indefinite" restart="never" nodeType="tmRoot"/>
-      </p:par>
-    </p:tnLst>
-  </p:timing>
 </p:sld>
 </file>
 
@@ -16047,14 +15740,13 @@
           <a:lstStyle/>
           <a:p>
             <a:r>
-              <a:rPr lang="en-US" altLang="zh-TW" dirty="0" smtClean="0"/>
+              <a:rPr lang="en-US" altLang="zh-TW" dirty="0"/>
               <a:t>10-4 </a:t>
             </a:r>
             <a:r>
-              <a:rPr lang="zh-TW" altLang="en-US" dirty="0" smtClean="0"/>
+              <a:rPr lang="zh-TW" altLang="en-US" dirty="0"/>
               <a:t>樹狀結構─中序法</a:t>
             </a:r>
-            <a:endParaRPr lang="zh-TW" altLang="en-US" dirty="0"/>
           </a:p>
         </p:txBody>
       </p:sp>
@@ -16075,11 +15767,11 @@
           <a:p>
             <a:pPr algn="l"/>
             <a:r>
-              <a:rPr lang="zh-TW" altLang="en-US" dirty="0" smtClean="0"/>
+              <a:rPr lang="zh-TW" altLang="en-US" dirty="0"/>
               <a:t>中序法的程序</a:t>
             </a:r>
             <a:r>
-              <a:rPr lang="en-US" altLang="zh-TW" dirty="0" err="1" smtClean="0">
+              <a:rPr lang="en-US" altLang="zh-TW" dirty="0" err="1">
                 <a:solidFill>
                   <a:srgbClr val="0070C0"/>
                 </a:solidFill>
@@ -16087,10 +15779,10 @@
               <a:t>inorder</a:t>
             </a:r>
             <a:r>
-              <a:rPr lang="zh-TW" altLang="en-US" dirty="0" smtClean="0"/>
+              <a:rPr lang="zh-TW" altLang="en-US" dirty="0"/>
               <a:t>，與前序法不同的是，它會直接遞迴呼叫此程序處理左子節點。</a:t>
             </a:r>
-            <a:endParaRPr lang="en-US" altLang="zh-TW" dirty="0" smtClean="0"/>
+            <a:endParaRPr lang="en-US" altLang="zh-TW" dirty="0"/>
           </a:p>
         </p:txBody>
       </p:sp>
@@ -16099,13 +15791,6 @@
   <p:clrMapOvr>
     <a:masterClrMapping/>
   </p:clrMapOvr>
-  <p:timing>
-    <p:tnLst>
-      <p:par>
-        <p:cTn id="1" dur="indefinite" restart="never" nodeType="tmRoot"/>
-      </p:par>
-    </p:tnLst>
-  </p:timing>
 </p:sld>
 </file>
 
@@ -16275,13 +15960,6 @@
   <p:clrMapOvr>
     <a:masterClrMapping/>
   </p:clrMapOvr>
-  <p:timing>
-    <p:tnLst>
-      <p:par>
-        <p:cTn id="1" dur="indefinite" restart="never" nodeType="tmRoot"/>
-      </p:par>
-    </p:tnLst>
-  </p:timing>
 </p:sld>
 </file>
 
@@ -16318,20 +15996,12 @@
           <a:lstStyle/>
           <a:p>
             <a:r>
-              <a:rPr lang="en-US" altLang="zh-TW" dirty="0" smtClean="0"/>
+              <a:rPr lang="en-US" altLang="zh-TW" dirty="0"/>
               <a:t>10-4 </a:t>
             </a:r>
             <a:r>
               <a:rPr lang="zh-TW" altLang="en-US" dirty="0"/>
-              <a:t>樹狀結構</a:t>
-            </a:r>
-            <a:r>
-              <a:rPr lang="zh-TW" altLang="en-US" dirty="0" smtClean="0"/>
-              <a:t>─後序</a:t>
-            </a:r>
-            <a:r>
-              <a:rPr lang="zh-TW" altLang="en-US" dirty="0"/>
-              <a:t>法</a:t>
+              <a:t>樹狀結構─後序法</a:t>
             </a:r>
           </a:p>
         </p:txBody>
@@ -16357,19 +16027,11 @@
           <a:lstStyle/>
           <a:p>
             <a:r>
-              <a:rPr lang="zh-TW" altLang="en-US" dirty="0" smtClean="0"/>
-              <a:t>後</a:t>
-            </a:r>
-            <a:r>
-              <a:rPr lang="zh-TW" altLang="en-US" dirty="0"/>
-              <a:t>序法的</a:t>
-            </a:r>
-            <a:r>
-              <a:rPr lang="zh-TW" altLang="en-US" dirty="0" smtClean="0"/>
-              <a:t>程序</a:t>
-            </a:r>
-            <a:r>
-              <a:rPr lang="en-US" altLang="zh-TW" dirty="0" err="1" smtClean="0">
+              <a:rPr lang="zh-TW" altLang="en-US" dirty="0"/>
+              <a:t>後序法的程序</a:t>
+            </a:r>
+            <a:r>
+              <a:rPr lang="en-US" altLang="zh-TW" dirty="0" err="1">
                 <a:solidFill>
                   <a:srgbClr val="0070C0"/>
                 </a:solidFill>
@@ -16377,19 +16039,11 @@
               <a:t>postorder</a:t>
             </a:r>
             <a:r>
-              <a:rPr lang="zh-TW" altLang="en-US" dirty="0" smtClean="0"/>
-              <a:t>，先</a:t>
-            </a:r>
-            <a:r>
-              <a:rPr lang="zh-TW" altLang="en-US" dirty="0"/>
-              <a:t>進行兩個遞迴呼叫，將左子樹和右子樹的資料都列印出來，最後再處理</a:t>
-            </a:r>
-            <a:r>
-              <a:rPr lang="zh-TW" altLang="en-US" dirty="0" smtClean="0"/>
-              <a:t>參數</a:t>
-            </a:r>
-            <a:r>
-              <a:rPr lang="en-US" altLang="zh-TW" dirty="0" smtClean="0">
+              <a:rPr lang="zh-TW" altLang="en-US" dirty="0"/>
+              <a:t>，先進行兩個遞迴呼叫，將左子樹和右子樹的資料都列印出來，最後再處理參數</a:t>
+            </a:r>
+            <a:r>
+              <a:rPr lang="en-US" altLang="zh-TW" dirty="0">
                 <a:solidFill>
                   <a:srgbClr val="0070C0"/>
                 </a:solidFill>
@@ -16397,18 +16051,9 @@
               <a:t>p</a:t>
             </a:r>
             <a:r>
-              <a:rPr lang="zh-TW" altLang="en-US" dirty="0" smtClean="0"/>
-              <a:t>對應</a:t>
-            </a:r>
-            <a:r>
-              <a:rPr lang="zh-TW" altLang="en-US" dirty="0"/>
-              <a:t>的節點，也就是父節點</a:t>
-            </a:r>
-            <a:r>
-              <a:rPr lang="zh-TW" altLang="en-US" dirty="0" smtClean="0"/>
-              <a:t>：</a:t>
-            </a:r>
-            <a:endParaRPr lang="zh-TW" altLang="en-US" dirty="0"/>
+              <a:rPr lang="zh-TW" altLang="en-US" dirty="0"/>
+              <a:t>對應的節點，也就是父節點：</a:t>
+            </a:r>
           </a:p>
         </p:txBody>
       </p:sp>
@@ -16482,13 +16127,6 @@
   <p:clrMapOvr>
     <a:masterClrMapping/>
   </p:clrMapOvr>
-  <p:timing>
-    <p:tnLst>
-      <p:par>
-        <p:cTn id="1" dur="indefinite" restart="never" nodeType="tmRoot"/>
-      </p:par>
-    </p:tnLst>
-  </p:timing>
 </p:sld>
 </file>
 
@@ -16527,14 +16165,14 @@
           <a:lstStyle/>
           <a:p>
             <a:r>
-              <a:rPr lang="zh-TW" altLang="en-US" dirty="0" smtClean="0">
+              <a:rPr lang="zh-TW" altLang="en-US" dirty="0">
                 <a:solidFill>
                   <a:srgbClr val="C00000"/>
                 </a:solidFill>
               </a:rPr>
               <a:t>手機末三碼的巧思與妙用</a:t>
             </a:r>
-            <a:endParaRPr lang="en-US" altLang="zh-TW" dirty="0" smtClean="0">
+            <a:endParaRPr lang="en-US" altLang="zh-TW" dirty="0">
               <a:solidFill>
                 <a:srgbClr val="C00000"/>
               </a:solidFill>
@@ -16542,17 +16180,17 @@
           </a:p>
           <a:p>
             <a:r>
-              <a:rPr lang="zh-TW" altLang="en-US" dirty="0" smtClean="0"/>
+              <a:rPr lang="zh-TW" altLang="en-US" dirty="0"/>
               <a:t>「手機門號末三碼」的概念，相當於「將手機門號除以一千後得到的餘數」，可算是一種雜湊函數的運算。</a:t>
             </a:r>
-            <a:endParaRPr lang="en-US" altLang="zh-TW" dirty="0" smtClean="0"/>
-          </a:p>
-          <a:p>
-            <a:r>
-              <a:rPr lang="zh-TW" altLang="en-US" dirty="0" smtClean="0"/>
+            <a:endParaRPr lang="en-US" altLang="zh-TW" dirty="0"/>
+          </a:p>
+          <a:p>
+            <a:r>
+              <a:rPr lang="zh-TW" altLang="en-US" dirty="0"/>
               <a:t>雜湊函數可將輸入資料，經過某些運算後，轉化為一個雜湊值。例如，「姓名筆畫」就是一種雜湊函數，「王大明」的姓名筆畫雜湊值為十五，筆者姓名的雜湊值為卅三。</a:t>
             </a:r>
-            <a:endParaRPr lang="en-US" altLang="zh-TW" dirty="0" smtClean="0"/>
+            <a:endParaRPr lang="en-US" altLang="zh-TW" dirty="0"/>
           </a:p>
         </p:txBody>
       </p:sp>
@@ -16566,13 +16204,6 @@
   <p:clrMapOvr>
     <a:masterClrMapping/>
   </p:clrMapOvr>
-  <p:timing>
-    <p:tnLst>
-      <p:par>
-        <p:cTn id="1" dur="indefinite" restart="never" nodeType="tmRoot"/>
-      </p:par>
-    </p:tnLst>
-  </p:timing>
 </p:sld>
 </file>
 
@@ -16628,13 +16259,6 @@
   <p:clrMapOvr>
     <a:masterClrMapping/>
   </p:clrMapOvr>
-  <p:timing>
-    <p:tnLst>
-      <p:par>
-        <p:cTn id="1" dur="indefinite" restart="never" nodeType="tmRoot"/>
-      </p:par>
-    </p:tnLst>
-  </p:timing>
 </p:sld>
 </file>
 
@@ -16771,13 +16395,6 @@
   <p:clrMapOvr>
     <a:masterClrMapping/>
   </p:clrMapOvr>
-  <p:timing>
-    <p:tnLst>
-      <p:par>
-        <p:cTn id="1" dur="indefinite" restart="never" nodeType="tmRoot"/>
-      </p:par>
-    </p:tnLst>
-  </p:timing>
 </p:sld>
 </file>
 
@@ -16814,7 +16431,7 @@
           <a:lstStyle/>
           <a:p>
             <a:r>
-              <a:rPr lang="en-US" altLang="zh-TW" dirty="0" smtClean="0"/>
+              <a:rPr lang="en-US" altLang="zh-TW" dirty="0"/>
               <a:t>10-1 </a:t>
             </a:r>
             <a:r>
@@ -16841,13 +16458,8 @@
           <a:p>
             <a:r>
               <a:rPr lang="zh-TW" altLang="en-US" dirty="0"/>
-              <a:t>綜合而言，每個同學這兩科成績的對應註標如下表所示</a:t>
-            </a:r>
-            <a:r>
-              <a:rPr lang="zh-TW" altLang="en-US" dirty="0" smtClean="0"/>
-              <a:t>：</a:t>
-            </a:r>
-            <a:endParaRPr lang="zh-TW" altLang="en-US" dirty="0"/>
+              <a:t>綜合而言，每個同學這兩科成績的對應註標如下表所示：</a:t>
+            </a:r>
           </a:p>
         </p:txBody>
       </p:sp>
@@ -16890,14 +16502,7 @@
                 <a:latin typeface="微軟正黑體" pitchFamily="34" charset="-120"/>
                 <a:ea typeface="微軟正黑體" pitchFamily="34" charset="-120"/>
               </a:rPr>
-              <a:t>二維陣列的註標</a:t>
-            </a:r>
-            <a:r>
-              <a:rPr lang="zh-TW" altLang="en-US" sz="2000" b="1" dirty="0" smtClean="0">
-                <a:latin typeface="微軟正黑體" pitchFamily="34" charset="-120"/>
-                <a:ea typeface="微軟正黑體" pitchFamily="34" charset="-120"/>
-              </a:rPr>
-              <a:t>對應</a:t>
+              <a:t>二維陣列的註標對應</a:t>
             </a:r>
             <a:endParaRPr lang="zh-TW" altLang="en-US" sz="2000" dirty="0">
               <a:latin typeface="微軟正黑體" pitchFamily="34" charset="-120"/>
@@ -16980,13 +16585,6 @@
   <p:clrMapOvr>
     <a:masterClrMapping/>
   </p:clrMapOvr>
-  <p:timing>
-    <p:tnLst>
-      <p:par>
-        <p:cTn id="1" dur="indefinite" restart="never" nodeType="tmRoot"/>
-      </p:par>
-    </p:tnLst>
-  </p:timing>
 </p:sld>
 </file>
 
@@ -17023,14 +16621,13 @@
           <a:lstStyle/>
           <a:p>
             <a:r>
-              <a:rPr lang="en-US" altLang="zh-TW" dirty="0" smtClean="0"/>
+              <a:rPr lang="en-US" altLang="zh-TW" dirty="0"/>
               <a:t>10-1 </a:t>
             </a:r>
             <a:r>
-              <a:rPr lang="zh-TW" altLang="en-US" dirty="0" smtClean="0"/>
+              <a:rPr lang="zh-TW" altLang="en-US" dirty="0"/>
               <a:t>陣列</a:t>
             </a:r>
-            <a:endParaRPr lang="zh-TW" altLang="en-US" dirty="0"/>
           </a:p>
         </p:txBody>
       </p:sp>
@@ -17050,14 +16647,14 @@
           <a:lstStyle/>
           <a:p>
             <a:r>
-              <a:rPr lang="zh-TW" altLang="en-US" dirty="0" smtClean="0"/>
+              <a:rPr lang="zh-TW" altLang="en-US" dirty="0"/>
               <a:t>問題是，如此宣告出來的多維陣列，是不是會造成程式執行的時候，存取任一個註標資料的困難？</a:t>
             </a:r>
-            <a:endParaRPr lang="en-US" altLang="zh-TW" dirty="0" smtClean="0"/>
-          </a:p>
-          <a:p>
-            <a:r>
-              <a:rPr lang="zh-TW" altLang="en-US" dirty="0" smtClean="0"/>
+            <a:endParaRPr lang="en-US" altLang="zh-TW" dirty="0"/>
+          </a:p>
+          <a:p>
+            <a:r>
+              <a:rPr lang="zh-TW" altLang="en-US" dirty="0"/>
               <a:t>答案是否定的。</a:t>
             </a:r>
           </a:p>
@@ -17073,13 +16670,6 @@
   <p:clrMapOvr>
     <a:masterClrMapping/>
   </p:clrMapOvr>
-  <p:timing>
-    <p:tnLst>
-      <p:par>
-        <p:cTn id="1" dur="indefinite" restart="never" nodeType="tmRoot"/>
-      </p:par>
-    </p:tnLst>
-  </p:timing>
 </p:sld>
 </file>
 
@@ -17225,13 +16815,6 @@
   <p:clrMapOvr>
     <a:masterClrMapping/>
   </p:clrMapOvr>
-  <p:timing>
-    <p:tnLst>
-      <p:par>
-        <p:cTn id="1" dur="indefinite" restart="never" nodeType="tmRoot"/>
-      </p:par>
-    </p:tnLst>
-  </p:timing>
 </p:sld>
 </file>
 
@@ -17268,14 +16851,13 @@
           <a:lstStyle/>
           <a:p>
             <a:r>
-              <a:rPr lang="en-US" altLang="zh-TW" dirty="0" smtClean="0"/>
+              <a:rPr lang="en-US" altLang="zh-TW" dirty="0"/>
               <a:t>10-1 </a:t>
             </a:r>
             <a:r>
-              <a:rPr lang="zh-TW" altLang="en-US" dirty="0" smtClean="0"/>
+              <a:rPr lang="zh-TW" altLang="en-US" dirty="0"/>
               <a:t>陣列</a:t>
             </a:r>
-            <a:endParaRPr lang="zh-TW" altLang="en-US" dirty="0"/>
           </a:p>
         </p:txBody>
       </p:sp>
@@ -17295,19 +16877,19 @@
           <a:lstStyle/>
           <a:p>
             <a:r>
-              <a:rPr lang="zh-TW" altLang="en-US" smtClean="0"/>
+              <a:rPr lang="zh-TW" altLang="en-US"/>
               <a:t>在</a:t>
             </a:r>
             <a:r>
-              <a:rPr lang="en-US" altLang="zh-TW" smtClean="0"/>
+              <a:rPr lang="en-US" altLang="zh-TW"/>
               <a:t>C</a:t>
             </a:r>
             <a:r>
-              <a:rPr lang="zh-TW" altLang="en-US" smtClean="0"/>
+              <a:rPr lang="zh-TW" altLang="en-US"/>
               <a:t>程式語言裡，一列或一行可表示幾個元素，必須在宣告陣列時事先宣告好，這裡所謂的</a:t>
             </a:r>
             <a:r>
-              <a:rPr lang="zh-TW" altLang="en-US" smtClean="0">
+              <a:rPr lang="zh-TW" altLang="en-US">
                 <a:solidFill>
                   <a:srgbClr val="C00000"/>
                 </a:solidFill>
@@ -17315,14 +16897,14 @@
               <a:t>元素</a:t>
             </a:r>
             <a:r>
-              <a:rPr lang="en-US" altLang="zh-TW" smtClean="0"/>
+              <a:rPr lang="en-US" altLang="zh-TW"/>
               <a:t>(element)</a:t>
             </a:r>
             <a:r>
-              <a:rPr lang="zh-TW" altLang="en-US" smtClean="0"/>
+              <a:rPr lang="zh-TW" altLang="en-US"/>
               <a:t>，是指每一筆儲存在陣列裡的資料。</a:t>
             </a:r>
-            <a:endParaRPr lang="en-US" altLang="zh-TW" dirty="0" smtClean="0"/>
+            <a:endParaRPr lang="en-US" altLang="zh-TW" dirty="0"/>
           </a:p>
         </p:txBody>
       </p:sp>
@@ -17336,13 +16918,6 @@
   <p:clrMapOvr>
     <a:masterClrMapping/>
   </p:clrMapOvr>
-  <p:timing>
-    <p:tnLst>
-      <p:par>
-        <p:cTn id="1" dur="indefinite" restart="never" nodeType="tmRoot"/>
-      </p:par>
-    </p:tnLst>
-  </p:timing>
 </p:sld>
 </file>
 
@@ -17484,13 +17059,6 @@
   <p:clrMapOvr>
     <a:masterClrMapping/>
   </p:clrMapOvr>
-  <p:timing>
-    <p:tnLst>
-      <p:par>
-        <p:cTn id="1" dur="indefinite" restart="never" nodeType="tmRoot"/>
-      </p:par>
-    </p:tnLst>
-  </p:timing>
 </p:sld>
 </file>
 
@@ -17527,11 +17095,11 @@
           <a:lstStyle/>
           <a:p>
             <a:r>
-              <a:rPr lang="en-US" altLang="zh-TW" smtClean="0"/>
+              <a:rPr lang="en-US" altLang="zh-TW"/>
               <a:t>10-1 </a:t>
             </a:r>
             <a:r>
-              <a:rPr lang="zh-TW" altLang="en-US" smtClean="0"/>
+              <a:rPr lang="zh-TW" altLang="en-US"/>
               <a:t>陣列</a:t>
             </a:r>
             <a:endParaRPr lang="zh-TW" altLang="en-US" dirty="0"/>
@@ -17554,23 +17122,23 @@
           <a:lstStyle/>
           <a:p>
             <a:r>
-              <a:rPr lang="zh-TW" altLang="en-US" smtClean="0"/>
+              <a:rPr lang="zh-TW" altLang="en-US"/>
               <a:t>以此二維陣列來說，一列表示</a:t>
             </a:r>
             <a:r>
-              <a:rPr lang="en-US" altLang="zh-TW" smtClean="0"/>
+              <a:rPr lang="en-US" altLang="zh-TW"/>
               <a:t>5</a:t>
             </a:r>
             <a:r>
-              <a:rPr lang="zh-TW" altLang="en-US" smtClean="0"/>
+              <a:rPr lang="zh-TW" altLang="en-US"/>
               <a:t>個元素，一個元素是一個整數的大小，也就是</a:t>
             </a:r>
             <a:r>
-              <a:rPr lang="en-US" altLang="zh-TW" smtClean="0"/>
+              <a:rPr lang="en-US" altLang="zh-TW"/>
               <a:t>4 bytes</a:t>
             </a:r>
             <a:r>
-              <a:rPr lang="zh-TW" altLang="en-US" smtClean="0"/>
+              <a:rPr lang="zh-TW" altLang="en-US"/>
               <a:t>，所以公式可以進一步化簡為：</a:t>
             </a:r>
             <a:endParaRPr lang="zh-TW" altLang="en-US" dirty="0"/>
@@ -17647,13 +17215,6 @@
   <p:clrMapOvr>
     <a:masterClrMapping/>
   </p:clrMapOvr>
-  <p:timing>
-    <p:tnLst>
-      <p:par>
-        <p:cTn id="1" dur="indefinite" restart="never" nodeType="tmRoot"/>
-      </p:par>
-    </p:tnLst>
-  </p:timing>
 </p:sld>
 </file>
 
@@ -17690,7 +17251,7 @@
           <a:lstStyle/>
           <a:p>
             <a:r>
-              <a:rPr lang="en-US" altLang="zh-TW" dirty="0" smtClean="0"/>
+              <a:rPr lang="en-US" altLang="zh-TW" dirty="0"/>
               <a:t>10-1 </a:t>
             </a:r>
             <a:r>
@@ -17718,15 +17279,15 @@
           <a:lstStyle/>
           <a:p>
             <a:r>
-              <a:rPr lang="en-US" altLang="zh-TW" dirty="0" smtClean="0"/>
+              <a:rPr lang="en-US" altLang="zh-TW" dirty="0"/>
               <a:t>scores[0][1]</a:t>
             </a:r>
             <a:r>
-              <a:rPr lang="zh-TW" altLang="en-US" dirty="0" smtClean="0"/>
+              <a:rPr lang="zh-TW" altLang="en-US" dirty="0"/>
               <a:t>在記憶體的位置，可算出為</a:t>
             </a:r>
             <a:r>
-              <a:rPr lang="en-US" altLang="zh-TW" dirty="0" smtClean="0">
+              <a:rPr lang="en-US" altLang="zh-TW" dirty="0">
                 <a:solidFill>
                   <a:srgbClr val="0070C0"/>
                 </a:solidFill>
@@ -17734,19 +17295,19 @@
               <a:t>start+4</a:t>
             </a:r>
             <a:r>
-              <a:rPr lang="zh-TW" altLang="en-US" dirty="0" smtClean="0"/>
+              <a:rPr lang="zh-TW" altLang="en-US" dirty="0"/>
               <a:t>；而</a:t>
             </a:r>
             <a:r>
-              <a:rPr lang="en-US" altLang="zh-TW" dirty="0" smtClean="0"/>
+              <a:rPr lang="en-US" altLang="zh-TW" dirty="0"/>
               <a:t>scores[1][3]</a:t>
             </a:r>
             <a:r>
-              <a:rPr lang="zh-TW" altLang="en-US" dirty="0" smtClean="0"/>
+              <a:rPr lang="zh-TW" altLang="en-US" dirty="0"/>
               <a:t>在記憶體的位置，則為</a:t>
             </a:r>
             <a:r>
-              <a:rPr lang="en-US" altLang="zh-TW" dirty="0" smtClean="0">
+              <a:rPr lang="en-US" altLang="zh-TW" dirty="0">
                 <a:solidFill>
                   <a:srgbClr val="0070C0"/>
                 </a:solidFill>
@@ -17754,7 +17315,7 @@
               <a:t>start+32</a:t>
             </a:r>
             <a:r>
-              <a:rPr lang="zh-TW" altLang="en-US" dirty="0" smtClean="0"/>
+              <a:rPr lang="zh-TW" altLang="en-US" dirty="0"/>
               <a:t>；也就是所有註標的位置都可以透過此公式很快的決定。</a:t>
             </a:r>
           </a:p>
@@ -17770,13 +17331,6 @@
   <p:clrMapOvr>
     <a:masterClrMapping/>
   </p:clrMapOvr>
-  <p:timing>
-    <p:tnLst>
-      <p:par>
-        <p:cTn id="1" dur="indefinite" restart="never" nodeType="tmRoot"/>
-      </p:par>
-    </p:tnLst>
-  </p:timing>
 </p:sld>
 </file>
 
@@ -17839,7 +17393,7 @@
           <a:lstStyle/>
           <a:p>
             <a:r>
-              <a:rPr lang="zh-TW" altLang="en-US" dirty="0" smtClean="0"/>
+              <a:rPr lang="zh-TW" altLang="en-US" dirty="0"/>
               <a:t>在</a:t>
             </a:r>
             <a:r>
@@ -17882,13 +17436,6 @@
   <p:clrMapOvr>
     <a:masterClrMapping/>
   </p:clrMapOvr>
-  <p:timing>
-    <p:tnLst>
-      <p:par>
-        <p:cTn id="1" dur="indefinite" restart="never" nodeType="tmRoot"/>
-      </p:par>
-    </p:tnLst>
-  </p:timing>
 </p:sld>
 </file>
 
@@ -17925,11 +17472,11 @@
           <a:lstStyle/>
           <a:p>
             <a:r>
-              <a:rPr lang="en-US" altLang="zh-TW" smtClean="0"/>
+              <a:rPr lang="en-US" altLang="zh-TW"/>
               <a:t>10-1 </a:t>
             </a:r>
             <a:r>
-              <a:rPr lang="zh-TW" altLang="en-US" smtClean="0"/>
+              <a:rPr lang="zh-TW" altLang="en-US"/>
               <a:t>陣列</a:t>
             </a:r>
             <a:endParaRPr lang="zh-TW" altLang="en-US" dirty="0"/>
@@ -17952,43 +17499,43 @@
           <a:lstStyle/>
           <a:p>
             <a:r>
-              <a:rPr lang="zh-TW" altLang="en-US" smtClean="0"/>
+              <a:rPr lang="zh-TW" altLang="en-US"/>
               <a:t>假設班上只有</a:t>
             </a:r>
             <a:r>
-              <a:rPr lang="en-US" altLang="zh-TW" smtClean="0"/>
+              <a:rPr lang="en-US" altLang="zh-TW"/>
               <a:t>5</a:t>
             </a:r>
             <a:r>
-              <a:rPr lang="zh-TW" altLang="en-US" smtClean="0"/>
+              <a:rPr lang="zh-TW" altLang="en-US"/>
               <a:t>名同學，學號分別是</a:t>
             </a:r>
             <a:r>
-              <a:rPr lang="en-US" altLang="zh-TW" smtClean="0"/>
+              <a:rPr lang="en-US" altLang="zh-TW"/>
               <a:t>1</a:t>
             </a:r>
             <a:r>
-              <a:rPr lang="zh-TW" altLang="en-US" smtClean="0"/>
+              <a:rPr lang="zh-TW" altLang="en-US"/>
               <a:t>號到</a:t>
             </a:r>
             <a:r>
-              <a:rPr lang="en-US" altLang="zh-TW" smtClean="0"/>
+              <a:rPr lang="en-US" altLang="zh-TW"/>
               <a:t>5</a:t>
             </a:r>
             <a:r>
-              <a:rPr lang="zh-TW" altLang="en-US" smtClean="0"/>
+              <a:rPr lang="zh-TW" altLang="en-US"/>
               <a:t>號，且數學成績是整數，在</a:t>
             </a:r>
             <a:r>
-              <a:rPr lang="en-US" altLang="zh-TW" smtClean="0"/>
+              <a:rPr lang="en-US" altLang="zh-TW"/>
               <a:t>C</a:t>
             </a:r>
             <a:r>
-              <a:rPr lang="zh-TW" altLang="en-US" smtClean="0"/>
+              <a:rPr lang="zh-TW" altLang="en-US"/>
               <a:t>裡面可以如下宣告一個整數陣列叫作</a:t>
             </a:r>
             <a:r>
-              <a:rPr lang="en-US" altLang="zh-TW" smtClean="0">
+              <a:rPr lang="en-US" altLang="zh-TW">
                 <a:solidFill>
                   <a:srgbClr val="0070C0"/>
                 </a:solidFill>
@@ -17996,7 +17543,7 @@
               <a:t>score</a:t>
             </a:r>
             <a:r>
-              <a:rPr lang="zh-TW" altLang="en-US" smtClean="0"/>
+              <a:rPr lang="zh-TW" altLang="en-US"/>
               <a:t>，來儲存這些資料。</a:t>
             </a:r>
             <a:endParaRPr lang="zh-TW" altLang="en-US" dirty="0"/>
@@ -18073,13 +17620,6 @@
   <p:clrMapOvr>
     <a:masterClrMapping/>
   </p:clrMapOvr>
-  <p:timing>
-    <p:tnLst>
-      <p:par>
-        <p:cTn id="1" dur="indefinite" restart="never" nodeType="tmRoot"/>
-      </p:par>
-    </p:tnLst>
-  </p:timing>
 </p:sld>
 </file>
 
@@ -18116,14 +17656,13 @@
           <a:lstStyle/>
           <a:p>
             <a:r>
-              <a:rPr lang="en-US" altLang="zh-TW" dirty="0" smtClean="0"/>
+              <a:rPr lang="en-US" altLang="zh-TW" dirty="0"/>
               <a:t>10-1 </a:t>
             </a:r>
             <a:r>
-              <a:rPr lang="zh-TW" altLang="en-US" dirty="0" smtClean="0"/>
+              <a:rPr lang="zh-TW" altLang="en-US" dirty="0"/>
               <a:t>陣列</a:t>
             </a:r>
-            <a:endParaRPr lang="zh-TW" altLang="en-US" dirty="0"/>
           </a:p>
         </p:txBody>
       </p:sp>
@@ -18143,15 +17682,15 @@
           <a:lstStyle/>
           <a:p>
             <a:r>
-              <a:rPr lang="en-US" altLang="zh-TW" dirty="0" smtClean="0"/>
+              <a:rPr lang="en-US" altLang="zh-TW" dirty="0"/>
               <a:t>FORTRAN</a:t>
             </a:r>
             <a:r>
-              <a:rPr lang="zh-TW" altLang="en-US" dirty="0" smtClean="0"/>
+              <a:rPr lang="zh-TW" altLang="en-US" dirty="0"/>
               <a:t>語言採用</a:t>
             </a:r>
             <a:r>
-              <a:rPr lang="zh-TW" altLang="en-US" dirty="0" smtClean="0">
+              <a:rPr lang="zh-TW" altLang="en-US" dirty="0">
                 <a:solidFill>
                   <a:srgbClr val="C00000"/>
                 </a:solidFill>
@@ -18159,14 +17698,13 @@
               <a:t>「以欄為主」</a:t>
             </a:r>
             <a:r>
-              <a:rPr lang="en-US" altLang="zh-TW" dirty="0" smtClean="0"/>
+              <a:rPr lang="en-US" altLang="zh-TW" dirty="0"/>
               <a:t>(column major)</a:t>
             </a:r>
             <a:r>
-              <a:rPr lang="zh-TW" altLang="en-US" dirty="0" smtClean="0"/>
+              <a:rPr lang="zh-TW" altLang="en-US" dirty="0"/>
               <a:t>，也就是先存放好第一「欄」的元素，接著再存放第二「欄」，依此類推。</a:t>
             </a:r>
-            <a:endParaRPr lang="zh-TW" altLang="en-US" dirty="0"/>
           </a:p>
         </p:txBody>
       </p:sp>
@@ -18180,13 +17718,6 @@
   <p:clrMapOvr>
     <a:masterClrMapping/>
   </p:clrMapOvr>
-  <p:timing>
-    <p:tnLst>
-      <p:par>
-        <p:cTn id="1" dur="indefinite" restart="never" nodeType="tmRoot"/>
-      </p:par>
-    </p:tnLst>
-  </p:timing>
 </p:sld>
 </file>
 
@@ -18328,13 +17859,6 @@
   <p:clrMapOvr>
     <a:masterClrMapping/>
   </p:clrMapOvr>
-  <p:timing>
-    <p:tnLst>
-      <p:par>
-        <p:cTn id="1" dur="indefinite" restart="never" nodeType="tmRoot"/>
-      </p:par>
-    </p:tnLst>
-  </p:timing>
 </p:sld>
 </file>
 
@@ -18371,14 +17895,13 @@
           <a:lstStyle/>
           <a:p>
             <a:r>
-              <a:rPr lang="en-US" altLang="zh-TW" dirty="0" smtClean="0"/>
+              <a:rPr lang="en-US" altLang="zh-TW" dirty="0"/>
               <a:t>10-1 </a:t>
             </a:r>
             <a:r>
-              <a:rPr lang="zh-TW" altLang="en-US" dirty="0" smtClean="0"/>
+              <a:rPr lang="zh-TW" altLang="en-US" dirty="0"/>
               <a:t>陣列</a:t>
             </a:r>
-            <a:endParaRPr lang="zh-TW" altLang="en-US" dirty="0"/>
           </a:p>
         </p:txBody>
       </p:sp>
@@ -18398,24 +17921,24 @@
           <a:lstStyle/>
           <a:p>
             <a:r>
-              <a:rPr lang="zh-TW" altLang="en-US" smtClean="0"/>
+              <a:rPr lang="zh-TW" altLang="en-US"/>
               <a:t>以二維陣列</a:t>
             </a:r>
             <a:r>
-              <a:rPr lang="en-US" altLang="zh-TW" smtClean="0"/>
+              <a:rPr lang="en-US" altLang="zh-TW"/>
               <a:t>scores</a:t>
             </a:r>
             <a:r>
-              <a:rPr lang="zh-TW" altLang="en-US" smtClean="0"/>
+              <a:rPr lang="zh-TW" altLang="en-US"/>
               <a:t>為例，「以欄為主」公式如下所示：</a:t>
             </a:r>
-            <a:endParaRPr lang="en-US" altLang="zh-TW" smtClean="0"/>
-          </a:p>
-          <a:p>
-            <a:endParaRPr lang="en-US" altLang="zh-TW" smtClean="0"/>
-          </a:p>
-          <a:p>
-            <a:endParaRPr lang="en-US" altLang="zh-TW" smtClean="0"/>
+            <a:endParaRPr lang="en-US" altLang="zh-TW"/>
+          </a:p>
+          <a:p>
+            <a:endParaRPr lang="en-US" altLang="zh-TW"/>
+          </a:p>
+          <a:p>
+            <a:endParaRPr lang="en-US" altLang="zh-TW"/>
           </a:p>
           <a:p>
             <a:endParaRPr lang="zh-TW" altLang="en-US" dirty="0"/>
@@ -18492,13 +18015,6 @@
   <p:clrMapOvr>
     <a:masterClrMapping/>
   </p:clrMapOvr>
-  <p:timing>
-    <p:tnLst>
-      <p:par>
-        <p:cTn id="1" dur="indefinite" restart="never" nodeType="tmRoot"/>
-      </p:par>
-    </p:tnLst>
-  </p:timing>
 </p:sld>
 </file>
 
@@ -18594,7 +18110,7 @@
             </a:r>
             <a:r>
               <a:rPr lang="en-US" altLang="zh-TW" dirty="0"/>
-              <a:t>scores[1][3] </a:t>
+              <a:t>scores[1][3]</a:t>
             </a:r>
             <a:r>
               <a:rPr lang="zh-TW" altLang="en-US" dirty="0"/>
@@ -18628,13 +18144,6 @@
   <p:clrMapOvr>
     <a:masterClrMapping/>
   </p:clrMapOvr>
-  <p:timing>
-    <p:tnLst>
-      <p:par>
-        <p:cTn id="1" dur="indefinite" restart="never" nodeType="tmRoot"/>
-      </p:par>
-    </p:tnLst>
-  </p:timing>
 </p:sld>
 </file>
 
@@ -18671,14 +18180,13 @@
           <a:lstStyle/>
           <a:p>
             <a:r>
-              <a:rPr lang="en-US" altLang="zh-TW" dirty="0" smtClean="0"/>
+              <a:rPr lang="en-US" altLang="zh-TW" dirty="0"/>
               <a:t>10-2 </a:t>
             </a:r>
             <a:r>
-              <a:rPr lang="zh-TW" altLang="en-US" dirty="0" smtClean="0"/>
+              <a:rPr lang="zh-TW" altLang="en-US" dirty="0"/>
               <a:t>鏈結串列</a:t>
             </a:r>
-            <a:endParaRPr lang="zh-TW" altLang="en-US" dirty="0"/>
           </a:p>
         </p:txBody>
       </p:sp>
@@ -18698,10 +18206,10 @@
           <a:lstStyle/>
           <a:p>
             <a:r>
-              <a:rPr lang="zh-TW" altLang="en-US" dirty="0" smtClean="0"/>
+              <a:rPr lang="zh-TW" altLang="en-US" dirty="0"/>
               <a:t>可以利用指標建立鏈結串列，來表示不確定大小或會動態增減的資料。</a:t>
             </a:r>
-            <a:endParaRPr lang="en-US" altLang="zh-TW" dirty="0" smtClean="0"/>
+            <a:endParaRPr lang="en-US" altLang="zh-TW" dirty="0"/>
           </a:p>
           <a:p>
             <a:endParaRPr lang="zh-TW" altLang="en-US" dirty="0"/>
@@ -18718,13 +18226,6 @@
   <p:clrMapOvr>
     <a:masterClrMapping/>
   </p:clrMapOvr>
-  <p:timing>
-    <p:tnLst>
-      <p:par>
-        <p:cTn id="1" dur="indefinite" restart="never" nodeType="tmRoot"/>
-      </p:par>
-    </p:tnLst>
-  </p:timing>
 </p:sld>
 </file>
 
@@ -18856,11 +18357,11 @@
           <a:lstStyle/>
           <a:p>
             <a:r>
-              <a:rPr lang="en-US" altLang="zh-TW" smtClean="0"/>
+              <a:rPr lang="en-US" altLang="zh-TW"/>
               <a:t>10-2 </a:t>
             </a:r>
             <a:r>
-              <a:rPr lang="zh-TW" altLang="en-US" smtClean="0"/>
+              <a:rPr lang="zh-TW" altLang="en-US"/>
               <a:t>鏈結串列</a:t>
             </a:r>
             <a:endParaRPr lang="zh-TW" altLang="en-US" dirty="0"/>
@@ -18883,22 +18384,18 @@
           <a:lstStyle/>
           <a:p>
             <a:r>
-              <a:rPr lang="zh-TW" altLang="en-US" dirty="0" smtClean="0"/>
-              <a:t>鏈結串列是由一個個節點所組成的，繼續使用在</a:t>
-            </a:r>
-            <a:r>
-              <a:rPr lang="zh-TW" altLang="en-US" dirty="0" smtClean="0"/>
-              <a:t>第</a:t>
-            </a:r>
-            <a:r>
-              <a:rPr lang="en-US" altLang="zh-TW" dirty="0" smtClean="0"/>
+              <a:rPr lang="zh-TW" altLang="en-US" dirty="0"/>
+              <a:t>鏈結串列是由一個個節點所組成的，繼續使用在第</a:t>
+            </a:r>
+            <a:r>
+              <a:rPr lang="en-US" altLang="zh-TW" dirty="0"/>
               <a:t>9-2</a:t>
             </a:r>
             <a:r>
-              <a:rPr lang="zh-TW" altLang="en-US" dirty="0" smtClean="0"/>
+              <a:rPr lang="zh-TW" altLang="en-US" dirty="0"/>
               <a:t>節的範例，其節點的資料型態宣告如下：</a:t>
             </a:r>
-            <a:endParaRPr lang="en-US" altLang="zh-TW" dirty="0" smtClean="0"/>
+            <a:endParaRPr lang="en-US" altLang="zh-TW" dirty="0"/>
           </a:p>
           <a:p>
             <a:endParaRPr lang="zh-TW" altLang="en-US" dirty="0"/>
@@ -18975,13 +18472,6 @@
   <p:clrMapOvr>
     <a:masterClrMapping/>
   </p:clrMapOvr>
-  <p:timing>
-    <p:tnLst>
-      <p:par>
-        <p:cTn id="1" dur="indefinite" restart="never" nodeType="tmRoot"/>
-      </p:par>
-    </p:tnLst>
-  </p:timing>
 </p:sld>
 </file>
 
@@ -19018,7 +18508,7 @@
           <a:lstStyle/>
           <a:p>
             <a:r>
-              <a:rPr lang="en-US" altLang="zh-TW" dirty="0" smtClean="0"/>
+              <a:rPr lang="en-US" altLang="zh-TW" dirty="0"/>
               <a:t>10-2 </a:t>
             </a:r>
             <a:r>
@@ -19046,19 +18536,11 @@
           <a:lstStyle/>
           <a:p>
             <a:r>
-              <a:rPr lang="zh-TW" altLang="en-US" dirty="0" smtClean="0"/>
-              <a:t>可以</a:t>
-            </a:r>
-            <a:r>
-              <a:rPr lang="zh-TW" altLang="en-US" dirty="0"/>
-              <a:t>根據此資料型態宣告一個指標</a:t>
-            </a:r>
-            <a:r>
-              <a:rPr lang="zh-TW" altLang="en-US" dirty="0" smtClean="0"/>
-              <a:t>變數</a:t>
-            </a:r>
-            <a:r>
-              <a:rPr lang="en-US" altLang="zh-TW" dirty="0" smtClean="0">
+              <a:rPr lang="zh-TW" altLang="en-US" dirty="0"/>
+              <a:t>可以根據此資料型態宣告一個指標變數</a:t>
+            </a:r>
+            <a:r>
+              <a:rPr lang="en-US" altLang="zh-TW" dirty="0">
                 <a:solidFill>
                   <a:srgbClr val="0070C0"/>
                 </a:solidFill>
@@ -19066,25 +18548,17 @@
               <a:t>front</a:t>
             </a:r>
             <a:r>
-              <a:rPr lang="zh-TW" altLang="en-US" dirty="0" smtClean="0"/>
-              <a:t>，</a:t>
-            </a:r>
-            <a:r>
-              <a:rPr lang="zh-TW" altLang="en-US" dirty="0"/>
-              <a:t>用來指到一個鏈結串列的起始節點</a:t>
-            </a:r>
-            <a:r>
-              <a:rPr lang="zh-TW" altLang="en-US" dirty="0" smtClean="0"/>
-              <a:t>。</a:t>
-            </a:r>
-            <a:endParaRPr lang="en-US" altLang="zh-TW" dirty="0" smtClean="0"/>
-          </a:p>
-          <a:p>
+              <a:rPr lang="zh-TW" altLang="en-US" dirty="0"/>
+              <a:t>，用來指到一個鏈結串列的起始節點。</a:t>
+            </a:r>
             <a:endParaRPr lang="en-US" altLang="zh-TW" dirty="0"/>
           </a:p>
           <a:p>
-            <a:r>
-              <a:rPr lang="zh-TW" altLang="en-US" dirty="0" smtClean="0"/>
+            <a:endParaRPr lang="en-US" altLang="zh-TW" dirty="0"/>
+          </a:p>
+          <a:p>
+            <a:r>
+              <a:rPr lang="zh-TW" altLang="en-US" dirty="0"/>
               <a:t>根據</a:t>
             </a:r>
             <a:r>
@@ -19093,14 +18567,10 @@
             </a:r>
             <a:r>
               <a:rPr lang="zh-TW" altLang="en-US" dirty="0"/>
-              <a:t>語言的語法，若在宣告一個變數時前面加上符號「*」，則該變數就是指標變數，換句話說，</a:t>
-            </a:r>
-            <a:r>
-              <a:rPr lang="zh-TW" altLang="en-US" dirty="0" smtClean="0"/>
-              <a:t>變數</a:t>
-            </a:r>
-            <a:r>
-              <a:rPr lang="en-US" altLang="zh-TW" dirty="0" smtClean="0">
+              <a:t>語言的語法，若在宣告一個變數時前面加上符號「*」，則該變數就是指標變數，換句話說，變數</a:t>
+            </a:r>
+            <a:r>
+              <a:rPr lang="en-US" altLang="zh-TW" dirty="0">
                 <a:solidFill>
                   <a:srgbClr val="0070C0"/>
                 </a:solidFill>
@@ -19108,12 +18578,8 @@
               <a:t>front</a:t>
             </a:r>
             <a:r>
-              <a:rPr lang="zh-TW" altLang="en-US" dirty="0" smtClean="0"/>
-              <a:t>記錄</a:t>
-            </a:r>
-            <a:r>
-              <a:rPr lang="zh-TW" altLang="en-US" dirty="0"/>
-              <a:t>的值會是起始節點在記憶體裡的位置。</a:t>
+              <a:rPr lang="zh-TW" altLang="en-US" dirty="0"/>
+              <a:t>記錄的值會是起始節點在記憶體裡的位置。</a:t>
             </a:r>
           </a:p>
         </p:txBody>
@@ -19227,13 +18693,6 @@
   <p:clrMapOvr>
     <a:masterClrMapping/>
   </p:clrMapOvr>
-  <p:timing>
-    <p:tnLst>
-      <p:par>
-        <p:cTn id="1" dur="indefinite" restart="never" nodeType="tmRoot"/>
-      </p:par>
-    </p:tnLst>
-  </p:timing>
 </p:sld>
 </file>
 
@@ -19270,7 +18729,7 @@
           <a:lstStyle/>
           <a:p>
             <a:r>
-              <a:rPr lang="en-US" altLang="zh-TW" dirty="0" smtClean="0"/>
+              <a:rPr lang="en-US" altLang="zh-TW" dirty="0"/>
               <a:t>10-2 </a:t>
             </a:r>
             <a:r>
@@ -19303,27 +18762,27 @@
           <a:lstStyle/>
           <a:p>
             <a:r>
-              <a:rPr lang="zh-TW" altLang="en-US" dirty="0" smtClean="0"/>
+              <a:rPr lang="zh-TW" altLang="en-US" dirty="0"/>
               <a:t>利用運算式「*</a:t>
             </a:r>
             <a:r>
-              <a:rPr lang="en-US" altLang="zh-TW" dirty="0" smtClean="0"/>
+              <a:rPr lang="en-US" altLang="zh-TW" dirty="0"/>
               <a:t>front</a:t>
             </a:r>
             <a:r>
-              <a:rPr lang="zh-TW" altLang="en-US" dirty="0" smtClean="0"/>
+              <a:rPr lang="zh-TW" altLang="en-US" dirty="0"/>
               <a:t>」指到該節點，「*</a:t>
             </a:r>
             <a:r>
-              <a:rPr lang="en-US" altLang="zh-TW" dirty="0" err="1" smtClean="0"/>
+              <a:rPr lang="en-US" altLang="zh-TW" dirty="0" err="1"/>
               <a:t>front.data</a:t>
             </a:r>
             <a:r>
-              <a:rPr lang="zh-TW" altLang="en-US" dirty="0" smtClean="0"/>
+              <a:rPr lang="zh-TW" altLang="en-US" dirty="0"/>
               <a:t>」會傳回該節點在</a:t>
             </a:r>
             <a:r>
-              <a:rPr lang="en-US" altLang="zh-TW" dirty="0" smtClean="0">
+              <a:rPr lang="en-US" altLang="zh-TW" dirty="0">
                 <a:solidFill>
                   <a:srgbClr val="0070C0"/>
                 </a:solidFill>
@@ -19331,26 +18790,26 @@
               <a:t>data</a:t>
             </a:r>
             <a:r>
-              <a:rPr lang="zh-TW" altLang="en-US" dirty="0" smtClean="0"/>
+              <a:rPr lang="zh-TW" altLang="en-US" dirty="0"/>
               <a:t>欄位的值。</a:t>
             </a:r>
-            <a:endParaRPr lang="en-US" altLang="zh-TW" dirty="0" smtClean="0"/>
-          </a:p>
-          <a:p>
-            <a:r>
-              <a:rPr lang="zh-TW" altLang="en-US" dirty="0" smtClean="0"/>
+            <a:endParaRPr lang="en-US" altLang="zh-TW" dirty="0"/>
+          </a:p>
+          <a:p>
+            <a:r>
+              <a:rPr lang="zh-TW" altLang="en-US" dirty="0"/>
               <a:t>下圖的鏈結串列為例，「*</a:t>
             </a:r>
             <a:r>
-              <a:rPr lang="en-US" altLang="zh-TW" dirty="0" err="1" smtClean="0"/>
+              <a:rPr lang="en-US" altLang="zh-TW" dirty="0" err="1"/>
               <a:t>front.data</a:t>
             </a:r>
             <a:r>
-              <a:rPr lang="zh-TW" altLang="en-US" dirty="0" smtClean="0"/>
+              <a:rPr lang="zh-TW" altLang="en-US" dirty="0"/>
               <a:t>」的值為</a:t>
             </a:r>
             <a:r>
-              <a:rPr lang="en-US" altLang="zh-TW" dirty="0" smtClean="0">
+              <a:rPr lang="en-US" altLang="zh-TW" dirty="0">
                 <a:solidFill>
                   <a:srgbClr val="0070C0"/>
                 </a:solidFill>
@@ -19358,10 +18817,9 @@
               <a:t>3</a:t>
             </a:r>
             <a:r>
-              <a:rPr lang="zh-TW" altLang="en-US" dirty="0" smtClean="0"/>
+              <a:rPr lang="zh-TW" altLang="en-US" dirty="0"/>
               <a:t>。</a:t>
             </a:r>
-            <a:endParaRPr lang="zh-TW" altLang="en-US" dirty="0"/>
           </a:p>
         </p:txBody>
       </p:sp>
@@ -19402,16 +18860,12 @@
           <a:lstStyle/>
           <a:p>
             <a:r>
-              <a:rPr lang="zh-TW" altLang="en-US" b="1" dirty="0" smtClean="0">
+              <a:rPr lang="zh-TW" altLang="en-US" b="1" dirty="0">
                 <a:latin typeface="微軟正黑體" pitchFamily="34" charset="-120"/>
                 <a:ea typeface="微軟正黑體" pitchFamily="34" charset="-120"/>
               </a:rPr>
               <a:t>鏈結串列範例</a:t>
             </a:r>
-            <a:endParaRPr lang="zh-TW" altLang="en-US" b="1" dirty="0">
-              <a:latin typeface="微軟正黑體" pitchFamily="34" charset="-120"/>
-              <a:ea typeface="微軟正黑體" pitchFamily="34" charset="-120"/>
-            </a:endParaRPr>
           </a:p>
         </p:txBody>
       </p:sp>
@@ -19474,13 +18928,6 @@
   <p:clrMapOvr>
     <a:masterClrMapping/>
   </p:clrMapOvr>
-  <p:timing>
-    <p:tnLst>
-      <p:par>
-        <p:cTn id="1" dur="indefinite" restart="never" nodeType="tmRoot"/>
-      </p:par>
-    </p:tnLst>
-  </p:timing>
 </p:sld>
 </file>
 
@@ -19517,7 +18964,7 @@
           <a:lstStyle/>
           <a:p>
             <a:r>
-              <a:rPr lang="en-US" altLang="zh-TW" dirty="0" smtClean="0"/>
+              <a:rPr lang="en-US" altLang="zh-TW" dirty="0"/>
               <a:t>10-2 </a:t>
             </a:r>
             <a:r>
@@ -19544,14 +18991,10 @@
           <a:p>
             <a:r>
               <a:rPr lang="zh-TW" altLang="en-US" dirty="0"/>
-              <a:t>另一種寫法是利用</a:t>
-            </a:r>
-            <a:r>
-              <a:rPr lang="zh-TW" altLang="en-US" dirty="0" smtClean="0"/>
-              <a:t>箭頭</a:t>
-            </a:r>
-            <a:r>
-              <a:rPr lang="en-US" altLang="zh-TW" dirty="0" smtClean="0">
+              <a:t>另一種寫法是利用箭頭</a:t>
+            </a:r>
+            <a:r>
+              <a:rPr lang="en-US" altLang="zh-TW" dirty="0">
                 <a:solidFill>
                   <a:srgbClr val="0070C0"/>
                 </a:solidFill>
@@ -19559,41 +19002,29 @@
               <a:t>-&gt;</a:t>
             </a:r>
             <a:r>
-              <a:rPr lang="zh-TW" altLang="en-US" dirty="0" smtClean="0"/>
+              <a:rPr lang="zh-TW" altLang="en-US" dirty="0"/>
               <a:t>，也就是</a:t>
             </a:r>
-            <a:r>
-              <a:rPr lang="en-US" altLang="zh-TW" dirty="0" smtClean="0"/>
-              <a:t/>
-            </a:r>
             <a:br>
-              <a:rPr lang="en-US" altLang="zh-TW" dirty="0" smtClean="0"/>
+              <a:rPr lang="en-US" altLang="zh-TW" dirty="0"/>
             </a:br>
             <a:r>
-              <a:rPr lang="en-US" altLang="zh-TW" dirty="0" smtClean="0"/>
-              <a:t>front-</a:t>
-            </a:r>
-            <a:r>
               <a:rPr lang="en-US" altLang="zh-TW" dirty="0"/>
-              <a:t>&gt;</a:t>
-            </a:r>
-            <a:r>
-              <a:rPr lang="en-US" altLang="zh-TW" dirty="0" smtClean="0"/>
-              <a:t>data</a:t>
-            </a:r>
-            <a:r>
-              <a:rPr lang="zh-TW" altLang="en-US" dirty="0" smtClean="0"/>
+              <a:t>front-&gt;data</a:t>
+            </a:r>
+            <a:r>
+              <a:rPr lang="zh-TW" altLang="en-US" dirty="0"/>
               <a:t>。 </a:t>
             </a:r>
-            <a:endParaRPr lang="en-US" altLang="zh-TW" dirty="0" smtClean="0"/>
-          </a:p>
-          <a:p>
-            <a:r>
-              <a:rPr lang="zh-TW" altLang="en-US" dirty="0" smtClean="0"/>
+            <a:endParaRPr lang="en-US" altLang="zh-TW" dirty="0"/>
+          </a:p>
+          <a:p>
+            <a:r>
+              <a:rPr lang="zh-TW" altLang="en-US" dirty="0"/>
               <a:t>注意，</a:t>
             </a:r>
             <a:r>
-              <a:rPr lang="en-US" altLang="zh-TW" dirty="0" smtClean="0">
+              <a:rPr lang="en-US" altLang="zh-TW" dirty="0">
                 <a:solidFill>
                   <a:srgbClr val="0070C0"/>
                 </a:solidFill>
@@ -19601,7 +19032,7 @@
               <a:t>null</a:t>
             </a:r>
             <a:r>
-              <a:rPr lang="zh-TW" altLang="en-US" dirty="0" smtClean="0"/>
+              <a:rPr lang="zh-TW" altLang="en-US" dirty="0"/>
               <a:t>在</a:t>
             </a:r>
             <a:r>
@@ -19628,13 +19059,6 @@
   <p:clrMapOvr>
     <a:masterClrMapping/>
   </p:clrMapOvr>
-  <p:timing>
-    <p:tnLst>
-      <p:par>
-        <p:cTn id="1" dur="indefinite" restart="never" nodeType="tmRoot"/>
-      </p:par>
-    </p:tnLst>
-  </p:timing>
 </p:sld>
 </file>
 
@@ -19671,7 +19095,7 @@
           <a:lstStyle/>
           <a:p>
             <a:r>
-              <a:rPr lang="en-US" altLang="zh-TW" dirty="0" smtClean="0"/>
+              <a:rPr lang="en-US" altLang="zh-TW" dirty="0"/>
               <a:t>10-1 </a:t>
             </a:r>
             <a:r>
@@ -19697,11 +19121,11 @@
           <a:lstStyle/>
           <a:p>
             <a:r>
-              <a:rPr lang="zh-TW" altLang="en-US" dirty="0" smtClean="0"/>
+              <a:rPr lang="zh-TW" altLang="en-US" dirty="0"/>
               <a:t>若是這些同學的成績分別是</a:t>
             </a:r>
             <a:r>
-              <a:rPr lang="en-US" altLang="zh-TW" dirty="0" smtClean="0">
+              <a:rPr lang="en-US" altLang="zh-TW" dirty="0">
                 <a:solidFill>
                   <a:srgbClr val="0070C0"/>
                 </a:solidFill>
@@ -19709,7 +19133,7 @@
               <a:t>80</a:t>
             </a:r>
             <a:r>
-              <a:rPr lang="zh-TW" altLang="en-US" dirty="0" smtClean="0">
+              <a:rPr lang="zh-TW" altLang="en-US" dirty="0">
                 <a:solidFill>
                   <a:srgbClr val="0070C0"/>
                 </a:solidFill>
@@ -19717,7 +19141,7 @@
               <a:t>、</a:t>
             </a:r>
             <a:r>
-              <a:rPr lang="en-US" altLang="zh-TW" dirty="0" smtClean="0">
+              <a:rPr lang="en-US" altLang="zh-TW" dirty="0">
                 <a:solidFill>
                   <a:srgbClr val="0070C0"/>
                 </a:solidFill>
@@ -19725,7 +19149,7 @@
               <a:t>70</a:t>
             </a:r>
             <a:r>
-              <a:rPr lang="zh-TW" altLang="en-US" dirty="0" smtClean="0">
+              <a:rPr lang="zh-TW" altLang="en-US" dirty="0">
                 <a:solidFill>
                   <a:srgbClr val="0070C0"/>
                 </a:solidFill>
@@ -19733,7 +19157,7 @@
               <a:t>、</a:t>
             </a:r>
             <a:r>
-              <a:rPr lang="en-US" altLang="zh-TW" dirty="0" smtClean="0">
+              <a:rPr lang="en-US" altLang="zh-TW" dirty="0">
                 <a:solidFill>
                   <a:srgbClr val="0070C0"/>
                 </a:solidFill>
@@ -19741,7 +19165,7 @@
               <a:t>60</a:t>
             </a:r>
             <a:r>
-              <a:rPr lang="zh-TW" altLang="en-US" dirty="0" smtClean="0">
+              <a:rPr lang="zh-TW" altLang="en-US" dirty="0">
                 <a:solidFill>
                   <a:srgbClr val="0070C0"/>
                 </a:solidFill>
@@ -19749,7 +19173,7 @@
               <a:t>、</a:t>
             </a:r>
             <a:r>
-              <a:rPr lang="en-US" altLang="zh-TW" dirty="0" smtClean="0">
+              <a:rPr lang="en-US" altLang="zh-TW" dirty="0">
                 <a:solidFill>
                   <a:srgbClr val="0070C0"/>
                 </a:solidFill>
@@ -19757,7 +19181,7 @@
               <a:t>90</a:t>
             </a:r>
             <a:r>
-              <a:rPr lang="zh-TW" altLang="en-US" dirty="0" smtClean="0">
+              <a:rPr lang="zh-TW" altLang="en-US" dirty="0">
                 <a:solidFill>
                   <a:srgbClr val="0070C0"/>
                 </a:solidFill>
@@ -19765,7 +19189,7 @@
               <a:t>、</a:t>
             </a:r>
             <a:r>
-              <a:rPr lang="en-US" altLang="zh-TW" dirty="0" smtClean="0">
+              <a:rPr lang="en-US" altLang="zh-TW" dirty="0">
                 <a:solidFill>
                   <a:srgbClr val="0070C0"/>
                 </a:solidFill>
@@ -19773,7 +19197,7 @@
               <a:t>95</a:t>
             </a:r>
             <a:r>
-              <a:rPr lang="zh-TW" altLang="en-US" dirty="0" smtClean="0">
+              <a:rPr lang="zh-TW" altLang="en-US" dirty="0">
                 <a:solidFill>
                   <a:srgbClr val="0070C0"/>
                 </a:solidFill>
@@ -19781,19 +19205,19 @@
               <a:t>，</a:t>
             </a:r>
             <a:r>
-              <a:rPr lang="zh-TW" altLang="en-US" dirty="0" smtClean="0"/>
+              <a:rPr lang="zh-TW" altLang="en-US" dirty="0"/>
               <a:t>可以用下列的</a:t>
             </a:r>
             <a:r>
-              <a:rPr lang="en-US" altLang="zh-TW" dirty="0" smtClean="0"/>
+              <a:rPr lang="en-US" altLang="zh-TW" dirty="0"/>
               <a:t>C</a:t>
             </a:r>
             <a:r>
-              <a:rPr lang="zh-TW" altLang="en-US" dirty="0" smtClean="0"/>
+              <a:rPr lang="zh-TW" altLang="en-US" dirty="0"/>
               <a:t>指令將其指定到陣列裡面，注意到學號</a:t>
             </a:r>
             <a:r>
-              <a:rPr lang="en-US" altLang="zh-TW" dirty="0" smtClean="0">
+              <a:rPr lang="en-US" altLang="zh-TW" dirty="0">
                 <a:solidFill>
                   <a:srgbClr val="0070C0"/>
                 </a:solidFill>
@@ -19801,11 +19225,11 @@
               <a:t>1</a:t>
             </a:r>
             <a:r>
-              <a:rPr lang="zh-TW" altLang="en-US" dirty="0" smtClean="0"/>
+              <a:rPr lang="zh-TW" altLang="en-US" dirty="0"/>
               <a:t>的同學以註標</a:t>
             </a:r>
             <a:r>
-              <a:rPr lang="en-US" altLang="zh-TW" dirty="0" smtClean="0">
+              <a:rPr lang="en-US" altLang="zh-TW" dirty="0">
                 <a:solidFill>
                   <a:srgbClr val="0070C0"/>
                 </a:solidFill>
@@ -19813,11 +19237,11 @@
               <a:t>0</a:t>
             </a:r>
             <a:r>
-              <a:rPr lang="zh-TW" altLang="en-US" dirty="0" smtClean="0"/>
+              <a:rPr lang="zh-TW" altLang="en-US" dirty="0"/>
               <a:t>表示，學號</a:t>
             </a:r>
             <a:r>
-              <a:rPr lang="en-US" altLang="zh-TW" dirty="0" smtClean="0">
+              <a:rPr lang="en-US" altLang="zh-TW" dirty="0">
                 <a:solidFill>
                   <a:srgbClr val="0070C0"/>
                 </a:solidFill>
@@ -19825,11 +19249,11 @@
               <a:t>2</a:t>
             </a:r>
             <a:r>
-              <a:rPr lang="zh-TW" altLang="en-US" dirty="0" smtClean="0"/>
+              <a:rPr lang="zh-TW" altLang="en-US" dirty="0"/>
               <a:t>的同學以註標</a:t>
             </a:r>
             <a:r>
-              <a:rPr lang="en-US" altLang="zh-TW" dirty="0" smtClean="0">
+              <a:rPr lang="en-US" altLang="zh-TW" dirty="0">
                 <a:solidFill>
                   <a:srgbClr val="0070C0"/>
                 </a:solidFill>
@@ -19837,10 +19261,9 @@
               <a:t>1</a:t>
             </a:r>
             <a:r>
-              <a:rPr lang="zh-TW" altLang="en-US" dirty="0" smtClean="0"/>
+              <a:rPr lang="zh-TW" altLang="en-US" dirty="0"/>
               <a:t>表示，依此類推。</a:t>
             </a:r>
-            <a:endParaRPr lang="zh-TW" altLang="en-US" dirty="0"/>
           </a:p>
         </p:txBody>
       </p:sp>
@@ -19914,13 +19337,6 @@
   <p:clrMapOvr>
     <a:masterClrMapping/>
   </p:clrMapOvr>
-  <p:timing>
-    <p:tnLst>
-      <p:par>
-        <p:cTn id="1" dur="indefinite" restart="never" nodeType="tmRoot"/>
-      </p:par>
-    </p:tnLst>
-  </p:timing>
 </p:sld>
 </file>
 
@@ -19957,7 +19373,7 @@
           <a:lstStyle/>
           <a:p>
             <a:r>
-              <a:rPr lang="en-US" altLang="zh-TW" dirty="0" smtClean="0"/>
+              <a:rPr lang="en-US" altLang="zh-TW" dirty="0"/>
               <a:t>10-2 </a:t>
             </a:r>
             <a:r>
@@ -19983,11 +19399,11 @@
           <a:lstStyle/>
           <a:p>
             <a:r>
-              <a:rPr lang="zh-TW" altLang="en-US" dirty="0" smtClean="0"/>
+              <a:rPr lang="zh-TW" altLang="en-US" dirty="0"/>
               <a:t>假設現在要把一個新的節點加入到鏈結串列的起點，可以定義一個程序叫作</a:t>
             </a:r>
             <a:r>
-              <a:rPr lang="en-US" altLang="zh-TW" dirty="0" smtClean="0">
+              <a:rPr lang="en-US" altLang="zh-TW" dirty="0">
                 <a:solidFill>
                   <a:srgbClr val="0070C0"/>
                 </a:solidFill>
@@ -19995,10 +19411,9 @@
               <a:t>insert</a:t>
             </a:r>
             <a:r>
-              <a:rPr lang="zh-TW" altLang="en-US" dirty="0" smtClean="0"/>
+              <a:rPr lang="zh-TW" altLang="en-US" dirty="0"/>
               <a:t>如下：</a:t>
             </a:r>
-            <a:endParaRPr lang="zh-TW" altLang="en-US" dirty="0"/>
           </a:p>
         </p:txBody>
       </p:sp>
@@ -20067,13 +19482,6 @@
   <p:clrMapOvr>
     <a:masterClrMapping/>
   </p:clrMapOvr>
-  <p:timing>
-    <p:tnLst>
-      <p:par>
-        <p:cTn id="1" dur="indefinite" restart="never" nodeType="tmRoot"/>
-      </p:par>
-    </p:tnLst>
-  </p:timing>
 </p:sld>
 </file>
 
@@ -20110,7 +19518,7 @@
           <a:lstStyle/>
           <a:p>
             <a:r>
-              <a:rPr lang="en-US" altLang="zh-TW" dirty="0" smtClean="0"/>
+              <a:rPr lang="en-US" altLang="zh-TW" dirty="0"/>
               <a:t>10-2 </a:t>
             </a:r>
             <a:r>
@@ -20143,11 +19551,11 @@
               </a:lnSpc>
             </a:pPr>
             <a:r>
-              <a:rPr lang="zh-TW" altLang="en-US" dirty="0" smtClean="0"/>
+              <a:rPr lang="zh-TW" altLang="en-US" dirty="0"/>
               <a:t>假設要呼叫此程序，在下圖的鏈結串列的前端，加入一個新的節點，其值為</a:t>
             </a:r>
             <a:r>
-              <a:rPr lang="en-US" altLang="zh-TW" dirty="0" smtClean="0">
+              <a:rPr lang="en-US" altLang="zh-TW" dirty="0">
                 <a:solidFill>
                   <a:srgbClr val="0070C0"/>
                 </a:solidFill>
@@ -20155,18 +19563,18 @@
               <a:t>7</a:t>
             </a:r>
             <a:r>
-              <a:rPr lang="zh-TW" altLang="en-US" dirty="0" smtClean="0"/>
+              <a:rPr lang="zh-TW" altLang="en-US" dirty="0"/>
               <a:t>，也就是執行</a:t>
             </a:r>
             <a:r>
-              <a:rPr lang="en-US" altLang="zh-TW" dirty="0" smtClean="0"/>
+              <a:rPr lang="en-US" altLang="zh-TW" dirty="0"/>
               <a:t>insert(front, 7)</a:t>
             </a:r>
             <a:r>
-              <a:rPr lang="zh-TW" altLang="en-US" dirty="0" smtClean="0"/>
+              <a:rPr lang="zh-TW" altLang="en-US" dirty="0"/>
               <a:t>。</a:t>
             </a:r>
-            <a:endParaRPr lang="en-US" altLang="zh-TW" dirty="0" smtClean="0"/>
+            <a:endParaRPr lang="en-US" altLang="zh-TW" dirty="0"/>
           </a:p>
           <a:p>
             <a:pPr>
@@ -20175,7 +19583,7 @@
               </a:lnSpc>
             </a:pPr>
             <a:r>
-              <a:rPr lang="zh-TW" altLang="en-US" dirty="0" smtClean="0"/>
+              <a:rPr lang="zh-TW" altLang="en-US" dirty="0"/>
               <a:t>程式的執行步驟如下：</a:t>
             </a:r>
           </a:p>
@@ -20272,16 +19680,12 @@
           <a:lstStyle/>
           <a:p>
             <a:r>
-              <a:rPr lang="zh-TW" altLang="en-US" b="1" dirty="0" smtClean="0">
+              <a:rPr lang="zh-TW" altLang="en-US" b="1" dirty="0">
                 <a:latin typeface="微軟正黑體" pitchFamily="34" charset="-120"/>
                 <a:ea typeface="微軟正黑體" pitchFamily="34" charset="-120"/>
               </a:rPr>
               <a:t>鏈結串列加入節點範例</a:t>
             </a:r>
-            <a:endParaRPr lang="zh-TW" altLang="en-US" b="1" dirty="0">
-              <a:latin typeface="微軟正黑體" pitchFamily="34" charset="-120"/>
-              <a:ea typeface="微軟正黑體" pitchFamily="34" charset="-120"/>
-            </a:endParaRPr>
           </a:p>
         </p:txBody>
       </p:sp>
@@ -20290,13 +19694,6 @@
   <p:clrMapOvr>
     <a:masterClrMapping/>
   </p:clrMapOvr>
-  <p:timing>
-    <p:tnLst>
-      <p:par>
-        <p:cTn id="1" dur="indefinite" restart="never" nodeType="tmRoot"/>
-      </p:par>
-    </p:tnLst>
-  </p:timing>
 </p:sld>
 </file>
 
@@ -20333,14 +19730,13 @@
           <a:lstStyle/>
           <a:p>
             <a:r>
-              <a:rPr lang="en-US" altLang="zh-TW" dirty="0" smtClean="0"/>
+              <a:rPr lang="en-US" altLang="zh-TW" dirty="0"/>
               <a:t>10-2 </a:t>
             </a:r>
             <a:r>
-              <a:rPr lang="zh-TW" altLang="en-US" dirty="0" smtClean="0"/>
+              <a:rPr lang="zh-TW" altLang="en-US" dirty="0"/>
               <a:t>鏈結串列</a:t>
             </a:r>
-            <a:endParaRPr lang="zh-TW" altLang="en-US" dirty="0"/>
           </a:p>
         </p:txBody>
       </p:sp>
@@ -20361,83 +19757,83 @@
           <a:p>
             <a:pPr lvl="0"/>
             <a:r>
-              <a:rPr lang="zh-TW" altLang="en-US" dirty="0" smtClean="0"/>
+              <a:rPr lang="zh-TW" altLang="en-US" dirty="0"/>
               <a:t>步驟</a:t>
             </a:r>
             <a:r>
-              <a:rPr lang="en-US" altLang="zh-TW" dirty="0" smtClean="0"/>
+              <a:rPr lang="en-US" altLang="zh-TW" dirty="0"/>
               <a:t>1</a:t>
             </a:r>
             <a:r>
-              <a:rPr lang="zh-TW" altLang="en-US" dirty="0" smtClean="0"/>
+              <a:rPr lang="zh-TW" altLang="en-US" dirty="0"/>
               <a:t>：</a:t>
             </a:r>
             <a:r>
-              <a:rPr lang="zh-TW" altLang="zh-TW" dirty="0" smtClean="0"/>
+              <a:rPr lang="zh-TW" altLang="zh-TW" dirty="0"/>
               <a:t>利用</a:t>
             </a:r>
             <a:r>
-              <a:rPr lang="en-US" altLang="zh-TW" dirty="0" err="1" smtClean="0"/>
+              <a:rPr lang="en-US" altLang="zh-TW" dirty="0" err="1"/>
               <a:t>malloc</a:t>
             </a:r>
             <a:r>
-              <a:rPr lang="zh-TW" altLang="zh-TW" dirty="0" smtClean="0"/>
+              <a:rPr lang="zh-TW" altLang="zh-TW" dirty="0"/>
               <a:t>函數建立一個新的節點，並利用局部變數</a:t>
             </a:r>
             <a:r>
-              <a:rPr lang="en-US" altLang="zh-TW" dirty="0" smtClean="0"/>
+              <a:rPr lang="en-US" altLang="zh-TW" dirty="0"/>
               <a:t>temp</a:t>
             </a:r>
             <a:r>
-              <a:rPr lang="zh-TW" altLang="zh-TW" dirty="0" smtClean="0"/>
+              <a:rPr lang="zh-TW" altLang="zh-TW" dirty="0"/>
               <a:t>指到該節點</a:t>
             </a:r>
             <a:r>
-              <a:rPr lang="zh-TW" altLang="en-US" dirty="0" smtClean="0"/>
+              <a:rPr lang="zh-TW" altLang="en-US" dirty="0"/>
               <a:t>。</a:t>
             </a:r>
-            <a:endParaRPr lang="zh-TW" altLang="zh-TW" dirty="0" smtClean="0"/>
+            <a:endParaRPr lang="zh-TW" altLang="zh-TW" dirty="0"/>
           </a:p>
           <a:p>
             <a:pPr lvl="0"/>
             <a:r>
-              <a:rPr lang="zh-TW" altLang="en-US" dirty="0" smtClean="0"/>
+              <a:rPr lang="zh-TW" altLang="en-US" dirty="0"/>
               <a:t>步驟</a:t>
             </a:r>
             <a:r>
-              <a:rPr lang="en-US" altLang="zh-TW" dirty="0" smtClean="0"/>
+              <a:rPr lang="en-US" altLang="zh-TW" dirty="0"/>
               <a:t>2</a:t>
             </a:r>
             <a:r>
-              <a:rPr lang="zh-TW" altLang="en-US" dirty="0" smtClean="0"/>
+              <a:rPr lang="zh-TW" altLang="en-US" dirty="0"/>
               <a:t>：</a:t>
             </a:r>
             <a:r>
-              <a:rPr lang="zh-TW" altLang="zh-TW" dirty="0" smtClean="0"/>
+              <a:rPr lang="zh-TW" altLang="zh-TW" dirty="0"/>
               <a:t>把數值</a:t>
             </a:r>
             <a:r>
-              <a:rPr lang="en-US" altLang="zh-TW" dirty="0" smtClean="0"/>
+              <a:rPr lang="en-US" altLang="zh-TW" dirty="0"/>
               <a:t>7</a:t>
             </a:r>
             <a:r>
-              <a:rPr lang="zh-TW" altLang="zh-TW" dirty="0" smtClean="0"/>
+              <a:rPr lang="zh-TW" altLang="zh-TW" dirty="0"/>
               <a:t>指定給節點</a:t>
             </a:r>
             <a:r>
-              <a:rPr lang="en-US" altLang="zh-TW" dirty="0" smtClean="0"/>
+              <a:rPr lang="en-US" altLang="zh-TW" dirty="0"/>
               <a:t>temp</a:t>
             </a:r>
             <a:r>
-              <a:rPr lang="zh-TW" altLang="zh-TW" dirty="0" smtClean="0"/>
+              <a:rPr lang="zh-TW" altLang="zh-TW" dirty="0"/>
               <a:t>的欄位</a:t>
             </a:r>
             <a:r>
-              <a:rPr lang="en-US" altLang="zh-TW" dirty="0" smtClean="0"/>
+              <a:rPr lang="en-US" altLang="zh-TW" dirty="0"/>
               <a:t>data</a:t>
             </a:r>
             <a:r>
-              <a:rPr lang="zh-TW" altLang="en-US" dirty="0" smtClean="0"/>
+              <a:rPr lang="zh-TW" altLang="en-US" dirty="0"/>
               <a:t>。</a:t>
             </a:r>
             <a:endParaRPr lang="zh-TW" altLang="zh-TW" dirty="0"/>
@@ -20454,13 +19850,6 @@
   <p:clrMapOvr>
     <a:masterClrMapping/>
   </p:clrMapOvr>
-  <p:timing>
-    <p:tnLst>
-      <p:par>
-        <p:cTn id="1" dur="indefinite" restart="never" nodeType="tmRoot"/>
-      </p:par>
-    </p:tnLst>
-  </p:timing>
 </p:sld>
 </file>
 
@@ -20497,11 +19886,11 @@
           <a:lstStyle/>
           <a:p>
             <a:r>
-              <a:rPr lang="en-US" altLang="zh-TW" smtClean="0"/>
+              <a:rPr lang="en-US" altLang="zh-TW"/>
               <a:t>10-2 </a:t>
             </a:r>
             <a:r>
-              <a:rPr lang="zh-TW" altLang="en-US" smtClean="0"/>
+              <a:rPr lang="zh-TW" altLang="en-US"/>
               <a:t>鏈結串列</a:t>
             </a:r>
             <a:endParaRPr lang="zh-TW" altLang="en-US" dirty="0"/>
@@ -20527,130 +19916,129 @@
           <a:p>
             <a:pPr lvl="0"/>
             <a:r>
-              <a:rPr lang="zh-TW" altLang="en-US" dirty="0" smtClean="0"/>
+              <a:rPr lang="zh-TW" altLang="en-US" dirty="0"/>
               <a:t>步驟</a:t>
             </a:r>
             <a:r>
-              <a:rPr lang="en-US" altLang="zh-TW" dirty="0" smtClean="0"/>
+              <a:rPr lang="en-US" altLang="zh-TW" dirty="0"/>
               <a:t>3</a:t>
             </a:r>
             <a:r>
-              <a:rPr lang="zh-TW" altLang="en-US" dirty="0" smtClean="0"/>
+              <a:rPr lang="zh-TW" altLang="en-US" dirty="0"/>
               <a:t>：</a:t>
             </a:r>
             <a:r>
-              <a:rPr lang="zh-TW" altLang="zh-TW" dirty="0" smtClean="0"/>
+              <a:rPr lang="zh-TW" altLang="zh-TW" dirty="0"/>
               <a:t>把節點</a:t>
             </a:r>
             <a:r>
-              <a:rPr lang="en-US" altLang="zh-TW" dirty="0" smtClean="0"/>
+              <a:rPr lang="en-US" altLang="zh-TW" dirty="0"/>
               <a:t>temp</a:t>
             </a:r>
             <a:r>
-              <a:rPr lang="zh-TW" altLang="zh-TW" dirty="0" smtClean="0"/>
+              <a:rPr lang="zh-TW" altLang="zh-TW" dirty="0"/>
               <a:t>的欄位</a:t>
             </a:r>
             <a:r>
-              <a:rPr lang="en-US" altLang="zh-TW" dirty="0" smtClean="0"/>
+              <a:rPr lang="en-US" altLang="zh-TW" dirty="0"/>
               <a:t>next</a:t>
             </a:r>
             <a:r>
-              <a:rPr lang="zh-TW" altLang="zh-TW" dirty="0" smtClean="0"/>
+              <a:rPr lang="zh-TW" altLang="zh-TW" dirty="0"/>
               <a:t>設定如正式參數</a:t>
             </a:r>
             <a:r>
-              <a:rPr lang="en-US" altLang="zh-TW" dirty="0" smtClean="0"/>
+              <a:rPr lang="en-US" altLang="zh-TW" dirty="0"/>
               <a:t>p</a:t>
             </a:r>
             <a:r>
-              <a:rPr lang="zh-TW" altLang="zh-TW" dirty="0" smtClean="0"/>
+              <a:rPr lang="zh-TW" altLang="zh-TW" dirty="0"/>
               <a:t>的值，也就是將節點</a:t>
             </a:r>
             <a:r>
-              <a:rPr lang="en-US" altLang="zh-TW" dirty="0" smtClean="0"/>
+              <a:rPr lang="en-US" altLang="zh-TW" dirty="0"/>
               <a:t>temp</a:t>
             </a:r>
             <a:r>
-              <a:rPr lang="zh-TW" altLang="zh-TW" dirty="0" smtClean="0"/>
+              <a:rPr lang="zh-TW" altLang="zh-TW" dirty="0"/>
               <a:t>的欄位</a:t>
             </a:r>
             <a:r>
-              <a:rPr lang="en-US" altLang="zh-TW" dirty="0" smtClean="0"/>
+              <a:rPr lang="en-US" altLang="zh-TW" dirty="0"/>
               <a:t>next</a:t>
             </a:r>
             <a:r>
-              <a:rPr lang="zh-TW" altLang="zh-TW" dirty="0" smtClean="0"/>
+              <a:rPr lang="zh-TW" altLang="zh-TW" dirty="0"/>
               <a:t>指到</a:t>
             </a:r>
             <a:r>
-              <a:rPr lang="en-US" altLang="zh-TW" dirty="0" smtClean="0"/>
+              <a:rPr lang="en-US" altLang="zh-TW" dirty="0"/>
               <a:t>p</a:t>
             </a:r>
             <a:r>
-              <a:rPr lang="zh-TW" altLang="zh-TW" dirty="0" smtClean="0"/>
+              <a:rPr lang="zh-TW" altLang="zh-TW" dirty="0"/>
               <a:t>所指到的節點。注意，由於正式參數</a:t>
             </a:r>
             <a:r>
-              <a:rPr lang="en-US" altLang="zh-TW" dirty="0" smtClean="0"/>
+              <a:rPr lang="en-US" altLang="zh-TW" dirty="0"/>
               <a:t>p</a:t>
             </a:r>
             <a:r>
-              <a:rPr lang="zh-TW" altLang="zh-TW" dirty="0" smtClean="0"/>
+              <a:rPr lang="zh-TW" altLang="zh-TW" dirty="0"/>
               <a:t>會對應到真實參數 </a:t>
             </a:r>
             <a:r>
-              <a:rPr lang="en-US" altLang="zh-TW" dirty="0" smtClean="0"/>
+              <a:rPr lang="en-US" altLang="zh-TW" dirty="0"/>
               <a:t>front</a:t>
             </a:r>
             <a:r>
-              <a:rPr lang="zh-TW" altLang="zh-TW" dirty="0" smtClean="0"/>
+              <a:rPr lang="zh-TW" altLang="zh-TW" dirty="0"/>
               <a:t>，所以新的節點會指到串列的第一個節點</a:t>
             </a:r>
             <a:r>
-              <a:rPr lang="zh-TW" altLang="en-US" dirty="0" smtClean="0"/>
+              <a:rPr lang="zh-TW" altLang="en-US" dirty="0"/>
               <a:t>。</a:t>
             </a:r>
-            <a:endParaRPr lang="zh-TW" altLang="zh-TW" dirty="0" smtClean="0"/>
+            <a:endParaRPr lang="zh-TW" altLang="zh-TW" dirty="0"/>
           </a:p>
           <a:p>
             <a:pPr lvl="0"/>
             <a:r>
-              <a:rPr lang="zh-TW" altLang="en-US" dirty="0" smtClean="0"/>
+              <a:rPr lang="zh-TW" altLang="en-US" dirty="0"/>
               <a:t>步驟</a:t>
             </a:r>
             <a:r>
-              <a:rPr lang="en-US" altLang="zh-TW" dirty="0" smtClean="0"/>
+              <a:rPr lang="en-US" altLang="zh-TW" dirty="0"/>
               <a:t>4</a:t>
             </a:r>
             <a:r>
-              <a:rPr lang="zh-TW" altLang="en-US" dirty="0" smtClean="0"/>
+              <a:rPr lang="zh-TW" altLang="en-US" dirty="0"/>
               <a:t>：</a:t>
             </a:r>
             <a:r>
-              <a:rPr lang="zh-TW" altLang="zh-TW" dirty="0" smtClean="0"/>
+              <a:rPr lang="zh-TW" altLang="zh-TW" dirty="0"/>
               <a:t>最後將參數</a:t>
             </a:r>
             <a:r>
-              <a:rPr lang="en-US" altLang="zh-TW" dirty="0" smtClean="0"/>
+              <a:rPr lang="en-US" altLang="zh-TW" dirty="0"/>
               <a:t>p(</a:t>
             </a:r>
             <a:r>
-              <a:rPr lang="zh-TW" altLang="zh-TW" dirty="0" smtClean="0"/>
+              <a:rPr lang="zh-TW" altLang="zh-TW" dirty="0"/>
               <a:t>也就是</a:t>
             </a:r>
             <a:r>
-              <a:rPr lang="en-US" altLang="zh-TW" dirty="0" smtClean="0"/>
+              <a:rPr lang="en-US" altLang="zh-TW" dirty="0"/>
               <a:t>front)</a:t>
             </a:r>
             <a:r>
-              <a:rPr lang="zh-TW" altLang="zh-TW" dirty="0" smtClean="0"/>
+              <a:rPr lang="zh-TW" altLang="zh-TW" dirty="0"/>
               <a:t>，指到新建立的節點</a:t>
             </a:r>
             <a:r>
-              <a:rPr lang="zh-TW" altLang="en-US" dirty="0" smtClean="0"/>
+              <a:rPr lang="zh-TW" altLang="en-US" dirty="0"/>
               <a:t>。</a:t>
             </a:r>
-            <a:endParaRPr lang="zh-TW" altLang="en-US" dirty="0"/>
           </a:p>
         </p:txBody>
       </p:sp>
@@ -20664,13 +20052,6 @@
   <p:clrMapOvr>
     <a:masterClrMapping/>
   </p:clrMapOvr>
-  <p:timing>
-    <p:tnLst>
-      <p:par>
-        <p:cTn id="1" dur="indefinite" restart="never" nodeType="tmRoot"/>
-      </p:par>
-    </p:tnLst>
-  </p:timing>
 </p:sld>
 </file>
 
@@ -20707,14 +20088,13 @@
           <a:lstStyle/>
           <a:p>
             <a:r>
-              <a:rPr lang="en-US" altLang="zh-TW" dirty="0" smtClean="0"/>
+              <a:rPr lang="en-US" altLang="zh-TW" dirty="0"/>
               <a:t>10-2 </a:t>
             </a:r>
             <a:r>
-              <a:rPr lang="zh-TW" altLang="en-US" dirty="0" smtClean="0"/>
+              <a:rPr lang="zh-TW" altLang="en-US" dirty="0"/>
               <a:t>鏈結串列</a:t>
             </a:r>
-            <a:endParaRPr lang="zh-TW" altLang="en-US" dirty="0"/>
           </a:p>
         </p:txBody>
       </p:sp>
@@ -20736,18 +20116,18 @@
           <a:lstStyle/>
           <a:p>
             <a:r>
-              <a:rPr lang="zh-TW" altLang="en-US" dirty="0" smtClean="0"/>
+              <a:rPr lang="zh-TW" altLang="en-US" dirty="0"/>
               <a:t>鏈結串列和陣列有一點很大的不同，就是鏈結串列的邏輯順序和實體順序並不一定相同。</a:t>
             </a:r>
-            <a:endParaRPr lang="en-US" altLang="zh-TW" dirty="0" smtClean="0"/>
-          </a:p>
-          <a:p>
-            <a:r>
-              <a:rPr lang="zh-TW" altLang="en-US" dirty="0" smtClean="0"/>
+            <a:endParaRPr lang="en-US" altLang="zh-TW" dirty="0"/>
+          </a:p>
+          <a:p>
+            <a:r>
+              <a:rPr lang="zh-TW" altLang="en-US" dirty="0"/>
               <a:t>當利用函數</a:t>
             </a:r>
             <a:r>
-              <a:rPr lang="en-US" altLang="zh-TW" dirty="0" err="1" smtClean="0">
+              <a:rPr lang="en-US" altLang="zh-TW" dirty="0" err="1">
                 <a:solidFill>
                   <a:srgbClr val="0070C0"/>
                 </a:solidFill>
@@ -20755,26 +20135,9 @@
               <a:t>malloc</a:t>
             </a:r>
             <a:r>
-              <a:rPr lang="zh-TW" altLang="en-US" dirty="0" smtClean="0"/>
-              <a:t>向系統要一塊記憶體的空間時，系統會根據當時記憶體哪裡有空位</a:t>
-            </a:r>
-            <a:r>
-              <a:rPr lang="zh-TW" altLang="en-US" dirty="0"/>
-              <a:t>，回</a:t>
-            </a:r>
-            <a:r>
-              <a:rPr lang="zh-TW" altLang="en-US" dirty="0" smtClean="0"/>
-              <a:t>傳</a:t>
-            </a:r>
-            <a:r>
-              <a:rPr lang="zh-TW" altLang="en-US" dirty="0"/>
-              <a:t>該</a:t>
-            </a:r>
-            <a:r>
-              <a:rPr lang="zh-TW" altLang="en-US" dirty="0" smtClean="0"/>
-              <a:t>位址，也許會在目前節點的前方，或是後方。</a:t>
-            </a:r>
-            <a:endParaRPr lang="zh-TW" altLang="en-US" dirty="0"/>
+              <a:rPr lang="zh-TW" altLang="en-US" dirty="0"/>
+              <a:t>向系統要一塊記憶體的空間時，系統會根據當時記憶體哪裡有空位，回傳該位址，也許會在目前節點的前方，或是後方。</a:t>
+            </a:r>
           </a:p>
         </p:txBody>
       </p:sp>
@@ -20783,13 +20146,6 @@
   <p:clrMapOvr>
     <a:masterClrMapping/>
   </p:clrMapOvr>
-  <p:timing>
-    <p:tnLst>
-      <p:par>
-        <p:cTn id="1" dur="indefinite" restart="never" nodeType="tmRoot"/>
-      </p:par>
-    </p:tnLst>
-  </p:timing>
 </p:sld>
 </file>
 
@@ -20826,7 +20182,7 @@
           <a:lstStyle/>
           <a:p>
             <a:r>
-              <a:rPr lang="en-US" altLang="zh-TW" dirty="0" smtClean="0"/>
+              <a:rPr lang="en-US" altLang="zh-TW" dirty="0"/>
               <a:t>10-2 </a:t>
             </a:r>
             <a:r>
@@ -20863,14 +20219,10 @@
             </a:pPr>
             <a:r>
               <a:rPr lang="zh-TW" altLang="en-US" dirty="0"/>
-              <a:t>下圖顯示上圖鏈結串列的可能實體順序，其中</a:t>
-            </a:r>
-            <a:r>
-              <a:rPr lang="zh-TW" altLang="en-US" dirty="0" smtClean="0"/>
-              <a:t>編號</a:t>
-            </a:r>
-            <a:r>
-              <a:rPr lang="en-US" altLang="zh-TW" dirty="0" smtClean="0">
+              <a:t>下圖顯示上圖鏈結串列的可能實體順序，其中編號</a:t>
+            </a:r>
+            <a:r>
+              <a:rPr lang="en-US" altLang="zh-TW" dirty="0">
                 <a:solidFill>
                   <a:srgbClr val="0070C0"/>
                 </a:solidFill>
@@ -20878,11 +20230,11 @@
               <a:t>L1</a:t>
             </a:r>
             <a:r>
-              <a:rPr lang="zh-TW" altLang="en-US" dirty="0" smtClean="0"/>
+              <a:rPr lang="zh-TW" altLang="en-US" dirty="0"/>
               <a:t>、</a:t>
             </a:r>
             <a:r>
-              <a:rPr lang="en-US" altLang="zh-TW" dirty="0" smtClean="0">
+              <a:rPr lang="en-US" altLang="zh-TW" dirty="0">
                 <a:solidFill>
                   <a:srgbClr val="0070C0"/>
                 </a:solidFill>
@@ -20890,11 +20242,11 @@
               <a:t>L2</a:t>
             </a:r>
             <a:r>
-              <a:rPr lang="zh-TW" altLang="en-US" dirty="0" smtClean="0"/>
+              <a:rPr lang="zh-TW" altLang="en-US" dirty="0"/>
               <a:t>、</a:t>
             </a:r>
             <a:r>
-              <a:rPr lang="en-US" altLang="zh-TW" dirty="0" smtClean="0">
+              <a:rPr lang="en-US" altLang="zh-TW" dirty="0">
                 <a:solidFill>
                   <a:srgbClr val="0070C0"/>
                 </a:solidFill>
@@ -20902,7 +20254,7 @@
               <a:t>L3</a:t>
             </a:r>
             <a:r>
-              <a:rPr lang="zh-TW" altLang="en-US" dirty="0" smtClean="0">
+              <a:rPr lang="zh-TW" altLang="en-US" dirty="0">
                 <a:solidFill>
                   <a:srgbClr val="0070C0"/>
                 </a:solidFill>
@@ -20911,35 +20263,23 @@
             </a:r>
             <a:r>
               <a:rPr lang="zh-TW" altLang="en-US" dirty="0"/>
-              <a:t>等，代表記憶體的實體位置</a:t>
-            </a:r>
-            <a:r>
-              <a:rPr lang="zh-TW" altLang="en-US" dirty="0" smtClean="0"/>
-              <a:t>。</a:t>
-            </a:r>
-            <a:endParaRPr lang="en-US" altLang="zh-TW" dirty="0" smtClean="0"/>
-          </a:p>
-          <a:p>
+              <a:t>等，代表記憶體的實體位置。</a:t>
+            </a:r>
             <a:endParaRPr lang="en-US" altLang="zh-TW" dirty="0"/>
           </a:p>
           <a:p>
-            <a:endParaRPr lang="en-US" altLang="zh-TW" dirty="0" smtClean="0"/>
-          </a:p>
-          <a:p>
-            <a:r>
-              <a:rPr lang="zh-TW" altLang="en-US" dirty="0" smtClean="0"/>
-              <a:t>節點</a:t>
-            </a:r>
-            <a:r>
-              <a:rPr lang="zh-TW" altLang="en-US" dirty="0"/>
-              <a:t>內容值</a:t>
-            </a:r>
-            <a:r>
-              <a:rPr lang="zh-TW" altLang="en-US" dirty="0" smtClean="0"/>
-              <a:t>為</a:t>
-            </a:r>
-            <a:r>
-              <a:rPr lang="en-US" altLang="zh-TW" dirty="0" smtClean="0">
+            <a:endParaRPr lang="en-US" altLang="zh-TW" dirty="0"/>
+          </a:p>
+          <a:p>
+            <a:endParaRPr lang="en-US" altLang="zh-TW" dirty="0"/>
+          </a:p>
+          <a:p>
+            <a:r>
+              <a:rPr lang="zh-TW" altLang="en-US" dirty="0"/>
+              <a:t>節點內容值為</a:t>
+            </a:r>
+            <a:r>
+              <a:rPr lang="en-US" altLang="zh-TW" dirty="0">
                 <a:solidFill>
                   <a:srgbClr val="0070C0"/>
                 </a:solidFill>
@@ -20947,19 +20287,11 @@
               <a:t>3</a:t>
             </a:r>
             <a:r>
-              <a:rPr lang="zh-TW" altLang="en-US" dirty="0" smtClean="0"/>
-              <a:t>的</a:t>
-            </a:r>
-            <a:r>
-              <a:rPr lang="zh-TW" altLang="en-US" dirty="0"/>
-              <a:t>節點，即使在邏輯順序上是排在內容值</a:t>
-            </a:r>
-            <a:r>
-              <a:rPr lang="zh-TW" altLang="en-US" dirty="0" smtClean="0"/>
-              <a:t>為</a:t>
-            </a:r>
-            <a:r>
-              <a:rPr lang="en-US" altLang="zh-TW" dirty="0" smtClean="0">
+              <a:rPr lang="zh-TW" altLang="en-US" dirty="0"/>
+              <a:t>的節點，即使在邏輯順序上是排在內容值為</a:t>
+            </a:r>
+            <a:r>
+              <a:rPr lang="en-US" altLang="zh-TW" dirty="0">
                 <a:solidFill>
                   <a:srgbClr val="0070C0"/>
                 </a:solidFill>
@@ -20967,12 +20299,8 @@
               <a:t>7</a:t>
             </a:r>
             <a:r>
-              <a:rPr lang="zh-TW" altLang="en-US" dirty="0" smtClean="0"/>
-              <a:t>的</a:t>
-            </a:r>
-            <a:r>
-              <a:rPr lang="zh-TW" altLang="en-US" dirty="0"/>
-              <a:t>節點後面，但是在記憶體的實體順序上，則可能是排在其前面。</a:t>
+              <a:rPr lang="zh-TW" altLang="en-US" dirty="0"/>
+              <a:t>的節點後面，但是在記憶體的實體順序上，則可能是排在其前面。</a:t>
             </a:r>
           </a:p>
         </p:txBody>
@@ -21020,13 +20348,6 @@
   <p:clrMapOvr>
     <a:masterClrMapping/>
   </p:clrMapOvr>
-  <p:timing>
-    <p:tnLst>
-      <p:par>
-        <p:cTn id="1" dur="indefinite" restart="never" nodeType="tmRoot"/>
-      </p:par>
-    </p:tnLst>
-  </p:timing>
 </p:sld>
 </file>
 
@@ -21063,7 +20384,7 @@
           <a:lstStyle/>
           <a:p>
             <a:r>
-              <a:rPr lang="en-US" altLang="zh-TW" dirty="0" smtClean="0"/>
+              <a:rPr lang="en-US" altLang="zh-TW" dirty="0"/>
               <a:t>10-2 </a:t>
             </a:r>
             <a:r>
@@ -21096,10 +20417,10 @@
               </a:lnSpc>
             </a:pPr>
             <a:r>
-              <a:rPr lang="zh-TW" altLang="en-US" dirty="0" smtClean="0"/>
+              <a:rPr lang="zh-TW" altLang="en-US" dirty="0"/>
               <a:t>可以推算出陣列裡元素的位置公式，而很快的知道陣列裡任一註標的位置。</a:t>
             </a:r>
-            <a:endParaRPr lang="en-US" altLang="zh-TW" dirty="0" smtClean="0"/>
+            <a:endParaRPr lang="en-US" altLang="zh-TW" dirty="0"/>
           </a:p>
           <a:p>
             <a:pPr>
@@ -21108,10 +20429,9 @@
               </a:lnSpc>
             </a:pPr>
             <a:r>
-              <a:rPr lang="zh-TW" altLang="en-US" dirty="0" smtClean="0"/>
+              <a:rPr lang="zh-TW" altLang="en-US" dirty="0"/>
               <a:t>另一方面，要取出鏈結串列的某一個節點，只能依循事先建立好的指標，一一探訪中間經過的節點。</a:t>
             </a:r>
-            <a:endParaRPr lang="zh-TW" altLang="en-US" dirty="0"/>
           </a:p>
         </p:txBody>
       </p:sp>
@@ -21120,13 +20440,6 @@
   <p:clrMapOvr>
     <a:masterClrMapping/>
   </p:clrMapOvr>
-  <p:timing>
-    <p:tnLst>
-      <p:par>
-        <p:cTn id="1" dur="indefinite" restart="never" nodeType="tmRoot"/>
-      </p:par>
-    </p:tnLst>
-  </p:timing>
 </p:sld>
 </file>
 
@@ -21163,7 +20476,7 @@
           <a:lstStyle/>
           <a:p>
             <a:r>
-              <a:rPr lang="en-US" altLang="zh-TW" dirty="0" smtClean="0"/>
+              <a:rPr lang="en-US" altLang="zh-TW" dirty="0"/>
               <a:t>10-2 </a:t>
             </a:r>
             <a:r>
@@ -21198,13 +20511,8 @@
             </a:r>
             <a:r>
               <a:rPr lang="zh-TW" altLang="en-US" dirty="0"/>
-              <a:t>程式，把一個鏈結串列內所有節點的內容值依照邏輯順序列出來</a:t>
-            </a:r>
-            <a:r>
-              <a:rPr lang="zh-TW" altLang="en-US" dirty="0" smtClean="0"/>
-              <a:t>：</a:t>
-            </a:r>
-            <a:endParaRPr lang="zh-TW" altLang="en-US" dirty="0"/>
+              <a:t>程式，把一個鏈結串列內所有節點的內容值依照邏輯順序列出來：</a:t>
+            </a:r>
           </a:p>
         </p:txBody>
       </p:sp>
@@ -21278,13 +20586,6 @@
   <p:clrMapOvr>
     <a:masterClrMapping/>
   </p:clrMapOvr>
-  <p:timing>
-    <p:tnLst>
-      <p:par>
-        <p:cTn id="1" dur="indefinite" restart="never" nodeType="tmRoot"/>
-      </p:par>
-    </p:tnLst>
-  </p:timing>
 </p:sld>
 </file>
 
@@ -21321,14 +20622,13 @@
           <a:lstStyle/>
           <a:p>
             <a:r>
-              <a:rPr lang="en-US" altLang="zh-TW" dirty="0" smtClean="0"/>
+              <a:rPr lang="en-US" altLang="zh-TW" dirty="0"/>
               <a:t>10-2 </a:t>
             </a:r>
             <a:r>
-              <a:rPr lang="zh-TW" altLang="en-US" dirty="0" smtClean="0"/>
+              <a:rPr lang="zh-TW" altLang="en-US" dirty="0"/>
               <a:t>鏈結串列</a:t>
             </a:r>
-            <a:endParaRPr lang="zh-TW" altLang="en-US" dirty="0"/>
           </a:p>
         </p:txBody>
       </p:sp>
@@ -21348,7 +20648,7 @@
           <a:lstStyle/>
           <a:p>
             <a:r>
-              <a:rPr lang="en-US" altLang="zh-TW" dirty="0" err="1" smtClean="0">
+              <a:rPr lang="en-US" altLang="zh-TW" dirty="0" err="1">
                 <a:solidFill>
                   <a:srgbClr val="0070C0"/>
                 </a:solidFill>
@@ -21356,11 +20656,11 @@
               <a:t>changehead</a:t>
             </a:r>
             <a:r>
-              <a:rPr lang="zh-TW" altLang="en-US" dirty="0" smtClean="0"/>
+              <a:rPr lang="zh-TW" altLang="en-US" dirty="0"/>
               <a:t>程式會把第一個參數</a:t>
             </a:r>
             <a:r>
-              <a:rPr lang="en-US" altLang="zh-TW" dirty="0" smtClean="0">
+              <a:rPr lang="en-US" altLang="zh-TW" dirty="0">
                 <a:solidFill>
                   <a:srgbClr val="0070C0"/>
                 </a:solidFill>
@@ -21368,11 +20668,11 @@
               <a:t>p</a:t>
             </a:r>
             <a:r>
-              <a:rPr lang="zh-TW" altLang="en-US" dirty="0" smtClean="0"/>
+              <a:rPr lang="zh-TW" altLang="en-US" dirty="0"/>
               <a:t>指到的鏈結串列的起始節點，變成第二個參數</a:t>
             </a:r>
             <a:r>
-              <a:rPr lang="en-US" altLang="zh-TW" dirty="0" smtClean="0">
+              <a:rPr lang="en-US" altLang="zh-TW" dirty="0">
                 <a:solidFill>
                   <a:srgbClr val="0070C0"/>
                 </a:solidFill>
@@ -21380,10 +20680,9 @@
               <a:t>q</a:t>
             </a:r>
             <a:r>
-              <a:rPr lang="zh-TW" altLang="en-US" dirty="0" smtClean="0"/>
+              <a:rPr lang="zh-TW" altLang="en-US" dirty="0"/>
               <a:t>指到的鏈結串列的起始節點。把該程序再度列舉如下：</a:t>
             </a:r>
-            <a:endParaRPr lang="zh-TW" altLang="en-US" dirty="0"/>
           </a:p>
         </p:txBody>
       </p:sp>
@@ -21452,13 +20751,6 @@
   <p:clrMapOvr>
     <a:masterClrMapping/>
   </p:clrMapOvr>
-  <p:timing>
-    <p:tnLst>
-      <p:par>
-        <p:cTn id="1" dur="indefinite" restart="never" nodeType="tmRoot"/>
-      </p:par>
-    </p:tnLst>
-  </p:timing>
 </p:sld>
 </file>
 
@@ -21573,13 +20865,8 @@
             </a:r>
             <a:r>
               <a:rPr lang="zh-TW" altLang="en-US" dirty="0"/>
-              <a:t>指到第一個鏈結串列的第二個節點</a:t>
-            </a:r>
-            <a:r>
-              <a:rPr lang="zh-TW" altLang="en-US" dirty="0" smtClean="0"/>
-              <a:t>。</a:t>
-            </a:r>
-            <a:endParaRPr lang="zh-TW" altLang="en-US" dirty="0"/>
+              <a:t>指到第一個鏈結串列的第二個節點。</a:t>
+            </a:r>
           </a:p>
         </p:txBody>
       </p:sp>
@@ -21593,13 +20880,6 @@
   <p:clrMapOvr>
     <a:masterClrMapping/>
   </p:clrMapOvr>
-  <p:timing>
-    <p:tnLst>
-      <p:par>
-        <p:cTn id="1" dur="indefinite" restart="never" nodeType="tmRoot"/>
-      </p:par>
-    </p:tnLst>
-  </p:timing>
 </p:sld>
 </file>
 
@@ -21636,7 +20916,7 @@
           <a:lstStyle/>
           <a:p>
             <a:r>
-              <a:rPr lang="en-US" altLang="zh-TW" dirty="0" smtClean="0"/>
+              <a:rPr lang="en-US" altLang="zh-TW" dirty="0"/>
               <a:t>10-1 </a:t>
             </a:r>
             <a:r>
@@ -21662,11 +20942,11 @@
           <a:lstStyle/>
           <a:p>
             <a:r>
-              <a:rPr lang="zh-TW" altLang="en-US" dirty="0" smtClean="0"/>
+              <a:rPr lang="zh-TW" altLang="en-US" dirty="0"/>
               <a:t>在一般的程式語言裡，陣列的</a:t>
             </a:r>
             <a:r>
-              <a:rPr lang="zh-TW" altLang="en-US" dirty="0" smtClean="0">
+              <a:rPr lang="zh-TW" altLang="en-US" dirty="0">
                 <a:solidFill>
                   <a:srgbClr val="C00000"/>
                 </a:solidFill>
@@ -21674,15 +20954,15 @@
               <a:t>邏輯順序</a:t>
             </a:r>
             <a:r>
-              <a:rPr lang="en-US" altLang="zh-TW" dirty="0" smtClean="0"/>
+              <a:rPr lang="en-US" altLang="zh-TW" dirty="0"/>
               <a:t>(logical order)</a:t>
             </a:r>
             <a:r>
-              <a:rPr lang="zh-TW" altLang="en-US" dirty="0" smtClean="0"/>
+              <a:rPr lang="zh-TW" altLang="en-US" dirty="0"/>
               <a:t>和</a:t>
             </a:r>
             <a:r>
-              <a:rPr lang="zh-TW" altLang="en-US" dirty="0" smtClean="0">
+              <a:rPr lang="zh-TW" altLang="en-US" dirty="0">
                 <a:solidFill>
                   <a:srgbClr val="C00000"/>
                 </a:solidFill>
@@ -21690,14 +20970,14 @@
               <a:t>實體順序</a:t>
             </a:r>
             <a:r>
-              <a:rPr lang="en-US" altLang="zh-TW" dirty="0" smtClean="0"/>
+              <a:rPr lang="en-US" altLang="zh-TW" dirty="0"/>
               <a:t>(physical order)</a:t>
             </a:r>
             <a:r>
-              <a:rPr lang="zh-TW" altLang="en-US" dirty="0" smtClean="0"/>
+              <a:rPr lang="zh-TW" altLang="en-US" dirty="0"/>
               <a:t>是一樣的，也就是在記憶體裡，註標小的會排在註標大的之前。</a:t>
             </a:r>
-            <a:endParaRPr lang="en-US" altLang="zh-TW" dirty="0" smtClean="0"/>
+            <a:endParaRPr lang="en-US" altLang="zh-TW" dirty="0"/>
           </a:p>
         </p:txBody>
       </p:sp>
@@ -21711,13 +20991,6 @@
   <p:clrMapOvr>
     <a:masterClrMapping/>
   </p:clrMapOvr>
-  <p:timing>
-    <p:tnLst>
-      <p:par>
-        <p:cTn id="1" dur="indefinite" restart="never" nodeType="tmRoot"/>
-      </p:par>
-    </p:tnLst>
-  </p:timing>
 </p:sld>
 </file>
 
@@ -21859,13 +21132,6 @@
   <p:clrMapOvr>
     <a:masterClrMapping/>
   </p:clrMapOvr>
-  <p:timing>
-    <p:tnLst>
-      <p:par>
-        <p:cTn id="1" dur="indefinite" restart="never" nodeType="tmRoot"/>
-      </p:par>
-    </p:tnLst>
-  </p:timing>
 </p:sld>
 </file>
 
@@ -21983,13 +21249,6 @@
   <p:clrMapOvr>
     <a:masterClrMapping/>
   </p:clrMapOvr>
-  <p:timing>
-    <p:tnLst>
-      <p:par>
-        <p:cTn id="1" dur="indefinite" restart="never" nodeType="tmRoot"/>
-      </p:par>
-    </p:tnLst>
-  </p:timing>
 </p:sld>
 </file>
 
@@ -22026,7 +21285,7 @@
           <a:lstStyle/>
           <a:p>
             <a:r>
-              <a:rPr lang="en-US" altLang="zh-TW" dirty="0" smtClean="0"/>
+              <a:rPr lang="en-US" altLang="zh-TW" dirty="0"/>
               <a:t>10-3 </a:t>
             </a:r>
             <a:r>
@@ -22052,25 +21311,25 @@
           <a:lstStyle/>
           <a:p>
             <a:r>
-              <a:rPr lang="zh-TW" altLang="en-US" dirty="0" smtClean="0">
+              <a:rPr lang="zh-TW" altLang="en-US" dirty="0">
                 <a:hlinkClick r:id="rId2" action="ppaction://hlinksldjump"/>
               </a:rPr>
               <a:t>堆疊</a:t>
             </a:r>
-            <a:endParaRPr lang="en-US" altLang="zh-TW" dirty="0" smtClean="0"/>
-          </a:p>
-          <a:p>
-            <a:r>
-              <a:rPr lang="zh-TW" altLang="en-US" dirty="0" smtClean="0">
+            <a:endParaRPr lang="en-US" altLang="zh-TW" dirty="0"/>
+          </a:p>
+          <a:p>
+            <a:r>
+              <a:rPr lang="zh-TW" altLang="en-US" dirty="0">
                 <a:hlinkClick r:id="rId3" action="ppaction://hlinksldjump"/>
               </a:rPr>
               <a:t>佇列</a:t>
             </a:r>
-            <a:endParaRPr lang="en-US" altLang="zh-TW" dirty="0" smtClean="0"/>
-          </a:p>
-          <a:p>
-            <a:r>
-              <a:rPr lang="zh-TW" altLang="en-US" dirty="0" smtClean="0">
+            <a:endParaRPr lang="en-US" altLang="zh-TW" dirty="0"/>
+          </a:p>
+          <a:p>
+            <a:r>
+              <a:rPr lang="zh-TW" altLang="en-US" dirty="0">
                 <a:hlinkClick r:id="rId4" action="ppaction://hlinksldjump"/>
               </a:rPr>
               <a:t>環狀佇列</a:t>
@@ -22222,13 +21481,6 @@
   <p:clrMapOvr>
     <a:masterClrMapping/>
   </p:clrMapOvr>
-  <p:timing>
-    <p:tnLst>
-      <p:par>
-        <p:cTn id="1" dur="indefinite" restart="never" nodeType="tmRoot"/>
-      </p:par>
-    </p:tnLst>
-  </p:timing>
 </p:sld>
 </file>
 
@@ -22270,7 +21522,7 @@
           <a:lstStyle/>
           <a:p>
             <a:r>
-              <a:rPr lang="zh-TW" altLang="en-US" b="1" dirty="0" smtClean="0"/>
+              <a:rPr lang="zh-TW" altLang="en-US" b="1" dirty="0"/>
               <a:t>堆疊</a:t>
             </a:r>
             <a:endParaRPr lang="zh-TW" altLang="en-US" dirty="0"/>
@@ -22296,22 +21548,14 @@
           <a:p>
             <a:r>
               <a:rPr lang="zh-TW" altLang="en-US" dirty="0"/>
-              <a:t>堆疊的概念，是處理一序列資料的時候，採用「後進先出」、「先進後出」的順序</a:t>
-            </a:r>
-            <a:r>
-              <a:rPr lang="zh-TW" altLang="en-US" dirty="0" smtClean="0"/>
-              <a:t>。</a:t>
-            </a:r>
-            <a:endParaRPr lang="en-US" altLang="zh-TW" dirty="0" smtClean="0"/>
-          </a:p>
-          <a:p>
-            <a:r>
-              <a:rPr lang="zh-TW" altLang="en-US" dirty="0" smtClean="0"/>
-              <a:t>假設</a:t>
-            </a:r>
-            <a:r>
-              <a:rPr lang="zh-TW" altLang="en-US" dirty="0"/>
-              <a:t>現在要在一個狹長的網球桶裡，依序放入編號</a:t>
+              <a:t>堆疊的概念，是處理一序列資料的時候，採用「後進先出」、「先進後出」的順序。</a:t>
+            </a:r>
+            <a:endParaRPr lang="en-US" altLang="zh-TW" dirty="0"/>
+          </a:p>
+          <a:p>
+            <a:r>
+              <a:rPr lang="zh-TW" altLang="en-US" dirty="0"/>
+              <a:t>假設現在要在一個狹長的網球桶裡，依序放入編號</a:t>
             </a:r>
             <a:r>
               <a:rPr lang="en-US" altLang="zh-TW" dirty="0"/>
@@ -22354,13 +21598,6 @@
   <p:clrMapOvr>
     <a:masterClrMapping/>
   </p:clrMapOvr>
-  <p:timing>
-    <p:tnLst>
-      <p:par>
-        <p:cTn id="1" dur="indefinite" restart="never" nodeType="tmRoot"/>
-      </p:par>
-    </p:tnLst>
-  </p:timing>
 </p:sld>
 </file>
 
@@ -22397,10 +21634,9 @@
           <a:lstStyle/>
           <a:p>
             <a:r>
-              <a:rPr lang="zh-TW" altLang="en-US" dirty="0" smtClean="0"/>
+              <a:rPr lang="zh-TW" altLang="en-US" dirty="0"/>
               <a:t>堆疊</a:t>
             </a:r>
-            <a:endParaRPr lang="zh-TW" altLang="en-US" dirty="0"/>
           </a:p>
         </p:txBody>
       </p:sp>
@@ -22420,34 +21656,34 @@
           <a:lstStyle/>
           <a:p>
             <a:r>
-              <a:rPr lang="zh-TW" altLang="en-US" smtClean="0"/>
+              <a:rPr lang="zh-TW" altLang="en-US"/>
               <a:t>當要用球的時候，由於該球桶的開口固定在上面，所以首先拿到的是球桶最上方的</a:t>
             </a:r>
             <a:r>
-              <a:rPr lang="en-US" altLang="zh-TW" smtClean="0"/>
+              <a:rPr lang="en-US" altLang="zh-TW"/>
               <a:t>5</a:t>
             </a:r>
             <a:r>
-              <a:rPr lang="zh-TW" altLang="en-US" smtClean="0"/>
+              <a:rPr lang="zh-TW" altLang="en-US"/>
               <a:t>號球，接著是</a:t>
             </a:r>
             <a:r>
-              <a:rPr lang="en-US" altLang="zh-TW" smtClean="0"/>
+              <a:rPr lang="en-US" altLang="zh-TW"/>
               <a:t>4</a:t>
             </a:r>
             <a:r>
-              <a:rPr lang="zh-TW" altLang="en-US" smtClean="0"/>
+              <a:rPr lang="zh-TW" altLang="en-US"/>
               <a:t>號球，最後才會拿到</a:t>
             </a:r>
             <a:r>
-              <a:rPr lang="en-US" altLang="zh-TW" smtClean="0"/>
+              <a:rPr lang="en-US" altLang="zh-TW"/>
               <a:t>1</a:t>
             </a:r>
             <a:r>
-              <a:rPr lang="zh-TW" altLang="en-US" smtClean="0"/>
+              <a:rPr lang="zh-TW" altLang="en-US"/>
               <a:t>號球。</a:t>
             </a:r>
-            <a:endParaRPr lang="en-US" altLang="zh-TW" dirty="0" smtClean="0"/>
+            <a:endParaRPr lang="en-US" altLang="zh-TW" dirty="0"/>
           </a:p>
         </p:txBody>
       </p:sp>
@@ -22456,13 +21692,6 @@
   <p:clrMapOvr>
     <a:masterClrMapping/>
   </p:clrMapOvr>
-  <p:timing>
-    <p:tnLst>
-      <p:par>
-        <p:cTn id="1" dur="indefinite" restart="never" nodeType="tmRoot"/>
-      </p:par>
-    </p:tnLst>
-  </p:timing>
 </p:sld>
 </file>
 
@@ -22608,13 +21837,6 @@
   <p:clrMapOvr>
     <a:masterClrMapping/>
   </p:clrMapOvr>
-  <p:timing>
-    <p:tnLst>
-      <p:par>
-        <p:cTn id="1" dur="indefinite" restart="never" nodeType="tmRoot"/>
-      </p:par>
-    </p:tnLst>
-  </p:timing>
 </p:sld>
 </file>
 
@@ -22696,19 +21918,8 @@
                 <a:latin typeface="微軟正黑體" pitchFamily="34" charset="-120"/>
                 <a:ea typeface="微軟正黑體" pitchFamily="34" charset="-120"/>
               </a:rPr>
-              <a:t>堆疊</a:t>
-            </a:r>
-            <a:r>
-              <a:rPr lang="zh-TW" altLang="en-US" sz="2800" dirty="0" smtClean="0">
-                <a:latin typeface="微軟正黑體" pitchFamily="34" charset="-120"/>
-                <a:ea typeface="微軟正黑體" pitchFamily="34" charset="-120"/>
-              </a:rPr>
-              <a:t>示意圖</a:t>
-            </a:r>
-            <a:endParaRPr lang="zh-TW" altLang="en-US" sz="2800" dirty="0">
-              <a:latin typeface="微軟正黑體" pitchFamily="34" charset="-120"/>
-              <a:ea typeface="微軟正黑體" pitchFamily="34" charset="-120"/>
-            </a:endParaRPr>
+              <a:t>堆疊示意圖</a:t>
+            </a:r>
           </a:p>
         </p:txBody>
       </p:sp>
@@ -22761,13 +21972,6 @@
   <p:clrMapOvr>
     <a:masterClrMapping/>
   </p:clrMapOvr>
-  <p:timing>
-    <p:tnLst>
-      <p:par>
-        <p:cTn id="1" dur="indefinite" restart="never" nodeType="tmRoot"/>
-      </p:par>
-    </p:tnLst>
-  </p:timing>
 </p:sld>
 </file>
 
@@ -22827,22 +22031,14 @@
           <a:p>
             <a:r>
               <a:rPr lang="zh-TW" altLang="en-US" dirty="0"/>
-              <a:t>重點在於如何針對此陣列撰寫對應的程式，以實作「後進先出」和「先進後出」的想法</a:t>
-            </a:r>
-            <a:r>
-              <a:rPr lang="zh-TW" altLang="en-US" dirty="0" smtClean="0"/>
-              <a:t>。</a:t>
-            </a:r>
-            <a:endParaRPr lang="en-US" altLang="zh-TW" dirty="0" smtClean="0"/>
-          </a:p>
-          <a:p>
-            <a:r>
-              <a:rPr lang="zh-TW" altLang="en-US" dirty="0" smtClean="0"/>
-              <a:t>也就是</a:t>
-            </a:r>
-            <a:r>
-              <a:rPr lang="zh-TW" altLang="en-US" dirty="0"/>
-              <a:t>，必須適當的定義如何將資料放入堆疊，再如何將資料從堆疊取出，才能造成「後進先出」和「先進後出」的效果。</a:t>
+              <a:t>重點在於如何針對此陣列撰寫對應的程式，以實作「後進先出」和「先進後出」的想法。</a:t>
+            </a:r>
+            <a:endParaRPr lang="en-US" altLang="zh-TW" dirty="0"/>
+          </a:p>
+          <a:p>
+            <a:r>
+              <a:rPr lang="zh-TW" altLang="en-US" dirty="0"/>
+              <a:t>也就是，必須適當的定義如何將資料放入堆疊，再如何將資料從堆疊取出，才能造成「後進先出」和「先進後出」的效果。</a:t>
             </a:r>
           </a:p>
         </p:txBody>
@@ -22852,13 +22048,6 @@
   <p:clrMapOvr>
     <a:masterClrMapping/>
   </p:clrMapOvr>
-  <p:timing>
-    <p:tnLst>
-      <p:par>
-        <p:cTn id="1" dur="indefinite" restart="never" nodeType="tmRoot"/>
-      </p:par>
-    </p:tnLst>
-  </p:timing>
 </p:sld>
 </file>
 
@@ -22919,11 +22108,11 @@
           <a:lstStyle/>
           <a:p>
             <a:r>
-              <a:rPr lang="zh-TW" altLang="en-US" dirty="0" smtClean="0"/>
+              <a:rPr lang="zh-TW" altLang="en-US" dirty="0"/>
               <a:t>為了達到此目的，還需要記錄其他相關資訊。首先，為了知道目前堆疊內元素的個數，需要定義一個整數變數</a:t>
             </a:r>
             <a:r>
-              <a:rPr lang="en-US" altLang="zh-TW" dirty="0" smtClean="0">
+              <a:rPr lang="en-US" altLang="zh-TW" dirty="0">
                 <a:solidFill>
                   <a:srgbClr val="0070C0"/>
                 </a:solidFill>
@@ -22931,11 +22120,11 @@
               <a:t>top</a:t>
             </a:r>
             <a:r>
-              <a:rPr lang="zh-TW" altLang="en-US" dirty="0" smtClean="0"/>
+              <a:rPr lang="zh-TW" altLang="en-US" dirty="0"/>
               <a:t>，對應到最上層元素的註標，一開始設為</a:t>
             </a:r>
             <a:r>
-              <a:rPr lang="en-US" altLang="zh-TW" dirty="0" smtClean="0">
+              <a:rPr lang="en-US" altLang="zh-TW" dirty="0">
                 <a:solidFill>
                   <a:srgbClr val="0070C0"/>
                 </a:solidFill>
@@ -22943,10 +22132,9 @@
               <a:t>-1</a:t>
             </a:r>
             <a:r>
-              <a:rPr lang="zh-TW" altLang="en-US" dirty="0" smtClean="0"/>
+              <a:rPr lang="zh-TW" altLang="en-US" dirty="0"/>
               <a:t>，以表示空堆疊。</a:t>
             </a:r>
-            <a:endParaRPr lang="zh-TW" altLang="en-US" dirty="0"/>
           </a:p>
         </p:txBody>
       </p:sp>
@@ -23015,13 +22203,6 @@
   <p:clrMapOvr>
     <a:masterClrMapping/>
   </p:clrMapOvr>
-  <p:timing>
-    <p:tnLst>
-      <p:par>
-        <p:cTn id="1" dur="indefinite" restart="never" nodeType="tmRoot"/>
-      </p:par>
-    </p:tnLst>
-  </p:timing>
 </p:sld>
 </file>
 
@@ -23080,11 +22261,11 @@
           <a:lstStyle/>
           <a:p>
             <a:r>
-              <a:rPr lang="zh-TW" altLang="en-US" dirty="0" smtClean="0"/>
+              <a:rPr lang="zh-TW" altLang="en-US" dirty="0"/>
               <a:t>接著定義將資料放入堆疊的程序</a:t>
             </a:r>
             <a:r>
-              <a:rPr lang="en-US" altLang="zh-TW" dirty="0" smtClean="0">
+              <a:rPr lang="en-US" altLang="zh-TW" dirty="0">
                 <a:solidFill>
                   <a:srgbClr val="0070C0"/>
                 </a:solidFill>
@@ -23092,18 +22273,18 @@
               <a:t>push</a:t>
             </a:r>
             <a:r>
-              <a:rPr lang="zh-TW" altLang="en-US" dirty="0" smtClean="0"/>
+              <a:rPr lang="zh-TW" altLang="en-US" dirty="0"/>
               <a:t>如下。</a:t>
             </a:r>
-            <a:endParaRPr lang="en-US" altLang="zh-TW" dirty="0" smtClean="0"/>
-          </a:p>
-          <a:p>
-            <a:r>
-              <a:rPr lang="zh-TW" altLang="en-US" dirty="0" smtClean="0"/>
+            <a:endParaRPr lang="en-US" altLang="zh-TW" dirty="0"/>
+          </a:p>
+          <a:p>
+            <a:r>
+              <a:rPr lang="zh-TW" altLang="en-US" dirty="0"/>
               <a:t>注意到，會先增加變數</a:t>
             </a:r>
             <a:r>
-              <a:rPr lang="en-US" altLang="zh-TW" dirty="0" smtClean="0">
+              <a:rPr lang="en-US" altLang="zh-TW" dirty="0">
                 <a:solidFill>
                   <a:srgbClr val="0070C0"/>
                 </a:solidFill>
@@ -23111,11 +22292,11 @@
               <a:t>top</a:t>
             </a:r>
             <a:r>
-              <a:rPr lang="zh-TW" altLang="en-US" dirty="0" smtClean="0"/>
+              <a:rPr lang="zh-TW" altLang="en-US" dirty="0"/>
               <a:t>，也就是後放進去的元素會放在註標比較大的位置，而同時</a:t>
             </a:r>
             <a:r>
-              <a:rPr lang="en-US" altLang="zh-TW" dirty="0" smtClean="0">
+              <a:rPr lang="en-US" altLang="zh-TW" dirty="0">
                 <a:solidFill>
                   <a:srgbClr val="0070C0"/>
                 </a:solidFill>
@@ -23123,10 +22304,9 @@
               <a:t>top</a:t>
             </a:r>
             <a:r>
-              <a:rPr lang="zh-TW" altLang="en-US" dirty="0" smtClean="0"/>
+              <a:rPr lang="zh-TW" altLang="en-US" dirty="0"/>
               <a:t>會代表最後一個元素在陣列的註標：</a:t>
             </a:r>
-            <a:endParaRPr lang="zh-TW" altLang="en-US" dirty="0"/>
           </a:p>
         </p:txBody>
       </p:sp>
@@ -23195,13 +22375,6 @@
   <p:clrMapOvr>
     <a:masterClrMapping/>
   </p:clrMapOvr>
-  <p:timing>
-    <p:tnLst>
-      <p:par>
-        <p:cTn id="1" dur="indefinite" restart="never" nodeType="tmRoot"/>
-      </p:par>
-    </p:tnLst>
-  </p:timing>
 </p:sld>
 </file>
 
@@ -23345,13 +22518,6 @@
   <p:clrMapOvr>
     <a:masterClrMapping/>
   </p:clrMapOvr>
-  <p:timing>
-    <p:tnLst>
-      <p:par>
-        <p:cTn id="1" dur="indefinite" restart="never" nodeType="tmRoot"/>
-      </p:par>
-    </p:tnLst>
-  </p:timing>
 </p:sld>
 </file>
 
@@ -23410,11 +22576,11 @@
           <a:lstStyle/>
           <a:p>
             <a:r>
-              <a:rPr lang="zh-TW" altLang="en-US" dirty="0" smtClean="0"/>
+              <a:rPr lang="zh-TW" altLang="en-US" dirty="0"/>
               <a:t>要將資料從堆疊取出的話，直接回傳陣列在</a:t>
             </a:r>
             <a:r>
-              <a:rPr lang="en-US" altLang="zh-TW" dirty="0" smtClean="0">
+              <a:rPr lang="en-US" altLang="zh-TW" dirty="0">
                 <a:solidFill>
                   <a:srgbClr val="0070C0"/>
                 </a:solidFill>
@@ -23422,7 +22588,7 @@
               <a:t>top</a:t>
             </a:r>
             <a:r>
-              <a:rPr lang="zh-TW" altLang="en-US" dirty="0" smtClean="0"/>
+              <a:rPr lang="zh-TW" altLang="en-US" dirty="0"/>
               <a:t>註標存放的資料即可；同時要更改變數</a:t>
             </a:r>
             <a:r>
@@ -23434,18 +22600,18 @@
               <a:t>top</a:t>
             </a:r>
             <a:r>
-              <a:rPr lang="zh-TW" altLang="en-US" dirty="0" smtClean="0"/>
+              <a:rPr lang="zh-TW" altLang="en-US" dirty="0"/>
               <a:t>的值，以表示堆疊內的元素減少。</a:t>
             </a:r>
-            <a:endParaRPr lang="en-US" altLang="zh-TW" dirty="0" smtClean="0"/>
-          </a:p>
-          <a:p>
-            <a:r>
-              <a:rPr lang="zh-TW" altLang="en-US" dirty="0" smtClean="0"/>
+            <a:endParaRPr lang="en-US" altLang="zh-TW" dirty="0"/>
+          </a:p>
+          <a:p>
+            <a:r>
+              <a:rPr lang="zh-TW" altLang="en-US" dirty="0"/>
               <a:t>相關的函數</a:t>
             </a:r>
             <a:r>
-              <a:rPr lang="en-US" altLang="zh-TW" dirty="0" smtClean="0">
+              <a:rPr lang="en-US" altLang="zh-TW" dirty="0">
                 <a:solidFill>
                   <a:srgbClr val="0070C0"/>
                 </a:solidFill>
@@ -23453,10 +22619,9 @@
               <a:t>pop</a:t>
             </a:r>
             <a:r>
-              <a:rPr lang="zh-TW" altLang="en-US" dirty="0" smtClean="0"/>
+              <a:rPr lang="zh-TW" altLang="en-US" dirty="0"/>
               <a:t>定義如下：</a:t>
             </a:r>
-            <a:endParaRPr lang="zh-TW" altLang="en-US" dirty="0"/>
           </a:p>
         </p:txBody>
       </p:sp>
@@ -23525,13 +22690,6 @@
   <p:clrMapOvr>
     <a:masterClrMapping/>
   </p:clrMapOvr>
-  <p:timing>
-    <p:tnLst>
-      <p:par>
-        <p:cTn id="1" dur="indefinite" restart="never" nodeType="tmRoot"/>
-      </p:par>
-    </p:tnLst>
-  </p:timing>
 </p:sld>
 </file>
 
@@ -23570,10 +22728,9 @@
           <a:lstStyle/>
           <a:p>
             <a:r>
-              <a:rPr lang="zh-TW" altLang="en-US" dirty="0" smtClean="0"/>
+              <a:rPr lang="zh-TW" altLang="en-US" dirty="0"/>
               <a:t>佇列</a:t>
             </a:r>
-            <a:endParaRPr lang="zh-TW" altLang="en-US" dirty="0"/>
           </a:p>
         </p:txBody>
       </p:sp>
@@ -23595,25 +22752,25 @@
           <a:lstStyle/>
           <a:p>
             <a:r>
-              <a:rPr lang="zh-TW" altLang="en-US" dirty="0" smtClean="0"/>
+              <a:rPr lang="zh-TW" altLang="en-US" dirty="0"/>
               <a:t>佇列</a:t>
             </a:r>
             <a:r>
-              <a:rPr lang="en-US" altLang="zh-TW" dirty="0" smtClean="0"/>
+              <a:rPr lang="en-US" altLang="zh-TW" dirty="0"/>
               <a:t>(queue)</a:t>
             </a:r>
             <a:r>
-              <a:rPr lang="zh-TW" altLang="en-US" dirty="0" smtClean="0"/>
+              <a:rPr lang="zh-TW" altLang="en-US" dirty="0"/>
               <a:t>這種資料結構的操作方式和堆疊相反。</a:t>
             </a:r>
-            <a:endParaRPr lang="en-US" altLang="zh-TW" dirty="0" smtClean="0"/>
-          </a:p>
-          <a:p>
-            <a:r>
-              <a:rPr lang="zh-TW" altLang="en-US" dirty="0" smtClean="0"/>
+            <a:endParaRPr lang="en-US" altLang="zh-TW" dirty="0"/>
+          </a:p>
+          <a:p>
+            <a:r>
+              <a:rPr lang="zh-TW" altLang="en-US" dirty="0"/>
               <a:t>佇列的概念，是處理一序列資料的時候，採用「先進先出」、「後進後出」的順序。</a:t>
             </a:r>
-            <a:endParaRPr lang="en-US" altLang="zh-TW" dirty="0" smtClean="0"/>
+            <a:endParaRPr lang="en-US" altLang="zh-TW" dirty="0"/>
           </a:p>
         </p:txBody>
       </p:sp>
@@ -23622,13 +22779,6 @@
   <p:clrMapOvr>
     <a:masterClrMapping/>
   </p:clrMapOvr>
-  <p:timing>
-    <p:tnLst>
-      <p:par>
-        <p:cTn id="1" dur="indefinite" restart="never" nodeType="tmRoot"/>
-      </p:par>
-    </p:tnLst>
-  </p:timing>
 </p:sld>
 </file>
 
@@ -23738,13 +22888,6 @@
   <p:clrMapOvr>
     <a:masterClrMapping/>
   </p:clrMapOvr>
-  <p:timing>
-    <p:tnLst>
-      <p:par>
-        <p:cTn id="1" dur="indefinite" restart="never" nodeType="tmRoot"/>
-      </p:par>
-    </p:tnLst>
-  </p:timing>
 </p:sld>
 </file>
 
@@ -23828,13 +22971,9 @@
             </a:r>
             <a:r>
               <a:rPr lang="zh-TW" altLang="en-US" dirty="0"/>
-              <a:t>號車。進入佇列和出來佇列的示意圖如下所示</a:t>
-            </a:r>
-            <a:r>
-              <a:rPr lang="zh-TW" altLang="en-US" dirty="0" smtClean="0"/>
-              <a:t>。</a:t>
-            </a:r>
-            <a:endParaRPr lang="en-US" altLang="zh-TW" dirty="0" smtClean="0"/>
+              <a:t>號車。進入佇列和出來佇列的示意圖如下所示。</a:t>
+            </a:r>
+            <a:endParaRPr lang="en-US" altLang="zh-TW" dirty="0"/>
           </a:p>
           <a:p>
             <a:endParaRPr lang="en-US" altLang="zh-TW" dirty="0"/>
@@ -23843,7 +22982,7 @@
             <a:pPr marL="0" indent="0">
               <a:buNone/>
             </a:pPr>
-            <a:endParaRPr lang="en-US" altLang="zh-TW" dirty="0" smtClean="0"/>
+            <a:endParaRPr lang="en-US" altLang="zh-TW" dirty="0"/>
           </a:p>
         </p:txBody>
       </p:sp>
@@ -23911,13 +23050,6 @@
   <p:clrMapOvr>
     <a:masterClrMapping/>
   </p:clrMapOvr>
-  <p:timing>
-    <p:tnLst>
-      <p:par>
-        <p:cTn id="1" dur="indefinite" restart="never" nodeType="tmRoot"/>
-      </p:par>
-    </p:tnLst>
-  </p:timing>
 </p:sld>
 </file>
 
@@ -23976,27 +23108,15 @@
           <a:lstStyle/>
           <a:p>
             <a:r>
-              <a:rPr lang="zh-TW" altLang="en-US" dirty="0" smtClean="0"/>
-              <a:t>同樣</a:t>
-            </a:r>
-            <a:r>
-              <a:rPr lang="zh-TW" altLang="en-US" dirty="0"/>
-              <a:t>利用陣列來實作佇列</a:t>
-            </a:r>
-            <a:r>
-              <a:rPr lang="zh-TW" altLang="en-US" dirty="0" smtClean="0"/>
-              <a:t>。</a:t>
-            </a:r>
-            <a:endParaRPr lang="en-US" altLang="zh-TW" dirty="0" smtClean="0"/>
-          </a:p>
-          <a:p>
-            <a:r>
-              <a:rPr lang="zh-TW" altLang="en-US" dirty="0" smtClean="0"/>
-              <a:t>假設預先</a:t>
-            </a:r>
-            <a:r>
-              <a:rPr lang="zh-TW" altLang="en-US" dirty="0"/>
-              <a:t>知道只有</a:t>
+              <a:rPr lang="zh-TW" altLang="en-US" dirty="0"/>
+              <a:t>同樣利用陣列來實作佇列。</a:t>
+            </a:r>
+            <a:endParaRPr lang="en-US" altLang="zh-TW" dirty="0"/>
+          </a:p>
+          <a:p>
+            <a:r>
+              <a:rPr lang="zh-TW" altLang="en-US" dirty="0"/>
+              <a:t>假設預先知道只有</a:t>
             </a:r>
             <a:r>
               <a:rPr lang="en-US" altLang="zh-TW" dirty="0"/>
@@ -24004,21 +23124,9 @@
             </a:r>
             <a:r>
               <a:rPr lang="zh-TW" altLang="en-US" dirty="0"/>
-              <a:t>個整數要處理</a:t>
-            </a:r>
-            <a:r>
-              <a:rPr lang="zh-TW" altLang="en-US" dirty="0" smtClean="0"/>
-              <a:t>，可以</a:t>
-            </a:r>
-            <a:r>
-              <a:rPr lang="zh-TW" altLang="en-US" dirty="0"/>
-              <a:t>宣告如下</a:t>
-            </a:r>
-            <a:r>
-              <a:rPr lang="zh-TW" altLang="en-US" dirty="0" smtClean="0"/>
-              <a:t>：</a:t>
-            </a:r>
-            <a:endParaRPr lang="en-US" altLang="zh-TW" dirty="0" smtClean="0"/>
+              <a:t>個整數要處理，可以宣告如下：</a:t>
+            </a:r>
+            <a:endParaRPr lang="en-US" altLang="zh-TW" dirty="0"/>
           </a:p>
           <a:p>
             <a:pPr marL="0" indent="0">
@@ -24104,13 +23212,6 @@
   <p:clrMapOvr>
     <a:masterClrMapping/>
   </p:clrMapOvr>
-  <p:timing>
-    <p:tnLst>
-      <p:par>
-        <p:cTn id="1" dur="indefinite" restart="never" nodeType="tmRoot"/>
-      </p:par>
-    </p:tnLst>
-  </p:timing>
 </p:sld>
 </file>
 
@@ -24147,10 +23248,9 @@
           <a:lstStyle/>
           <a:p>
             <a:r>
-              <a:rPr lang="zh-TW" altLang="en-US" dirty="0" smtClean="0"/>
+              <a:rPr lang="zh-TW" altLang="en-US" dirty="0"/>
               <a:t>佇列</a:t>
             </a:r>
-            <a:endParaRPr lang="zh-TW" altLang="en-US" dirty="0"/>
           </a:p>
         </p:txBody>
       </p:sp>
@@ -24170,10 +23270,10 @@
           <a:lstStyle/>
           <a:p>
             <a:r>
-              <a:rPr lang="zh-TW" altLang="en-US" dirty="0" smtClean="0"/>
+              <a:rPr lang="zh-TW" altLang="en-US" dirty="0"/>
               <a:t>以下提出相關的定義，說明如何將資料放入佇列，再將資料從佇列取出，以實作「先進先出」和「後進後出」的想法。</a:t>
             </a:r>
-            <a:endParaRPr lang="en-US" altLang="zh-TW" dirty="0" smtClean="0"/>
+            <a:endParaRPr lang="en-US" altLang="zh-TW" dirty="0"/>
           </a:p>
         </p:txBody>
       </p:sp>
@@ -24182,13 +23282,6 @@
   <p:clrMapOvr>
     <a:masterClrMapping/>
   </p:clrMapOvr>
-  <p:timing>
-    <p:tnLst>
-      <p:par>
-        <p:cTn id="1" dur="indefinite" restart="never" nodeType="tmRoot"/>
-      </p:par>
-    </p:tnLst>
-  </p:timing>
 </p:sld>
 </file>
 
@@ -24362,13 +23455,6 @@
   <p:clrMapOvr>
     <a:masterClrMapping/>
   </p:clrMapOvr>
-  <p:timing>
-    <p:tnLst>
-      <p:par>
-        <p:cTn id="1" dur="indefinite" restart="never" nodeType="tmRoot"/>
-      </p:par>
-    </p:tnLst>
-  </p:timing>
 </p:sld>
 </file>
 
@@ -24427,11 +23513,11 @@
           <a:lstStyle/>
           <a:p>
             <a:r>
-              <a:rPr lang="zh-TW" altLang="en-US" dirty="0" smtClean="0"/>
+              <a:rPr lang="zh-TW" altLang="en-US" dirty="0"/>
               <a:t>接著定義將資料放入佇列的程序</a:t>
             </a:r>
             <a:r>
-              <a:rPr lang="en-US" altLang="zh-TW" dirty="0" smtClean="0">
+              <a:rPr lang="en-US" altLang="zh-TW" dirty="0">
                 <a:solidFill>
                   <a:srgbClr val="0070C0"/>
                 </a:solidFill>
@@ -24439,11 +23525,11 @@
               <a:t>put</a:t>
             </a:r>
             <a:r>
-              <a:rPr lang="zh-TW" altLang="en-US" dirty="0" smtClean="0"/>
+              <a:rPr lang="zh-TW" altLang="en-US" dirty="0"/>
               <a:t>，注意到，這裡更改的是最後面元素的註標，也就是變數</a:t>
             </a:r>
             <a:r>
-              <a:rPr lang="en-US" altLang="zh-TW" dirty="0" smtClean="0">
+              <a:rPr lang="en-US" altLang="zh-TW" dirty="0">
                 <a:solidFill>
                   <a:srgbClr val="0070C0"/>
                 </a:solidFill>
@@ -24451,10 +23537,9 @@
               <a:t>rear</a:t>
             </a:r>
             <a:r>
-              <a:rPr lang="zh-TW" altLang="en-US" dirty="0" smtClean="0"/>
+              <a:rPr lang="zh-TW" altLang="en-US" dirty="0"/>
               <a:t>會對應到佇列最後面元素的註標：</a:t>
             </a:r>
-            <a:endParaRPr lang="zh-TW" altLang="en-US" dirty="0"/>
           </a:p>
         </p:txBody>
       </p:sp>
@@ -24523,13 +23608,6 @@
   <p:clrMapOvr>
     <a:masterClrMapping/>
   </p:clrMapOvr>
-  <p:timing>
-    <p:tnLst>
-      <p:par>
-        <p:cTn id="1" dur="indefinite" restart="never" nodeType="tmRoot"/>
-      </p:par>
-    </p:tnLst>
-  </p:timing>
 </p:sld>
 </file>
 
@@ -24588,11 +23666,11 @@
           <a:lstStyle/>
           <a:p>
             <a:r>
-              <a:rPr lang="zh-TW" altLang="en-US" dirty="0" smtClean="0"/>
+              <a:rPr lang="zh-TW" altLang="en-US" dirty="0"/>
               <a:t>然後，要將資料從佇列取出的時候， 根據的變數是</a:t>
             </a:r>
             <a:r>
-              <a:rPr lang="en-US" altLang="zh-TW" dirty="0" smtClean="0">
+              <a:rPr lang="en-US" altLang="zh-TW" dirty="0">
                 <a:solidFill>
                   <a:srgbClr val="0070C0"/>
                 </a:solidFill>
@@ -24600,11 +23678,11 @@
               <a:t>front</a:t>
             </a:r>
             <a:r>
-              <a:rPr lang="zh-TW" altLang="en-US" dirty="0" smtClean="0"/>
+              <a:rPr lang="zh-TW" altLang="en-US" dirty="0"/>
               <a:t>，因為它對應到最前面元素前一個位置的註標，相關的函數</a:t>
             </a:r>
             <a:r>
-              <a:rPr lang="en-US" altLang="zh-TW" dirty="0" smtClean="0">
+              <a:rPr lang="en-US" altLang="zh-TW" dirty="0">
                 <a:solidFill>
                   <a:srgbClr val="0070C0"/>
                 </a:solidFill>
@@ -24612,10 +23690,9 @@
               <a:t>get</a:t>
             </a:r>
             <a:r>
-              <a:rPr lang="zh-TW" altLang="en-US" dirty="0" smtClean="0"/>
+              <a:rPr lang="zh-TW" altLang="en-US" dirty="0"/>
               <a:t>如下：</a:t>
             </a:r>
-            <a:endParaRPr lang="zh-TW" altLang="en-US" dirty="0"/>
           </a:p>
         </p:txBody>
       </p:sp>
@@ -24684,13 +23761,6 @@
   <p:clrMapOvr>
     <a:masterClrMapping/>
   </p:clrMapOvr>
-  <p:timing>
-    <p:tnLst>
-      <p:par>
-        <p:cTn id="1" dur="indefinite" restart="never" nodeType="tmRoot"/>
-      </p:par>
-    </p:tnLst>
-  </p:timing>
 </p:sld>
 </file>
 
@@ -24730,13 +23800,8 @@
           <a:p>
             <a:r>
               <a:rPr lang="zh-TW" altLang="en-US" dirty="0"/>
-              <a:t>環狀</a:t>
-            </a:r>
-            <a:r>
-              <a:rPr lang="zh-TW" altLang="en-US" dirty="0" smtClean="0"/>
-              <a:t>佇列</a:t>
-            </a:r>
-            <a:endParaRPr lang="zh-TW" altLang="en-US" dirty="0"/>
+              <a:t>環狀佇列</a:t>
+            </a:r>
           </a:p>
         </p:txBody>
       </p:sp>
@@ -24758,11 +23823,11 @@
           <a:lstStyle/>
           <a:p>
             <a:r>
-              <a:rPr lang="zh-TW" altLang="en-US" dirty="0" smtClean="0"/>
+              <a:rPr lang="zh-TW" altLang="en-US" dirty="0"/>
               <a:t>觀察佇列的相關程序，可以看到</a:t>
             </a:r>
             <a:r>
-              <a:rPr lang="en-US" altLang="zh-TW" dirty="0" smtClean="0">
+              <a:rPr lang="en-US" altLang="zh-TW" dirty="0">
                 <a:solidFill>
                   <a:srgbClr val="0070C0"/>
                 </a:solidFill>
@@ -24770,11 +23835,11 @@
               <a:t>front</a:t>
             </a:r>
             <a:r>
-              <a:rPr lang="zh-TW" altLang="en-US" dirty="0" smtClean="0"/>
+              <a:rPr lang="zh-TW" altLang="en-US" dirty="0"/>
               <a:t>和</a:t>
             </a:r>
             <a:r>
-              <a:rPr lang="en-US" altLang="zh-TW" dirty="0" smtClean="0">
+              <a:rPr lang="en-US" altLang="zh-TW" dirty="0">
                 <a:solidFill>
                   <a:srgbClr val="0070C0"/>
                 </a:solidFill>
@@ -24782,10 +23847,10 @@
               <a:t>rear</a:t>
             </a:r>
             <a:r>
-              <a:rPr lang="zh-TW" altLang="en-US" dirty="0" smtClean="0"/>
+              <a:rPr lang="zh-TW" altLang="en-US" dirty="0"/>
               <a:t>對應的註標會一直增加。</a:t>
             </a:r>
-            <a:endParaRPr lang="en-US" altLang="zh-TW" dirty="0" smtClean="0"/>
+            <a:endParaRPr lang="en-US" altLang="zh-TW" dirty="0"/>
           </a:p>
         </p:txBody>
       </p:sp>
@@ -24794,13 +23859,6 @@
   <p:clrMapOvr>
     <a:masterClrMapping/>
   </p:clrMapOvr>
-  <p:timing>
-    <p:tnLst>
-      <p:par>
-        <p:cTn id="1" dur="indefinite" restart="never" nodeType="tmRoot"/>
-      </p:par>
-    </p:tnLst>
-  </p:timing>
 </p:sld>
 </file>
 
@@ -24837,7 +23895,7 @@
           <a:lstStyle/>
           <a:p>
             <a:r>
-              <a:rPr lang="en-US" altLang="zh-TW" dirty="0" smtClean="0"/>
+              <a:rPr lang="en-US" altLang="zh-TW" dirty="0"/>
               <a:t>10-1 </a:t>
             </a:r>
             <a:r>
@@ -24863,10 +23921,10 @@
           <a:lstStyle/>
           <a:p>
             <a:r>
-              <a:rPr lang="zh-TW" altLang="en-US" dirty="0" smtClean="0"/>
+              <a:rPr lang="zh-TW" altLang="en-US" dirty="0"/>
               <a:t>這樣的儲存方式， 是為了可以很快的決定某一個註標在記憶體的位置。</a:t>
             </a:r>
-            <a:endParaRPr lang="en-US" altLang="zh-TW" dirty="0" smtClean="0"/>
+            <a:endParaRPr lang="en-US" altLang="zh-TW" dirty="0"/>
           </a:p>
         </p:txBody>
       </p:sp>
@@ -24880,13 +23938,6 @@
   <p:clrMapOvr>
     <a:masterClrMapping/>
   </p:clrMapOvr>
-  <p:timing>
-    <p:tnLst>
-      <p:par>
-        <p:cTn id="1" dur="indefinite" restart="never" nodeType="tmRoot"/>
-      </p:par>
-    </p:tnLst>
-  </p:timing>
 </p:sld>
 </file>
 
@@ -25010,13 +24061,6 @@
   <p:clrMapOvr>
     <a:masterClrMapping/>
   </p:clrMapOvr>
-  <p:timing>
-    <p:tnLst>
-      <p:par>
-        <p:cTn id="1" dur="indefinite" restart="never" nodeType="tmRoot"/>
-      </p:par>
-    </p:tnLst>
-  </p:timing>
 </p:sld>
 </file>
 
@@ -25075,12 +24119,8 @@
           <a:lstStyle/>
           <a:p>
             <a:r>
-              <a:rPr lang="zh-TW" altLang="en-US" dirty="0" smtClean="0"/>
-              <a:t>為了方便說明，接下來假設</a:t>
-            </a:r>
-            <a:r>
-              <a:rPr lang="zh-TW" altLang="en-US" dirty="0"/>
-              <a:t>陣列裡只能存放</a:t>
+              <a:rPr lang="zh-TW" altLang="en-US" dirty="0"/>
+              <a:t>為了方便說明，接下來假設陣列裡只能存放</a:t>
             </a:r>
             <a:r>
               <a:rPr lang="en-US" altLang="zh-TW" dirty="0"/>
@@ -25088,14 +24128,10 @@
             </a:r>
             <a:r>
               <a:rPr lang="zh-TW" altLang="en-US" dirty="0"/>
-              <a:t>個數字，</a:t>
-            </a:r>
-            <a:r>
-              <a:rPr lang="zh-TW" altLang="en-US" dirty="0" smtClean="0"/>
-              <a:t>然後</a:t>
-            </a:r>
-            <a:r>
-              <a:rPr lang="en-US" altLang="zh-TW" dirty="0" smtClean="0">
+              <a:t>個數字，然後</a:t>
+            </a:r>
+            <a:r>
+              <a:rPr lang="en-US" altLang="zh-TW" dirty="0">
                 <a:solidFill>
                   <a:srgbClr val="0070C0"/>
                 </a:solidFill>
@@ -25103,11 +24139,11 @@
               <a:t>front</a:t>
             </a:r>
             <a:r>
-              <a:rPr lang="zh-TW" altLang="en-US" dirty="0" smtClean="0"/>
+              <a:rPr lang="zh-TW" altLang="en-US" dirty="0"/>
               <a:t>和</a:t>
             </a:r>
             <a:r>
-              <a:rPr lang="en-US" altLang="zh-TW" dirty="0" smtClean="0">
+              <a:rPr lang="en-US" altLang="zh-TW" dirty="0">
                 <a:solidFill>
                   <a:srgbClr val="0070C0"/>
                 </a:solidFill>
@@ -25115,22 +24151,17 @@
               <a:t>rear</a:t>
             </a:r>
             <a:r>
-              <a:rPr lang="zh-TW" altLang="en-US" dirty="0" smtClean="0"/>
-              <a:t>這兩</a:t>
-            </a:r>
-            <a:r>
-              <a:rPr lang="zh-TW" altLang="en-US" dirty="0"/>
-              <a:t>個變數，分別表示陣列的最前面和最後面註標，兩個的初始值都設定為</a:t>
+              <a:rPr lang="zh-TW" altLang="en-US" dirty="0"/>
+              <a:t>這兩個變數，分別表示陣列的最前面和最後面註標，兩個的初始值都設定為</a:t>
             </a:r>
             <a:r>
               <a:rPr lang="en-US" altLang="zh-TW" dirty="0"/>
               <a:t>0</a:t>
             </a:r>
             <a:r>
-              <a:rPr lang="zh-TW" altLang="en-US" dirty="0" smtClean="0"/>
+              <a:rPr lang="zh-TW" altLang="en-US" dirty="0"/>
               <a:t>。</a:t>
             </a:r>
-            <a:endParaRPr lang="zh-TW" altLang="en-US" dirty="0"/>
           </a:p>
         </p:txBody>
       </p:sp>
@@ -25204,13 +24235,6 @@
   <p:clrMapOvr>
     <a:masterClrMapping/>
   </p:clrMapOvr>
-  <p:timing>
-    <p:tnLst>
-      <p:par>
-        <p:cTn id="1" dur="indefinite" restart="never" nodeType="tmRoot"/>
-      </p:par>
-    </p:tnLst>
-  </p:timing>
 </p:sld>
 </file>
 
@@ -25247,10 +24271,9 @@
           <a:lstStyle/>
           <a:p>
             <a:r>
-              <a:rPr lang="zh-TW" altLang="en-US" dirty="0" smtClean="0"/>
+              <a:rPr lang="zh-TW" altLang="en-US" dirty="0"/>
               <a:t>環狀佇列</a:t>
             </a:r>
-            <a:endParaRPr lang="zh-TW" altLang="en-US" dirty="0"/>
           </a:p>
         </p:txBody>
       </p:sp>
@@ -25270,22 +24293,22 @@
           <a:lstStyle/>
           <a:p>
             <a:r>
-              <a:rPr lang="zh-TW" altLang="en-US" dirty="0" smtClean="0"/>
+              <a:rPr lang="zh-TW" altLang="en-US" dirty="0"/>
               <a:t>要將資料放入環狀佇列之前，首先必須先決定放入的位置，所根據的是對應陣列最後面的註標變數</a:t>
             </a:r>
             <a:r>
-              <a:rPr lang="en-US" altLang="zh-TW" dirty="0" smtClean="0">
-                <a:solidFill>
-                  <a:srgbClr val="00B0F0"/>
+              <a:rPr lang="en-US" altLang="zh-TW" dirty="0">
+                <a:solidFill>
+                  <a:srgbClr val="0070C0"/>
                 </a:solidFill>
               </a:rPr>
               <a:t>rear</a:t>
             </a:r>
             <a:r>
-              <a:rPr lang="zh-TW" altLang="en-US" dirty="0" smtClean="0"/>
+              <a:rPr lang="zh-TW" altLang="en-US" dirty="0"/>
               <a:t>。</a:t>
             </a:r>
-            <a:endParaRPr lang="en-US" altLang="zh-TW" dirty="0" smtClean="0"/>
+            <a:endParaRPr lang="en-US" altLang="zh-TW" dirty="0"/>
           </a:p>
         </p:txBody>
       </p:sp>
@@ -25294,13 +24317,6 @@
   <p:clrMapOvr>
     <a:masterClrMapping/>
   </p:clrMapOvr>
-  <p:timing>
-    <p:tnLst>
-      <p:par>
-        <p:cTn id="1" dur="indefinite" restart="never" nodeType="tmRoot"/>
-      </p:par>
-    </p:tnLst>
-  </p:timing>
 </p:sld>
 </file>
 
@@ -25450,13 +24466,6 @@
   <p:clrMapOvr>
     <a:masterClrMapping/>
   </p:clrMapOvr>
-  <p:timing>
-    <p:tnLst>
-      <p:par>
-        <p:cTn id="1" dur="indefinite" restart="never" nodeType="tmRoot"/>
-      </p:par>
-    </p:tnLst>
-  </p:timing>
 </p:sld>
 </file>
 
@@ -25518,14 +24527,10 @@
           <a:p>
             <a:r>
               <a:rPr lang="zh-TW" altLang="en-US" dirty="0"/>
-              <a:t>至於要將資料取出時，所根據的是對應陣列最前面的註標</a:t>
-            </a:r>
-            <a:r>
-              <a:rPr lang="zh-TW" altLang="en-US" dirty="0" smtClean="0"/>
-              <a:t>變數</a:t>
-            </a:r>
-            <a:r>
-              <a:rPr lang="en-US" altLang="zh-TW" dirty="0" smtClean="0">
+              <a:t>至於要將資料取出時，所根據的是對應陣列最前面的註標變數</a:t>
+            </a:r>
+            <a:r>
+              <a:rPr lang="en-US" altLang="zh-TW" dirty="0">
                 <a:solidFill>
                   <a:srgbClr val="0070C0"/>
                 </a:solidFill>
@@ -25533,19 +24538,11 @@
               <a:t>front</a:t>
             </a:r>
             <a:r>
-              <a:rPr lang="zh-TW" altLang="en-US" dirty="0" smtClean="0"/>
-              <a:t>，同樣</a:t>
-            </a:r>
-            <a:r>
-              <a:rPr lang="zh-TW" altLang="en-US" dirty="0"/>
-              <a:t>需要利用</a:t>
-            </a:r>
-            <a:r>
-              <a:rPr lang="zh-TW" altLang="en-US" dirty="0" smtClean="0"/>
-              <a:t>運算子</a:t>
-            </a:r>
-            <a:r>
-              <a:rPr lang="en-US" altLang="zh-TW" dirty="0" smtClean="0">
+              <a:rPr lang="zh-TW" altLang="en-US" dirty="0"/>
+              <a:t>，同樣需要利用運算子</a:t>
+            </a:r>
+            <a:r>
+              <a:rPr lang="en-US" altLang="zh-TW" dirty="0">
                 <a:solidFill>
                   <a:srgbClr val="0070C0"/>
                 </a:solidFill>
@@ -25553,18 +24550,10 @@
               <a:t>%</a:t>
             </a:r>
             <a:r>
-              <a:rPr lang="zh-TW" altLang="en-US" dirty="0" smtClean="0"/>
-              <a:t>取得</a:t>
-            </a:r>
-            <a:r>
-              <a:rPr lang="zh-TW" altLang="en-US" dirty="0"/>
-              <a:t>其註標的位置，如下列公式所決定</a:t>
-            </a:r>
-            <a:r>
-              <a:rPr lang="zh-TW" altLang="en-US" dirty="0" smtClean="0"/>
-              <a:t>：</a:t>
-            </a:r>
-            <a:endParaRPr lang="en-US" altLang="zh-TW" dirty="0" smtClean="0"/>
+              <a:rPr lang="zh-TW" altLang="en-US" dirty="0"/>
+              <a:t>取得其註標的位置，如下列公式所決定：</a:t>
+            </a:r>
+            <a:endParaRPr lang="en-US" altLang="zh-TW" dirty="0"/>
           </a:p>
           <a:p>
             <a:endParaRPr lang="en-US" altLang="zh-TW" dirty="0"/>
@@ -25683,13 +24672,6 @@
   <p:clrMapOvr>
     <a:masterClrMapping/>
   </p:clrMapOvr>
-  <p:timing>
-    <p:tnLst>
-      <p:par>
-        <p:cTn id="1" dur="indefinite" restart="never" nodeType="tmRoot"/>
-      </p:par>
-    </p:tnLst>
-  </p:timing>
 </p:sld>
 </file>
 
@@ -25808,13 +24790,6 @@
   <p:clrMapOvr>
     <a:masterClrMapping/>
   </p:clrMapOvr>
-  <p:timing>
-    <p:tnLst>
-      <p:par>
-        <p:cTn id="1" dur="indefinite" restart="never" nodeType="tmRoot"/>
-      </p:par>
-    </p:tnLst>
-  </p:timing>
 </p:sld>
 </file>
 
@@ -25873,11 +24848,11 @@
           <a:lstStyle/>
           <a:p>
             <a:r>
-              <a:rPr lang="zh-TW" altLang="en-US" dirty="0" smtClean="0"/>
+              <a:rPr lang="zh-TW" altLang="en-US" dirty="0"/>
               <a:t>由於一開始當環狀佇列還沒存放任何東西的時候，</a:t>
             </a:r>
             <a:r>
-              <a:rPr lang="en-US" altLang="zh-TW" dirty="0" smtClean="0">
+              <a:rPr lang="en-US" altLang="zh-TW" dirty="0">
                 <a:solidFill>
                   <a:srgbClr val="0070C0"/>
                 </a:solidFill>
@@ -25885,11 +24860,11 @@
               <a:t>front</a:t>
             </a:r>
             <a:r>
-              <a:rPr lang="zh-TW" altLang="en-US" dirty="0" smtClean="0"/>
+              <a:rPr lang="zh-TW" altLang="en-US" dirty="0"/>
               <a:t>和</a:t>
             </a:r>
             <a:r>
-              <a:rPr lang="en-US" altLang="zh-TW" dirty="0" smtClean="0">
+              <a:rPr lang="en-US" altLang="zh-TW" dirty="0">
                 <a:solidFill>
                   <a:srgbClr val="0070C0"/>
                 </a:solidFill>
@@ -25897,11 +24872,11 @@
               <a:t>rear</a:t>
             </a:r>
             <a:r>
-              <a:rPr lang="zh-TW" altLang="en-US" dirty="0" smtClean="0"/>
+              <a:rPr lang="zh-TW" altLang="en-US" dirty="0"/>
               <a:t>這兩個變數都設為</a:t>
             </a:r>
             <a:r>
-              <a:rPr lang="en-US" altLang="zh-TW" dirty="0" smtClean="0">
+              <a:rPr lang="en-US" altLang="zh-TW" dirty="0">
                 <a:solidFill>
                   <a:srgbClr val="0070C0"/>
                 </a:solidFill>
@@ -25909,11 +24884,11 @@
               <a:t>0</a:t>
             </a:r>
             <a:r>
-              <a:rPr lang="zh-TW" altLang="en-US" dirty="0" smtClean="0"/>
+              <a:rPr lang="zh-TW" altLang="en-US" dirty="0"/>
               <a:t>，所以很直覺地可以推論出當</a:t>
             </a:r>
             <a:r>
-              <a:rPr lang="en-US" altLang="zh-TW" dirty="0" smtClean="0">
+              <a:rPr lang="en-US" altLang="zh-TW" dirty="0">
                 <a:solidFill>
                   <a:srgbClr val="0070C0"/>
                 </a:solidFill>
@@ -25921,11 +24896,11 @@
               <a:t>front</a:t>
             </a:r>
             <a:r>
-              <a:rPr lang="zh-TW" altLang="en-US" dirty="0" smtClean="0"/>
+              <a:rPr lang="zh-TW" altLang="en-US" dirty="0"/>
               <a:t>和</a:t>
             </a:r>
             <a:r>
-              <a:rPr lang="en-US" altLang="zh-TW" dirty="0" smtClean="0">
+              <a:rPr lang="en-US" altLang="zh-TW" dirty="0">
                 <a:solidFill>
                   <a:srgbClr val="0070C0"/>
                 </a:solidFill>
@@ -25933,10 +24908,9 @@
               <a:t>rear</a:t>
             </a:r>
             <a:r>
-              <a:rPr lang="zh-TW" altLang="en-US" dirty="0" smtClean="0"/>
+              <a:rPr lang="zh-TW" altLang="en-US" dirty="0"/>
               <a:t>這兩個變數的值相同時，佇列是空的，如下式所列：</a:t>
             </a:r>
-            <a:endParaRPr lang="zh-TW" altLang="en-US" dirty="0"/>
           </a:p>
         </p:txBody>
       </p:sp>
@@ -26005,13 +24979,6 @@
   <p:clrMapOvr>
     <a:masterClrMapping/>
   </p:clrMapOvr>
-  <p:timing>
-    <p:tnLst>
-      <p:par>
-        <p:cTn id="1" dur="indefinite" restart="never" nodeType="tmRoot"/>
-      </p:par>
-    </p:tnLst>
-  </p:timing>
 </p:sld>
 </file>
 
@@ -26095,17 +25062,10 @@
                 <a:latin typeface="微軟正黑體" pitchFamily="34" charset="-120"/>
                 <a:ea typeface="微軟正黑體" pitchFamily="34" charset="-120"/>
               </a:rPr>
-              <a:t>佇列的名稱簡寫</a:t>
-            </a:r>
-            <a:r>
-              <a:rPr lang="zh-TW" altLang="en-US" b="1" dirty="0" smtClean="0">
-                <a:latin typeface="微軟正黑體" pitchFamily="34" charset="-120"/>
-                <a:ea typeface="微軟正黑體" pitchFamily="34" charset="-120"/>
-              </a:rPr>
-              <a:t>為</a:t>
-            </a:r>
-            <a:r>
-              <a:rPr lang="en-US" altLang="zh-TW" b="1" dirty="0" smtClean="0">
+              <a:t>佇列的名稱簡寫為</a:t>
+            </a:r>
+            <a:r>
+              <a:rPr lang="en-US" altLang="zh-TW" b="1" dirty="0">
                 <a:solidFill>
                   <a:srgbClr val="0070C0"/>
                 </a:solidFill>
@@ -26215,16 +25175,12 @@
           <a:lstStyle/>
           <a:p>
             <a:r>
-              <a:rPr lang="zh-TW" altLang="en-US" sz="2400" b="1" dirty="0" smtClean="0">
+              <a:rPr lang="zh-TW" altLang="en-US" sz="2400" b="1" dirty="0">
                 <a:latin typeface="微軟正黑體" pitchFamily="34" charset="-120"/>
                 <a:ea typeface="微軟正黑體" pitchFamily="34" charset="-120"/>
               </a:rPr>
               <a:t>環狀佇列示意圖</a:t>
             </a:r>
-            <a:endParaRPr lang="zh-TW" altLang="en-US" sz="2400" b="1" dirty="0">
-              <a:latin typeface="微軟正黑體" pitchFamily="34" charset="-120"/>
-              <a:ea typeface="微軟正黑體" pitchFamily="34" charset="-120"/>
-            </a:endParaRPr>
           </a:p>
         </p:txBody>
       </p:sp>
@@ -26233,13 +25189,6 @@
   <p:clrMapOvr>
     <a:masterClrMapping/>
   </p:clrMapOvr>
-  <p:timing>
-    <p:tnLst>
-      <p:par>
-        <p:cTn id="1" dur="indefinite" restart="never" nodeType="tmRoot"/>
-      </p:par>
-    </p:tnLst>
-  </p:timing>
 </p:sld>
 </file>
 
@@ -26300,19 +25249,19 @@
           <a:lstStyle/>
           <a:p>
             <a:r>
-              <a:rPr lang="zh-TW" altLang="en-US" dirty="0" smtClean="0"/>
+              <a:rPr lang="zh-TW" altLang="en-US" dirty="0"/>
               <a:t>一開始在上圖</a:t>
             </a:r>
             <a:r>
-              <a:rPr lang="en-US" altLang="zh-TW" dirty="0" smtClean="0"/>
+              <a:rPr lang="en-US" altLang="zh-TW" dirty="0"/>
               <a:t>(a)</a:t>
             </a:r>
             <a:r>
-              <a:rPr lang="zh-TW" altLang="en-US" dirty="0" smtClean="0"/>
+              <a:rPr lang="zh-TW" altLang="en-US" dirty="0"/>
               <a:t>中，佇列是空的，然後</a:t>
             </a:r>
             <a:r>
-              <a:rPr lang="en-US" altLang="zh-TW" dirty="0" smtClean="0">
+              <a:rPr lang="en-US" altLang="zh-TW" dirty="0">
                 <a:solidFill>
                   <a:srgbClr val="0070C0"/>
                 </a:solidFill>
@@ -26320,11 +25269,11 @@
               <a:t>front</a:t>
             </a:r>
             <a:r>
-              <a:rPr lang="zh-TW" altLang="en-US" dirty="0" smtClean="0"/>
+              <a:rPr lang="zh-TW" altLang="en-US" dirty="0"/>
               <a:t>和 </a:t>
             </a:r>
             <a:r>
-              <a:rPr lang="en-US" altLang="zh-TW" dirty="0" smtClean="0">
+              <a:rPr lang="en-US" altLang="zh-TW" dirty="0">
                 <a:solidFill>
                   <a:srgbClr val="0070C0"/>
                 </a:solidFill>
@@ -26332,11 +25281,11 @@
               <a:t>rear</a:t>
             </a:r>
             <a:r>
-              <a:rPr lang="zh-TW" altLang="en-US" dirty="0" smtClean="0"/>
+              <a:rPr lang="zh-TW" altLang="en-US" dirty="0"/>
               <a:t>這兩個變數的值都為</a:t>
             </a:r>
             <a:r>
-              <a:rPr lang="en-US" altLang="zh-TW" dirty="0" smtClean="0">
+              <a:rPr lang="en-US" altLang="zh-TW" dirty="0">
                 <a:solidFill>
                   <a:srgbClr val="0070C0"/>
                 </a:solidFill>
@@ -26344,42 +25293,42 @@
               <a:t>0</a:t>
             </a:r>
             <a:r>
-              <a:rPr lang="zh-TW" altLang="en-US" dirty="0" smtClean="0"/>
+              <a:rPr lang="zh-TW" altLang="en-US" dirty="0"/>
               <a:t>。</a:t>
             </a:r>
-            <a:endParaRPr lang="en-US" altLang="zh-TW" dirty="0" smtClean="0"/>
-          </a:p>
-          <a:p>
-            <a:r>
-              <a:rPr lang="zh-TW" altLang="en-US" dirty="0" smtClean="0"/>
+            <a:endParaRPr lang="en-US" altLang="zh-TW" dirty="0"/>
+          </a:p>
+          <a:p>
+            <a:r>
+              <a:rPr lang="zh-TW" altLang="en-US" dirty="0"/>
               <a:t>之後如同一般的佇列，元素會加入佇列的尾端，所以在加入了數字</a:t>
             </a:r>
             <a:r>
-              <a:rPr lang="en-US" altLang="zh-TW" dirty="0" smtClean="0"/>
+              <a:rPr lang="en-US" altLang="zh-TW" dirty="0"/>
               <a:t>N1</a:t>
             </a:r>
             <a:r>
-              <a:rPr lang="zh-TW" altLang="en-US" dirty="0" smtClean="0"/>
+              <a:rPr lang="zh-TW" altLang="en-US" dirty="0"/>
               <a:t>、</a:t>
             </a:r>
             <a:r>
-              <a:rPr lang="en-US" altLang="zh-TW" dirty="0" smtClean="0"/>
+              <a:rPr lang="en-US" altLang="zh-TW" dirty="0"/>
               <a:t>N2</a:t>
             </a:r>
             <a:r>
-              <a:rPr lang="zh-TW" altLang="en-US" dirty="0" smtClean="0"/>
+              <a:rPr lang="zh-TW" altLang="en-US" dirty="0"/>
               <a:t>和</a:t>
             </a:r>
             <a:r>
-              <a:rPr lang="en-US" altLang="zh-TW" dirty="0" smtClean="0"/>
+              <a:rPr lang="en-US" altLang="zh-TW" dirty="0"/>
               <a:t>N3</a:t>
             </a:r>
             <a:r>
-              <a:rPr lang="zh-TW" altLang="en-US" dirty="0" smtClean="0"/>
+              <a:rPr lang="zh-TW" altLang="en-US" dirty="0"/>
               <a:t>之後，</a:t>
             </a:r>
             <a:r>
-              <a:rPr lang="en-US" altLang="zh-TW" dirty="0" smtClean="0">
+              <a:rPr lang="en-US" altLang="zh-TW" dirty="0">
                 <a:solidFill>
                   <a:srgbClr val="0070C0"/>
                 </a:solidFill>
@@ -26387,11 +25336,11 @@
               <a:t>rear</a:t>
             </a:r>
             <a:r>
-              <a:rPr lang="zh-TW" altLang="en-US" dirty="0" smtClean="0"/>
+              <a:rPr lang="zh-TW" altLang="en-US" dirty="0"/>
               <a:t>的值會變為</a:t>
             </a:r>
             <a:r>
-              <a:rPr lang="en-US" altLang="zh-TW" dirty="0" smtClean="0">
+              <a:rPr lang="en-US" altLang="zh-TW" dirty="0">
                 <a:solidFill>
                   <a:srgbClr val="0070C0"/>
                 </a:solidFill>
@@ -26399,18 +25348,17 @@
               <a:t>3</a:t>
             </a:r>
             <a:r>
-              <a:rPr lang="zh-TW" altLang="en-US" dirty="0" smtClean="0"/>
+              <a:rPr lang="zh-TW" altLang="en-US" dirty="0"/>
               <a:t>，如圖</a:t>
             </a:r>
             <a:r>
-              <a:rPr lang="en-US" altLang="zh-TW" dirty="0" smtClean="0"/>
+              <a:rPr lang="en-US" altLang="zh-TW" dirty="0"/>
               <a:t>(b)</a:t>
             </a:r>
             <a:r>
-              <a:rPr lang="zh-TW" altLang="en-US" dirty="0" smtClean="0"/>
+              <a:rPr lang="zh-TW" altLang="en-US" dirty="0"/>
               <a:t>所示。</a:t>
             </a:r>
-            <a:endParaRPr lang="zh-TW" altLang="en-US" dirty="0"/>
           </a:p>
         </p:txBody>
       </p:sp>
@@ -26419,13 +25367,6 @@
   <p:clrMapOvr>
     <a:masterClrMapping/>
   </p:clrMapOvr>
-  <p:timing>
-    <p:tnLst>
-      <p:par>
-        <p:cTn id="1" dur="indefinite" restart="never" nodeType="tmRoot"/>
-      </p:par>
-    </p:tnLst>
-  </p:timing>
 </p:sld>
 </file>
 
@@ -26503,11 +25444,7 @@
             </a:r>
             <a:r>
               <a:rPr lang="zh-TW" altLang="en-US" dirty="0"/>
-              <a:t>個數字，但是</a:t>
-            </a:r>
-            <a:r>
-              <a:rPr lang="zh-TW" altLang="en-US" dirty="0" smtClean="0"/>
-              <a:t>當加入</a:t>
+              <a:t>個數字，但是當加入</a:t>
             </a:r>
             <a:r>
               <a:rPr lang="en-US" altLang="zh-TW" dirty="0"/>
@@ -26518,16 +25455,12 @@
               <a:t>、</a:t>
             </a:r>
             <a:r>
-              <a:rPr lang="en-US" altLang="zh-TW" dirty="0" smtClean="0"/>
+              <a:rPr lang="en-US" altLang="zh-TW" dirty="0"/>
               <a:t>N5</a:t>
             </a:r>
             <a:r>
-              <a:rPr lang="zh-TW" altLang="en-US" dirty="0" smtClean="0"/>
-              <a:t>後，</a:t>
-            </a:r>
-            <a:r>
-              <a:rPr lang="zh-TW" altLang="en-US" dirty="0"/>
-              <a:t>此時的</a:t>
+              <a:rPr lang="zh-TW" altLang="en-US" dirty="0"/>
+              <a:t>後，此時的</a:t>
             </a:r>
             <a:r>
               <a:rPr lang="en-US" altLang="zh-TW" dirty="0">
@@ -26551,19 +25484,11 @@
             </a:r>
             <a:r>
               <a:rPr lang="zh-TW" altLang="en-US" dirty="0"/>
-              <a:t>，如</a:t>
-            </a:r>
-            <a:r>
-              <a:rPr lang="zh-TW" altLang="en-US" dirty="0" smtClean="0"/>
-              <a:t>圖</a:t>
-            </a:r>
-            <a:r>
-              <a:rPr lang="en-US" altLang="zh-TW" dirty="0" smtClean="0"/>
-              <a:t>(</a:t>
+              <a:t>，如圖</a:t>
             </a:r>
             <a:r>
               <a:rPr lang="en-US" altLang="zh-TW" dirty="0"/>
-              <a:t>c)</a:t>
+              <a:t>(c)</a:t>
             </a:r>
             <a:r>
               <a:rPr lang="zh-TW" altLang="en-US" dirty="0"/>
@@ -26572,12 +25497,8 @@
           </a:p>
           <a:p>
             <a:r>
-              <a:rPr lang="zh-TW" altLang="en-US" dirty="0" smtClean="0"/>
-              <a:t>若要</a:t>
-            </a:r>
-            <a:r>
-              <a:rPr lang="zh-TW" altLang="en-US" dirty="0"/>
-              <a:t>繼續加入</a:t>
+              <a:rPr lang="zh-TW" altLang="en-US" dirty="0"/>
+              <a:t>若要繼續加入</a:t>
             </a:r>
             <a:r>
               <a:rPr lang="en-US" altLang="zh-TW" dirty="0"/>
@@ -26585,22 +25506,10 @@
             </a:r>
             <a:r>
               <a:rPr lang="zh-TW" altLang="en-US" dirty="0"/>
-              <a:t>，則根據之前的公式去計算陣列的註標</a:t>
-            </a:r>
-            <a:r>
-              <a:rPr lang="zh-TW" altLang="en-US" dirty="0" smtClean="0"/>
-              <a:t>，會</a:t>
-            </a:r>
-            <a:r>
-              <a:rPr lang="zh-TW" altLang="en-US" dirty="0"/>
-              <a:t>得到下面的</a:t>
-            </a:r>
-            <a:r>
-              <a:rPr lang="zh-TW" altLang="en-US" dirty="0" smtClean="0"/>
-              <a:t>結果。</a:t>
-            </a:r>
-            <a:r>
-              <a:rPr lang="en-US" altLang="zh-TW" dirty="0" smtClean="0">
+              <a:t>，則根據之前的公式去計算陣列的註標，會得到下面的結果。</a:t>
+            </a:r>
+            <a:r>
+              <a:rPr lang="en-US" altLang="zh-TW" dirty="0">
                 <a:solidFill>
                   <a:srgbClr val="0070C0"/>
                 </a:solidFill>
@@ -26608,19 +25517,11 @@
               <a:t>rear</a:t>
             </a:r>
             <a:r>
-              <a:rPr lang="zh-TW" altLang="en-US" dirty="0" smtClean="0"/>
-              <a:t>的</a:t>
-            </a:r>
-            <a:r>
-              <a:rPr lang="zh-TW" altLang="en-US" dirty="0"/>
-              <a:t>值計算</a:t>
-            </a:r>
-            <a:r>
-              <a:rPr lang="zh-TW" altLang="en-US" dirty="0" smtClean="0"/>
-              <a:t>為</a:t>
-            </a:r>
-            <a:r>
-              <a:rPr lang="en-US" altLang="zh-TW" dirty="0" smtClean="0">
+              <a:rPr lang="zh-TW" altLang="en-US" dirty="0"/>
+              <a:t>的值計算為</a:t>
+            </a:r>
+            <a:r>
+              <a:rPr lang="en-US" altLang="zh-TW" dirty="0">
                 <a:solidFill>
                   <a:srgbClr val="0070C0"/>
                 </a:solidFill>
@@ -26628,10 +25529,9 @@
               <a:t>0</a:t>
             </a:r>
             <a:r>
-              <a:rPr lang="zh-TW" altLang="en-US" dirty="0" smtClean="0"/>
+              <a:rPr lang="zh-TW" altLang="en-US" dirty="0"/>
               <a:t>。</a:t>
             </a:r>
-            <a:endParaRPr lang="zh-TW" altLang="en-US" dirty="0"/>
           </a:p>
           <a:p>
             <a:endParaRPr lang="zh-TW" altLang="en-US" dirty="0"/>
@@ -26708,13 +25608,6 @@
   <p:clrMapOvr>
     <a:masterClrMapping/>
   </p:clrMapOvr>
-  <p:timing>
-    <p:tnLst>
-      <p:par>
-        <p:cTn id="1" dur="indefinite" restart="never" nodeType="tmRoot"/>
-      </p:par>
-    </p:tnLst>
-  </p:timing>
 </p:sld>
 </file>
 
@@ -26908,13 +25801,6 @@
   <p:clrMapOvr>
     <a:masterClrMapping/>
   </p:clrMapOvr>
-  <p:timing>
-    <p:tnLst>
-      <p:par>
-        <p:cTn id="1" dur="indefinite" restart="never" nodeType="tmRoot"/>
-      </p:par>
-    </p:tnLst>
-  </p:timing>
 </p:sld>
 </file>
 
@@ -26975,27 +25861,27 @@
           <a:lstStyle/>
           <a:p>
             <a:r>
-              <a:rPr lang="zh-TW" altLang="en-US" dirty="0" smtClean="0"/>
+              <a:rPr lang="zh-TW" altLang="en-US" dirty="0"/>
               <a:t>若是真的將</a:t>
             </a:r>
             <a:r>
-              <a:rPr lang="en-US" altLang="zh-TW" dirty="0" smtClean="0"/>
+              <a:rPr lang="en-US" altLang="zh-TW" dirty="0"/>
               <a:t>N6</a:t>
             </a:r>
             <a:r>
-              <a:rPr lang="zh-TW" altLang="en-US" dirty="0" smtClean="0"/>
+              <a:rPr lang="zh-TW" altLang="en-US" dirty="0"/>
               <a:t>加入</a:t>
             </a:r>
             <a:r>
-              <a:rPr lang="en-US" altLang="zh-TW" dirty="0" smtClean="0"/>
+              <a:rPr lang="en-US" altLang="zh-TW" dirty="0"/>
               <a:t>Q[0]</a:t>
             </a:r>
             <a:r>
-              <a:rPr lang="zh-TW" altLang="en-US" dirty="0" smtClean="0"/>
+              <a:rPr lang="zh-TW" altLang="en-US" dirty="0"/>
               <a:t>的話，等到之後要去此環狀佇列取資料時，由於</a:t>
             </a:r>
             <a:r>
-              <a:rPr lang="en-US" altLang="zh-TW" dirty="0" smtClean="0">
+              <a:rPr lang="en-US" altLang="zh-TW" dirty="0">
                 <a:solidFill>
                   <a:srgbClr val="0070C0"/>
                 </a:solidFill>
@@ -27003,11 +25889,11 @@
               <a:t>front</a:t>
             </a:r>
             <a:r>
-              <a:rPr lang="zh-TW" altLang="en-US" dirty="0" smtClean="0"/>
+              <a:rPr lang="zh-TW" altLang="en-US" dirty="0"/>
               <a:t>和</a:t>
             </a:r>
             <a:r>
-              <a:rPr lang="en-US" altLang="zh-TW" dirty="0" smtClean="0">
+              <a:rPr lang="en-US" altLang="zh-TW" dirty="0">
                 <a:solidFill>
                   <a:srgbClr val="0070C0"/>
                 </a:solidFill>
@@ -27015,11 +25901,11 @@
               <a:t>rear</a:t>
             </a:r>
             <a:r>
-              <a:rPr lang="zh-TW" altLang="en-US" dirty="0" smtClean="0"/>
+              <a:rPr lang="zh-TW" altLang="en-US" dirty="0"/>
               <a:t>的值此時皆為</a:t>
             </a:r>
             <a:r>
-              <a:rPr lang="en-US" altLang="zh-TW" dirty="0" smtClean="0">
+              <a:rPr lang="en-US" altLang="zh-TW" dirty="0">
                 <a:solidFill>
                   <a:srgbClr val="0070C0"/>
                 </a:solidFill>
@@ -27027,33 +25913,32 @@
               <a:t>0</a:t>
             </a:r>
             <a:r>
-              <a:rPr lang="zh-TW" altLang="en-US" dirty="0" smtClean="0"/>
+              <a:rPr lang="zh-TW" altLang="en-US" dirty="0"/>
               <a:t>，根據之前的判斷式，會判斷此佇列為空佇列，也就是儘管佇列是滿的，卻會被誤判成空的。</a:t>
             </a:r>
-            <a:endParaRPr lang="en-US" altLang="zh-TW" dirty="0" smtClean="0"/>
-          </a:p>
-          <a:p>
-            <a:r>
-              <a:rPr lang="zh-TW" altLang="en-US" dirty="0" smtClean="0"/>
+            <a:endParaRPr lang="en-US" altLang="zh-TW" dirty="0"/>
+          </a:p>
+          <a:p>
+            <a:r>
+              <a:rPr lang="zh-TW" altLang="en-US" dirty="0"/>
               <a:t>所以，環狀佇列一個很重要的性質是，當宣告環狀佇列裡有</a:t>
             </a:r>
             <a:r>
-              <a:rPr lang="en-US" altLang="zh-TW" dirty="0" smtClean="0"/>
+              <a:rPr lang="en-US" altLang="zh-TW" dirty="0"/>
               <a:t>6</a:t>
             </a:r>
             <a:r>
-              <a:rPr lang="zh-TW" altLang="en-US" dirty="0" smtClean="0"/>
+              <a:rPr lang="zh-TW" altLang="en-US" dirty="0"/>
               <a:t>個空間時，最多只能表示</a:t>
             </a:r>
             <a:r>
-              <a:rPr lang="en-US" altLang="zh-TW" dirty="0" smtClean="0"/>
+              <a:rPr lang="en-US" altLang="zh-TW" dirty="0"/>
               <a:t>5</a:t>
             </a:r>
             <a:r>
-              <a:rPr lang="zh-TW" altLang="en-US" dirty="0" smtClean="0"/>
+              <a:rPr lang="zh-TW" altLang="en-US" dirty="0"/>
               <a:t>個元素。</a:t>
             </a:r>
-            <a:endParaRPr lang="zh-TW" altLang="en-US" dirty="0"/>
           </a:p>
         </p:txBody>
       </p:sp>
@@ -27062,13 +25947,6 @@
   <p:clrMapOvr>
     <a:masterClrMapping/>
   </p:clrMapOvr>
-  <p:timing>
-    <p:tnLst>
-      <p:par>
-        <p:cTn id="1" dur="indefinite" restart="never" nodeType="tmRoot"/>
-      </p:par>
-    </p:tnLst>
-  </p:timing>
 </p:sld>
 </file>
 
@@ -27129,12 +26007,8 @@
           <a:lstStyle/>
           <a:p>
             <a:r>
-              <a:rPr lang="zh-TW" altLang="en-US" sz="2600" dirty="0" smtClean="0"/>
-              <a:t>繼續</a:t>
-            </a:r>
-            <a:r>
               <a:rPr lang="zh-TW" altLang="en-US" sz="2600" dirty="0"/>
-              <a:t>對此環狀佇列處理：取出</a:t>
+              <a:t>繼續對此環狀佇列處理：取出</a:t>
             </a:r>
             <a:r>
               <a:rPr lang="en-US" altLang="zh-TW" sz="2600" dirty="0"/>
@@ -27150,14 +26024,10 @@
             </a:r>
             <a:r>
               <a:rPr lang="zh-TW" altLang="en-US" sz="2600" dirty="0"/>
-              <a:t>，</a:t>
-            </a:r>
-            <a:r>
-              <a:rPr lang="zh-TW" altLang="en-US" sz="2600" dirty="0" smtClean="0"/>
-              <a:t>使得</a:t>
-            </a:r>
-            <a:r>
-              <a:rPr lang="en-US" altLang="zh-TW" sz="2600" dirty="0" smtClean="0">
+              <a:t>，使得</a:t>
+            </a:r>
+            <a:r>
+              <a:rPr lang="en-US" altLang="zh-TW" sz="2600" dirty="0">
                 <a:solidFill>
                   <a:srgbClr val="0070C0"/>
                 </a:solidFill>
@@ -27165,12 +26035,8 @@
               <a:t>front</a:t>
             </a:r>
             <a:r>
-              <a:rPr lang="zh-TW" altLang="en-US" sz="2600" dirty="0" smtClean="0"/>
-              <a:t>的</a:t>
-            </a:r>
-            <a:r>
               <a:rPr lang="zh-TW" altLang="en-US" sz="2600" dirty="0"/>
-              <a:t>變數值變成</a:t>
+              <a:t>的變數值變成</a:t>
             </a:r>
             <a:r>
               <a:rPr lang="en-US" altLang="zh-TW" sz="2600" dirty="0"/>
@@ -27194,14 +26060,10 @@
             </a:r>
             <a:r>
               <a:rPr lang="zh-TW" altLang="en-US" sz="2600" dirty="0"/>
-              <a:t>，</a:t>
-            </a:r>
-            <a:r>
-              <a:rPr lang="zh-TW" altLang="en-US" sz="2600" dirty="0" smtClean="0"/>
-              <a:t>使得</a:t>
-            </a:r>
-            <a:r>
-              <a:rPr lang="en-US" altLang="zh-TW" sz="2600" dirty="0" smtClean="0">
+              <a:t>，使得</a:t>
+            </a:r>
+            <a:r>
+              <a:rPr lang="en-US" altLang="zh-TW" sz="2600" dirty="0">
                 <a:solidFill>
                   <a:srgbClr val="0070C0"/>
                 </a:solidFill>
@@ -27209,31 +26071,23 @@
               <a:t>rear</a:t>
             </a:r>
             <a:r>
-              <a:rPr lang="zh-TW" altLang="en-US" sz="2600" dirty="0" smtClean="0"/>
-              <a:t>的</a:t>
-            </a:r>
-            <a:r>
               <a:rPr lang="zh-TW" altLang="en-US" sz="2600" dirty="0"/>
-              <a:t>變數值變成</a:t>
+              <a:t>的變數值變成</a:t>
             </a:r>
             <a:r>
               <a:rPr lang="en-US" altLang="zh-TW" sz="2600" dirty="0"/>
               <a:t>1</a:t>
             </a:r>
             <a:r>
-              <a:rPr lang="zh-TW" altLang="en-US" sz="2600" dirty="0" smtClean="0"/>
+              <a:rPr lang="zh-TW" altLang="en-US" sz="2600" dirty="0"/>
               <a:t>。</a:t>
             </a:r>
-            <a:endParaRPr lang="en-US" altLang="zh-TW" sz="2600" dirty="0" smtClean="0"/>
-          </a:p>
-          <a:p>
-            <a:r>
-              <a:rPr lang="zh-TW" altLang="en-US" sz="2600" dirty="0" smtClean="0"/>
-              <a:t>此時</a:t>
-            </a:r>
+            <a:endParaRPr lang="en-US" altLang="zh-TW" sz="2600" dirty="0"/>
+          </a:p>
+          <a:p>
             <a:r>
               <a:rPr lang="zh-TW" altLang="en-US" sz="2600" dirty="0"/>
-              <a:t>佇列仍然是滿的，如圖</a:t>
+              <a:t>此時佇列仍然是滿的，如圖</a:t>
             </a:r>
             <a:r>
               <a:rPr lang="en-US" altLang="zh-TW" sz="2600" dirty="0"/>
@@ -27241,22 +26095,10 @@
             </a:r>
             <a:r>
               <a:rPr lang="zh-TW" altLang="en-US" sz="2600" dirty="0"/>
-              <a:t>所示。</a:t>
-            </a:r>
-            <a:r>
-              <a:rPr lang="zh-TW" altLang="en-US" sz="2600" dirty="0" smtClean="0"/>
-              <a:t>所以可以</a:t>
-            </a:r>
-            <a:r>
-              <a:rPr lang="zh-TW" altLang="en-US" sz="2600" dirty="0"/>
-              <a:t>推論出，</a:t>
-            </a:r>
-            <a:r>
-              <a:rPr lang="zh-TW" altLang="en-US" sz="2600" dirty="0" smtClean="0"/>
-              <a:t>當</a:t>
-            </a:r>
-            <a:r>
-              <a:rPr lang="en-US" altLang="zh-TW" sz="2600" dirty="0" smtClean="0">
+              <a:t>所示。所以可以推論出，當</a:t>
+            </a:r>
+            <a:r>
+              <a:rPr lang="en-US" altLang="zh-TW" sz="2600" dirty="0">
                 <a:solidFill>
                   <a:srgbClr val="0070C0"/>
                 </a:solidFill>
@@ -27264,11 +26106,11 @@
               <a:t>rear</a:t>
             </a:r>
             <a:r>
-              <a:rPr lang="zh-TW" altLang="en-US" sz="2600" dirty="0" smtClean="0"/>
+              <a:rPr lang="zh-TW" altLang="en-US" sz="2600" dirty="0"/>
               <a:t>在</a:t>
             </a:r>
             <a:r>
-              <a:rPr lang="en-US" altLang="zh-TW" sz="2600" dirty="0" smtClean="0">
+              <a:rPr lang="en-US" altLang="zh-TW" sz="2600" dirty="0">
                 <a:solidFill>
                   <a:srgbClr val="0070C0"/>
                 </a:solidFill>
@@ -27276,18 +26118,9 @@
               <a:t>front</a:t>
             </a:r>
             <a:r>
-              <a:rPr lang="zh-TW" altLang="en-US" sz="2600" dirty="0" smtClean="0"/>
-              <a:t>順</a:t>
-            </a:r>
-            <a:r>
               <a:rPr lang="zh-TW" altLang="en-US" sz="2600" dirty="0"/>
-              <a:t>時針方向的後一位時，佇列是滿</a:t>
-            </a:r>
-            <a:r>
-              <a:rPr lang="zh-TW" altLang="en-US" sz="2600" dirty="0" smtClean="0"/>
-              <a:t>的：</a:t>
-            </a:r>
-            <a:endParaRPr lang="zh-TW" altLang="en-US" sz="2600" dirty="0"/>
+              <a:t>順時針方向的後一位時，佇列是滿的：</a:t>
+            </a:r>
           </a:p>
           <a:p>
             <a:pPr marL="0" indent="0">
@@ -27367,13 +26200,6 @@
   <p:clrMapOvr>
     <a:masterClrMapping/>
   </p:clrMapOvr>
-  <p:timing>
-    <p:tnLst>
-      <p:par>
-        <p:cTn id="1" dur="indefinite" restart="never" nodeType="tmRoot"/>
-      </p:par>
-    </p:tnLst>
-  </p:timing>
 </p:sld>
 </file>
 
@@ -27434,11 +26260,11 @@
           <a:lstStyle/>
           <a:p>
             <a:r>
-              <a:rPr lang="zh-TW" altLang="en-US" sz="2800" dirty="0" smtClean="0"/>
+              <a:rPr lang="zh-TW" altLang="en-US" sz="2800" dirty="0"/>
               <a:t>根據以上的討論， 將資料加入環狀佇列的程序 </a:t>
             </a:r>
             <a:r>
-              <a:rPr lang="en-US" altLang="zh-TW" sz="2800" dirty="0" smtClean="0">
+              <a:rPr lang="en-US" altLang="zh-TW" sz="2800" dirty="0">
                 <a:solidFill>
                   <a:srgbClr val="0070C0"/>
                 </a:solidFill>
@@ -27446,10 +26272,9 @@
               <a:t>put</a:t>
             </a:r>
             <a:r>
-              <a:rPr lang="zh-TW" altLang="en-US" sz="2800" dirty="0" smtClean="0"/>
+              <a:rPr lang="zh-TW" altLang="en-US" sz="2800" dirty="0"/>
               <a:t>定義如下：</a:t>
             </a:r>
-            <a:endParaRPr lang="zh-TW" altLang="en-US" sz="2800" dirty="0"/>
           </a:p>
         </p:txBody>
       </p:sp>
@@ -27518,13 +26343,6 @@
   <p:clrMapOvr>
     <a:masterClrMapping/>
   </p:clrMapOvr>
-  <p:timing>
-    <p:tnLst>
-      <p:par>
-        <p:cTn id="1" dur="indefinite" restart="never" nodeType="tmRoot"/>
-      </p:par>
-    </p:tnLst>
-  </p:timing>
 </p:sld>
 </file>
 
@@ -27583,11 +26401,11 @@
           <a:lstStyle/>
           <a:p>
             <a:r>
-              <a:rPr lang="zh-TW" altLang="en-US" dirty="0" smtClean="0"/>
+              <a:rPr lang="zh-TW" altLang="en-US" dirty="0"/>
               <a:t>然後，將資料從環狀佇列取出的函數</a:t>
             </a:r>
             <a:r>
-              <a:rPr lang="en-US" altLang="zh-TW" dirty="0" smtClean="0">
+              <a:rPr lang="en-US" altLang="zh-TW" dirty="0">
                 <a:solidFill>
                   <a:srgbClr val="0070C0"/>
                 </a:solidFill>
@@ -27595,10 +26413,9 @@
               <a:t>get</a:t>
             </a:r>
             <a:r>
-              <a:rPr lang="zh-TW" altLang="en-US" dirty="0" smtClean="0"/>
+              <a:rPr lang="zh-TW" altLang="en-US" dirty="0"/>
               <a:t>，如下所列：</a:t>
             </a:r>
-            <a:endParaRPr lang="zh-TW" altLang="en-US" dirty="0"/>
           </a:p>
         </p:txBody>
       </p:sp>
@@ -27667,13 +26484,6 @@
   <p:clrMapOvr>
     <a:masterClrMapping/>
   </p:clrMapOvr>
-  <p:timing>
-    <p:tnLst>
-      <p:par>
-        <p:cTn id="1" dur="indefinite" restart="never" nodeType="tmRoot"/>
-      </p:par>
-    </p:tnLst>
-  </p:timing>
 </p:sld>
 </file>
 
@@ -27710,14 +26520,13 @@
           <a:lstStyle/>
           <a:p>
             <a:r>
-              <a:rPr lang="en-US" altLang="zh-TW" dirty="0" smtClean="0"/>
+              <a:rPr lang="en-US" altLang="zh-TW" dirty="0"/>
               <a:t>10-4 </a:t>
             </a:r>
             <a:r>
-              <a:rPr lang="zh-TW" altLang="en-US" dirty="0" smtClean="0"/>
+              <a:rPr lang="zh-TW" altLang="en-US" dirty="0"/>
               <a:t>樹狀結構</a:t>
             </a:r>
-            <a:endParaRPr lang="zh-TW" altLang="en-US" dirty="0"/>
           </a:p>
         </p:txBody>
       </p:sp>
@@ -27737,25 +26546,25 @@
           <a:lstStyle/>
           <a:p>
             <a:r>
-              <a:rPr lang="zh-TW" altLang="en-US" smtClean="0"/>
+              <a:rPr lang="zh-TW" altLang="en-US"/>
               <a:t>樹</a:t>
             </a:r>
             <a:r>
-              <a:rPr lang="en-US" altLang="zh-TW" smtClean="0"/>
+              <a:rPr lang="en-US" altLang="zh-TW"/>
               <a:t>(tree)</a:t>
             </a:r>
             <a:r>
-              <a:rPr lang="zh-TW" altLang="en-US" smtClean="0"/>
+              <a:rPr lang="zh-TW" altLang="en-US"/>
               <a:t>在資訊科學裡是一種很重要的技巧，有很多專門的課程在教導樹的定義和應用。</a:t>
             </a:r>
-            <a:endParaRPr lang="en-US" altLang="zh-TW" smtClean="0"/>
-          </a:p>
-          <a:p>
-            <a:r>
-              <a:rPr lang="zh-TW" altLang="en-US" smtClean="0"/>
+            <a:endParaRPr lang="en-US" altLang="zh-TW"/>
+          </a:p>
+          <a:p>
+            <a:r>
+              <a:rPr lang="zh-TW" altLang="en-US"/>
               <a:t>在此節中會介紹樹的基本定義和對應的程式。</a:t>
             </a:r>
-            <a:endParaRPr lang="en-US" altLang="zh-TW" dirty="0" smtClean="0"/>
+            <a:endParaRPr lang="en-US" altLang="zh-TW" dirty="0"/>
           </a:p>
         </p:txBody>
       </p:sp>
@@ -27764,13 +26573,6 @@
   <p:clrMapOvr>
     <a:masterClrMapping/>
   </p:clrMapOvr>
-  <p:timing>
-    <p:tnLst>
-      <p:par>
-        <p:cTn id="1" dur="indefinite" restart="never" nodeType="tmRoot"/>
-      </p:par>
-    </p:tnLst>
-  </p:timing>
 </p:sld>
 </file>
 
@@ -27868,13 +26670,6 @@
   <p:clrMapOvr>
     <a:masterClrMapping/>
   </p:clrMapOvr>
-  <p:timing>
-    <p:tnLst>
-      <p:par>
-        <p:cTn id="1" dur="indefinite" restart="never" nodeType="tmRoot"/>
-      </p:par>
-    </p:tnLst>
-  </p:timing>
 </p:sld>
 </file>
 
@@ -27916,14 +26711,13 @@
           <a:lstStyle/>
           <a:p>
             <a:r>
-              <a:rPr lang="en-US" altLang="zh-TW" dirty="0" smtClean="0"/>
+              <a:rPr lang="en-US" altLang="zh-TW" dirty="0"/>
               <a:t>10-4 </a:t>
             </a:r>
             <a:r>
-              <a:rPr lang="zh-TW" altLang="en-US" dirty="0" smtClean="0"/>
+              <a:rPr lang="zh-TW" altLang="en-US" dirty="0"/>
               <a:t>樹狀結構</a:t>
             </a:r>
-            <a:endParaRPr lang="zh-TW" altLang="en-US" dirty="0"/>
           </a:p>
         </p:txBody>
       </p:sp>
@@ -27950,42 +26744,42 @@
           <a:lstStyle/>
           <a:p>
             <a:r>
-              <a:rPr lang="zh-TW" altLang="en-US" dirty="0" smtClean="0"/>
+              <a:rPr lang="zh-TW" altLang="en-US" dirty="0"/>
               <a:t>樹由節點</a:t>
             </a:r>
             <a:r>
-              <a:rPr lang="en-US" altLang="zh-TW" dirty="0" smtClean="0"/>
+              <a:rPr lang="en-US" altLang="zh-TW" dirty="0"/>
               <a:t>(node)</a:t>
             </a:r>
             <a:r>
-              <a:rPr lang="zh-TW" altLang="en-US" dirty="0" smtClean="0"/>
+              <a:rPr lang="zh-TW" altLang="en-US" dirty="0"/>
               <a:t>和邊</a:t>
             </a:r>
             <a:r>
-              <a:rPr lang="en-US" altLang="zh-TW" dirty="0" smtClean="0"/>
+              <a:rPr lang="en-US" altLang="zh-TW" dirty="0"/>
               <a:t>(edge)</a:t>
             </a:r>
             <a:r>
-              <a:rPr lang="zh-TW" altLang="en-US" dirty="0" smtClean="0"/>
+              <a:rPr lang="zh-TW" altLang="en-US" dirty="0"/>
               <a:t>所構成，樹中節點可細分：</a:t>
             </a:r>
           </a:p>
           <a:p>
             <a:pPr lvl="1"/>
             <a:r>
-              <a:rPr lang="zh-TW" altLang="en-US" dirty="0" smtClean="0"/>
+              <a:rPr lang="zh-TW" altLang="en-US" dirty="0"/>
               <a:t>外部節點</a:t>
             </a:r>
             <a:r>
-              <a:rPr lang="en-US" altLang="zh-TW" dirty="0" smtClean="0"/>
+              <a:rPr lang="en-US" altLang="zh-TW" dirty="0"/>
               <a:t>(external node)</a:t>
             </a:r>
             <a:r>
-              <a:rPr lang="zh-TW" altLang="en-US" dirty="0" smtClean="0"/>
+              <a:rPr lang="zh-TW" altLang="en-US" dirty="0"/>
               <a:t>：又稱作葉節點，位於樹的最下層，如編號</a:t>
             </a:r>
             <a:r>
-              <a:rPr lang="en-US" altLang="zh-TW" dirty="0" smtClean="0">
+              <a:rPr lang="en-US" altLang="zh-TW" dirty="0">
                 <a:solidFill>
                   <a:srgbClr val="0070C0"/>
                 </a:solidFill>
@@ -27993,7 +26787,7 @@
               <a:t>E</a:t>
             </a:r>
             <a:r>
-              <a:rPr lang="zh-TW" altLang="en-US" dirty="0" smtClean="0">
+              <a:rPr lang="zh-TW" altLang="en-US" dirty="0">
                 <a:solidFill>
                   <a:srgbClr val="0070C0"/>
                 </a:solidFill>
@@ -28001,7 +26795,7 @@
               <a:t>、</a:t>
             </a:r>
             <a:r>
-              <a:rPr lang="en-US" altLang="zh-TW" dirty="0" smtClean="0">
+              <a:rPr lang="en-US" altLang="zh-TW" dirty="0">
                 <a:solidFill>
                   <a:srgbClr val="0070C0"/>
                 </a:solidFill>
@@ -28009,7 +26803,7 @@
               <a:t>F</a:t>
             </a:r>
             <a:r>
-              <a:rPr lang="zh-TW" altLang="en-US" dirty="0" smtClean="0">
+              <a:rPr lang="zh-TW" altLang="en-US" dirty="0">
                 <a:solidFill>
                   <a:srgbClr val="0070C0"/>
                 </a:solidFill>
@@ -28017,7 +26811,7 @@
               <a:t>、</a:t>
             </a:r>
             <a:r>
-              <a:rPr lang="en-US" altLang="zh-TW" dirty="0" smtClean="0">
+              <a:rPr lang="en-US" altLang="zh-TW" dirty="0">
                 <a:solidFill>
                   <a:srgbClr val="0070C0"/>
                 </a:solidFill>
@@ -28025,26 +26819,26 @@
               <a:t>H</a:t>
             </a:r>
             <a:r>
-              <a:rPr lang="zh-TW" altLang="en-US" dirty="0" smtClean="0"/>
+              <a:rPr lang="zh-TW" altLang="en-US" dirty="0"/>
               <a:t>等的節點。</a:t>
             </a:r>
           </a:p>
           <a:p>
             <a:pPr lvl="1"/>
             <a:r>
-              <a:rPr lang="zh-TW" altLang="en-US" dirty="0" smtClean="0"/>
+              <a:rPr lang="zh-TW" altLang="en-US" dirty="0"/>
               <a:t>內部節點</a:t>
             </a:r>
             <a:r>
-              <a:rPr lang="en-US" altLang="zh-TW" dirty="0" smtClean="0"/>
+              <a:rPr lang="en-US" altLang="zh-TW" dirty="0"/>
               <a:t>(internal node)</a:t>
             </a:r>
             <a:r>
-              <a:rPr lang="zh-TW" altLang="en-US" dirty="0" smtClean="0"/>
+              <a:rPr lang="zh-TW" altLang="en-US" dirty="0"/>
               <a:t>：不是外部的節點，如編號 </a:t>
             </a:r>
             <a:r>
-              <a:rPr lang="en-US" altLang="zh-TW" dirty="0" smtClean="0">
+              <a:rPr lang="en-US" altLang="zh-TW" dirty="0">
                 <a:solidFill>
                   <a:srgbClr val="0070C0"/>
                 </a:solidFill>
@@ -28052,7 +26846,7 @@
               <a:t>C</a:t>
             </a:r>
             <a:r>
-              <a:rPr lang="zh-TW" altLang="en-US" dirty="0" smtClean="0">
+              <a:rPr lang="zh-TW" altLang="en-US" dirty="0">
                 <a:solidFill>
                   <a:srgbClr val="0070C0"/>
                 </a:solidFill>
@@ -28060,7 +26854,7 @@
               <a:t>、</a:t>
             </a:r>
             <a:r>
-              <a:rPr lang="en-US" altLang="zh-TW" dirty="0" smtClean="0">
+              <a:rPr lang="en-US" altLang="zh-TW" dirty="0">
                 <a:solidFill>
                   <a:srgbClr val="0070C0"/>
                 </a:solidFill>
@@ -28068,7 +26862,7 @@
               <a:t>I</a:t>
             </a:r>
             <a:r>
-              <a:rPr lang="zh-TW" altLang="en-US" dirty="0" smtClean="0">
+              <a:rPr lang="zh-TW" altLang="en-US" dirty="0">
                 <a:solidFill>
                   <a:srgbClr val="0070C0"/>
                 </a:solidFill>
@@ -28076,7 +26870,7 @@
               <a:t>、</a:t>
             </a:r>
             <a:r>
-              <a:rPr lang="en-US" altLang="zh-TW" dirty="0" smtClean="0">
+              <a:rPr lang="en-US" altLang="zh-TW" dirty="0">
                 <a:solidFill>
                   <a:srgbClr val="0070C0"/>
                 </a:solidFill>
@@ -28084,26 +26878,26 @@
               <a:t>G</a:t>
             </a:r>
             <a:r>
-              <a:rPr lang="zh-TW" altLang="en-US" dirty="0" smtClean="0"/>
+              <a:rPr lang="zh-TW" altLang="en-US" dirty="0"/>
               <a:t>等的節點。</a:t>
             </a:r>
           </a:p>
           <a:p>
             <a:pPr lvl="1"/>
             <a:r>
-              <a:rPr lang="zh-TW" altLang="en-US" dirty="0" smtClean="0"/>
+              <a:rPr lang="zh-TW" altLang="en-US" dirty="0"/>
               <a:t>根節點</a:t>
             </a:r>
             <a:r>
-              <a:rPr lang="en-US" altLang="zh-TW" dirty="0" smtClean="0"/>
+              <a:rPr lang="en-US" altLang="zh-TW" dirty="0"/>
               <a:t>(root node)</a:t>
             </a:r>
             <a:r>
-              <a:rPr lang="zh-TW" altLang="en-US" dirty="0" smtClean="0"/>
+              <a:rPr lang="zh-TW" altLang="en-US" dirty="0"/>
               <a:t>：位於最上層的節點，如編號</a:t>
             </a:r>
             <a:r>
-              <a:rPr lang="en-US" altLang="zh-TW" dirty="0" smtClean="0">
+              <a:rPr lang="en-US" altLang="zh-TW" dirty="0">
                 <a:solidFill>
                   <a:srgbClr val="0070C0"/>
                 </a:solidFill>
@@ -28111,10 +26905,9 @@
               <a:t>L</a:t>
             </a:r>
             <a:r>
-              <a:rPr lang="zh-TW" altLang="en-US" dirty="0" smtClean="0"/>
+              <a:rPr lang="zh-TW" altLang="en-US" dirty="0"/>
               <a:t>的節點。</a:t>
             </a:r>
-            <a:endParaRPr lang="zh-TW" altLang="en-US" dirty="0"/>
           </a:p>
         </p:txBody>
       </p:sp>
@@ -28182,13 +26975,6 @@
   <p:clrMapOvr>
     <a:masterClrMapping/>
   </p:clrMapOvr>
-  <p:timing>
-    <p:tnLst>
-      <p:par>
-        <p:cTn id="1" dur="indefinite" restart="never" nodeType="tmRoot"/>
-      </p:par>
-    </p:tnLst>
-  </p:timing>
 </p:sld>
 </file>
 
@@ -28225,7 +27011,7 @@
           <a:lstStyle/>
           <a:p>
             <a:r>
-              <a:rPr lang="en-US" altLang="zh-TW" dirty="0" smtClean="0"/>
+              <a:rPr lang="en-US" altLang="zh-TW" dirty="0"/>
               <a:t>10-4 </a:t>
             </a:r>
             <a:r>
@@ -28274,19 +27060,8 @@
                 <a:latin typeface="微軟正黑體" pitchFamily="34" charset="-120"/>
                 <a:ea typeface="微軟正黑體" pitchFamily="34" charset="-120"/>
               </a:rPr>
-              <a:t>樹的</a:t>
-            </a:r>
-            <a:r>
-              <a:rPr lang="zh-TW" altLang="en-US" b="1" dirty="0" smtClean="0">
-                <a:latin typeface="微軟正黑體" pitchFamily="34" charset="-120"/>
-                <a:ea typeface="微軟正黑體" pitchFamily="34" charset="-120"/>
-              </a:rPr>
-              <a:t>範例</a:t>
-            </a:r>
-            <a:endParaRPr lang="zh-TW" altLang="en-US" b="1" dirty="0">
-              <a:latin typeface="微軟正黑體" pitchFamily="34" charset="-120"/>
-              <a:ea typeface="微軟正黑體" pitchFamily="34" charset="-120"/>
-            </a:endParaRPr>
+              <a:t>樹的範例</a:t>
+            </a:r>
           </a:p>
         </p:txBody>
       </p:sp>
@@ -28349,13 +27124,6 @@
   <p:clrMapOvr>
     <a:masterClrMapping/>
   </p:clrMapOvr>
-  <p:timing>
-    <p:tnLst>
-      <p:par>
-        <p:cTn id="1" dur="indefinite" restart="never" nodeType="tmRoot"/>
-      </p:par>
-    </p:tnLst>
-  </p:timing>
 </p:sld>
 </file>
 
@@ -28392,7 +27160,7 @@
           <a:lstStyle/>
           <a:p>
             <a:r>
-              <a:rPr lang="en-US" altLang="zh-TW" dirty="0" smtClean="0"/>
+              <a:rPr lang="en-US" altLang="zh-TW" dirty="0"/>
               <a:t>10-4 </a:t>
             </a:r>
             <a:r>
@@ -28425,7 +27193,7 @@
               </a:lnSpc>
             </a:pPr>
             <a:r>
-              <a:rPr lang="zh-TW" altLang="en-US" sz="2800" dirty="0" smtClean="0"/>
+              <a:rPr lang="zh-TW" altLang="en-US" sz="2800" dirty="0"/>
               <a:t>樹具有下列特殊性質：</a:t>
             </a:r>
           </a:p>
@@ -28436,7 +27204,7 @@
               </a:lnSpc>
             </a:pPr>
             <a:r>
-              <a:rPr lang="zh-TW" altLang="en-US" sz="2600" dirty="0" smtClean="0"/>
+              <a:rPr lang="zh-TW" altLang="en-US" sz="2600" dirty="0"/>
               <a:t>只有唯一一個根節點。</a:t>
             </a:r>
           </a:p>
@@ -28447,15 +27215,15 @@
               </a:lnSpc>
             </a:pPr>
             <a:r>
-              <a:rPr lang="zh-TW" altLang="en-US" sz="2600" dirty="0" smtClean="0"/>
+              <a:rPr lang="zh-TW" altLang="en-US" sz="2600" dirty="0"/>
               <a:t>樹中沒有迴圈</a:t>
             </a:r>
             <a:r>
-              <a:rPr lang="en-US" altLang="zh-TW" sz="2600" dirty="0" smtClean="0"/>
+              <a:rPr lang="en-US" altLang="zh-TW" sz="2600" dirty="0"/>
               <a:t>(loop)</a:t>
             </a:r>
             <a:r>
-              <a:rPr lang="zh-TW" altLang="en-US" sz="2600" dirty="0" smtClean="0"/>
+              <a:rPr lang="zh-TW" altLang="en-US" sz="2600" dirty="0"/>
               <a:t>，也就是任一節點循著邊往下走的話，不可能走回自己。</a:t>
             </a:r>
           </a:p>
@@ -28466,13 +27234,6 @@
   <p:clrMapOvr>
     <a:masterClrMapping/>
   </p:clrMapOvr>
-  <p:timing>
-    <p:tnLst>
-      <p:par>
-        <p:cTn id="1" dur="indefinite" restart="never" nodeType="tmRoot"/>
-      </p:par>
-    </p:tnLst>
-  </p:timing>
 </p:sld>
 </file>
 
@@ -28535,76 +27296,76 @@
           <a:lstStyle/>
           <a:p>
             <a:r>
-              <a:rPr lang="zh-TW" altLang="en-US" dirty="0" smtClean="0"/>
+              <a:rPr lang="zh-TW" altLang="en-US" dirty="0"/>
               <a:t>樹具有下列特殊性質：</a:t>
             </a:r>
-            <a:endParaRPr lang="en-US" altLang="zh-TW" dirty="0" smtClean="0"/>
+            <a:endParaRPr lang="en-US" altLang="zh-TW" dirty="0"/>
           </a:p>
           <a:p>
             <a:pPr lvl="1"/>
             <a:r>
-              <a:rPr lang="zh-TW" altLang="en-US" dirty="0" smtClean="0"/>
+              <a:rPr lang="zh-TW" altLang="en-US" dirty="0"/>
               <a:t>任兩點只有唯一路徑。譬如說，節點</a:t>
             </a:r>
             <a:r>
-              <a:rPr lang="en-US" altLang="zh-TW" dirty="0" smtClean="0"/>
+              <a:rPr lang="en-US" altLang="zh-TW" dirty="0"/>
               <a:t>E</a:t>
             </a:r>
             <a:r>
-              <a:rPr lang="zh-TW" altLang="en-US" dirty="0" smtClean="0"/>
+              <a:rPr lang="zh-TW" altLang="en-US" dirty="0"/>
               <a:t>要走到節點</a:t>
             </a:r>
             <a:r>
-              <a:rPr lang="en-US" altLang="zh-TW" dirty="0" smtClean="0"/>
+              <a:rPr lang="en-US" altLang="zh-TW" dirty="0"/>
               <a:t>I</a:t>
             </a:r>
             <a:r>
-              <a:rPr lang="zh-TW" altLang="en-US" dirty="0" smtClean="0"/>
+              <a:rPr lang="zh-TW" altLang="en-US" dirty="0"/>
               <a:t>的話，一定會經過節點</a:t>
             </a:r>
             <a:r>
-              <a:rPr lang="en-US" altLang="zh-TW" dirty="0" smtClean="0"/>
+              <a:rPr lang="en-US" altLang="zh-TW" dirty="0"/>
               <a:t>G</a:t>
             </a:r>
             <a:r>
-              <a:rPr lang="zh-TW" altLang="en-US" dirty="0" smtClean="0"/>
+              <a:rPr lang="zh-TW" altLang="en-US" dirty="0"/>
               <a:t>，而沒有其他方法；另一個例子，從節點</a:t>
             </a:r>
             <a:r>
-              <a:rPr lang="en-US" altLang="zh-TW" dirty="0" smtClean="0"/>
+              <a:rPr lang="en-US" altLang="zh-TW" dirty="0"/>
               <a:t>J</a:t>
             </a:r>
             <a:r>
-              <a:rPr lang="zh-TW" altLang="en-US" dirty="0" smtClean="0"/>
+              <a:rPr lang="zh-TW" altLang="en-US" dirty="0"/>
               <a:t>要走到節點</a:t>
             </a:r>
             <a:r>
-              <a:rPr lang="en-US" altLang="zh-TW" dirty="0" smtClean="0"/>
+              <a:rPr lang="en-US" altLang="zh-TW" dirty="0"/>
               <a:t>C</a:t>
             </a:r>
             <a:r>
-              <a:rPr lang="zh-TW" altLang="en-US" dirty="0" smtClean="0"/>
+              <a:rPr lang="zh-TW" altLang="en-US" dirty="0"/>
               <a:t>的話，也一定會經過節點</a:t>
             </a:r>
             <a:r>
-              <a:rPr lang="en-US" altLang="zh-TW" dirty="0" smtClean="0"/>
+              <a:rPr lang="en-US" altLang="zh-TW" dirty="0"/>
               <a:t>K</a:t>
             </a:r>
             <a:r>
-              <a:rPr lang="zh-TW" altLang="en-US" dirty="0" smtClean="0"/>
+              <a:rPr lang="zh-TW" altLang="en-US" dirty="0"/>
               <a:t>和節點</a:t>
             </a:r>
             <a:r>
-              <a:rPr lang="en-US" altLang="zh-TW" dirty="0" smtClean="0"/>
+              <a:rPr lang="en-US" altLang="zh-TW" dirty="0"/>
               <a:t>L</a:t>
             </a:r>
             <a:r>
-              <a:rPr lang="zh-TW" altLang="en-US" dirty="0" smtClean="0"/>
+              <a:rPr lang="zh-TW" altLang="en-US" dirty="0"/>
               <a:t>。</a:t>
             </a:r>
           </a:p>
           <a:p>
-            <a:endParaRPr lang="zh-TW" altLang="en-US" dirty="0" smtClean="0"/>
+            <a:endParaRPr lang="zh-TW" altLang="en-US" dirty="0"/>
           </a:p>
           <a:p>
             <a:endParaRPr lang="zh-TW" altLang="en-US" dirty="0"/>
@@ -28621,13 +27382,6 @@
   <p:clrMapOvr>
     <a:masterClrMapping/>
   </p:clrMapOvr>
-  <p:timing>
-    <p:tnLst>
-      <p:par>
-        <p:cTn id="1" dur="indefinite" restart="never" nodeType="tmRoot"/>
-      </p:par>
-    </p:tnLst>
-  </p:timing>
 </p:sld>
 </file>
 
@@ -28664,7 +27418,7 @@
           <a:lstStyle/>
           <a:p>
             <a:r>
-              <a:rPr lang="en-US" altLang="zh-TW" dirty="0" smtClean="0"/>
+              <a:rPr lang="en-US" altLang="zh-TW" dirty="0"/>
               <a:t>10-1 </a:t>
             </a:r>
             <a:r>
@@ -28690,11 +27444,11 @@
           <a:lstStyle/>
           <a:p>
             <a:r>
-              <a:rPr lang="zh-TW" altLang="en-US" dirty="0" smtClean="0"/>
+              <a:rPr lang="zh-TW" altLang="en-US" dirty="0"/>
               <a:t>舉例來說，</a:t>
             </a:r>
             <a:r>
-              <a:rPr lang="en-US" altLang="zh-TW" dirty="0" smtClean="0">
+              <a:rPr lang="en-US" altLang="zh-TW" dirty="0">
                 <a:solidFill>
                   <a:srgbClr val="0070C0"/>
                 </a:solidFill>
@@ -28702,11 +27456,11 @@
               <a:t>score[2]</a:t>
             </a:r>
             <a:r>
-              <a:rPr lang="zh-TW" altLang="en-US" dirty="0" smtClean="0"/>
+              <a:rPr lang="zh-TW" altLang="en-US" dirty="0"/>
               <a:t>的位置是</a:t>
             </a:r>
             <a:r>
-              <a:rPr lang="en-US" altLang="zh-TW" dirty="0" smtClean="0">
+              <a:rPr lang="en-US" altLang="zh-TW" dirty="0">
                 <a:solidFill>
                   <a:srgbClr val="0070C0"/>
                 </a:solidFill>
@@ -28714,16 +27468,15 @@
               <a:t>start+8</a:t>
             </a:r>
             <a:r>
-              <a:rPr lang="zh-TW" altLang="en-US" dirty="0" smtClean="0"/>
+              <a:rPr lang="zh-TW" altLang="en-US" dirty="0"/>
               <a:t>。在程式執行的時候，使用者要求任一個註標的資料時，都可以利用此公式很快的計算得到。</a:t>
             </a:r>
           </a:p>
           <a:p>
             <a:r>
-              <a:rPr lang="zh-TW" altLang="en-US" dirty="0" smtClean="0"/>
+              <a:rPr lang="zh-TW" altLang="en-US" dirty="0"/>
               <a:t>一般程式語言也允許定義更複雜的陣列資料結構。</a:t>
             </a:r>
-            <a:endParaRPr lang="zh-TW" altLang="en-US" dirty="0"/>
           </a:p>
         </p:txBody>
       </p:sp>
@@ -28737,13 +27490,6 @@
   <p:clrMapOvr>
     <a:masterClrMapping/>
   </p:clrMapOvr>
-  <p:timing>
-    <p:tnLst>
-      <p:par>
-        <p:cTn id="1" dur="indefinite" restart="never" nodeType="tmRoot"/>
-      </p:par>
-    </p:tnLst>
-  </p:timing>
 </p:sld>
 </file>
 
@@ -28780,14 +27526,13 @@
           <a:lstStyle/>
           <a:p>
             <a:r>
-              <a:rPr lang="en-US" altLang="zh-TW" dirty="0" smtClean="0"/>
+              <a:rPr lang="en-US" altLang="zh-TW" dirty="0"/>
               <a:t>10-4 </a:t>
             </a:r>
             <a:r>
-              <a:rPr lang="zh-TW" altLang="en-US" dirty="0" smtClean="0"/>
+              <a:rPr lang="zh-TW" altLang="en-US" dirty="0"/>
               <a:t>樹狀結構</a:t>
             </a:r>
-            <a:endParaRPr lang="zh-TW" altLang="en-US" dirty="0"/>
           </a:p>
         </p:txBody>
       </p:sp>
@@ -28809,7 +27554,7 @@
           <a:lstStyle/>
           <a:p>
             <a:r>
-              <a:rPr lang="zh-TW" altLang="en-US" dirty="0" smtClean="0">
+              <a:rPr lang="zh-TW" altLang="en-US" dirty="0">
                 <a:solidFill>
                   <a:srgbClr val="C00000"/>
                 </a:solidFill>
@@ -28820,18 +27565,18 @@
           <a:p>
             <a:pPr lvl="1"/>
             <a:r>
-              <a:rPr lang="zh-TW" altLang="en-US" dirty="0" smtClean="0"/>
+              <a:rPr lang="zh-TW" altLang="en-US" dirty="0"/>
               <a:t>樹的高度（</a:t>
             </a:r>
             <a:r>
-              <a:rPr lang="en-US" altLang="zh-TW" dirty="0" smtClean="0"/>
+              <a:rPr lang="en-US" altLang="zh-TW" dirty="0"/>
               <a:t>height</a:t>
             </a:r>
             <a:r>
-              <a:rPr lang="zh-TW" altLang="en-US" dirty="0" smtClean="0"/>
+              <a:rPr lang="zh-TW" altLang="en-US" dirty="0"/>
               <a:t>）為從根節點到樹中所有葉節點的最長可能路徑。</a:t>
             </a:r>
-            <a:endParaRPr lang="en-US" altLang="zh-TW" dirty="0" smtClean="0"/>
+            <a:endParaRPr lang="en-US" altLang="zh-TW" dirty="0"/>
           </a:p>
         </p:txBody>
       </p:sp>
@@ -28840,13 +27585,6 @@
   <p:clrMapOvr>
     <a:masterClrMapping/>
   </p:clrMapOvr>
-  <p:timing>
-    <p:tnLst>
-      <p:par>
-        <p:cTn id="1" dur="indefinite" restart="never" nodeType="tmRoot"/>
-      </p:par>
-    </p:tnLst>
-  </p:timing>
 </p:sld>
 </file>
 
@@ -28883,11 +27621,11 @@
           <a:lstStyle/>
           <a:p>
             <a:r>
-              <a:rPr lang="en-US" altLang="zh-TW" smtClean="0"/>
+              <a:rPr lang="en-US" altLang="zh-TW"/>
               <a:t>10-4 </a:t>
             </a:r>
             <a:r>
-              <a:rPr lang="zh-TW" altLang="en-US" smtClean="0"/>
+              <a:rPr lang="zh-TW" altLang="en-US"/>
               <a:t>樹狀結構</a:t>
             </a:r>
             <a:endParaRPr lang="zh-TW" altLang="en-US" dirty="0"/>
@@ -28910,14 +27648,14 @@
           <a:lstStyle/>
           <a:p>
             <a:r>
-              <a:rPr lang="zh-TW" altLang="en-US" dirty="0" smtClean="0">
+              <a:rPr lang="zh-TW" altLang="en-US" dirty="0">
                 <a:solidFill>
                   <a:srgbClr val="C00000"/>
                 </a:solidFill>
               </a:rPr>
               <a:t>樹的高度</a:t>
             </a:r>
-            <a:endParaRPr lang="en-US" altLang="zh-TW" dirty="0" smtClean="0">
+            <a:endParaRPr lang="en-US" altLang="zh-TW" dirty="0">
               <a:solidFill>
                 <a:srgbClr val="C00000"/>
               </a:solidFill>
@@ -28926,76 +27664,76 @@
           <a:p>
             <a:pPr lvl="1"/>
             <a:r>
-              <a:rPr lang="zh-TW" altLang="en-US" dirty="0" smtClean="0"/>
+              <a:rPr lang="zh-TW" altLang="en-US" dirty="0"/>
               <a:t>以圖</a:t>
             </a:r>
             <a:r>
-              <a:rPr lang="en-US" altLang="zh-TW" dirty="0" smtClean="0"/>
+              <a:rPr lang="en-US" altLang="zh-TW" dirty="0"/>
               <a:t>10-6</a:t>
             </a:r>
             <a:r>
-              <a:rPr lang="zh-TW" altLang="en-US" dirty="0" smtClean="0"/>
+              <a:rPr lang="zh-TW" altLang="en-US" dirty="0"/>
               <a:t>為例，圖中共有</a:t>
             </a:r>
             <a:r>
-              <a:rPr lang="en-US" altLang="zh-TW" dirty="0" smtClean="0"/>
+              <a:rPr lang="en-US" altLang="zh-TW" dirty="0"/>
               <a:t>7</a:t>
             </a:r>
             <a:r>
-              <a:rPr lang="zh-TW" altLang="en-US" dirty="0" smtClean="0"/>
+              <a:rPr lang="zh-TW" altLang="en-US" dirty="0"/>
               <a:t>個葉節點，可以看到從根節點</a:t>
             </a:r>
             <a:r>
-              <a:rPr lang="en-US" altLang="zh-TW" dirty="0" smtClean="0"/>
+              <a:rPr lang="en-US" altLang="zh-TW" dirty="0"/>
               <a:t>L</a:t>
             </a:r>
             <a:r>
-              <a:rPr lang="zh-TW" altLang="en-US" dirty="0" smtClean="0"/>
+              <a:rPr lang="zh-TW" altLang="en-US" dirty="0"/>
               <a:t>到葉節點</a:t>
             </a:r>
             <a:r>
-              <a:rPr lang="en-US" altLang="zh-TW" dirty="0" smtClean="0"/>
+              <a:rPr lang="en-US" altLang="zh-TW" dirty="0"/>
               <a:t>E</a:t>
             </a:r>
             <a:r>
-              <a:rPr lang="zh-TW" altLang="en-US" dirty="0" smtClean="0"/>
+              <a:rPr lang="zh-TW" altLang="en-US" dirty="0"/>
               <a:t>或</a:t>
             </a:r>
             <a:r>
-              <a:rPr lang="en-US" altLang="zh-TW" dirty="0" smtClean="0"/>
+              <a:rPr lang="en-US" altLang="zh-TW" dirty="0"/>
               <a:t>F</a:t>
             </a:r>
             <a:r>
-              <a:rPr lang="zh-TW" altLang="en-US" dirty="0" smtClean="0"/>
+              <a:rPr lang="zh-TW" altLang="en-US" dirty="0"/>
               <a:t>的路徑長度為</a:t>
             </a:r>
             <a:r>
-              <a:rPr lang="en-US" altLang="zh-TW" dirty="0" smtClean="0"/>
+              <a:rPr lang="en-US" altLang="zh-TW" dirty="0"/>
               <a:t>3</a:t>
             </a:r>
             <a:r>
-              <a:rPr lang="zh-TW" altLang="en-US" dirty="0" smtClean="0"/>
+              <a:rPr lang="zh-TW" altLang="en-US" dirty="0"/>
               <a:t>（也就是途中經過</a:t>
             </a:r>
             <a:r>
-              <a:rPr lang="en-US" altLang="zh-TW" dirty="0" smtClean="0"/>
+              <a:rPr lang="en-US" altLang="zh-TW" dirty="0"/>
               <a:t>3</a:t>
             </a:r>
             <a:r>
-              <a:rPr lang="zh-TW" altLang="en-US" dirty="0" smtClean="0"/>
+              <a:rPr lang="zh-TW" altLang="en-US" dirty="0"/>
               <a:t>條樹邊），比起根節點到其他葉節點的長度都還長，所以這棵樹的高度為</a:t>
             </a:r>
             <a:r>
-              <a:rPr lang="en-US" altLang="zh-TW" dirty="0" smtClean="0"/>
+              <a:rPr lang="en-US" altLang="zh-TW" dirty="0"/>
               <a:t>3</a:t>
             </a:r>
             <a:r>
-              <a:rPr lang="zh-TW" altLang="en-US" dirty="0" smtClean="0"/>
+              <a:rPr lang="zh-TW" altLang="en-US" dirty="0"/>
               <a:t>。</a:t>
             </a:r>
           </a:p>
           <a:p>
-            <a:endParaRPr lang="zh-TW" altLang="en-US" dirty="0" smtClean="0"/>
+            <a:endParaRPr lang="zh-TW" altLang="en-US" dirty="0"/>
           </a:p>
           <a:p>
             <a:endParaRPr lang="zh-TW" altLang="en-US" dirty="0"/>
@@ -29066,13 +27804,6 @@
   <p:clrMapOvr>
     <a:masterClrMapping/>
   </p:clrMapOvr>
-  <p:timing>
-    <p:tnLst>
-      <p:par>
-        <p:cTn id="1" dur="indefinite" restart="never" nodeType="tmRoot"/>
-      </p:par>
-    </p:tnLst>
-  </p:timing>
 </p:sld>
 </file>
 
@@ -29109,7 +27840,7 @@
           <a:lstStyle/>
           <a:p>
             <a:r>
-              <a:rPr lang="en-US" altLang="zh-TW" dirty="0" smtClean="0"/>
+              <a:rPr lang="en-US" altLang="zh-TW" dirty="0"/>
               <a:t>10-4 </a:t>
             </a:r>
             <a:r>
@@ -29135,7 +27866,7 @@
           <a:lstStyle/>
           <a:p>
             <a:r>
-              <a:rPr lang="zh-TW" altLang="en-US" dirty="0" smtClean="0">
+              <a:rPr lang="zh-TW" altLang="en-US" dirty="0">
                 <a:solidFill>
                   <a:srgbClr val="C00000"/>
                 </a:solidFill>
@@ -29146,114 +27877,113 @@
           <a:p>
             <a:pPr lvl="1"/>
             <a:r>
-              <a:rPr lang="zh-TW" altLang="en-US" dirty="0" smtClean="0"/>
+              <a:rPr lang="zh-TW" altLang="en-US" dirty="0"/>
               <a:t>樹的階層</a:t>
             </a:r>
             <a:r>
-              <a:rPr lang="en-US" altLang="zh-TW" dirty="0" smtClean="0"/>
+              <a:rPr lang="en-US" altLang="zh-TW" dirty="0"/>
               <a:t>(level)</a:t>
             </a:r>
             <a:r>
-              <a:rPr lang="zh-TW" altLang="en-US" dirty="0" smtClean="0"/>
+              <a:rPr lang="zh-TW" altLang="en-US" dirty="0"/>
               <a:t>代表任何一個節點距離根節點的距離。圖</a:t>
             </a:r>
             <a:r>
-              <a:rPr lang="en-US" altLang="zh-TW" dirty="0" smtClean="0"/>
+              <a:rPr lang="en-US" altLang="zh-TW" dirty="0"/>
               <a:t>10-6</a:t>
             </a:r>
             <a:r>
-              <a:rPr lang="zh-TW" altLang="en-US" dirty="0" smtClean="0"/>
+              <a:rPr lang="zh-TW" altLang="en-US" dirty="0"/>
               <a:t>中，根節點</a:t>
             </a:r>
             <a:r>
-              <a:rPr lang="en-US" altLang="zh-TW" dirty="0" smtClean="0"/>
+              <a:rPr lang="en-US" altLang="zh-TW" dirty="0"/>
               <a:t>L</a:t>
             </a:r>
             <a:r>
-              <a:rPr lang="zh-TW" altLang="en-US" dirty="0" smtClean="0"/>
+              <a:rPr lang="zh-TW" altLang="en-US" dirty="0"/>
               <a:t>的階層為</a:t>
             </a:r>
             <a:r>
-              <a:rPr lang="en-US" altLang="zh-TW" dirty="0" smtClean="0"/>
+              <a:rPr lang="en-US" altLang="zh-TW" dirty="0"/>
               <a:t>0</a:t>
             </a:r>
             <a:r>
-              <a:rPr lang="zh-TW" altLang="en-US" dirty="0" smtClean="0"/>
+              <a:rPr lang="zh-TW" altLang="en-US" dirty="0"/>
               <a:t>，內部節點</a:t>
             </a:r>
             <a:r>
-              <a:rPr lang="en-US" altLang="zh-TW" dirty="0" smtClean="0"/>
+              <a:rPr lang="en-US" altLang="zh-TW" dirty="0"/>
               <a:t>I</a:t>
             </a:r>
             <a:r>
-              <a:rPr lang="zh-TW" altLang="en-US" dirty="0" smtClean="0"/>
+              <a:rPr lang="zh-TW" altLang="en-US" dirty="0"/>
               <a:t>的階層為</a:t>
             </a:r>
             <a:r>
-              <a:rPr lang="en-US" altLang="zh-TW" dirty="0" smtClean="0"/>
+              <a:rPr lang="en-US" altLang="zh-TW" dirty="0"/>
               <a:t>1</a:t>
             </a:r>
             <a:r>
-              <a:rPr lang="zh-TW" altLang="en-US" dirty="0" smtClean="0"/>
+              <a:rPr lang="zh-TW" altLang="en-US" dirty="0"/>
               <a:t>，至於在第</a:t>
             </a:r>
             <a:r>
-              <a:rPr lang="en-US" altLang="zh-TW" dirty="0" smtClean="0"/>
+              <a:rPr lang="en-US" altLang="zh-TW" dirty="0"/>
               <a:t>2</a:t>
             </a:r>
             <a:r>
-              <a:rPr lang="zh-TW" altLang="en-US" dirty="0" smtClean="0"/>
+              <a:rPr lang="zh-TW" altLang="en-US" dirty="0"/>
               <a:t>階層的節點，包含</a:t>
             </a:r>
             <a:r>
-              <a:rPr lang="en-US" altLang="zh-TW" dirty="0" smtClean="0"/>
+              <a:rPr lang="en-US" altLang="zh-TW" dirty="0"/>
               <a:t>A</a:t>
             </a:r>
             <a:r>
-              <a:rPr lang="zh-TW" altLang="en-US" dirty="0" smtClean="0"/>
+              <a:rPr lang="zh-TW" altLang="en-US" dirty="0"/>
               <a:t>、</a:t>
             </a:r>
             <a:r>
-              <a:rPr lang="en-US" altLang="zh-TW" dirty="0" smtClean="0"/>
+              <a:rPr lang="en-US" altLang="zh-TW" dirty="0"/>
               <a:t>B</a:t>
             </a:r>
             <a:r>
-              <a:rPr lang="zh-TW" altLang="en-US" dirty="0" smtClean="0"/>
+              <a:rPr lang="zh-TW" altLang="en-US" dirty="0"/>
               <a:t>、</a:t>
             </a:r>
             <a:r>
-              <a:rPr lang="en-US" altLang="zh-TW" dirty="0" smtClean="0"/>
+              <a:rPr lang="en-US" altLang="zh-TW" dirty="0"/>
               <a:t>D</a:t>
             </a:r>
             <a:r>
-              <a:rPr lang="zh-TW" altLang="en-US" dirty="0" smtClean="0"/>
+              <a:rPr lang="zh-TW" altLang="en-US" dirty="0"/>
               <a:t>、</a:t>
             </a:r>
             <a:r>
-              <a:rPr lang="en-US" altLang="zh-TW" dirty="0" smtClean="0"/>
+              <a:rPr lang="en-US" altLang="zh-TW" dirty="0"/>
               <a:t>G</a:t>
             </a:r>
             <a:r>
-              <a:rPr lang="zh-TW" altLang="en-US" dirty="0" smtClean="0"/>
+              <a:rPr lang="zh-TW" altLang="en-US" dirty="0"/>
               <a:t>、</a:t>
             </a:r>
             <a:r>
-              <a:rPr lang="en-US" altLang="zh-TW" dirty="0" smtClean="0"/>
+              <a:rPr lang="en-US" altLang="zh-TW" dirty="0"/>
               <a:t>H</a:t>
             </a:r>
             <a:r>
-              <a:rPr lang="zh-TW" altLang="en-US" dirty="0" smtClean="0"/>
+              <a:rPr lang="zh-TW" altLang="en-US" dirty="0"/>
               <a:t>、</a:t>
             </a:r>
             <a:r>
-              <a:rPr lang="en-US" altLang="zh-TW" dirty="0" smtClean="0"/>
+              <a:rPr lang="en-US" altLang="zh-TW" dirty="0"/>
               <a:t>J</a:t>
             </a:r>
             <a:r>
-              <a:rPr lang="zh-TW" altLang="en-US" dirty="0" smtClean="0"/>
+              <a:rPr lang="zh-TW" altLang="en-US" dirty="0"/>
               <a:t>等節點。</a:t>
             </a:r>
-            <a:endParaRPr lang="zh-TW" altLang="en-US" dirty="0"/>
           </a:p>
         </p:txBody>
       </p:sp>
@@ -29316,13 +28046,6 @@
   <p:clrMapOvr>
     <a:masterClrMapping/>
   </p:clrMapOvr>
-  <p:timing>
-    <p:tnLst>
-      <p:par>
-        <p:cTn id="1" dur="indefinite" restart="never" nodeType="tmRoot"/>
-      </p:par>
-    </p:tnLst>
-  </p:timing>
 </p:sld>
 </file>
 
@@ -29359,7 +28082,7 @@
           <a:lstStyle/>
           <a:p>
             <a:r>
-              <a:rPr lang="en-US" altLang="zh-TW" dirty="0" smtClean="0"/>
+              <a:rPr lang="en-US" altLang="zh-TW" dirty="0"/>
               <a:t>10-4 </a:t>
             </a:r>
             <a:r>
@@ -29387,53 +28110,53 @@
           <a:lstStyle/>
           <a:p>
             <a:r>
-              <a:rPr lang="zh-TW" altLang="en-US" sz="2800" b="1" dirty="0" smtClean="0">
+              <a:rPr lang="zh-TW" altLang="en-US" sz="2800" b="1" dirty="0">
                 <a:solidFill>
                   <a:srgbClr val="C00000"/>
                 </a:solidFill>
               </a:rPr>
-              <a:t>祖先節點和父節點</a:t>
+              <a:t>祖先節點</a:t>
             </a:r>
           </a:p>
           <a:p>
             <a:pPr lvl="1"/>
             <a:r>
-              <a:rPr lang="zh-TW" altLang="en-US" sz="2600" dirty="0" smtClean="0"/>
+              <a:rPr lang="zh-TW" altLang="en-US" sz="2600" dirty="0"/>
               <a:t>若是考慮某</a:t>
             </a:r>
             <a:r>
-              <a:rPr lang="en-US" altLang="zh-TW" sz="2600" dirty="0" smtClean="0"/>
+              <a:rPr lang="en-US" altLang="zh-TW" sz="2600" dirty="0"/>
               <a:t>1</a:t>
             </a:r>
             <a:r>
-              <a:rPr lang="zh-TW" altLang="en-US" sz="2600" dirty="0" smtClean="0"/>
+              <a:rPr lang="zh-TW" altLang="en-US" sz="2600" dirty="0"/>
               <a:t>個節點，和該節點往上走到根節點的那一條唯一路徑，則在該路徑上的所有節點</a:t>
             </a:r>
             <a:r>
-              <a:rPr lang="en-US" altLang="zh-TW" sz="2600" dirty="0" smtClean="0"/>
+              <a:rPr lang="en-US" altLang="zh-TW" sz="2600" dirty="0"/>
               <a:t>(</a:t>
             </a:r>
             <a:r>
-              <a:rPr lang="zh-TW" altLang="en-US" sz="2600" dirty="0" smtClean="0"/>
+              <a:rPr lang="zh-TW" altLang="en-US" sz="2600" dirty="0"/>
               <a:t>不包含自己</a:t>
             </a:r>
             <a:r>
-              <a:rPr lang="en-US" altLang="zh-TW" sz="2600" dirty="0" smtClean="0"/>
+              <a:rPr lang="en-US" altLang="zh-TW" sz="2600" dirty="0"/>
               <a:t>)</a:t>
             </a:r>
             <a:r>
-              <a:rPr lang="zh-TW" altLang="en-US" sz="2600" dirty="0" smtClean="0"/>
+              <a:rPr lang="zh-TW" altLang="en-US" sz="2600" dirty="0"/>
               <a:t>，都是該節點的祖先節點</a:t>
             </a:r>
             <a:r>
-              <a:rPr lang="en-US" altLang="zh-TW" sz="2600" dirty="0" smtClean="0"/>
+              <a:rPr lang="en-US" altLang="zh-TW" sz="2600" dirty="0"/>
               <a:t>(ancestor node)</a:t>
             </a:r>
             <a:r>
-              <a:rPr lang="zh-TW" altLang="en-US" sz="2600" dirty="0" smtClean="0"/>
+              <a:rPr lang="zh-TW" altLang="en-US" sz="2600" dirty="0"/>
               <a:t>。</a:t>
             </a:r>
-            <a:endParaRPr lang="en-US" altLang="zh-TW" sz="2600" dirty="0" smtClean="0"/>
+            <a:endParaRPr lang="en-US" altLang="zh-TW" sz="2600" dirty="0"/>
           </a:p>
         </p:txBody>
       </p:sp>
@@ -29442,13 +28165,6 @@
   <p:clrMapOvr>
     <a:masterClrMapping/>
   </p:clrMapOvr>
-  <p:timing>
-    <p:tnLst>
-      <p:par>
-        <p:cTn id="1" dur="indefinite" restart="never" nodeType="tmRoot"/>
-      </p:par>
-    </p:tnLst>
-  </p:timing>
 </p:sld>
 </file>
 
@@ -29485,7 +28201,7 @@
           <a:lstStyle/>
           <a:p>
             <a:r>
-              <a:rPr lang="en-US" altLang="zh-TW" dirty="0" smtClean="0"/>
+              <a:rPr lang="en-US" altLang="zh-TW" dirty="0"/>
               <a:t>10-4 </a:t>
             </a:r>
             <a:r>
@@ -29513,7 +28229,7 @@
           <a:lstStyle/>
           <a:p>
             <a:r>
-              <a:rPr lang="zh-TW" altLang="en-US" sz="2800" b="1" dirty="0" smtClean="0">
+              <a:rPr lang="zh-TW" altLang="en-US" sz="2800" b="1" dirty="0">
                 <a:solidFill>
                   <a:srgbClr val="C00000"/>
                 </a:solidFill>
@@ -29524,58 +28240,57 @@
           <a:p>
             <a:pPr lvl="1"/>
             <a:r>
-              <a:rPr lang="zh-TW" altLang="en-US" sz="2600" dirty="0" smtClean="0"/>
+              <a:rPr lang="zh-TW" altLang="en-US" sz="2600" dirty="0"/>
               <a:t>以圖</a:t>
             </a:r>
             <a:r>
-              <a:rPr lang="en-US" altLang="zh-TW" sz="2600" dirty="0" smtClean="0"/>
+              <a:rPr lang="en-US" altLang="zh-TW" sz="2600" dirty="0"/>
               <a:t>10-6</a:t>
             </a:r>
             <a:r>
-              <a:rPr lang="zh-TW" altLang="en-US" sz="2600" dirty="0" smtClean="0"/>
+              <a:rPr lang="zh-TW" altLang="en-US" sz="2600" dirty="0"/>
               <a:t>的節點</a:t>
             </a:r>
             <a:r>
-              <a:rPr lang="en-US" altLang="zh-TW" sz="2600" dirty="0" smtClean="0"/>
+              <a:rPr lang="en-US" altLang="zh-TW" sz="2600" dirty="0"/>
               <a:t>F</a:t>
             </a:r>
             <a:r>
-              <a:rPr lang="zh-TW" altLang="en-US" sz="2600" dirty="0" smtClean="0"/>
+              <a:rPr lang="zh-TW" altLang="en-US" sz="2600" dirty="0"/>
               <a:t>為例，它的祖先節點有</a:t>
             </a:r>
             <a:r>
-              <a:rPr lang="en-US" altLang="zh-TW" sz="2600" dirty="0" smtClean="0"/>
+              <a:rPr lang="en-US" altLang="zh-TW" sz="2600" dirty="0"/>
               <a:t>G</a:t>
             </a:r>
             <a:r>
-              <a:rPr lang="zh-TW" altLang="en-US" sz="2600" dirty="0" smtClean="0"/>
+              <a:rPr lang="zh-TW" altLang="en-US" sz="2600" dirty="0"/>
               <a:t>、</a:t>
             </a:r>
             <a:r>
-              <a:rPr lang="en-US" altLang="zh-TW" sz="2600" dirty="0" smtClean="0"/>
+              <a:rPr lang="en-US" altLang="zh-TW" sz="2600" dirty="0"/>
               <a:t>I</a:t>
             </a:r>
             <a:r>
-              <a:rPr lang="zh-TW" altLang="en-US" sz="2600" dirty="0" smtClean="0"/>
+              <a:rPr lang="zh-TW" altLang="en-US" sz="2600" dirty="0"/>
               <a:t>、</a:t>
             </a:r>
             <a:r>
-              <a:rPr lang="en-US" altLang="zh-TW" sz="2600" dirty="0" smtClean="0"/>
+              <a:rPr lang="en-US" altLang="zh-TW" sz="2600" dirty="0"/>
               <a:t>L</a:t>
             </a:r>
             <a:r>
-              <a:rPr lang="zh-TW" altLang="en-US" sz="2600" dirty="0" smtClean="0"/>
+              <a:rPr lang="zh-TW" altLang="en-US" sz="2600" dirty="0"/>
               <a:t>三個節點。可以觀察到，祖先節點包含它的父節點</a:t>
             </a:r>
             <a:r>
-              <a:rPr lang="en-US" altLang="zh-TW" sz="2600" dirty="0" smtClean="0"/>
+              <a:rPr lang="en-US" altLang="zh-TW" sz="2600" dirty="0"/>
               <a:t>(parent node) G</a:t>
             </a:r>
             <a:r>
-              <a:rPr lang="zh-TW" altLang="en-US" sz="2600" dirty="0" smtClean="0"/>
+              <a:rPr lang="zh-TW" altLang="en-US" sz="2600" dirty="0"/>
               <a:t>，也就是最靠近該節點的祖先節點。</a:t>
             </a:r>
-            <a:endParaRPr lang="zh-TW" altLang="en-US" sz="2600" dirty="0"/>
           </a:p>
         </p:txBody>
       </p:sp>
@@ -29643,13 +28358,6 @@
   <p:clrMapOvr>
     <a:masterClrMapping/>
   </p:clrMapOvr>
-  <p:timing>
-    <p:tnLst>
-      <p:par>
-        <p:cTn id="1" dur="indefinite" restart="never" nodeType="tmRoot"/>
-      </p:par>
-    </p:tnLst>
-  </p:timing>
 </p:sld>
 </file>
 
@@ -29686,7 +28394,7 @@
           <a:lstStyle/>
           <a:p>
             <a:r>
-              <a:rPr lang="en-US" altLang="zh-TW" dirty="0" smtClean="0"/>
+              <a:rPr lang="en-US" altLang="zh-TW" dirty="0"/>
               <a:t>10-4 </a:t>
             </a:r>
             <a:r>
@@ -29714,53 +28422,53 @@
           <a:lstStyle/>
           <a:p>
             <a:r>
-              <a:rPr lang="zh-TW" altLang="en-US" sz="2800" b="1" dirty="0" smtClean="0">
+              <a:rPr lang="zh-TW" altLang="en-US" sz="2800" b="1" dirty="0">
                 <a:solidFill>
                   <a:srgbClr val="C00000"/>
                 </a:solidFill>
               </a:rPr>
-              <a:t>子孫節點和子節點</a:t>
+              <a:t>子孫節點</a:t>
             </a:r>
           </a:p>
           <a:p>
             <a:pPr lvl="1"/>
             <a:r>
-              <a:rPr lang="zh-TW" altLang="en-US" sz="2600" dirty="0" smtClean="0"/>
+              <a:rPr lang="zh-TW" altLang="en-US" sz="2600" dirty="0"/>
               <a:t>考慮某</a:t>
             </a:r>
             <a:r>
-              <a:rPr lang="en-US" altLang="zh-TW" sz="2600" dirty="0" smtClean="0"/>
+              <a:rPr lang="en-US" altLang="zh-TW" sz="2600" dirty="0"/>
               <a:t>1</a:t>
             </a:r>
             <a:r>
-              <a:rPr lang="zh-TW" altLang="en-US" sz="2600" dirty="0" smtClean="0"/>
+              <a:rPr lang="zh-TW" altLang="en-US" sz="2600" dirty="0"/>
               <a:t>個節點，和該節點往下走到葉節點的所有可能路徑。那麼，在這些路徑上的所有節點</a:t>
             </a:r>
             <a:r>
-              <a:rPr lang="en-US" altLang="zh-TW" sz="2600" dirty="0" smtClean="0"/>
+              <a:rPr lang="en-US" altLang="zh-TW" sz="2600" dirty="0"/>
               <a:t>(</a:t>
             </a:r>
             <a:r>
-              <a:rPr lang="zh-TW" altLang="en-US" sz="2600" dirty="0" smtClean="0"/>
+              <a:rPr lang="zh-TW" altLang="en-US" sz="2600" dirty="0"/>
               <a:t>不包含自己</a:t>
             </a:r>
             <a:r>
-              <a:rPr lang="en-US" altLang="zh-TW" sz="2600" dirty="0" smtClean="0"/>
+              <a:rPr lang="en-US" altLang="zh-TW" sz="2600" dirty="0"/>
               <a:t>)</a:t>
             </a:r>
             <a:r>
-              <a:rPr lang="zh-TW" altLang="en-US" sz="2600" dirty="0" smtClean="0"/>
+              <a:rPr lang="zh-TW" altLang="en-US" sz="2600" dirty="0"/>
               <a:t>，都是該節點的子孫節點</a:t>
             </a:r>
             <a:r>
-              <a:rPr lang="en-US" altLang="zh-TW" sz="2600" dirty="0" smtClean="0"/>
+              <a:rPr lang="en-US" altLang="zh-TW" sz="2600" dirty="0"/>
               <a:t>(descendent node)</a:t>
             </a:r>
             <a:r>
-              <a:rPr lang="zh-TW" altLang="en-US" sz="2600" dirty="0" smtClean="0"/>
+              <a:rPr lang="zh-TW" altLang="en-US" sz="2600" dirty="0"/>
               <a:t>。</a:t>
             </a:r>
-            <a:endParaRPr lang="en-US" altLang="zh-TW" sz="2600" dirty="0" smtClean="0"/>
+            <a:endParaRPr lang="en-US" altLang="zh-TW" sz="2600" dirty="0"/>
           </a:p>
         </p:txBody>
       </p:sp>
@@ -29769,13 +28477,6 @@
   <p:clrMapOvr>
     <a:masterClrMapping/>
   </p:clrMapOvr>
-  <p:timing>
-    <p:tnLst>
-      <p:par>
-        <p:cTn id="1" dur="indefinite" restart="never" nodeType="tmRoot"/>
-      </p:par>
-    </p:tnLst>
-  </p:timing>
 </p:sld>
 </file>
 
@@ -29812,7 +28513,7 @@
           <a:lstStyle/>
           <a:p>
             <a:r>
-              <a:rPr lang="en-US" altLang="zh-TW" dirty="0" smtClean="0"/>
+              <a:rPr lang="en-US" altLang="zh-TW" dirty="0"/>
               <a:t>10-4 </a:t>
             </a:r>
             <a:r>
@@ -29840,7 +28541,7 @@
           <a:lstStyle/>
           <a:p>
             <a:r>
-              <a:rPr lang="zh-TW" altLang="en-US" sz="2800" b="1" dirty="0" smtClean="0">
+              <a:rPr lang="zh-TW" altLang="en-US" sz="2800" b="1" dirty="0">
                 <a:solidFill>
                   <a:srgbClr val="C00000"/>
                 </a:solidFill>
@@ -29851,114 +28552,105 @@
           <a:p>
             <a:pPr lvl="1"/>
             <a:r>
-              <a:rPr lang="zh-TW" altLang="en-US" sz="2600" dirty="0" smtClean="0"/>
+              <a:rPr lang="zh-TW" altLang="en-US" sz="2600" dirty="0"/>
               <a:t>以圖</a:t>
             </a:r>
             <a:r>
-              <a:rPr lang="en-US" altLang="zh-TW" sz="2600" dirty="0" smtClean="0"/>
+              <a:rPr lang="en-US" altLang="zh-TW" sz="2600" dirty="0"/>
               <a:t>10-6</a:t>
             </a:r>
             <a:r>
-              <a:rPr lang="zh-TW" altLang="en-US" sz="2600" dirty="0" smtClean="0"/>
+              <a:rPr lang="zh-TW" altLang="en-US" sz="2600" dirty="0"/>
               <a:t>的節點</a:t>
             </a:r>
             <a:r>
-              <a:rPr lang="en-US" altLang="zh-TW" sz="2600" dirty="0" smtClean="0"/>
+              <a:rPr lang="en-US" altLang="zh-TW" sz="2600" dirty="0"/>
               <a:t>I</a:t>
             </a:r>
             <a:r>
-              <a:rPr lang="zh-TW" altLang="en-US" sz="2600" dirty="0" smtClean="0"/>
+              <a:rPr lang="zh-TW" altLang="en-US" sz="2600" dirty="0"/>
               <a:t>為例，它的子孫節點有</a:t>
             </a:r>
             <a:r>
-              <a:rPr lang="en-US" altLang="zh-TW" sz="2600" dirty="0" smtClean="0"/>
+              <a:rPr lang="en-US" altLang="zh-TW" sz="2600" dirty="0"/>
               <a:t>D</a:t>
             </a:r>
             <a:r>
-              <a:rPr lang="zh-TW" altLang="en-US" sz="2600" dirty="0" smtClean="0"/>
+              <a:rPr lang="zh-TW" altLang="en-US" sz="2600" dirty="0"/>
               <a:t>、</a:t>
             </a:r>
             <a:r>
-              <a:rPr lang="en-US" altLang="zh-TW" sz="2600" dirty="0" smtClean="0"/>
+              <a:rPr lang="en-US" altLang="zh-TW" sz="2600" dirty="0"/>
               <a:t>G</a:t>
             </a:r>
             <a:r>
-              <a:rPr lang="zh-TW" altLang="en-US" sz="2600" dirty="0" smtClean="0"/>
+              <a:rPr lang="zh-TW" altLang="en-US" sz="2600" dirty="0"/>
               <a:t>、</a:t>
             </a:r>
             <a:r>
-              <a:rPr lang="en-US" altLang="zh-TW" sz="2600" dirty="0" smtClean="0"/>
+              <a:rPr lang="en-US" altLang="zh-TW" sz="2600" dirty="0"/>
               <a:t>E</a:t>
             </a:r>
             <a:r>
-              <a:rPr lang="zh-TW" altLang="en-US" sz="2600" dirty="0" smtClean="0"/>
+              <a:rPr lang="zh-TW" altLang="en-US" sz="2600" dirty="0"/>
               <a:t>、</a:t>
             </a:r>
             <a:r>
-              <a:rPr lang="en-US" altLang="zh-TW" sz="2600" dirty="0" smtClean="0"/>
+              <a:rPr lang="en-US" altLang="zh-TW" sz="2600" dirty="0"/>
               <a:t>F</a:t>
             </a:r>
             <a:r>
-              <a:rPr lang="zh-TW" altLang="en-US" sz="2600" dirty="0" smtClean="0"/>
+              <a:rPr lang="zh-TW" altLang="en-US" sz="2600" dirty="0"/>
               <a:t>、</a:t>
             </a:r>
             <a:r>
-              <a:rPr lang="en-US" altLang="zh-TW" sz="2600" dirty="0" smtClean="0"/>
+              <a:rPr lang="en-US" altLang="zh-TW" sz="2600" dirty="0"/>
               <a:t>H</a:t>
             </a:r>
             <a:r>
-              <a:rPr lang="zh-TW" altLang="en-US" sz="2600" dirty="0" smtClean="0"/>
-              <a:t>等節點</a:t>
-            </a:r>
-            <a:r>
-              <a:rPr lang="zh-TW" altLang="en-US" dirty="0" smtClean="0"/>
-              <a:t>。可以觀察到，節點</a:t>
-            </a:r>
-            <a:r>
-              <a:rPr lang="en-US" altLang="zh-TW" dirty="0" smtClean="0"/>
+              <a:rPr lang="zh-TW" altLang="en-US" sz="2600" dirty="0"/>
+              <a:t>等節點。可以觀察到，節點</a:t>
+            </a:r>
+            <a:r>
+              <a:rPr lang="en-US" altLang="zh-TW" sz="2600" dirty="0"/>
               <a:t>I</a:t>
             </a:r>
             <a:r>
-              <a:rPr lang="zh-TW" altLang="en-US" dirty="0" smtClean="0"/>
-              <a:t>的</a:t>
-            </a:r>
-            <a:r>
-              <a:rPr lang="zh-TW" altLang="en-US" sz="2600" dirty="0" smtClean="0"/>
-              <a:t>子孫節點</a:t>
-            </a:r>
-            <a:r>
-              <a:rPr lang="en-US" altLang="zh-TW" sz="2600" dirty="0" smtClean="0"/>
+              <a:rPr lang="zh-TW" altLang="en-US" sz="2600" dirty="0"/>
+              <a:t>的子孫節點</a:t>
+            </a:r>
+            <a:r>
+              <a:rPr lang="en-US" altLang="zh-TW" sz="2600" dirty="0"/>
               <a:t>(child node)</a:t>
             </a:r>
             <a:r>
-              <a:rPr lang="zh-TW" altLang="en-US" sz="2600" dirty="0" smtClean="0"/>
+              <a:rPr lang="zh-TW" altLang="en-US" sz="2600" dirty="0"/>
               <a:t>包含它的三個子節點</a:t>
             </a:r>
             <a:r>
-              <a:rPr lang="en-US" altLang="zh-TW" sz="2600" dirty="0" smtClean="0"/>
+              <a:rPr lang="en-US" altLang="zh-TW" sz="2600" dirty="0"/>
               <a:t>D</a:t>
             </a:r>
             <a:r>
-              <a:rPr lang="zh-TW" altLang="en-US" sz="2600" dirty="0" smtClean="0"/>
+              <a:rPr lang="zh-TW" altLang="en-US" sz="2600" dirty="0"/>
               <a:t>、</a:t>
             </a:r>
             <a:r>
-              <a:rPr lang="en-US" altLang="zh-TW" sz="2600" dirty="0" smtClean="0"/>
+              <a:rPr lang="en-US" altLang="zh-TW" sz="2600" dirty="0"/>
               <a:t>G</a:t>
             </a:r>
             <a:r>
-              <a:rPr lang="zh-TW" altLang="en-US" sz="2600" dirty="0" smtClean="0"/>
+              <a:rPr lang="zh-TW" altLang="en-US" sz="2600" dirty="0"/>
               <a:t>、</a:t>
             </a:r>
             <a:r>
-              <a:rPr lang="en-US" altLang="zh-TW" sz="2600" dirty="0" smtClean="0"/>
+              <a:rPr lang="en-US" altLang="zh-TW" sz="2600" dirty="0"/>
               <a:t>H</a:t>
             </a:r>
             <a:r>
-              <a:rPr lang="zh-TW" altLang="en-US" sz="2600" dirty="0" smtClean="0"/>
+              <a:rPr lang="zh-TW" altLang="en-US" sz="2600" dirty="0"/>
               <a:t>，也就是最靠近該節點的子孫節點。</a:t>
             </a:r>
-            <a:endParaRPr lang="zh-TW" altLang="en-US" sz="2600" dirty="0"/>
           </a:p>
         </p:txBody>
       </p:sp>
@@ -30026,13 +28718,6 @@
   <p:clrMapOvr>
     <a:masterClrMapping/>
   </p:clrMapOvr>
-  <p:timing>
-    <p:tnLst>
-      <p:par>
-        <p:cTn id="1" dur="indefinite" restart="never" nodeType="tmRoot"/>
-      </p:par>
-    </p:tnLst>
-  </p:timing>
 </p:sld>
 </file>
 
@@ -30074,7 +28759,7 @@
           <a:lstStyle/>
           <a:p>
             <a:r>
-              <a:rPr lang="en-US" altLang="zh-TW" dirty="0" smtClean="0"/>
+              <a:rPr lang="en-US" altLang="zh-TW" dirty="0"/>
               <a:t>10-4 </a:t>
             </a:r>
             <a:r>
@@ -30102,50 +28787,62 @@
           <a:lstStyle/>
           <a:p>
             <a:r>
-              <a:rPr lang="zh-TW" altLang="en-US" dirty="0" smtClean="0"/>
-              <a:t>所謂的二元樹，就是每一個節點最多只有</a:t>
-            </a:r>
-            <a:r>
-              <a:rPr lang="en-US" altLang="zh-TW" dirty="0" smtClean="0"/>
+              <a:rPr lang="zh-TW" altLang="en-US" dirty="0"/>
+              <a:t>所謂的</a:t>
+            </a:r>
+            <a:r>
+              <a:rPr lang="zh-TW" altLang="en-US" dirty="0">
+                <a:solidFill>
+                  <a:srgbClr val="C00000"/>
+                </a:solidFill>
+              </a:rPr>
+              <a:t>二元樹</a:t>
+            </a:r>
+            <a:r>
+              <a:rPr lang="zh-TW" altLang="en-US" dirty="0"/>
+              <a:t>，就是每一個節點最多只有</a:t>
+            </a:r>
+            <a:r>
+              <a:rPr lang="en-US" altLang="zh-TW" dirty="0"/>
               <a:t>2</a:t>
             </a:r>
             <a:r>
-              <a:rPr lang="zh-TW" altLang="en-US" dirty="0" smtClean="0"/>
+              <a:rPr lang="zh-TW" altLang="en-US" dirty="0"/>
               <a:t>個子節點</a:t>
             </a:r>
             <a:r>
-              <a:rPr lang="en-US" altLang="zh-TW" dirty="0" smtClean="0"/>
+              <a:rPr lang="en-US" altLang="zh-TW" dirty="0"/>
               <a:t>(</a:t>
             </a:r>
             <a:r>
-              <a:rPr lang="zh-TW" altLang="en-US" dirty="0" smtClean="0"/>
+              <a:rPr lang="zh-TW" altLang="en-US" dirty="0"/>
               <a:t>可能沒有子節點，或是只有</a:t>
             </a:r>
             <a:r>
-              <a:rPr lang="en-US" altLang="zh-TW" dirty="0" smtClean="0"/>
+              <a:rPr lang="en-US" altLang="zh-TW" dirty="0"/>
               <a:t>1</a:t>
             </a:r>
             <a:r>
-              <a:rPr lang="zh-TW" altLang="en-US" dirty="0" smtClean="0"/>
+              <a:rPr lang="zh-TW" altLang="en-US" dirty="0"/>
               <a:t>個</a:t>
             </a:r>
             <a:r>
-              <a:rPr lang="en-US" altLang="zh-TW" dirty="0" smtClean="0"/>
+              <a:rPr lang="en-US" altLang="zh-TW" dirty="0"/>
               <a:t>)</a:t>
             </a:r>
             <a:r>
-              <a:rPr lang="zh-TW" altLang="en-US" dirty="0" smtClean="0"/>
+              <a:rPr lang="zh-TW" altLang="en-US" dirty="0"/>
               <a:t> 。</a:t>
             </a:r>
-            <a:endParaRPr lang="en-US" altLang="zh-TW" dirty="0" smtClean="0"/>
-          </a:p>
-          <a:p>
-            <a:r>
-              <a:rPr lang="zh-TW" altLang="en-US" dirty="0" smtClean="0"/>
+            <a:endParaRPr lang="en-US" altLang="zh-TW" dirty="0"/>
+          </a:p>
+          <a:p>
+            <a:r>
+              <a:rPr lang="zh-TW" altLang="en-US" dirty="0"/>
               <a:t>也稱作</a:t>
             </a:r>
             <a:r>
-              <a:rPr lang="zh-TW" altLang="en-US" dirty="0" smtClean="0">
+              <a:rPr lang="zh-TW" altLang="en-US" dirty="0">
                 <a:solidFill>
                   <a:srgbClr val="C00000"/>
                 </a:solidFill>
@@ -30153,46 +28850,45 @@
               <a:t>運算樹</a:t>
             </a:r>
             <a:r>
-              <a:rPr lang="en-US" altLang="zh-TW" dirty="0" smtClean="0"/>
+              <a:rPr lang="en-US" altLang="zh-TW" dirty="0"/>
               <a:t>(expression tree)</a:t>
             </a:r>
             <a:r>
-              <a:rPr lang="zh-TW" altLang="en-US" dirty="0" smtClean="0"/>
+              <a:rPr lang="zh-TW" altLang="en-US" dirty="0"/>
               <a:t>，是將一個算數運算式以樹狀結構表示，其中運算子</a:t>
             </a:r>
             <a:r>
-              <a:rPr lang="en-US" altLang="zh-TW" dirty="0" smtClean="0"/>
+              <a:rPr lang="en-US" altLang="zh-TW" dirty="0"/>
               <a:t>(operator)</a:t>
             </a:r>
             <a:r>
-              <a:rPr lang="zh-TW" altLang="en-US" dirty="0" smtClean="0"/>
+              <a:rPr lang="zh-TW" altLang="en-US" dirty="0"/>
               <a:t>為父節點，運算元</a:t>
             </a:r>
             <a:r>
-              <a:rPr lang="en-US" altLang="zh-TW" dirty="0" smtClean="0"/>
+              <a:rPr lang="en-US" altLang="zh-TW" dirty="0"/>
               <a:t>(operand)</a:t>
             </a:r>
             <a:r>
-              <a:rPr lang="zh-TW" altLang="en-US" dirty="0" smtClean="0"/>
+              <a:rPr lang="zh-TW" altLang="en-US" dirty="0"/>
               <a:t>為子節點。至於圖</a:t>
             </a:r>
             <a:r>
-              <a:rPr lang="en-US" altLang="zh-TW" dirty="0" smtClean="0"/>
+              <a:rPr lang="en-US" altLang="zh-TW" dirty="0"/>
               <a:t>10-6</a:t>
             </a:r>
             <a:r>
-              <a:rPr lang="zh-TW" altLang="en-US" dirty="0" smtClean="0"/>
+              <a:rPr lang="zh-TW" altLang="en-US" dirty="0"/>
               <a:t>的樹不是二元樹，因為節點</a:t>
             </a:r>
             <a:r>
-              <a:rPr lang="en-US" altLang="zh-TW" dirty="0" smtClean="0"/>
+              <a:rPr lang="en-US" altLang="zh-TW" dirty="0"/>
               <a:t>I</a:t>
             </a:r>
             <a:r>
-              <a:rPr lang="zh-TW" altLang="en-US" dirty="0" smtClean="0"/>
+              <a:rPr lang="zh-TW" altLang="en-US" dirty="0"/>
               <a:t>有三個子節點。</a:t>
             </a:r>
-            <a:endParaRPr lang="zh-TW" altLang="en-US" dirty="0"/>
           </a:p>
         </p:txBody>
       </p:sp>
@@ -30255,13 +28951,6 @@
   <p:clrMapOvr>
     <a:masterClrMapping/>
   </p:clrMapOvr>
-  <p:timing>
-    <p:tnLst>
-      <p:par>
-        <p:cTn id="1" dur="indefinite" restart="never" nodeType="tmRoot"/>
-      </p:par>
-    </p:tnLst>
-  </p:timing>
 </p:sld>
 </file>
 
@@ -30352,7 +29041,7 @@
           <a:lstStyle/>
           <a:p>
             <a:r>
-              <a:rPr lang="en-US" altLang="zh-TW" dirty="0" smtClean="0"/>
+              <a:rPr lang="en-US" altLang="zh-TW" dirty="0"/>
               <a:t>10-4 </a:t>
             </a:r>
             <a:r>
@@ -30411,13 +29100,6 @@
   <p:clrMapOvr>
     <a:masterClrMapping/>
   </p:clrMapOvr>
-  <p:timing>
-    <p:tnLst>
-      <p:par>
-        <p:cTn id="1" dur="indefinite" restart="never" nodeType="tmRoot"/>
-      </p:par>
-    </p:tnLst>
-  </p:timing>
 </p:sld>
 </file>
 
@@ -30454,14 +29136,13 @@
           <a:lstStyle/>
           <a:p>
             <a:r>
-              <a:rPr lang="en-US" altLang="zh-TW" dirty="0" smtClean="0"/>
+              <a:rPr lang="en-US" altLang="zh-TW" dirty="0"/>
               <a:t>10-4 </a:t>
             </a:r>
             <a:r>
-              <a:rPr lang="zh-TW" altLang="en-US" dirty="0" smtClean="0"/>
+              <a:rPr lang="zh-TW" altLang="en-US" dirty="0"/>
               <a:t>樹狀結構</a:t>
             </a:r>
-            <a:endParaRPr lang="zh-TW" altLang="en-US" dirty="0"/>
           </a:p>
         </p:txBody>
       </p:sp>
@@ -30483,11 +29164,11 @@
           <a:lstStyle/>
           <a:p>
             <a:r>
-              <a:rPr lang="zh-TW" altLang="en-US" dirty="0" smtClean="0"/>
+              <a:rPr lang="zh-TW" altLang="en-US" dirty="0"/>
               <a:t>針對二元樹的每一個節點，位於左邊的子節點，稱為</a:t>
             </a:r>
             <a:r>
-              <a:rPr lang="zh-TW" altLang="en-US" dirty="0" smtClean="0">
+              <a:rPr lang="zh-TW" altLang="en-US" dirty="0">
                 <a:solidFill>
                   <a:srgbClr val="C00000"/>
                 </a:solidFill>
@@ -30495,15 +29176,15 @@
               <a:t>左子節點</a:t>
             </a:r>
             <a:r>
-              <a:rPr lang="en-US" altLang="zh-TW" dirty="0" smtClean="0"/>
+              <a:rPr lang="en-US" altLang="zh-TW" dirty="0"/>
               <a:t>(left child node)</a:t>
             </a:r>
             <a:r>
-              <a:rPr lang="zh-TW" altLang="en-US" dirty="0" smtClean="0"/>
+              <a:rPr lang="zh-TW" altLang="en-US" dirty="0"/>
               <a:t>；若是以該左子節點為根節點，則所對應的樹稱為</a:t>
             </a:r>
             <a:r>
-              <a:rPr lang="zh-TW" altLang="en-US" dirty="0" smtClean="0">
+              <a:rPr lang="zh-TW" altLang="en-US" dirty="0">
                 <a:solidFill>
                   <a:srgbClr val="C00000"/>
                 </a:solidFill>
@@ -30511,22 +29192,22 @@
               <a:t>左子樹</a:t>
             </a:r>
             <a:r>
-              <a:rPr lang="en-US" altLang="zh-TW" dirty="0" smtClean="0"/>
+              <a:rPr lang="en-US" altLang="zh-TW" dirty="0"/>
               <a:t>(left subtree)</a:t>
             </a:r>
             <a:r>
-              <a:rPr lang="zh-TW" altLang="en-US" dirty="0" smtClean="0"/>
+              <a:rPr lang="zh-TW" altLang="en-US" dirty="0"/>
               <a:t>。</a:t>
             </a:r>
-            <a:endParaRPr lang="en-US" altLang="zh-TW" dirty="0" smtClean="0"/>
-          </a:p>
-          <a:p>
-            <a:r>
-              <a:rPr lang="zh-TW" altLang="en-US" dirty="0" smtClean="0"/>
+            <a:endParaRPr lang="en-US" altLang="zh-TW" dirty="0"/>
+          </a:p>
+          <a:p>
+            <a:r>
+              <a:rPr lang="zh-TW" altLang="en-US" dirty="0"/>
               <a:t>相同的，位於右邊的子節點為</a:t>
             </a:r>
             <a:r>
-              <a:rPr lang="zh-TW" altLang="en-US" dirty="0" smtClean="0">
+              <a:rPr lang="zh-TW" altLang="en-US" dirty="0">
                 <a:solidFill>
                   <a:srgbClr val="C00000"/>
                 </a:solidFill>
@@ -30534,15 +29215,15 @@
               <a:t>右子節點</a:t>
             </a:r>
             <a:r>
-              <a:rPr lang="en-US" altLang="zh-TW" dirty="0" smtClean="0"/>
+              <a:rPr lang="en-US" altLang="zh-TW" dirty="0"/>
               <a:t>(right child node)</a:t>
             </a:r>
             <a:r>
-              <a:rPr lang="zh-TW" altLang="en-US" dirty="0" smtClean="0"/>
+              <a:rPr lang="zh-TW" altLang="en-US" dirty="0"/>
               <a:t>，而對應的子樹稱作</a:t>
             </a:r>
             <a:r>
-              <a:rPr lang="zh-TW" altLang="en-US" dirty="0" smtClean="0">
+              <a:rPr lang="zh-TW" altLang="en-US" dirty="0">
                 <a:solidFill>
                   <a:srgbClr val="C00000"/>
                 </a:solidFill>
@@ -30550,14 +29231,13 @@
               <a:t>右子樹</a:t>
             </a:r>
             <a:r>
-              <a:rPr lang="en-US" altLang="zh-TW" dirty="0" smtClean="0"/>
+              <a:rPr lang="en-US" altLang="zh-TW" dirty="0"/>
               <a:t>(right subtree)</a:t>
             </a:r>
             <a:r>
-              <a:rPr lang="zh-TW" altLang="en-US" dirty="0" smtClean="0"/>
+              <a:rPr lang="zh-TW" altLang="en-US" dirty="0"/>
               <a:t>。</a:t>
             </a:r>
-            <a:endParaRPr lang="zh-TW" altLang="en-US" dirty="0"/>
           </a:p>
         </p:txBody>
       </p:sp>
@@ -30729,13 +29409,6 @@
   <p:clrMapOvr>
     <a:masterClrMapping/>
   </p:clrMapOvr>
-  <p:timing>
-    <p:tnLst>
-      <p:par>
-        <p:cTn id="1" dur="indefinite" restart="never" nodeType="tmRoot"/>
-      </p:par>
-    </p:tnLst>
-  </p:timing>
 </p:sld>
 </file>
 
@@ -30772,7 +29445,7 @@
           <a:lstStyle/>
           <a:p>
             <a:r>
-              <a:rPr lang="en-US" altLang="zh-TW" dirty="0" smtClean="0"/>
+              <a:rPr lang="en-US" altLang="zh-TW" dirty="0"/>
               <a:t>10-1 </a:t>
             </a:r>
             <a:r>
@@ -30824,7 +29497,7 @@
             <a:pPr marL="0" indent="0">
               <a:buNone/>
             </a:pPr>
-            <a:endParaRPr lang="en-US" altLang="zh-TW" sz="2400" dirty="0" smtClean="0"/>
+            <a:endParaRPr lang="en-US" altLang="zh-TW" sz="2400" dirty="0"/>
           </a:p>
           <a:p>
             <a:pPr>
@@ -30833,12 +29506,8 @@
               </a:spcBef>
             </a:pPr>
             <a:r>
-              <a:rPr lang="zh-TW" altLang="en-US" sz="2400" dirty="0" smtClean="0"/>
-              <a:t>可以</a:t>
-            </a:r>
-            <a:r>
               <a:rPr lang="zh-TW" altLang="en-US" sz="2400" dirty="0"/>
-              <a:t>宣告一個二維陣列如下：</a:t>
+              <a:t>可以宣告一個二維陣列如下：</a:t>
             </a:r>
           </a:p>
         </p:txBody>
@@ -31082,17 +29751,16 @@
           </a:lstStyle>
           <a:p>
             <a:r>
-              <a:rPr lang="zh-TW" altLang="en-US" sz="1400" b="1" dirty="0" smtClean="0"/>
+              <a:rPr lang="zh-TW" altLang="en-US" sz="1400" b="1" dirty="0"/>
               <a:t>同學的數學</a:t>
             </a:r>
-            <a:endParaRPr lang="en-US" altLang="zh-TW" sz="1400" b="1" dirty="0" smtClean="0"/>
-          </a:p>
-          <a:p>
-            <a:r>
-              <a:rPr lang="zh-TW" altLang="en-US" sz="1400" b="1" dirty="0" smtClean="0"/>
+            <a:endParaRPr lang="en-US" altLang="zh-TW" sz="1400" b="1" dirty="0"/>
+          </a:p>
+          <a:p>
+            <a:r>
+              <a:rPr lang="zh-TW" altLang="en-US" sz="1400" b="1" dirty="0"/>
               <a:t>和英文成績</a:t>
             </a:r>
-            <a:endParaRPr lang="zh-TW" altLang="en-US" sz="1400" b="1" dirty="0"/>
           </a:p>
         </p:txBody>
       </p:sp>
@@ -31166,13 +29834,6 @@
   <p:clrMapOvr>
     <a:masterClrMapping/>
   </p:clrMapOvr>
-  <p:timing>
-    <p:tnLst>
-      <p:par>
-        <p:cTn id="1" dur="indefinite" restart="never" nodeType="tmRoot"/>
-      </p:par>
-    </p:tnLst>
-  </p:timing>
 </p:sld>
 </file>
 
@@ -31263,7 +29924,7 @@
           <a:lstStyle/>
           <a:p>
             <a:r>
-              <a:rPr lang="en-US" altLang="zh-TW" dirty="0" smtClean="0"/>
+              <a:rPr lang="en-US" altLang="zh-TW" dirty="0"/>
               <a:t>10-4 </a:t>
             </a:r>
             <a:r>
@@ -31289,18 +29950,9 @@
           <a:lstStyle/>
           <a:p>
             <a:r>
-              <a:rPr lang="zh-TW" altLang="en-US" dirty="0" smtClean="0"/>
-              <a:t>以二元</a:t>
-            </a:r>
-            <a:r>
-              <a:rPr lang="zh-TW" altLang="en-US" dirty="0"/>
-              <a:t>樹的根節點為例，其左子樹和右子樹描繪於下圖中</a:t>
-            </a:r>
-            <a:r>
-              <a:rPr lang="zh-TW" altLang="en-US" dirty="0" smtClean="0"/>
-              <a:t>。</a:t>
-            </a:r>
-            <a:endParaRPr lang="zh-TW" altLang="en-US" dirty="0"/>
+              <a:rPr lang="zh-TW" altLang="en-US" dirty="0"/>
+              <a:t>以二元樹的根節點為例，其左子樹和右子樹描繪於下圖中。</a:t>
+            </a:r>
           </a:p>
         </p:txBody>
       </p:sp>
@@ -31343,19 +29995,8 @@
                 <a:latin typeface="微軟正黑體" pitchFamily="34" charset="-120"/>
                 <a:ea typeface="微軟正黑體" pitchFamily="34" charset="-120"/>
               </a:rPr>
-              <a:t>左子樹和右子</a:t>
-            </a:r>
-            <a:r>
-              <a:rPr lang="zh-TW" altLang="en-US" sz="2000" b="1" dirty="0" smtClean="0">
-                <a:latin typeface="微軟正黑體" pitchFamily="34" charset="-120"/>
-                <a:ea typeface="微軟正黑體" pitchFamily="34" charset="-120"/>
-              </a:rPr>
-              <a:t>樹</a:t>
-            </a:r>
-            <a:endParaRPr lang="zh-TW" altLang="en-US" sz="2000" b="1" dirty="0">
-              <a:latin typeface="微軟正黑體" pitchFamily="34" charset="-120"/>
-              <a:ea typeface="微軟正黑體" pitchFamily="34" charset="-120"/>
-            </a:endParaRPr>
+              <a:t>左子樹和右子樹</a:t>
+            </a:r>
           </a:p>
         </p:txBody>
       </p:sp>
@@ -31369,13 +30010,6 @@
   <p:clrMapOvr>
     <a:masterClrMapping/>
   </p:clrMapOvr>
-  <p:timing>
-    <p:tnLst>
-      <p:par>
-        <p:cTn id="1" dur="indefinite" restart="never" nodeType="tmRoot"/>
-      </p:par>
-    </p:tnLst>
-  </p:timing>
 </p:sld>
 </file>
 
@@ -31412,14 +30046,13 @@
           <a:lstStyle/>
           <a:p>
             <a:r>
-              <a:rPr lang="en-US" altLang="zh-TW" dirty="0" smtClean="0"/>
+              <a:rPr lang="en-US" altLang="zh-TW" dirty="0"/>
               <a:t>10-4 </a:t>
             </a:r>
             <a:r>
-              <a:rPr lang="zh-TW" altLang="en-US" dirty="0" smtClean="0"/>
+              <a:rPr lang="zh-TW" altLang="en-US" dirty="0"/>
               <a:t>樹狀結構</a:t>
             </a:r>
-            <a:endParaRPr lang="zh-TW" altLang="en-US" dirty="0"/>
           </a:p>
         </p:txBody>
       </p:sp>
@@ -31439,10 +30072,9 @@
           <a:lstStyle/>
           <a:p>
             <a:r>
-              <a:rPr lang="zh-TW" altLang="en-US" dirty="0" smtClean="0"/>
+              <a:rPr lang="zh-TW" altLang="en-US" dirty="0"/>
               <a:t>二元樹實作：首先定義樹中每一個節點的資料型態，假設每一個節點存放一個字元：</a:t>
             </a:r>
-            <a:endParaRPr lang="zh-TW" altLang="en-US" dirty="0"/>
           </a:p>
         </p:txBody>
       </p:sp>
@@ -31511,13 +30143,6 @@
   <p:clrMapOvr>
     <a:masterClrMapping/>
   </p:clrMapOvr>
-  <p:timing>
-    <p:tnLst>
-      <p:par>
-        <p:cTn id="1" dur="indefinite" restart="never" nodeType="tmRoot"/>
-      </p:par>
-    </p:tnLst>
-  </p:timing>
 </p:sld>
 </file>
 
@@ -31554,14 +30179,13 @@
           <a:lstStyle/>
           <a:p>
             <a:r>
-              <a:rPr lang="en-US" altLang="zh-TW" dirty="0" smtClean="0"/>
+              <a:rPr lang="en-US" altLang="zh-TW" dirty="0"/>
               <a:t>10-4 </a:t>
             </a:r>
             <a:r>
-              <a:rPr lang="zh-TW" altLang="en-US" dirty="0" smtClean="0"/>
+              <a:rPr lang="zh-TW" altLang="en-US" dirty="0"/>
               <a:t>樹狀結構</a:t>
             </a:r>
-            <a:endParaRPr lang="zh-TW" altLang="en-US" dirty="0"/>
           </a:p>
         </p:txBody>
       </p:sp>
@@ -31583,27 +30207,27 @@
           <a:lstStyle/>
           <a:p>
             <a:r>
-              <a:rPr lang="zh-TW" altLang="en-US" dirty="0" smtClean="0"/>
+              <a:rPr lang="zh-TW" altLang="en-US" dirty="0"/>
               <a:t>由於每一個節點最多有兩個子節點，將左子節點</a:t>
             </a:r>
             <a:r>
-              <a:rPr lang="en-US" altLang="zh-TW" dirty="0" smtClean="0"/>
+              <a:rPr lang="en-US" altLang="zh-TW" dirty="0"/>
               <a:t>(</a:t>
             </a:r>
             <a:r>
-              <a:rPr lang="zh-TW" altLang="en-US" dirty="0" smtClean="0"/>
+              <a:rPr lang="zh-TW" altLang="en-US" dirty="0"/>
               <a:t>或左子樹</a:t>
             </a:r>
             <a:r>
-              <a:rPr lang="en-US" altLang="zh-TW" dirty="0" smtClean="0"/>
+              <a:rPr lang="en-US" altLang="zh-TW" dirty="0"/>
               <a:t>)</a:t>
             </a:r>
             <a:r>
-              <a:rPr lang="zh-TW" altLang="en-US" dirty="0" smtClean="0"/>
+              <a:rPr lang="zh-TW" altLang="en-US" dirty="0"/>
               <a:t>以指標</a:t>
             </a:r>
             <a:r>
-              <a:rPr lang="en-US" altLang="zh-TW" dirty="0" smtClean="0">
+              <a:rPr lang="en-US" altLang="zh-TW" dirty="0">
                 <a:solidFill>
                   <a:srgbClr val="0070C0"/>
                 </a:solidFill>
@@ -31611,27 +30235,27 @@
               <a:t>left</a:t>
             </a:r>
             <a:r>
-              <a:rPr lang="zh-TW" altLang="en-US" dirty="0" smtClean="0"/>
+              <a:rPr lang="zh-TW" altLang="en-US" dirty="0"/>
               <a:t>表示，而將右子節點</a:t>
             </a:r>
             <a:r>
-              <a:rPr lang="en-US" altLang="zh-TW" dirty="0" smtClean="0"/>
+              <a:rPr lang="en-US" altLang="zh-TW" dirty="0"/>
               <a:t>(</a:t>
             </a:r>
             <a:r>
-              <a:rPr lang="zh-TW" altLang="en-US" dirty="0" smtClean="0"/>
+              <a:rPr lang="zh-TW" altLang="en-US" dirty="0"/>
               <a:t>或右子樹</a:t>
             </a:r>
             <a:r>
-              <a:rPr lang="en-US" altLang="zh-TW" dirty="0" smtClean="0"/>
+              <a:rPr lang="en-US" altLang="zh-TW" dirty="0"/>
               <a:t>)</a:t>
             </a:r>
             <a:r>
-              <a:rPr lang="zh-TW" altLang="en-US" dirty="0" smtClean="0"/>
+              <a:rPr lang="zh-TW" altLang="en-US" dirty="0"/>
               <a:t>以指標</a:t>
             </a:r>
             <a:r>
-              <a:rPr lang="en-US" altLang="zh-TW" dirty="0" smtClean="0">
+              <a:rPr lang="en-US" altLang="zh-TW" dirty="0">
                 <a:solidFill>
                   <a:srgbClr val="0070C0"/>
                 </a:solidFill>
@@ -31639,18 +30263,18 @@
               <a:t>right</a:t>
             </a:r>
             <a:r>
-              <a:rPr lang="zh-TW" altLang="en-US" dirty="0" smtClean="0"/>
+              <a:rPr lang="zh-TW" altLang="en-US" dirty="0"/>
               <a:t>表示，以此將一棵二元樹建立起來。</a:t>
             </a:r>
-            <a:endParaRPr lang="en-US" altLang="zh-TW" dirty="0" smtClean="0"/>
-          </a:p>
-          <a:p>
-            <a:r>
-              <a:rPr lang="zh-TW" altLang="en-US" dirty="0" smtClean="0"/>
+            <a:endParaRPr lang="en-US" altLang="zh-TW" dirty="0"/>
+          </a:p>
+          <a:p>
+            <a:r>
+              <a:rPr lang="zh-TW" altLang="en-US" dirty="0"/>
               <a:t>注意：若是只有一個子節點或沒有子節點的話，就以空指標</a:t>
             </a:r>
             <a:r>
-              <a:rPr lang="en-US" altLang="zh-TW" dirty="0" smtClean="0">
+              <a:rPr lang="en-US" altLang="zh-TW" dirty="0">
                 <a:solidFill>
                   <a:srgbClr val="0070C0"/>
                 </a:solidFill>
@@ -31658,10 +30282,9 @@
               <a:t>null</a:t>
             </a:r>
             <a:r>
-              <a:rPr lang="zh-TW" altLang="en-US" dirty="0" smtClean="0"/>
+              <a:rPr lang="zh-TW" altLang="en-US" dirty="0"/>
               <a:t>表示。</a:t>
             </a:r>
-            <a:endParaRPr lang="zh-TW" altLang="en-US" dirty="0"/>
           </a:p>
         </p:txBody>
       </p:sp>
@@ -31670,13 +30293,6 @@
   <p:clrMapOvr>
     <a:masterClrMapping/>
   </p:clrMapOvr>
-  <p:timing>
-    <p:tnLst>
-      <p:par>
-        <p:cTn id="1" dur="indefinite" restart="never" nodeType="tmRoot"/>
-      </p:par>
-    </p:tnLst>
-  </p:timing>
 </p:sld>
 </file>
 
@@ -31713,7 +30329,7 @@
           <a:lstStyle/>
           <a:p>
             <a:r>
-              <a:rPr lang="en-US" altLang="zh-TW" dirty="0" smtClean="0"/>
+              <a:rPr lang="en-US" altLang="zh-TW" dirty="0"/>
               <a:t>10-4 </a:t>
             </a:r>
             <a:r>
@@ -31742,33 +30358,16 @@
           <a:p>
             <a:r>
               <a:rPr lang="zh-TW" altLang="en-US" sz="2400" dirty="0"/>
-              <a:t>若是將該圖與前面</a:t>
-            </a:r>
-            <a:r>
-              <a:rPr lang="zh-TW" altLang="en-US" sz="2400" dirty="0" smtClean="0"/>
-              <a:t>第</a:t>
-            </a:r>
-            <a:r>
-              <a:rPr lang="en-US" altLang="zh-TW" sz="2400" dirty="0" smtClean="0"/>
+              <a:t>若是將該圖與前面第</a:t>
+            </a:r>
+            <a:r>
+              <a:rPr lang="en-US" altLang="zh-TW" sz="2400" dirty="0"/>
               <a:t>10-2</a:t>
             </a:r>
             <a:r>
               <a:rPr lang="zh-TW" altLang="en-US" sz="2400" dirty="0"/>
-              <a:t>節的鏈結串列做比較</a:t>
-            </a:r>
-            <a:r>
-              <a:rPr lang="zh-TW" altLang="en-US" sz="2400" dirty="0" smtClean="0"/>
-              <a:t>，可以</a:t>
-            </a:r>
-            <a:r>
-              <a:rPr lang="zh-TW" altLang="en-US" sz="2400" dirty="0"/>
-              <a:t>看出來，二元樹的每個節點定義了兩個指標，可看作是較複雜的鏈結串列</a:t>
-            </a:r>
-            <a:r>
-              <a:rPr lang="zh-TW" altLang="en-US" sz="2400" dirty="0" smtClean="0"/>
-              <a:t>。</a:t>
-            </a:r>
-            <a:endParaRPr lang="zh-TW" altLang="en-US" sz="2400" dirty="0"/>
+              <a:t>節的鏈結串列做比較，可以看出來，二元樹的每個節點定義了兩個指標，可看作是較複雜的鏈結串列。</a:t>
+            </a:r>
           </a:p>
         </p:txBody>
       </p:sp>
@@ -31811,19 +30410,8 @@
                 <a:latin typeface="微軟正黑體" pitchFamily="34" charset="-120"/>
                 <a:ea typeface="微軟正黑體" pitchFamily="34" charset="-120"/>
               </a:rPr>
-              <a:t>二元樹的實作</a:t>
-            </a:r>
-            <a:r>
-              <a:rPr lang="zh-TW" altLang="en-US" sz="2000" b="1" dirty="0" smtClean="0">
-                <a:latin typeface="微軟正黑體" pitchFamily="34" charset="-120"/>
-                <a:ea typeface="微軟正黑體" pitchFamily="34" charset="-120"/>
-              </a:rPr>
-              <a:t>示意圖</a:t>
-            </a:r>
-            <a:endParaRPr lang="zh-TW" altLang="en-US" sz="2000" b="1" dirty="0">
-              <a:latin typeface="微軟正黑體" pitchFamily="34" charset="-120"/>
-              <a:ea typeface="微軟正黑體" pitchFamily="34" charset="-120"/>
-            </a:endParaRPr>
+              <a:t>二元樹的實作示意圖</a:t>
+            </a:r>
           </a:p>
         </p:txBody>
       </p:sp>
@@ -31881,13 +30469,6 @@
   <p:clrMapOvr>
     <a:masterClrMapping/>
   </p:clrMapOvr>
-  <p:timing>
-    <p:tnLst>
-      <p:par>
-        <p:cTn id="1" dur="indefinite" restart="never" nodeType="tmRoot"/>
-      </p:par>
-    </p:tnLst>
-  </p:timing>
 </p:sld>
 </file>
 
@@ -31924,14 +30505,13 @@
           <a:lstStyle/>
           <a:p>
             <a:r>
-              <a:rPr lang="en-US" altLang="zh-TW" dirty="0" smtClean="0"/>
+              <a:rPr lang="en-US" altLang="zh-TW" dirty="0"/>
               <a:t>10-4 </a:t>
             </a:r>
             <a:r>
-              <a:rPr lang="zh-TW" altLang="en-US" dirty="0" smtClean="0"/>
+              <a:rPr lang="zh-TW" altLang="en-US" dirty="0"/>
               <a:t>樹狀結構</a:t>
             </a:r>
-            <a:endParaRPr lang="zh-TW" altLang="en-US" dirty="0"/>
           </a:p>
         </p:txBody>
       </p:sp>
@@ -31953,11 +30533,11 @@
           <a:lstStyle/>
           <a:p>
             <a:r>
-              <a:rPr lang="zh-TW" altLang="en-US" dirty="0" smtClean="0"/>
+              <a:rPr lang="zh-TW" altLang="en-US" dirty="0"/>
               <a:t>將二元樹建立起來之後，一個最常見而基本的運算，就是把整棵樹走一遍，也就是</a:t>
             </a:r>
             <a:r>
-              <a:rPr lang="zh-TW" altLang="en-US" dirty="0" smtClean="0">
+              <a:rPr lang="zh-TW" altLang="en-US" dirty="0">
                 <a:solidFill>
                   <a:srgbClr val="C00000"/>
                 </a:solidFill>
@@ -31965,82 +30545,81 @@
               <a:t>探訪</a:t>
             </a:r>
             <a:r>
-              <a:rPr lang="en-US" altLang="zh-TW" dirty="0" smtClean="0"/>
+              <a:rPr lang="en-US" altLang="zh-TW" dirty="0"/>
               <a:t>(traverse)</a:t>
             </a:r>
             <a:r>
-              <a:rPr lang="zh-TW" altLang="en-US" dirty="0" smtClean="0"/>
+              <a:rPr lang="zh-TW" altLang="en-US" dirty="0"/>
               <a:t>所有的節點。</a:t>
             </a:r>
-            <a:endParaRPr lang="en-US" altLang="zh-TW" dirty="0" smtClean="0"/>
-          </a:p>
-          <a:p>
-            <a:r>
-              <a:rPr lang="zh-TW" altLang="en-US" dirty="0" smtClean="0"/>
+            <a:endParaRPr lang="en-US" altLang="zh-TW" dirty="0"/>
+          </a:p>
+          <a:p>
+            <a:r>
+              <a:rPr lang="zh-TW" altLang="en-US" dirty="0"/>
               <a:t>二元樹的三種探訪順序如下：</a:t>
             </a:r>
           </a:p>
           <a:p>
             <a:pPr lvl="1"/>
             <a:r>
-              <a:rPr lang="zh-TW" altLang="en-US" dirty="0" smtClean="0"/>
+              <a:rPr lang="zh-TW" altLang="en-US" dirty="0"/>
               <a:t>前序法</a:t>
             </a:r>
             <a:r>
-              <a:rPr lang="en-US" altLang="zh-TW" dirty="0" smtClean="0"/>
+              <a:rPr lang="en-US" altLang="zh-TW" dirty="0"/>
               <a:t>(preorder)</a:t>
             </a:r>
             <a:r>
-              <a:rPr lang="zh-TW" altLang="en-US" dirty="0" smtClean="0"/>
+              <a:rPr lang="zh-TW" altLang="en-US" dirty="0"/>
               <a:t>。</a:t>
             </a:r>
           </a:p>
           <a:p>
             <a:pPr lvl="1"/>
             <a:r>
-              <a:rPr lang="zh-TW" altLang="en-US" dirty="0" smtClean="0"/>
+              <a:rPr lang="zh-TW" altLang="en-US" dirty="0"/>
               <a:t>中序法</a:t>
             </a:r>
             <a:r>
-              <a:rPr lang="en-US" altLang="zh-TW" dirty="0" smtClean="0"/>
+              <a:rPr lang="en-US" altLang="zh-TW" dirty="0"/>
               <a:t>(</a:t>
             </a:r>
             <a:r>
-              <a:rPr lang="en-US" altLang="zh-TW" dirty="0" err="1" smtClean="0"/>
+              <a:rPr lang="en-US" altLang="zh-TW" dirty="0" err="1"/>
               <a:t>inorder</a:t>
             </a:r>
             <a:r>
-              <a:rPr lang="en-US" altLang="zh-TW" dirty="0" smtClean="0"/>
+              <a:rPr lang="en-US" altLang="zh-TW" dirty="0"/>
               <a:t>)</a:t>
             </a:r>
             <a:r>
-              <a:rPr lang="zh-TW" altLang="en-US" dirty="0" smtClean="0"/>
+              <a:rPr lang="zh-TW" altLang="en-US" dirty="0"/>
               <a:t>。</a:t>
             </a:r>
           </a:p>
           <a:p>
             <a:pPr lvl="1"/>
             <a:r>
-              <a:rPr lang="zh-TW" altLang="en-US" dirty="0" smtClean="0"/>
+              <a:rPr lang="zh-TW" altLang="en-US" dirty="0"/>
               <a:t>後序法</a:t>
             </a:r>
             <a:r>
-              <a:rPr lang="en-US" altLang="zh-TW" dirty="0" smtClean="0"/>
+              <a:rPr lang="en-US" altLang="zh-TW" dirty="0"/>
               <a:t>(</a:t>
             </a:r>
             <a:r>
-              <a:rPr lang="en-US" altLang="zh-TW" dirty="0" err="1" smtClean="0"/>
+              <a:rPr lang="en-US" altLang="zh-TW" dirty="0" err="1"/>
               <a:t>postorder</a:t>
             </a:r>
             <a:r>
-              <a:rPr lang="en-US" altLang="zh-TW" dirty="0" smtClean="0"/>
+              <a:rPr lang="en-US" altLang="zh-TW" dirty="0"/>
               <a:t>)</a:t>
             </a:r>
             <a:r>
-              <a:rPr lang="zh-TW" altLang="en-US" dirty="0" smtClean="0"/>
+              <a:rPr lang="zh-TW" altLang="en-US" dirty="0"/>
               <a:t>。</a:t>
             </a:r>
-            <a:endParaRPr lang="zh-TW" altLang="en-US" dirty="0"/>
           </a:p>
         </p:txBody>
       </p:sp>
@@ -32049,13 +30628,6 @@
   <p:clrMapOvr>
     <a:masterClrMapping/>
   </p:clrMapOvr>
-  <p:timing>
-    <p:tnLst>
-      <p:par>
-        <p:cTn id="1" dur="indefinite" restart="never" nodeType="tmRoot"/>
-      </p:par>
-    </p:tnLst>
-  </p:timing>
 </p:sld>
 </file>
 
@@ -32092,7 +30664,7 @@
           <a:lstStyle/>
           <a:p>
             <a:r>
-              <a:rPr lang="en-US" altLang="zh-TW" dirty="0" smtClean="0"/>
+              <a:rPr lang="en-US" altLang="zh-TW" dirty="0"/>
               <a:t>10-4 </a:t>
             </a:r>
             <a:r>
@@ -32120,18 +30692,18 @@
           <a:lstStyle/>
           <a:p>
             <a:r>
-              <a:rPr lang="zh-TW" altLang="en-US" dirty="0" smtClean="0"/>
+              <a:rPr lang="zh-TW" altLang="en-US" dirty="0"/>
               <a:t>若是將圖</a:t>
             </a:r>
             <a:r>
-              <a:rPr lang="en-US" altLang="zh-TW" dirty="0" smtClean="0"/>
+              <a:rPr lang="en-US" altLang="zh-TW" dirty="0"/>
               <a:t>10-7</a:t>
             </a:r>
             <a:r>
-              <a:rPr lang="zh-TW" altLang="en-US" dirty="0" smtClean="0"/>
+              <a:rPr lang="zh-TW" altLang="en-US" dirty="0"/>
               <a:t>分別以這三種探訪順序走一遍，則正好會得到三種不同的運算式表示法。</a:t>
             </a:r>
-            <a:endParaRPr lang="en-US" altLang="zh-TW" dirty="0" smtClean="0"/>
+            <a:endParaRPr lang="en-US" altLang="zh-TW" dirty="0"/>
           </a:p>
         </p:txBody>
       </p:sp>
@@ -32140,13 +30712,6 @@
   <p:clrMapOvr>
     <a:masterClrMapping/>
   </p:clrMapOvr>
-  <p:timing>
-    <p:tnLst>
-      <p:par>
-        <p:cTn id="1" dur="indefinite" restart="never" nodeType="tmRoot"/>
-      </p:par>
-    </p:tnLst>
-  </p:timing>
 </p:sld>
 </file>
 
@@ -32211,12 +30776,8 @@
           <a:lstStyle/>
           <a:p>
             <a:r>
-              <a:rPr lang="zh-TW" altLang="en-US" dirty="0" smtClean="0"/>
-              <a:t>前</a:t>
-            </a:r>
-            <a:r>
-              <a:rPr lang="zh-TW" altLang="en-US" dirty="0"/>
-              <a:t>序法</a:t>
+              <a:rPr lang="zh-TW" altLang="en-US" dirty="0"/>
+              <a:t>前序法</a:t>
             </a:r>
             <a:r>
               <a:rPr lang="en-US" altLang="zh-TW" dirty="0"/>
@@ -32224,22 +30785,14 @@
             </a:r>
             <a:r>
               <a:rPr lang="zh-TW" altLang="en-US" dirty="0"/>
-              <a:t>為先表示運算子，再表示</a:t>
-            </a:r>
-            <a:r>
-              <a:rPr lang="zh-TW" altLang="en-US" dirty="0" smtClean="0"/>
-              <a:t>運算元。</a:t>
-            </a:r>
-            <a:endParaRPr lang="en-US" altLang="zh-TW" dirty="0" smtClean="0"/>
-          </a:p>
-          <a:p>
-            <a:r>
-              <a:rPr lang="zh-TW" altLang="en-US" dirty="0" smtClean="0"/>
-              <a:t>中</a:t>
-            </a:r>
-            <a:r>
-              <a:rPr lang="zh-TW" altLang="en-US" dirty="0"/>
-              <a:t>序法</a:t>
+              <a:t>為先表示運算子，再表示運算元。</a:t>
+            </a:r>
+            <a:endParaRPr lang="en-US" altLang="zh-TW" dirty="0"/>
+          </a:p>
+          <a:p>
+            <a:r>
+              <a:rPr lang="zh-TW" altLang="en-US" dirty="0"/>
+              <a:t>中序法</a:t>
             </a:r>
             <a:r>
               <a:rPr lang="en-US" altLang="zh-TW" dirty="0"/>
@@ -32255,22 +30808,14 @@
             </a:r>
             <a:r>
               <a:rPr lang="zh-TW" altLang="en-US" dirty="0"/>
-              <a:t>為先表示第一個運算元，接著是運算子，最後再表示第二個</a:t>
-            </a:r>
-            <a:r>
-              <a:rPr lang="zh-TW" altLang="en-US" dirty="0" smtClean="0"/>
-              <a:t>運算元。</a:t>
-            </a:r>
-            <a:endParaRPr lang="en-US" altLang="zh-TW" dirty="0" smtClean="0"/>
-          </a:p>
-          <a:p>
-            <a:r>
-              <a:rPr lang="zh-TW" altLang="en-US" dirty="0" smtClean="0"/>
-              <a:t>後</a:t>
-            </a:r>
-            <a:r>
-              <a:rPr lang="zh-TW" altLang="en-US" dirty="0"/>
-              <a:t>序法</a:t>
+              <a:t>為先表示第一個運算元，接著是運算子，最後再表示第二個運算元。</a:t>
+            </a:r>
+            <a:endParaRPr lang="en-US" altLang="zh-TW" dirty="0"/>
+          </a:p>
+          <a:p>
+            <a:r>
+              <a:rPr lang="zh-TW" altLang="en-US" dirty="0"/>
+              <a:t>後序法</a:t>
             </a:r>
             <a:r>
               <a:rPr lang="en-US" altLang="zh-TW" dirty="0"/>
@@ -32304,13 +30849,6 @@
   <p:clrMapOvr>
     <a:masterClrMapping/>
   </p:clrMapOvr>
-  <p:timing>
-    <p:tnLst>
-      <p:par>
-        <p:cTn id="1" dur="indefinite" restart="never" nodeType="tmRoot"/>
-      </p:par>
-    </p:tnLst>
-  </p:timing>
 </p:sld>
 </file>
 
@@ -32347,7 +30885,7 @@
           <a:lstStyle/>
           <a:p>
             <a:r>
-              <a:rPr lang="en-US" altLang="zh-TW" dirty="0" smtClean="0"/>
+              <a:rPr lang="en-US" altLang="zh-TW" dirty="0"/>
               <a:t>10-4 </a:t>
             </a:r>
             <a:r>
@@ -32373,11 +30911,11 @@
           <a:lstStyle/>
           <a:p>
             <a:r>
-              <a:rPr lang="zh-TW" altLang="en-US" dirty="0" smtClean="0"/>
+              <a:rPr lang="zh-TW" altLang="en-US" dirty="0"/>
               <a:t>將圖</a:t>
             </a:r>
             <a:r>
-              <a:rPr lang="en-US" altLang="zh-TW" dirty="0" smtClean="0"/>
+              <a:rPr lang="en-US" altLang="zh-TW" dirty="0"/>
               <a:t>10-7</a:t>
             </a:r>
             <a:r>
@@ -32422,13 +30960,6 @@
   <p:clrMapOvr>
     <a:masterClrMapping/>
   </p:clrMapOvr>
-  <p:timing>
-    <p:tnLst>
-      <p:par>
-        <p:cTn id="1" dur="indefinite" restart="never" nodeType="tmRoot"/>
-      </p:par>
-    </p:tnLst>
-  </p:timing>
 </p:sld>
 </file>
 
@@ -32465,7 +30996,7 @@
           <a:lstStyle/>
           <a:p>
             <a:r>
-              <a:rPr lang="en-US" altLang="zh-TW" dirty="0" smtClean="0"/>
+              <a:rPr lang="en-US" altLang="zh-TW" dirty="0"/>
               <a:t>10-4 </a:t>
             </a:r>
             <a:r>
@@ -32493,19 +31024,15 @@
           <a:lstStyle/>
           <a:p>
             <a:r>
-              <a:rPr lang="zh-TW" altLang="en-US" sz="2400" dirty="0" smtClean="0"/>
+              <a:rPr lang="zh-TW" altLang="en-US" sz="2400" dirty="0"/>
               <a:t>所謂的遞迴程序，就是在程序的本體中，又呼叫到自己本身。</a:t>
             </a:r>
-            <a:endParaRPr lang="en-US" altLang="zh-TW" sz="2400" dirty="0" smtClean="0"/>
-          </a:p>
-          <a:p>
-            <a:r>
-              <a:rPr lang="zh-TW" altLang="en-US" sz="2400" dirty="0" smtClean="0"/>
-              <a:t>以大家</a:t>
-            </a:r>
+            <a:endParaRPr lang="en-US" altLang="zh-TW" sz="2400" dirty="0"/>
+          </a:p>
+          <a:p>
             <a:r>
               <a:rPr lang="zh-TW" altLang="en-US" sz="2400" dirty="0"/>
-              <a:t>耳熟能詳的</a:t>
+              <a:t>以大家耳熟能詳的</a:t>
             </a:r>
             <a:r>
               <a:rPr lang="zh-TW" altLang="en-US" sz="2400" dirty="0">
@@ -32521,19 +31048,7 @@
             </a:r>
             <a:r>
               <a:rPr lang="zh-TW" altLang="en-US" sz="2400" dirty="0"/>
-              <a:t>為例</a:t>
-            </a:r>
-            <a:r>
-              <a:rPr lang="zh-TW" altLang="en-US" sz="2400" dirty="0" smtClean="0"/>
-              <a:t>，下列</a:t>
-            </a:r>
-            <a:r>
-              <a:rPr lang="zh-TW" altLang="en-US" sz="2400" dirty="0"/>
-              <a:t>的第一式中</a:t>
-            </a:r>
-            <a:r>
-              <a:rPr lang="zh-TW" altLang="en-US" sz="2400" dirty="0" smtClean="0"/>
-              <a:t>，定義</a:t>
+              <a:t>為例，下列的第一式中，定義</a:t>
             </a:r>
             <a:r>
               <a:rPr lang="en-US" altLang="zh-TW" sz="2400" dirty="0"/>
@@ -32549,11 +31064,7 @@
             </a:r>
             <a:r>
               <a:rPr lang="zh-TW" altLang="en-US" sz="2400" dirty="0"/>
-              <a:t>；至於在第二式中</a:t>
-            </a:r>
-            <a:r>
-              <a:rPr lang="zh-TW" altLang="en-US" sz="2400" dirty="0" smtClean="0"/>
-              <a:t>，利用</a:t>
+              <a:t>；至於在第二式中，利用</a:t>
             </a:r>
             <a:r>
               <a:rPr lang="en-US" altLang="zh-TW" sz="2400" dirty="0"/>
@@ -32569,13 +31080,8 @@
             </a:r>
             <a:r>
               <a:rPr lang="zh-TW" altLang="en-US" sz="2400" dirty="0"/>
-              <a:t>的階乘，這就是遞迴的觀念</a:t>
-            </a:r>
-            <a:r>
-              <a:rPr lang="zh-TW" altLang="en-US" sz="2400" dirty="0" smtClean="0"/>
-              <a:t>：</a:t>
-            </a:r>
-            <a:endParaRPr lang="zh-TW" altLang="en-US" sz="2400" dirty="0"/>
+              <a:t>的階乘，這就是遞迴的觀念：</a:t>
+            </a:r>
           </a:p>
         </p:txBody>
       </p:sp>
@@ -32644,13 +31150,6 @@
   <p:clrMapOvr>
     <a:masterClrMapping/>
   </p:clrMapOvr>
-  <p:timing>
-    <p:tnLst>
-      <p:par>
-        <p:cTn id="1" dur="indefinite" restart="never" nodeType="tmRoot"/>
-      </p:par>
-    </p:tnLst>
-  </p:timing>
 </p:sld>
 </file>
 
@@ -32687,7 +31186,7 @@
           <a:lstStyle/>
           <a:p>
             <a:r>
-              <a:rPr lang="en-US" altLang="zh-TW" dirty="0" smtClean="0"/>
+              <a:rPr lang="en-US" altLang="zh-TW" dirty="0"/>
               <a:t>10-4 </a:t>
             </a:r>
             <a:r>
@@ -32720,10 +31219,10 @@
               </a:lnSpc>
             </a:pPr>
             <a:r>
-              <a:rPr lang="zh-TW" altLang="en-US" dirty="0" smtClean="0"/>
+              <a:rPr lang="zh-TW" altLang="en-US" dirty="0"/>
               <a:t>在處理樹的演算法中，常使用到遞迴的觀念，因為樹中的每一個節點都有相同的特性，而且前面處理的結果，會影響到後面，就如同階乘函數一般。</a:t>
             </a:r>
-            <a:endParaRPr lang="en-US" altLang="zh-TW" dirty="0" smtClean="0"/>
+            <a:endParaRPr lang="en-US" altLang="zh-TW" dirty="0"/>
           </a:p>
           <a:p>
             <a:pPr>
@@ -32733,15 +31232,7 @@
             </a:pPr>
             <a:r>
               <a:rPr lang="zh-TW" altLang="en-US" dirty="0"/>
-              <a:t>三種探訪程序會在探訪節點的時候，同時將該節點表示的字元列出</a:t>
-            </a:r>
-            <a:r>
-              <a:rPr lang="zh-TW" altLang="en-US" dirty="0" smtClean="0"/>
-              <a:t>來</a:t>
-            </a:r>
-            <a:r>
-              <a:rPr lang="zh-TW" altLang="en-US" dirty="0"/>
-              <a:t>。</a:t>
+              <a:t>三種探訪程序會在探訪節點的時候，同時將該節點表示的字元列出來。</a:t>
             </a:r>
             <a:endParaRPr lang="en-US" altLang="zh-TW" dirty="0"/>
           </a:p>
@@ -32752,20 +31243,13 @@
   <p:clrMapOvr>
     <a:masterClrMapping/>
   </p:clrMapOvr>
-  <p:timing>
-    <p:tnLst>
-      <p:par>
-        <p:cTn id="1" dur="indefinite" restart="never" nodeType="tmRoot"/>
-      </p:par>
-    </p:tnLst>
-  </p:timing>
 </p:sld>
 </file>
 
 <file path=ppt/theme/theme1.xml><?xml version="1.0" encoding="utf-8"?>
 <a:theme xmlns:a="http://schemas.openxmlformats.org/drawingml/2006/main" name="Office 佈景主題">
   <a:themeElements>
-    <a:clrScheme name="Office">
+    <a:clrScheme name="藍綠色">
       <a:dk1>
         <a:sysClr val="windowText" lastClr="000000"/>
       </a:dk1>
@@ -32773,34 +31257,34 @@
         <a:sysClr val="window" lastClr="FFFFFF"/>
       </a:lt1>
       <a:dk2>
-        <a:srgbClr val="1F497D"/>
+        <a:srgbClr val="373545"/>
       </a:dk2>
       <a:lt2>
-        <a:srgbClr val="EEECE1"/>
+        <a:srgbClr val="CEDBE6"/>
       </a:lt2>
       <a:accent1>
-        <a:srgbClr val="4F81BD"/>
+        <a:srgbClr val="3494BA"/>
       </a:accent1>
       <a:accent2>
-        <a:srgbClr val="C0504D"/>
+        <a:srgbClr val="58B6C0"/>
       </a:accent2>
       <a:accent3>
-        <a:srgbClr val="9BBB59"/>
+        <a:srgbClr val="75BDA7"/>
       </a:accent3>
       <a:accent4>
-        <a:srgbClr val="8064A2"/>
+        <a:srgbClr val="7A8C8E"/>
       </a:accent4>
       <a:accent5>
-        <a:srgbClr val="4BACC6"/>
+        <a:srgbClr val="84ACB6"/>
       </a:accent5>
       <a:accent6>
-        <a:srgbClr val="F79646"/>
+        <a:srgbClr val="2683C6"/>
       </a:accent6>
       <a:hlink>
-        <a:srgbClr val="0000FF"/>
+        <a:srgbClr val="6B9F25"/>
       </a:hlink>
       <a:folHlink>
-        <a:srgbClr val="800080"/>
+        <a:srgbClr val="9F6715"/>
       </a:folHlink>
     </a:clrScheme>
     <a:fontScheme name="Office">
